--- a/flutter/Module 5 Exception/Chapter 1/PPT/Exception.pptx
+++ b/flutter/Module 5 Exception/Chapter 1/PPT/Exception.pptx
@@ -1,33 +1,38 @@
 
 <file path=ppt/presentation.xml><?xml version="1.0" encoding="utf-8"?>
-<p:presentation xmlns:a="http://schemas.openxmlformats.org/drawingml/2006/main" xmlns:r="http://schemas.openxmlformats.org/officeDocument/2006/relationships" xmlns:mc="http://schemas.openxmlformats.org/markup-compatibility/2006" xmlns:mv="urn:schemas-microsoft-com:mac:vml" xmlns:p="http://schemas.openxmlformats.org/presentationml/2006/main" xmlns:c="http://schemas.openxmlformats.org/drawingml/2006/chart" xmlns:dgm="http://schemas.openxmlformats.org/drawingml/2006/diagram" xmlns:o="urn:schemas-microsoft-com:office:office" xmlns:v="urn:schemas-microsoft-com:vml" xmlns:pvml="urn:schemas-microsoft-com:office:powerpoint" xmlns:com="http://schemas.openxmlformats.org/drawingml/2006/compatibility" xmlns:p14="http://schemas.microsoft.com/office/powerpoint/2010/main" xmlns:p15="http://schemas.microsoft.com/office/powerpoint/2012/main" xmlns:ahyp="http://schemas.microsoft.com/office/drawing/2018/hyperlinkcolor" autoCompressPictures="0" embedTrueTypeFonts="1" strictFirstAndLastChars="0" saveSubsetFonts="1">
+<p:presentation xmlns:a="http://schemas.openxmlformats.org/drawingml/2006/main" xmlns:r="http://schemas.openxmlformats.org/officeDocument/2006/relationships" xmlns:p="http://schemas.openxmlformats.org/presentationml/2006/main" strictFirstAndLastChars="0" embedTrueTypeFonts="1" saveSubsetFonts="1" autoCompressPictures="0">
   <p:sldMasterIdLst>
-    <p:sldMasterId id="2147483660" r:id="rId4"/>
+    <p:sldMasterId id="2147483660" r:id="rId1"/>
   </p:sldMasterIdLst>
   <p:notesMasterIdLst>
-    <p:notesMasterId r:id="rId5"/>
+    <p:notesMasterId r:id="rId10"/>
   </p:notesMasterIdLst>
   <p:sldIdLst>
-    <p:sldId id="256" r:id="rId6"/>
-    <p:sldId id="257" r:id="rId7"/>
-    <p:sldId id="258" r:id="rId8"/>
-    <p:sldId id="259" r:id="rId9"/>
-    <p:sldId id="260" r:id="rId10"/>
-    <p:sldId id="261" r:id="rId11"/>
-    <p:sldId id="262" r:id="rId12"/>
-    <p:sldId id="263" r:id="rId13"/>
+    <p:sldId id="256" r:id="rId2"/>
+    <p:sldId id="257" r:id="rId3"/>
+    <p:sldId id="258" r:id="rId4"/>
+    <p:sldId id="259" r:id="rId5"/>
+    <p:sldId id="260" r:id="rId6"/>
+    <p:sldId id="261" r:id="rId7"/>
+    <p:sldId id="262" r:id="rId8"/>
+    <p:sldId id="263" r:id="rId9"/>
   </p:sldIdLst>
-  <p:sldSz cy="5143500" cx="9144000"/>
+  <p:sldSz cx="9144000" cy="5143500" type="screen16x9"/>
   <p:notesSz cx="6858000" cy="9144000"/>
   <p:embeddedFontLst>
     <p:embeddedFont>
-      <p:font typeface="Gill Sans"/>
-      <p:regular r:id="rId14"/>
-      <p:bold r:id="rId15"/>
+      <p:font typeface="Gill Sans" panose="020B0604020202020204" charset="0"/>
+      <p:regular r:id="rId11"/>
+      <p:bold r:id="rId12"/>
+    </p:embeddedFont>
+    <p:embeddedFont>
+      <p:font typeface="Microsoft YaHei" panose="020B0503020204020204" pitchFamily="34" charset="-122"/>
+      <p:regular r:id="rId13"/>
+      <p:bold r:id="rId14"/>
     </p:embeddedFont>
   </p:embeddedFontLst>
   <p:defaultTextStyle>
-    <a:defPPr lvl="0" marR="0" rtl="0" algn="l">
+    <a:defPPr marR="0" lvl="0" algn="l" rtl="0">
       <a:lnSpc>
         <a:spcPct val="100000"/>
       </a:lnSpc>
@@ -38,7 +43,7 @@
         <a:spcPts val="0"/>
       </a:spcAft>
     </a:defPPr>
-    <a:lvl1pPr lvl="0" marR="0" rtl="0" algn="l">
+    <a:lvl1pPr marR="0" lvl="0" algn="l" rtl="0">
       <a:lnSpc>
         <a:spcPct val="100000"/>
       </a:lnSpc>
@@ -52,7 +57,7 @@
         <a:srgbClr val="000000"/>
       </a:buClr>
       <a:buFont typeface="Arial"/>
-      <a:defRPr b="0" i="0" sz="1400" u="none" cap="none" strike="noStrike">
+      <a:defRPr sz="1400" b="0" i="0" u="none" strike="noStrike" cap="none">
         <a:solidFill>
           <a:srgbClr val="000000"/>
         </a:solidFill>
@@ -62,7 +67,7 @@
         <a:sym typeface="Arial"/>
       </a:defRPr>
     </a:lvl1pPr>
-    <a:lvl2pPr lvl="1" marR="0" rtl="0" algn="l">
+    <a:lvl2pPr marR="0" lvl="1" algn="l" rtl="0">
       <a:lnSpc>
         <a:spcPct val="100000"/>
       </a:lnSpc>
@@ -76,7 +81,7 @@
         <a:srgbClr val="000000"/>
       </a:buClr>
       <a:buFont typeface="Arial"/>
-      <a:defRPr b="0" i="0" sz="1400" u="none" cap="none" strike="noStrike">
+      <a:defRPr sz="1400" b="0" i="0" u="none" strike="noStrike" cap="none">
         <a:solidFill>
           <a:srgbClr val="000000"/>
         </a:solidFill>
@@ -86,7 +91,7 @@
         <a:sym typeface="Arial"/>
       </a:defRPr>
     </a:lvl2pPr>
-    <a:lvl3pPr lvl="2" marR="0" rtl="0" algn="l">
+    <a:lvl3pPr marR="0" lvl="2" algn="l" rtl="0">
       <a:lnSpc>
         <a:spcPct val="100000"/>
       </a:lnSpc>
@@ -100,7 +105,7 @@
         <a:srgbClr val="000000"/>
       </a:buClr>
       <a:buFont typeface="Arial"/>
-      <a:defRPr b="0" i="0" sz="1400" u="none" cap="none" strike="noStrike">
+      <a:defRPr sz="1400" b="0" i="0" u="none" strike="noStrike" cap="none">
         <a:solidFill>
           <a:srgbClr val="000000"/>
         </a:solidFill>
@@ -110,7 +115,7 @@
         <a:sym typeface="Arial"/>
       </a:defRPr>
     </a:lvl3pPr>
-    <a:lvl4pPr lvl="3" marR="0" rtl="0" algn="l">
+    <a:lvl4pPr marR="0" lvl="3" algn="l" rtl="0">
       <a:lnSpc>
         <a:spcPct val="100000"/>
       </a:lnSpc>
@@ -124,7 +129,7 @@
         <a:srgbClr val="000000"/>
       </a:buClr>
       <a:buFont typeface="Arial"/>
-      <a:defRPr b="0" i="0" sz="1400" u="none" cap="none" strike="noStrike">
+      <a:defRPr sz="1400" b="0" i="0" u="none" strike="noStrike" cap="none">
         <a:solidFill>
           <a:srgbClr val="000000"/>
         </a:solidFill>
@@ -134,7 +139,7 @@
         <a:sym typeface="Arial"/>
       </a:defRPr>
     </a:lvl4pPr>
-    <a:lvl5pPr lvl="4" marR="0" rtl="0" algn="l">
+    <a:lvl5pPr marR="0" lvl="4" algn="l" rtl="0">
       <a:lnSpc>
         <a:spcPct val="100000"/>
       </a:lnSpc>
@@ -148,7 +153,7 @@
         <a:srgbClr val="000000"/>
       </a:buClr>
       <a:buFont typeface="Arial"/>
-      <a:defRPr b="0" i="0" sz="1400" u="none" cap="none" strike="noStrike">
+      <a:defRPr sz="1400" b="0" i="0" u="none" strike="noStrike" cap="none">
         <a:solidFill>
           <a:srgbClr val="000000"/>
         </a:solidFill>
@@ -158,7 +163,7 @@
         <a:sym typeface="Arial"/>
       </a:defRPr>
     </a:lvl5pPr>
-    <a:lvl6pPr lvl="5" marR="0" rtl="0" algn="l">
+    <a:lvl6pPr marR="0" lvl="5" algn="l" rtl="0">
       <a:lnSpc>
         <a:spcPct val="100000"/>
       </a:lnSpc>
@@ -172,7 +177,7 @@
         <a:srgbClr val="000000"/>
       </a:buClr>
       <a:buFont typeface="Arial"/>
-      <a:defRPr b="0" i="0" sz="1400" u="none" cap="none" strike="noStrike">
+      <a:defRPr sz="1400" b="0" i="0" u="none" strike="noStrike" cap="none">
         <a:solidFill>
           <a:srgbClr val="000000"/>
         </a:solidFill>
@@ -182,7 +187,7 @@
         <a:sym typeface="Arial"/>
       </a:defRPr>
     </a:lvl6pPr>
-    <a:lvl7pPr lvl="6" marR="0" rtl="0" algn="l">
+    <a:lvl7pPr marR="0" lvl="6" algn="l" rtl="0">
       <a:lnSpc>
         <a:spcPct val="100000"/>
       </a:lnSpc>
@@ -196,7 +201,7 @@
         <a:srgbClr val="000000"/>
       </a:buClr>
       <a:buFont typeface="Arial"/>
-      <a:defRPr b="0" i="0" sz="1400" u="none" cap="none" strike="noStrike">
+      <a:defRPr sz="1400" b="0" i="0" u="none" strike="noStrike" cap="none">
         <a:solidFill>
           <a:srgbClr val="000000"/>
         </a:solidFill>
@@ -206,7 +211,7 @@
         <a:sym typeface="Arial"/>
       </a:defRPr>
     </a:lvl7pPr>
-    <a:lvl8pPr lvl="7" marR="0" rtl="0" algn="l">
+    <a:lvl8pPr marR="0" lvl="7" algn="l" rtl="0">
       <a:lnSpc>
         <a:spcPct val="100000"/>
       </a:lnSpc>
@@ -220,7 +225,7 @@
         <a:srgbClr val="000000"/>
       </a:buClr>
       <a:buFont typeface="Arial"/>
-      <a:defRPr b="0" i="0" sz="1400" u="none" cap="none" strike="noStrike">
+      <a:defRPr sz="1400" b="0" i="0" u="none" strike="noStrike" cap="none">
         <a:solidFill>
           <a:srgbClr val="000000"/>
         </a:solidFill>
@@ -230,7 +235,7 @@
         <a:sym typeface="Arial"/>
       </a:defRPr>
     </a:lvl8pPr>
-    <a:lvl9pPr lvl="8" marR="0" rtl="0" algn="l">
+    <a:lvl9pPr marR="0" lvl="8" algn="l" rtl="0">
       <a:lnSpc>
         <a:spcPct val="100000"/>
       </a:lnSpc>
@@ -244,7 +249,7 @@
         <a:srgbClr val="000000"/>
       </a:buClr>
       <a:buFont typeface="Arial"/>
-      <a:defRPr b="0" i="0" sz="1400" u="none" cap="none" strike="noStrike">
+      <a:defRPr sz="1400" b="0" i="0" u="none" strike="noStrike" cap="none">
         <a:solidFill>
           <a:srgbClr val="000000"/>
         </a:solidFill>
@@ -257,7 +262,7 @@
   </p:defaultTextStyle>
   <p:extLst>
     <p:ext uri="{EFAFB233-063F-42B5-8137-9DF3F51BA10A}">
-      <p15:sldGuideLst>
+      <p15:sldGuideLst xmlns:p15="http://schemas.microsoft.com/office/powerpoint/2012/main">
         <p15:guide id="1" orient="horz" pos="1620">
           <p15:clr>
             <a:srgbClr val="747775"/>
@@ -275,11 +280,16 @@
 </file>
 
 <file path=ppt/notesMasters/notesMaster1.xml><?xml version="1.0" encoding="utf-8"?>
-<p:notesMaster xmlns:a="http://schemas.openxmlformats.org/drawingml/2006/main" xmlns:r="http://schemas.openxmlformats.org/officeDocument/2006/relationships" xmlns:mc="http://schemas.openxmlformats.org/markup-compatibility/2006" xmlns:mv="urn:schemas-microsoft-com:mac:vml" xmlns:p="http://schemas.openxmlformats.org/presentationml/2006/main" xmlns:c="http://schemas.openxmlformats.org/drawingml/2006/chart" xmlns:dgm="http://schemas.openxmlformats.org/drawingml/2006/diagram" xmlns:o="urn:schemas-microsoft-com:office:office" xmlns:v="urn:schemas-microsoft-com:vml" xmlns:pvml="urn:schemas-microsoft-com:office:powerpoint" xmlns:com="http://schemas.openxmlformats.org/drawingml/2006/compatibility" xmlns:p14="http://schemas.microsoft.com/office/powerpoint/2010/main" xmlns:p15="http://schemas.microsoft.com/office/powerpoint/2012/main" xmlns:ahyp="http://schemas.microsoft.com/office/drawing/2018/hyperlinkcolor">
+<p:notesMaster xmlns:a="http://schemas.openxmlformats.org/drawingml/2006/main" xmlns:r="http://schemas.openxmlformats.org/officeDocument/2006/relationships" xmlns:p="http://schemas.openxmlformats.org/presentationml/2006/main">
   <p:cSld>
+    <p:bg>
+      <p:bgRef idx="1001">
+        <a:schemeClr val="bg1"/>
+      </p:bgRef>
+    </p:bg>
     <p:spTree>
       <p:nvGrpSpPr>
-        <p:cNvPr id="2" name="Shape 2"/>
+        <p:cNvPr id="1" name="Shape 2"/>
         <p:cNvGrpSpPr/>
         <p:nvPr/>
       </p:nvGrpSpPr>
@@ -294,9 +304,11 @@
       <p:sp>
         <p:nvSpPr>
           <p:cNvPr id="3" name="Google Shape;3;n"/>
-          <p:cNvSpPr/>
+          <p:cNvSpPr>
+            <a:spLocks noGrp="1" noRot="1" noChangeAspect="1"/>
+          </p:cNvSpPr>
           <p:nvPr>
-            <p:ph idx="2" type="sldImg"/>
+            <p:ph type="sldImg" idx="2"/>
           </p:nvPr>
         </p:nvSpPr>
         <p:spPr>
@@ -305,9 +317,13 @@
             <a:ext cx="6096075" cy="3429000"/>
           </a:xfrm>
           <a:custGeom>
-            <a:rect b="b" l="l" r="r" t="t"/>
+            <a:avLst/>
+            <a:gdLst/>
+            <a:ahLst/>
+            <a:cxnLst/>
+            <a:rect l="l" t="t" r="r" b="b"/>
             <a:pathLst>
-              <a:path extrusionOk="0" h="120000" w="120000">
+              <a:path w="120000" h="120000" extrusionOk="0">
                 <a:moveTo>
                   <a:pt x="0" y="0"/>
                 </a:moveTo>
@@ -325,23 +341,25 @@
             </a:pathLst>
           </a:custGeom>
           <a:noFill/>
-          <a:ln cap="flat" cmpd="sng" w="9525">
+          <a:ln w="9525" cap="flat" cmpd="sng">
             <a:solidFill>
               <a:srgbClr val="000000"/>
             </a:solidFill>
             <a:prstDash val="solid"/>
             <a:round/>
-            <a:headEnd len="sm" w="sm" type="none"/>
-            <a:tailEnd len="sm" w="sm" type="none"/>
+            <a:headEnd type="none" w="sm" len="sm"/>
+            <a:tailEnd type="none" w="sm" len="sm"/>
           </a:ln>
         </p:spPr>
       </p:sp>
       <p:sp>
         <p:nvSpPr>
           <p:cNvPr id="4" name="Google Shape;4;n"/>
-          <p:cNvSpPr txBox="1"/>
+          <p:cNvSpPr txBox="1">
+            <a:spLocks noGrp="1"/>
+          </p:cNvSpPr>
           <p:nvPr>
-            <p:ph idx="1" type="body"/>
+            <p:ph type="body" idx="1"/>
           </p:nvPr>
         </p:nvSpPr>
         <p:spPr>
@@ -358,11 +376,11 @@
           </a:ln>
         </p:spPr>
         <p:txBody>
-          <a:bodyPr anchorCtr="0" anchor="t" bIns="91425" lIns="91425" spcFirstLastPara="1" rIns="91425" wrap="square" tIns="91425">
+          <a:bodyPr spcFirstLastPara="1" wrap="square" lIns="91425" tIns="91425" rIns="91425" bIns="91425" anchor="t" anchorCtr="0">
             <a:noAutofit/>
           </a:bodyPr>
           <a:lstStyle>
-            <a:lvl1pPr indent="-298450" lvl="0" marL="457200">
+            <a:lvl1pPr marL="457200" lvl="0" indent="-298450">
               <a:spcBef>
                 <a:spcPts val="0"/>
               </a:spcBef>
@@ -373,7 +391,7 @@
               <a:buChar char="●"/>
               <a:defRPr sz="1100"/>
             </a:lvl1pPr>
-            <a:lvl2pPr indent="-298450" lvl="1" marL="914400">
+            <a:lvl2pPr marL="914400" lvl="1" indent="-298450">
               <a:spcBef>
                 <a:spcPts val="0"/>
               </a:spcBef>
@@ -384,7 +402,7 @@
               <a:buChar char="○"/>
               <a:defRPr sz="1100"/>
             </a:lvl2pPr>
-            <a:lvl3pPr indent="-298450" lvl="2" marL="1371600">
+            <a:lvl3pPr marL="1371600" lvl="2" indent="-298450">
               <a:spcBef>
                 <a:spcPts val="0"/>
               </a:spcBef>
@@ -395,7 +413,7 @@
               <a:buChar char="■"/>
               <a:defRPr sz="1100"/>
             </a:lvl3pPr>
-            <a:lvl4pPr indent="-298450" lvl="3" marL="1828800">
+            <a:lvl4pPr marL="1828800" lvl="3" indent="-298450">
               <a:spcBef>
                 <a:spcPts val="0"/>
               </a:spcBef>
@@ -406,7 +424,7 @@
               <a:buChar char="●"/>
               <a:defRPr sz="1100"/>
             </a:lvl4pPr>
-            <a:lvl5pPr indent="-298450" lvl="4" marL="2286000">
+            <a:lvl5pPr marL="2286000" lvl="4" indent="-298450">
               <a:spcBef>
                 <a:spcPts val="0"/>
               </a:spcBef>
@@ -417,7 +435,7 @@
               <a:buChar char="○"/>
               <a:defRPr sz="1100"/>
             </a:lvl5pPr>
-            <a:lvl6pPr indent="-298450" lvl="5" marL="2743200">
+            <a:lvl6pPr marL="2743200" lvl="5" indent="-298450">
               <a:spcBef>
                 <a:spcPts val="0"/>
               </a:spcBef>
@@ -428,7 +446,7 @@
               <a:buChar char="■"/>
               <a:defRPr sz="1100"/>
             </a:lvl6pPr>
-            <a:lvl7pPr indent="-298450" lvl="6" marL="3200400">
+            <a:lvl7pPr marL="3200400" lvl="6" indent="-298450">
               <a:spcBef>
                 <a:spcPts val="0"/>
               </a:spcBef>
@@ -439,7 +457,7 @@
               <a:buChar char="●"/>
               <a:defRPr sz="1100"/>
             </a:lvl7pPr>
-            <a:lvl8pPr indent="-298450" lvl="7" marL="3657600">
+            <a:lvl8pPr marL="3657600" lvl="7" indent="-298450">
               <a:spcBef>
                 <a:spcPts val="0"/>
               </a:spcBef>
@@ -450,7 +468,7 @@
               <a:buChar char="○"/>
               <a:defRPr sz="1100"/>
             </a:lvl8pPr>
-            <a:lvl9pPr indent="-298450" lvl="8" marL="4114800">
+            <a:lvl9pPr marL="4114800" lvl="8" indent="-298450">
               <a:spcBef>
                 <a:spcPts val="0"/>
               </a:spcBef>
@@ -462,14 +480,16 @@
               <a:defRPr sz="1100"/>
             </a:lvl9pPr>
           </a:lstStyle>
-          <a:p/>
+          <a:p>
+            <a:endParaRPr/>
+          </a:p>
         </p:txBody>
       </p:sp>
     </p:spTree>
   </p:cSld>
-  <p:clrMap accent1="accent1" accent2="accent2" accent3="accent3" accent4="accent4" accent5="accent5" accent6="accent6" bg1="lt1" bg2="dk2" tx1="dk1" tx2="lt2" folHlink="folHlink" hlink="hlink"/>
+  <p:clrMap bg1="lt1" tx1="dk1" bg2="dk2" tx2="lt2" accent1="accent1" accent2="accent2" accent3="accent3" accent4="accent4" accent5="accent5" accent6="accent6" hlink="hlink" folHlink="folHlink"/>
   <p:notesStyle>
-    <a:defPPr lvl="0" marR="0" rtl="0" algn="l">
+    <a:defPPr marR="0" lvl="0" algn="l" rtl="0">
       <a:lnSpc>
         <a:spcPct val="100000"/>
       </a:lnSpc>
@@ -480,7 +500,7 @@
         <a:spcPts val="0"/>
       </a:spcAft>
     </a:defPPr>
-    <a:lvl1pPr lvl="0" marR="0" rtl="0" algn="l">
+    <a:lvl1pPr marR="0" lvl="0" algn="l" rtl="0">
       <a:lnSpc>
         <a:spcPct val="100000"/>
       </a:lnSpc>
@@ -494,7 +514,7 @@
         <a:srgbClr val="000000"/>
       </a:buClr>
       <a:buFont typeface="Arial"/>
-      <a:defRPr b="0" i="0" sz="1400" u="none" cap="none" strike="noStrike">
+      <a:defRPr sz="1400" b="0" i="0" u="none" strike="noStrike" cap="none">
         <a:solidFill>
           <a:srgbClr val="000000"/>
         </a:solidFill>
@@ -504,7 +524,7 @@
         <a:sym typeface="Arial"/>
       </a:defRPr>
     </a:lvl1pPr>
-    <a:lvl2pPr lvl="1" marR="0" rtl="0" algn="l">
+    <a:lvl2pPr marR="0" lvl="1" algn="l" rtl="0">
       <a:lnSpc>
         <a:spcPct val="100000"/>
       </a:lnSpc>
@@ -518,7 +538,7 @@
         <a:srgbClr val="000000"/>
       </a:buClr>
       <a:buFont typeface="Arial"/>
-      <a:defRPr b="0" i="0" sz="1400" u="none" cap="none" strike="noStrike">
+      <a:defRPr sz="1400" b="0" i="0" u="none" strike="noStrike" cap="none">
         <a:solidFill>
           <a:srgbClr val="000000"/>
         </a:solidFill>
@@ -528,7 +548,7 @@
         <a:sym typeface="Arial"/>
       </a:defRPr>
     </a:lvl2pPr>
-    <a:lvl3pPr lvl="2" marR="0" rtl="0" algn="l">
+    <a:lvl3pPr marR="0" lvl="2" algn="l" rtl="0">
       <a:lnSpc>
         <a:spcPct val="100000"/>
       </a:lnSpc>
@@ -542,7 +562,7 @@
         <a:srgbClr val="000000"/>
       </a:buClr>
       <a:buFont typeface="Arial"/>
-      <a:defRPr b="0" i="0" sz="1400" u="none" cap="none" strike="noStrike">
+      <a:defRPr sz="1400" b="0" i="0" u="none" strike="noStrike" cap="none">
         <a:solidFill>
           <a:srgbClr val="000000"/>
         </a:solidFill>
@@ -552,7 +572,7 @@
         <a:sym typeface="Arial"/>
       </a:defRPr>
     </a:lvl3pPr>
-    <a:lvl4pPr lvl="3" marR="0" rtl="0" algn="l">
+    <a:lvl4pPr marR="0" lvl="3" algn="l" rtl="0">
       <a:lnSpc>
         <a:spcPct val="100000"/>
       </a:lnSpc>
@@ -566,7 +586,7 @@
         <a:srgbClr val="000000"/>
       </a:buClr>
       <a:buFont typeface="Arial"/>
-      <a:defRPr b="0" i="0" sz="1400" u="none" cap="none" strike="noStrike">
+      <a:defRPr sz="1400" b="0" i="0" u="none" strike="noStrike" cap="none">
         <a:solidFill>
           <a:srgbClr val="000000"/>
         </a:solidFill>
@@ -576,7 +596,7 @@
         <a:sym typeface="Arial"/>
       </a:defRPr>
     </a:lvl4pPr>
-    <a:lvl5pPr lvl="4" marR="0" rtl="0" algn="l">
+    <a:lvl5pPr marR="0" lvl="4" algn="l" rtl="0">
       <a:lnSpc>
         <a:spcPct val="100000"/>
       </a:lnSpc>
@@ -590,7 +610,7 @@
         <a:srgbClr val="000000"/>
       </a:buClr>
       <a:buFont typeface="Arial"/>
-      <a:defRPr b="0" i="0" sz="1400" u="none" cap="none" strike="noStrike">
+      <a:defRPr sz="1400" b="0" i="0" u="none" strike="noStrike" cap="none">
         <a:solidFill>
           <a:srgbClr val="000000"/>
         </a:solidFill>
@@ -600,7 +620,7 @@
         <a:sym typeface="Arial"/>
       </a:defRPr>
     </a:lvl5pPr>
-    <a:lvl6pPr lvl="5" marR="0" rtl="0" algn="l">
+    <a:lvl6pPr marR="0" lvl="5" algn="l" rtl="0">
       <a:lnSpc>
         <a:spcPct val="100000"/>
       </a:lnSpc>
@@ -614,7 +634,7 @@
         <a:srgbClr val="000000"/>
       </a:buClr>
       <a:buFont typeface="Arial"/>
-      <a:defRPr b="0" i="0" sz="1400" u="none" cap="none" strike="noStrike">
+      <a:defRPr sz="1400" b="0" i="0" u="none" strike="noStrike" cap="none">
         <a:solidFill>
           <a:srgbClr val="000000"/>
         </a:solidFill>
@@ -624,7 +644,7 @@
         <a:sym typeface="Arial"/>
       </a:defRPr>
     </a:lvl6pPr>
-    <a:lvl7pPr lvl="6" marR="0" rtl="0" algn="l">
+    <a:lvl7pPr marR="0" lvl="6" algn="l" rtl="0">
       <a:lnSpc>
         <a:spcPct val="100000"/>
       </a:lnSpc>
@@ -638,7 +658,7 @@
         <a:srgbClr val="000000"/>
       </a:buClr>
       <a:buFont typeface="Arial"/>
-      <a:defRPr b="0" i="0" sz="1400" u="none" cap="none" strike="noStrike">
+      <a:defRPr sz="1400" b="0" i="0" u="none" strike="noStrike" cap="none">
         <a:solidFill>
           <a:srgbClr val="000000"/>
         </a:solidFill>
@@ -648,7 +668,7 @@
         <a:sym typeface="Arial"/>
       </a:defRPr>
     </a:lvl7pPr>
-    <a:lvl8pPr lvl="7" marR="0" rtl="0" algn="l">
+    <a:lvl8pPr marR="0" lvl="7" algn="l" rtl="0">
       <a:lnSpc>
         <a:spcPct val="100000"/>
       </a:lnSpc>
@@ -662,7 +682,7 @@
         <a:srgbClr val="000000"/>
       </a:buClr>
       <a:buFont typeface="Arial"/>
-      <a:defRPr b="0" i="0" sz="1400" u="none" cap="none" strike="noStrike">
+      <a:defRPr sz="1400" b="0" i="0" u="none" strike="noStrike" cap="none">
         <a:solidFill>
           <a:srgbClr val="000000"/>
         </a:solidFill>
@@ -672,7 +692,7 @@
         <a:sym typeface="Arial"/>
       </a:defRPr>
     </a:lvl8pPr>
-    <a:lvl9pPr lvl="8" marR="0" rtl="0" algn="l">
+    <a:lvl9pPr marR="0" lvl="8" algn="l" rtl="0">
       <a:lnSpc>
         <a:spcPct val="100000"/>
       </a:lnSpc>
@@ -686,7 +706,7 @@
         <a:srgbClr val="000000"/>
       </a:buClr>
       <a:buFont typeface="Arial"/>
-      <a:defRPr b="0" i="0" sz="1400" u="none" cap="none" strike="noStrike">
+      <a:defRPr sz="1400" b="0" i="0" u="none" strike="noStrike" cap="none">
         <a:solidFill>
           <a:srgbClr val="000000"/>
         </a:solidFill>
@@ -701,11 +721,11 @@
 </file>
 
 <file path=ppt/notesSlides/notesSlide1.xml><?xml version="1.0" encoding="utf-8"?>
-<p:notes xmlns:a="http://schemas.openxmlformats.org/drawingml/2006/main" xmlns:r="http://schemas.openxmlformats.org/officeDocument/2006/relationships" xmlns:mc="http://schemas.openxmlformats.org/markup-compatibility/2006" xmlns:mv="urn:schemas-microsoft-com:mac:vml" xmlns:p="http://schemas.openxmlformats.org/presentationml/2006/main" xmlns:c="http://schemas.openxmlformats.org/drawingml/2006/chart" xmlns:dgm="http://schemas.openxmlformats.org/drawingml/2006/diagram" xmlns:o="urn:schemas-microsoft-com:office:office" xmlns:v="urn:schemas-microsoft-com:vml" xmlns:pvml="urn:schemas-microsoft-com:office:powerpoint" xmlns:com="http://schemas.openxmlformats.org/drawingml/2006/compatibility" xmlns:p14="http://schemas.microsoft.com/office/powerpoint/2010/main" xmlns:p15="http://schemas.microsoft.com/office/powerpoint/2012/main" xmlns:ahyp="http://schemas.microsoft.com/office/drawing/2018/hyperlinkcolor" showMasterPhAnim="0" showMasterSp="0">
+<p:notes xmlns:a="http://schemas.openxmlformats.org/drawingml/2006/main" xmlns:r="http://schemas.openxmlformats.org/officeDocument/2006/relationships" xmlns:p="http://schemas.openxmlformats.org/presentationml/2006/main" showMasterSp="0" showMasterPhAnim="0">
   <p:cSld>
     <p:spTree>
       <p:nvGrpSpPr>
-        <p:cNvPr id="56" name="Shape 56"/>
+        <p:cNvPr id="1" name="Shape 56"/>
         <p:cNvGrpSpPr/>
         <p:nvPr/>
       </p:nvGrpSpPr>
@@ -720,9 +740,11 @@
       <p:sp>
         <p:nvSpPr>
           <p:cNvPr id="57" name="Google Shape;57;g30176cd2910_0_5:notes"/>
-          <p:cNvSpPr/>
+          <p:cNvSpPr>
+            <a:spLocks noGrp="1" noRot="1" noChangeAspect="1"/>
+          </p:cNvSpPr>
           <p:nvPr>
-            <p:ph idx="2" type="sldImg"/>
+            <p:ph type="sldImg" idx="2"/>
           </p:nvPr>
         </p:nvSpPr>
         <p:spPr>
@@ -731,9 +753,13 @@
             <a:ext cx="5486400" cy="3086100"/>
           </a:xfrm>
           <a:custGeom>
-            <a:rect b="b" l="l" r="r" t="t"/>
+            <a:avLst/>
+            <a:gdLst/>
+            <a:ahLst/>
+            <a:cxnLst/>
+            <a:rect l="l" t="t" r="r" b="b"/>
             <a:pathLst>
-              <a:path extrusionOk="0" h="120000" w="120000">
+              <a:path w="120000" h="120000" extrusionOk="0">
                 <a:moveTo>
                   <a:pt x="0" y="0"/>
                 </a:moveTo>
@@ -751,23 +777,25 @@
             </a:pathLst>
           </a:custGeom>
           <a:noFill/>
-          <a:ln cap="flat" cmpd="sng" w="9525">
+          <a:ln w="9525" cap="flat" cmpd="sng">
             <a:solidFill>
               <a:srgbClr val="000000"/>
             </a:solidFill>
             <a:prstDash val="solid"/>
             <a:miter lim="8000"/>
-            <a:headEnd len="sm" w="sm" type="none"/>
-            <a:tailEnd len="sm" w="sm" type="none"/>
+            <a:headEnd type="none" w="sm" len="sm"/>
+            <a:tailEnd type="none" w="sm" len="sm"/>
           </a:ln>
         </p:spPr>
       </p:sp>
       <p:sp>
         <p:nvSpPr>
           <p:cNvPr id="58" name="Google Shape;58;g30176cd2910_0_5:notes"/>
-          <p:cNvSpPr txBox="1"/>
+          <p:cNvSpPr txBox="1">
+            <a:spLocks noGrp="1"/>
+          </p:cNvSpPr>
           <p:nvPr>
-            <p:ph idx="1" type="body"/>
+            <p:ph type="body" idx="1"/>
           </p:nvPr>
         </p:nvSpPr>
         <p:spPr>
@@ -784,12 +812,12 @@
           </a:ln>
         </p:spPr>
         <p:txBody>
-          <a:bodyPr anchorCtr="0" anchor="t" bIns="45700" lIns="91425" spcFirstLastPara="1" rIns="91425" wrap="square" tIns="45700">
+          <a:bodyPr spcFirstLastPara="1" wrap="square" lIns="91425" tIns="45700" rIns="91425" bIns="45700" anchor="t" anchorCtr="0">
             <a:noAutofit/>
           </a:bodyPr>
           <a:lstStyle/>
           <a:p>
-            <a:pPr indent="-228600" lvl="0" marL="457200" rtl="0" algn="l">
+            <a:pPr marL="457200" lvl="0" indent="-228600" algn="l" rtl="0">
               <a:spcBef>
                 <a:spcPts val="0"/>
               </a:spcBef>
@@ -822,9 +850,11 @@
       <p:sp>
         <p:nvSpPr>
           <p:cNvPr id="59" name="Google Shape;59;g30176cd2910_0_5:notes"/>
-          <p:cNvSpPr txBox="1"/>
+          <p:cNvSpPr txBox="1">
+            <a:spLocks noGrp="1"/>
+          </p:cNvSpPr>
           <p:nvPr>
-            <p:ph idx="12" type="sldNum"/>
+            <p:ph type="sldNum" idx="12"/>
           </p:nvPr>
         </p:nvSpPr>
         <p:spPr>
@@ -841,12 +871,12 @@
           </a:ln>
         </p:spPr>
         <p:txBody>
-          <a:bodyPr anchorCtr="0" anchor="b" bIns="45700" lIns="91425" spcFirstLastPara="1" rIns="91425" wrap="square" tIns="45700">
+          <a:bodyPr spcFirstLastPara="1" wrap="square" lIns="91425" tIns="45700" rIns="91425" bIns="45700" anchor="b" anchorCtr="0">
             <a:noAutofit/>
           </a:bodyPr>
           <a:lstStyle/>
           <a:p>
-            <a:pPr indent="0" lvl="0" marL="0" rtl="0" algn="r">
+            <a:pPr marL="0" lvl="0" indent="0" algn="r" rtl="0">
               <a:lnSpc>
                 <a:spcPct val="100000"/>
               </a:lnSpc>
@@ -865,7 +895,7 @@
             </a:pPr>
             <a:fld id="{00000000-1234-1234-1234-123412341234}" type="slidenum">
               <a:rPr lang="en" sz="1200"/>
-              <a:t>‹#›</a:t>
+              <a:t>1</a:t>
             </a:fld>
             <a:endParaRPr sz="1200"/>
           </a:p>
@@ -880,11 +910,11 @@
 </file>
 
 <file path=ppt/notesSlides/notesSlide2.xml><?xml version="1.0" encoding="utf-8"?>
-<p:notes xmlns:a="http://schemas.openxmlformats.org/drawingml/2006/main" xmlns:r="http://schemas.openxmlformats.org/officeDocument/2006/relationships" xmlns:mc="http://schemas.openxmlformats.org/markup-compatibility/2006" xmlns:mv="urn:schemas-microsoft-com:mac:vml" xmlns:p="http://schemas.openxmlformats.org/presentationml/2006/main" xmlns:c="http://schemas.openxmlformats.org/drawingml/2006/chart" xmlns:dgm="http://schemas.openxmlformats.org/drawingml/2006/diagram" xmlns:o="urn:schemas-microsoft-com:office:office" xmlns:v="urn:schemas-microsoft-com:vml" xmlns:pvml="urn:schemas-microsoft-com:office:powerpoint" xmlns:com="http://schemas.openxmlformats.org/drawingml/2006/compatibility" xmlns:p14="http://schemas.microsoft.com/office/powerpoint/2010/main" xmlns:p15="http://schemas.microsoft.com/office/powerpoint/2012/main" xmlns:ahyp="http://schemas.microsoft.com/office/drawing/2018/hyperlinkcolor" showMasterPhAnim="0" showMasterSp="0">
+<p:notes xmlns:a="http://schemas.openxmlformats.org/drawingml/2006/main" xmlns:r="http://schemas.openxmlformats.org/officeDocument/2006/relationships" xmlns:p="http://schemas.openxmlformats.org/presentationml/2006/main" showMasterSp="0" showMasterPhAnim="0">
   <p:cSld>
     <p:spTree>
       <p:nvGrpSpPr>
-        <p:cNvPr id="90" name="Shape 90"/>
+        <p:cNvPr id="1" name="Shape 90"/>
         <p:cNvGrpSpPr/>
         <p:nvPr/>
       </p:nvGrpSpPr>
@@ -899,9 +929,11 @@
       <p:sp>
         <p:nvSpPr>
           <p:cNvPr id="91" name="Google Shape;91;g30176cd2910_0_56:notes"/>
-          <p:cNvSpPr txBox="1"/>
+          <p:cNvSpPr txBox="1">
+            <a:spLocks noGrp="1"/>
+          </p:cNvSpPr>
           <p:nvPr>
-            <p:ph idx="1" type="body"/>
+            <p:ph type="body" idx="1"/>
           </p:nvPr>
         </p:nvSpPr>
         <p:spPr>
@@ -918,12 +950,12 @@
           </a:ln>
         </p:spPr>
         <p:txBody>
-          <a:bodyPr anchorCtr="0" anchor="t" bIns="45700" lIns="91425" spcFirstLastPara="1" rIns="91425" wrap="square" tIns="45700">
+          <a:bodyPr spcFirstLastPara="1" wrap="square" lIns="91425" tIns="45700" rIns="91425" bIns="45700" anchor="t" anchorCtr="0">
             <a:noAutofit/>
           </a:bodyPr>
           <a:lstStyle/>
           <a:p>
-            <a:pPr indent="0" lvl="0" marL="0" rtl="0" algn="l">
+            <a:pPr marL="0" lvl="0" indent="0" algn="l" rtl="0">
               <a:spcBef>
                 <a:spcPts val="0"/>
               </a:spcBef>
@@ -937,13 +969,10 @@
               <a:buFont typeface="Arial"/>
               <a:buNone/>
             </a:pPr>
-            <a:r>
-              <a:t/>
-            </a:r>
             <a:endParaRPr/>
           </a:p>
           <a:p>
-            <a:pPr indent="0" lvl="0" marL="0" rtl="0" algn="l">
+            <a:pPr marL="0" lvl="0" indent="0" algn="l" rtl="0">
               <a:spcBef>
                 <a:spcPts val="0"/>
               </a:spcBef>
@@ -957,13 +986,10 @@
               <a:buFont typeface="Arial"/>
               <a:buNone/>
             </a:pPr>
-            <a:r>
-              <a:t/>
-            </a:r>
             <a:endParaRPr/>
           </a:p>
           <a:p>
-            <a:pPr indent="0" lvl="0" marL="0" rtl="0" algn="l">
+            <a:pPr marL="0" lvl="0" indent="0" algn="l" rtl="0">
               <a:spcBef>
                 <a:spcPts val="0"/>
               </a:spcBef>
@@ -980,7 +1006,7 @@
             <a:endParaRPr/>
           </a:p>
           <a:p>
-            <a:pPr indent="0" lvl="0" marL="0" rtl="0" algn="l">
+            <a:pPr marL="0" lvl="0" indent="0" algn="l" rtl="0">
               <a:spcBef>
                 <a:spcPts val="0"/>
               </a:spcBef>
@@ -994,13 +1020,10 @@
               <a:buFont typeface="Arial"/>
               <a:buNone/>
             </a:pPr>
-            <a:r>
-              <a:t/>
-            </a:r>
             <a:endParaRPr/>
           </a:p>
           <a:p>
-            <a:pPr indent="0" lvl="0" marL="0" rtl="0" algn="l">
+            <a:pPr marL="0" lvl="0" indent="0" algn="l" rtl="0">
               <a:spcBef>
                 <a:spcPts val="0"/>
               </a:spcBef>
@@ -1017,7 +1040,7 @@
             <a:endParaRPr/>
           </a:p>
           <a:p>
-            <a:pPr indent="0" lvl="0" marL="0" rtl="0" algn="l">
+            <a:pPr marL="0" lvl="0" indent="0" algn="l" rtl="0">
               <a:spcBef>
                 <a:spcPts val="0"/>
               </a:spcBef>
@@ -1031,13 +1054,10 @@
               <a:buFont typeface="Arial"/>
               <a:buNone/>
             </a:pPr>
-            <a:r>
-              <a:t/>
-            </a:r>
             <a:endParaRPr/>
           </a:p>
           <a:p>
-            <a:pPr indent="0" lvl="0" marL="0" rtl="0" algn="l">
+            <a:pPr marL="0" lvl="0" indent="0" algn="l" rtl="0">
               <a:spcBef>
                 <a:spcPts val="0"/>
               </a:spcBef>
@@ -1058,7 +1078,7 @@
             <a:endParaRPr/>
           </a:p>
           <a:p>
-            <a:pPr indent="0" lvl="0" marL="0" rtl="0" algn="l">
+            <a:pPr marL="0" lvl="0" indent="0" algn="l" rtl="0">
               <a:lnSpc>
                 <a:spcPct val="100000"/>
               </a:lnSpc>
@@ -1071,9 +1091,6 @@
               <a:buSzPts val="1400"/>
               <a:buNone/>
             </a:pPr>
-            <a:r>
-              <a:t/>
-            </a:r>
             <a:endParaRPr/>
           </a:p>
         </p:txBody>
@@ -1081,9 +1098,11 @@
       <p:sp>
         <p:nvSpPr>
           <p:cNvPr id="92" name="Google Shape;92;g30176cd2910_0_56:notes"/>
-          <p:cNvSpPr/>
+          <p:cNvSpPr>
+            <a:spLocks noGrp="1" noRot="1" noChangeAspect="1"/>
+          </p:cNvSpPr>
           <p:nvPr>
-            <p:ph idx="2" type="sldImg"/>
+            <p:ph type="sldImg" idx="2"/>
           </p:nvPr>
         </p:nvSpPr>
         <p:spPr>
@@ -1092,9 +1111,13 @@
             <a:ext cx="5486400" cy="3086100"/>
           </a:xfrm>
           <a:custGeom>
-            <a:rect b="b" l="l" r="r" t="t"/>
+            <a:avLst/>
+            <a:gdLst/>
+            <a:ahLst/>
+            <a:cxnLst/>
+            <a:rect l="l" t="t" r="r" b="b"/>
             <a:pathLst>
-              <a:path extrusionOk="0" h="120000" w="120000">
+              <a:path w="120000" h="120000" extrusionOk="0">
                 <a:moveTo>
                   <a:pt x="0" y="0"/>
                 </a:moveTo>
@@ -1112,14 +1135,14 @@
             </a:pathLst>
           </a:custGeom>
           <a:noFill/>
-          <a:ln cap="flat" cmpd="sng" w="12700">
+          <a:ln w="12700" cap="flat" cmpd="sng">
             <a:solidFill>
               <a:srgbClr val="000000"/>
             </a:solidFill>
             <a:prstDash val="solid"/>
             <a:round/>
-            <a:headEnd len="sm" w="sm" type="none"/>
-            <a:tailEnd len="sm" w="sm" type="none"/>
+            <a:headEnd type="none" w="sm" len="sm"/>
+            <a:tailEnd type="none" w="sm" len="sm"/>
           </a:ln>
         </p:spPr>
       </p:sp>
@@ -1132,11 +1155,11 @@
 </file>
 
 <file path=ppt/notesSlides/notesSlide3.xml><?xml version="1.0" encoding="utf-8"?>
-<p:notes xmlns:a="http://schemas.openxmlformats.org/drawingml/2006/main" xmlns:r="http://schemas.openxmlformats.org/officeDocument/2006/relationships" xmlns:mc="http://schemas.openxmlformats.org/markup-compatibility/2006" xmlns:mv="urn:schemas-microsoft-com:mac:vml" xmlns:p="http://schemas.openxmlformats.org/presentationml/2006/main" xmlns:c="http://schemas.openxmlformats.org/drawingml/2006/chart" xmlns:dgm="http://schemas.openxmlformats.org/drawingml/2006/diagram" xmlns:o="urn:schemas-microsoft-com:office:office" xmlns:v="urn:schemas-microsoft-com:vml" xmlns:pvml="urn:schemas-microsoft-com:office:powerpoint" xmlns:com="http://schemas.openxmlformats.org/drawingml/2006/compatibility" xmlns:p14="http://schemas.microsoft.com/office/powerpoint/2010/main" xmlns:p15="http://schemas.microsoft.com/office/powerpoint/2012/main" xmlns:ahyp="http://schemas.microsoft.com/office/drawing/2018/hyperlinkcolor" showMasterPhAnim="0" showMasterSp="0">
+<p:notes xmlns:a="http://schemas.openxmlformats.org/drawingml/2006/main" xmlns:r="http://schemas.openxmlformats.org/officeDocument/2006/relationships" xmlns:p="http://schemas.openxmlformats.org/presentationml/2006/main" showMasterSp="0" showMasterPhAnim="0">
   <p:cSld>
     <p:spTree>
       <p:nvGrpSpPr>
-        <p:cNvPr id="102" name="Shape 102"/>
+        <p:cNvPr id="1" name="Shape 102"/>
         <p:cNvGrpSpPr/>
         <p:nvPr/>
       </p:nvGrpSpPr>
@@ -1151,9 +1174,11 @@
       <p:sp>
         <p:nvSpPr>
           <p:cNvPr id="103" name="Google Shape;103;g30176cd2910_0_92:notes"/>
-          <p:cNvSpPr/>
+          <p:cNvSpPr>
+            <a:spLocks noGrp="1" noRot="1" noChangeAspect="1"/>
+          </p:cNvSpPr>
           <p:nvPr>
-            <p:ph idx="2" type="sldImg"/>
+            <p:ph type="sldImg" idx="2"/>
           </p:nvPr>
         </p:nvSpPr>
         <p:spPr>
@@ -1162,9 +1187,13 @@
             <a:ext cx="5486400" cy="3086100"/>
           </a:xfrm>
           <a:custGeom>
-            <a:rect b="b" l="l" r="r" t="t"/>
+            <a:avLst/>
+            <a:gdLst/>
+            <a:ahLst/>
+            <a:cxnLst/>
+            <a:rect l="l" t="t" r="r" b="b"/>
             <a:pathLst>
-              <a:path extrusionOk="0" h="120000" w="120000">
+              <a:path w="120000" h="120000" extrusionOk="0">
                 <a:moveTo>
                   <a:pt x="0" y="0"/>
                 </a:moveTo>
@@ -1182,23 +1211,25 @@
             </a:pathLst>
           </a:custGeom>
           <a:noFill/>
-          <a:ln cap="flat" cmpd="sng" w="12700">
+          <a:ln w="12700" cap="flat" cmpd="sng">
             <a:solidFill>
               <a:srgbClr val="000000"/>
             </a:solidFill>
             <a:prstDash val="solid"/>
             <a:round/>
-            <a:headEnd len="sm" w="sm" type="none"/>
-            <a:tailEnd len="sm" w="sm" type="none"/>
+            <a:headEnd type="none" w="sm" len="sm"/>
+            <a:tailEnd type="none" w="sm" len="sm"/>
           </a:ln>
         </p:spPr>
       </p:sp>
       <p:sp>
         <p:nvSpPr>
           <p:cNvPr id="104" name="Google Shape;104;g30176cd2910_0_92:notes"/>
-          <p:cNvSpPr txBox="1"/>
+          <p:cNvSpPr txBox="1">
+            <a:spLocks noGrp="1"/>
+          </p:cNvSpPr>
           <p:nvPr>
-            <p:ph idx="1" type="body"/>
+            <p:ph type="body" idx="1"/>
           </p:nvPr>
         </p:nvSpPr>
         <p:spPr>
@@ -1215,12 +1246,12 @@
           </a:ln>
         </p:spPr>
         <p:txBody>
-          <a:bodyPr anchorCtr="0" anchor="t" bIns="45700" lIns="91425" spcFirstLastPara="1" rIns="91425" wrap="square" tIns="45700">
+          <a:bodyPr spcFirstLastPara="1" wrap="square" lIns="91425" tIns="45700" rIns="91425" bIns="45700" anchor="t" anchorCtr="0">
             <a:noAutofit/>
           </a:bodyPr>
           <a:lstStyle/>
           <a:p>
-            <a:pPr indent="0" lvl="0" marL="0" rtl="0" algn="l">
+            <a:pPr marL="0" lvl="0" indent="0" algn="l" rtl="0">
               <a:lnSpc>
                 <a:spcPct val="100000"/>
               </a:lnSpc>
@@ -1233,10 +1264,7 @@
               <a:buSzPts val="1400"/>
               <a:buNone/>
             </a:pPr>
-            <a:r>
-              <a:t/>
-            </a:r>
-            <a:endParaRPr/>
+            <a:endParaRPr dirty="0"/>
           </a:p>
         </p:txBody>
       </p:sp>
@@ -1249,11 +1277,11 @@
 </file>
 
 <file path=ppt/notesSlides/notesSlide4.xml><?xml version="1.0" encoding="utf-8"?>
-<p:notes xmlns:a="http://schemas.openxmlformats.org/drawingml/2006/main" xmlns:r="http://schemas.openxmlformats.org/officeDocument/2006/relationships" xmlns:mc="http://schemas.openxmlformats.org/markup-compatibility/2006" xmlns:mv="urn:schemas-microsoft-com:mac:vml" xmlns:p="http://schemas.openxmlformats.org/presentationml/2006/main" xmlns:c="http://schemas.openxmlformats.org/drawingml/2006/chart" xmlns:dgm="http://schemas.openxmlformats.org/drawingml/2006/diagram" xmlns:o="urn:schemas-microsoft-com:office:office" xmlns:v="urn:schemas-microsoft-com:vml" xmlns:pvml="urn:schemas-microsoft-com:office:powerpoint" xmlns:com="http://schemas.openxmlformats.org/drawingml/2006/compatibility" xmlns:p14="http://schemas.microsoft.com/office/powerpoint/2010/main" xmlns:p15="http://schemas.microsoft.com/office/powerpoint/2012/main" xmlns:ahyp="http://schemas.microsoft.com/office/drawing/2018/hyperlinkcolor" showMasterPhAnim="0" showMasterSp="0">
+<p:notes xmlns:a="http://schemas.openxmlformats.org/drawingml/2006/main" xmlns:r="http://schemas.openxmlformats.org/officeDocument/2006/relationships" xmlns:p="http://schemas.openxmlformats.org/presentationml/2006/main" showMasterSp="0" showMasterPhAnim="0">
   <p:cSld>
     <p:spTree>
       <p:nvGrpSpPr>
-        <p:cNvPr id="112" name="Shape 112"/>
+        <p:cNvPr id="1" name="Shape 112"/>
         <p:cNvGrpSpPr/>
         <p:nvPr/>
       </p:nvGrpSpPr>
@@ -1268,9 +1296,11 @@
       <p:sp>
         <p:nvSpPr>
           <p:cNvPr id="113" name="Google Shape;113;g30176cd2910_0_121:notes"/>
-          <p:cNvSpPr txBox="1"/>
+          <p:cNvSpPr txBox="1">
+            <a:spLocks noGrp="1"/>
+          </p:cNvSpPr>
           <p:nvPr>
-            <p:ph idx="1" type="body"/>
+            <p:ph type="body" idx="1"/>
           </p:nvPr>
         </p:nvSpPr>
         <p:spPr>
@@ -1287,12 +1317,12 @@
           </a:ln>
         </p:spPr>
         <p:txBody>
-          <a:bodyPr anchorCtr="0" anchor="t" bIns="45700" lIns="91425" spcFirstLastPara="1" rIns="91425" wrap="square" tIns="45700">
+          <a:bodyPr spcFirstLastPara="1" wrap="square" lIns="91425" tIns="45700" rIns="91425" bIns="45700" anchor="t" anchorCtr="0">
             <a:noAutofit/>
           </a:bodyPr>
           <a:lstStyle/>
           <a:p>
-            <a:pPr indent="0" lvl="0" marL="0" rtl="0" algn="l">
+            <a:pPr marL="0" lvl="0" indent="0" algn="l" rtl="0">
               <a:lnSpc>
                 <a:spcPct val="100000"/>
               </a:lnSpc>
@@ -1305,9 +1335,6 @@
               <a:buSzPts val="1400"/>
               <a:buNone/>
             </a:pPr>
-            <a:r>
-              <a:t/>
-            </a:r>
             <a:endParaRPr/>
           </a:p>
         </p:txBody>
@@ -1315,9 +1342,11 @@
       <p:sp>
         <p:nvSpPr>
           <p:cNvPr id="114" name="Google Shape;114;g30176cd2910_0_121:notes"/>
-          <p:cNvSpPr/>
+          <p:cNvSpPr>
+            <a:spLocks noGrp="1" noRot="1" noChangeAspect="1"/>
+          </p:cNvSpPr>
           <p:nvPr>
-            <p:ph idx="2" type="sldImg"/>
+            <p:ph type="sldImg" idx="2"/>
           </p:nvPr>
         </p:nvSpPr>
         <p:spPr>
@@ -1326,9 +1355,13 @@
             <a:ext cx="5486400" cy="3086100"/>
           </a:xfrm>
           <a:custGeom>
-            <a:rect b="b" l="l" r="r" t="t"/>
+            <a:avLst/>
+            <a:gdLst/>
+            <a:ahLst/>
+            <a:cxnLst/>
+            <a:rect l="l" t="t" r="r" b="b"/>
             <a:pathLst>
-              <a:path extrusionOk="0" h="120000" w="120000">
+              <a:path w="120000" h="120000" extrusionOk="0">
                 <a:moveTo>
                   <a:pt x="0" y="0"/>
                 </a:moveTo>
@@ -1346,14 +1379,14 @@
             </a:pathLst>
           </a:custGeom>
           <a:noFill/>
-          <a:ln cap="flat" cmpd="sng" w="12700">
+          <a:ln w="12700" cap="flat" cmpd="sng">
             <a:solidFill>
               <a:srgbClr val="000000"/>
             </a:solidFill>
             <a:prstDash val="solid"/>
             <a:round/>
-            <a:headEnd len="sm" w="sm" type="none"/>
-            <a:tailEnd len="sm" w="sm" type="none"/>
+            <a:headEnd type="none" w="sm" len="sm"/>
+            <a:tailEnd type="none" w="sm" len="sm"/>
           </a:ln>
         </p:spPr>
       </p:sp>
@@ -1366,11 +1399,11 @@
 </file>
 
 <file path=ppt/notesSlides/notesSlide5.xml><?xml version="1.0" encoding="utf-8"?>
-<p:notes xmlns:a="http://schemas.openxmlformats.org/drawingml/2006/main" xmlns:r="http://schemas.openxmlformats.org/officeDocument/2006/relationships" xmlns:mc="http://schemas.openxmlformats.org/markup-compatibility/2006" xmlns:mv="urn:schemas-microsoft-com:mac:vml" xmlns:p="http://schemas.openxmlformats.org/presentationml/2006/main" xmlns:c="http://schemas.openxmlformats.org/drawingml/2006/chart" xmlns:dgm="http://schemas.openxmlformats.org/drawingml/2006/diagram" xmlns:o="urn:schemas-microsoft-com:office:office" xmlns:v="urn:schemas-microsoft-com:vml" xmlns:pvml="urn:schemas-microsoft-com:office:powerpoint" xmlns:com="http://schemas.openxmlformats.org/drawingml/2006/compatibility" xmlns:p14="http://schemas.microsoft.com/office/powerpoint/2010/main" xmlns:p15="http://schemas.microsoft.com/office/powerpoint/2012/main" xmlns:ahyp="http://schemas.microsoft.com/office/drawing/2018/hyperlinkcolor" showMasterPhAnim="0" showMasterSp="0">
+<p:notes xmlns:a="http://schemas.openxmlformats.org/drawingml/2006/main" xmlns:r="http://schemas.openxmlformats.org/officeDocument/2006/relationships" xmlns:p="http://schemas.openxmlformats.org/presentationml/2006/main" showMasterSp="0" showMasterPhAnim="0">
   <p:cSld>
     <p:spTree>
       <p:nvGrpSpPr>
-        <p:cNvPr id="122" name="Shape 122"/>
+        <p:cNvPr id="1" name="Shape 122"/>
         <p:cNvGrpSpPr/>
         <p:nvPr/>
       </p:nvGrpSpPr>
@@ -1385,9 +1418,11 @@
       <p:sp>
         <p:nvSpPr>
           <p:cNvPr id="123" name="Google Shape;123;g30176cd2910_0_151:notes"/>
-          <p:cNvSpPr txBox="1"/>
+          <p:cNvSpPr txBox="1">
+            <a:spLocks noGrp="1"/>
+          </p:cNvSpPr>
           <p:nvPr>
-            <p:ph idx="1" type="body"/>
+            <p:ph type="body" idx="1"/>
           </p:nvPr>
         </p:nvSpPr>
         <p:spPr>
@@ -1404,12 +1439,12 @@
           </a:ln>
         </p:spPr>
         <p:txBody>
-          <a:bodyPr anchorCtr="0" anchor="t" bIns="45700" lIns="91425" spcFirstLastPara="1" rIns="91425" wrap="square" tIns="45700">
+          <a:bodyPr spcFirstLastPara="1" wrap="square" lIns="91425" tIns="45700" rIns="91425" bIns="45700" anchor="t" anchorCtr="0">
             <a:noAutofit/>
           </a:bodyPr>
           <a:lstStyle/>
           <a:p>
-            <a:pPr indent="0" lvl="0" marL="0" rtl="0" algn="l">
+            <a:pPr marL="0" lvl="0" indent="0" algn="l" rtl="0">
               <a:lnSpc>
                 <a:spcPct val="100000"/>
               </a:lnSpc>
@@ -1422,9 +1457,6 @@
               <a:buSzPts val="1400"/>
               <a:buNone/>
             </a:pPr>
-            <a:r>
-              <a:t/>
-            </a:r>
             <a:endParaRPr/>
           </a:p>
         </p:txBody>
@@ -1432,9 +1464,11 @@
       <p:sp>
         <p:nvSpPr>
           <p:cNvPr id="124" name="Google Shape;124;g30176cd2910_0_151:notes"/>
-          <p:cNvSpPr/>
+          <p:cNvSpPr>
+            <a:spLocks noGrp="1" noRot="1" noChangeAspect="1"/>
+          </p:cNvSpPr>
           <p:nvPr>
-            <p:ph idx="2" type="sldImg"/>
+            <p:ph type="sldImg" idx="2"/>
           </p:nvPr>
         </p:nvSpPr>
         <p:spPr>
@@ -1443,9 +1477,13 @@
             <a:ext cx="5486400" cy="3086100"/>
           </a:xfrm>
           <a:custGeom>
-            <a:rect b="b" l="l" r="r" t="t"/>
+            <a:avLst/>
+            <a:gdLst/>
+            <a:ahLst/>
+            <a:cxnLst/>
+            <a:rect l="l" t="t" r="r" b="b"/>
             <a:pathLst>
-              <a:path extrusionOk="0" h="120000" w="120000">
+              <a:path w="120000" h="120000" extrusionOk="0">
                 <a:moveTo>
                   <a:pt x="0" y="0"/>
                 </a:moveTo>
@@ -1463,14 +1501,14 @@
             </a:pathLst>
           </a:custGeom>
           <a:noFill/>
-          <a:ln cap="flat" cmpd="sng" w="12700">
+          <a:ln w="12700" cap="flat" cmpd="sng">
             <a:solidFill>
               <a:srgbClr val="000000"/>
             </a:solidFill>
             <a:prstDash val="solid"/>
             <a:round/>
-            <a:headEnd len="sm" w="sm" type="none"/>
-            <a:tailEnd len="sm" w="sm" type="none"/>
+            <a:headEnd type="none" w="sm" len="sm"/>
+            <a:tailEnd type="none" w="sm" len="sm"/>
           </a:ln>
         </p:spPr>
       </p:sp>
@@ -1483,11 +1521,11 @@
 </file>
 
 <file path=ppt/notesSlides/notesSlide6.xml><?xml version="1.0" encoding="utf-8"?>
-<p:notes xmlns:a="http://schemas.openxmlformats.org/drawingml/2006/main" xmlns:r="http://schemas.openxmlformats.org/officeDocument/2006/relationships" xmlns:mc="http://schemas.openxmlformats.org/markup-compatibility/2006" xmlns:mv="urn:schemas-microsoft-com:mac:vml" xmlns:p="http://schemas.openxmlformats.org/presentationml/2006/main" xmlns:c="http://schemas.openxmlformats.org/drawingml/2006/chart" xmlns:dgm="http://schemas.openxmlformats.org/drawingml/2006/diagram" xmlns:o="urn:schemas-microsoft-com:office:office" xmlns:v="urn:schemas-microsoft-com:vml" xmlns:pvml="urn:schemas-microsoft-com:office:powerpoint" xmlns:com="http://schemas.openxmlformats.org/drawingml/2006/compatibility" xmlns:p14="http://schemas.microsoft.com/office/powerpoint/2010/main" xmlns:p15="http://schemas.microsoft.com/office/powerpoint/2012/main" xmlns:ahyp="http://schemas.microsoft.com/office/drawing/2018/hyperlinkcolor" showMasterPhAnim="0" showMasterSp="0">
+<p:notes xmlns:a="http://schemas.openxmlformats.org/drawingml/2006/main" xmlns:r="http://schemas.openxmlformats.org/officeDocument/2006/relationships" xmlns:p="http://schemas.openxmlformats.org/presentationml/2006/main" showMasterSp="0" showMasterPhAnim="0">
   <p:cSld>
     <p:spTree>
       <p:nvGrpSpPr>
-        <p:cNvPr id="151" name="Shape 151"/>
+        <p:cNvPr id="1" name="Shape 151"/>
         <p:cNvGrpSpPr/>
         <p:nvPr/>
       </p:nvGrpSpPr>
@@ -1502,9 +1540,11 @@
       <p:sp>
         <p:nvSpPr>
           <p:cNvPr id="152" name="Google Shape;152;g30176cd2910_0_199:notes"/>
-          <p:cNvSpPr txBox="1"/>
+          <p:cNvSpPr txBox="1">
+            <a:spLocks noGrp="1"/>
+          </p:cNvSpPr>
           <p:nvPr>
-            <p:ph idx="1" type="body"/>
+            <p:ph type="body" idx="1"/>
           </p:nvPr>
         </p:nvSpPr>
         <p:spPr>
@@ -1521,12 +1561,12 @@
           </a:ln>
         </p:spPr>
         <p:txBody>
-          <a:bodyPr anchorCtr="0" anchor="t" bIns="45700" lIns="91425" spcFirstLastPara="1" rIns="91425" wrap="square" tIns="45700">
+          <a:bodyPr spcFirstLastPara="1" wrap="square" lIns="91425" tIns="45700" rIns="91425" bIns="45700" anchor="t" anchorCtr="0">
             <a:noAutofit/>
           </a:bodyPr>
           <a:lstStyle/>
           <a:p>
-            <a:pPr indent="0" lvl="0" marL="0" rtl="0" algn="l">
+            <a:pPr marL="0" lvl="0" indent="0" algn="l" rtl="0">
               <a:spcBef>
                 <a:spcPts val="0"/>
               </a:spcBef>
@@ -1543,7 +1583,7 @@
             <a:endParaRPr/>
           </a:p>
           <a:p>
-            <a:pPr indent="0" lvl="0" marL="0" rtl="0" algn="l">
+            <a:pPr marL="0" lvl="0" indent="0" algn="l" rtl="0">
               <a:spcBef>
                 <a:spcPts val="0"/>
               </a:spcBef>
@@ -1557,13 +1597,10 @@
               <a:buFont typeface="Arial"/>
               <a:buNone/>
             </a:pPr>
-            <a:r>
-              <a:t/>
-            </a:r>
             <a:endParaRPr/>
           </a:p>
           <a:p>
-            <a:pPr indent="0" lvl="0" marL="0" rtl="0" algn="l">
+            <a:pPr marL="0" lvl="0" indent="0" algn="l" rtl="0">
               <a:spcBef>
                 <a:spcPts val="0"/>
               </a:spcBef>
@@ -1588,9 +1625,11 @@
       <p:sp>
         <p:nvSpPr>
           <p:cNvPr id="153" name="Google Shape;153;g30176cd2910_0_199:notes"/>
-          <p:cNvSpPr/>
+          <p:cNvSpPr>
+            <a:spLocks noGrp="1" noRot="1" noChangeAspect="1"/>
+          </p:cNvSpPr>
           <p:nvPr>
-            <p:ph idx="2" type="sldImg"/>
+            <p:ph type="sldImg" idx="2"/>
           </p:nvPr>
         </p:nvSpPr>
         <p:spPr>
@@ -1599,9 +1638,13 @@
             <a:ext cx="5486400" cy="3086100"/>
           </a:xfrm>
           <a:custGeom>
-            <a:rect b="b" l="l" r="r" t="t"/>
+            <a:avLst/>
+            <a:gdLst/>
+            <a:ahLst/>
+            <a:cxnLst/>
+            <a:rect l="l" t="t" r="r" b="b"/>
             <a:pathLst>
-              <a:path extrusionOk="0" h="120000" w="120000">
+              <a:path w="120000" h="120000" extrusionOk="0">
                 <a:moveTo>
                   <a:pt x="0" y="0"/>
                 </a:moveTo>
@@ -1619,14 +1662,14 @@
             </a:pathLst>
           </a:custGeom>
           <a:noFill/>
-          <a:ln cap="flat" cmpd="sng" w="12700">
+          <a:ln w="12700" cap="flat" cmpd="sng">
             <a:solidFill>
               <a:srgbClr val="000000"/>
             </a:solidFill>
             <a:prstDash val="solid"/>
             <a:round/>
-            <a:headEnd len="sm" w="sm" type="none"/>
-            <a:tailEnd len="sm" w="sm" type="none"/>
+            <a:headEnd type="none" w="sm" len="sm"/>
+            <a:tailEnd type="none" w="sm" len="sm"/>
           </a:ln>
         </p:spPr>
       </p:sp>
@@ -1639,11 +1682,11 @@
 </file>
 
 <file path=ppt/notesSlides/notesSlide7.xml><?xml version="1.0" encoding="utf-8"?>
-<p:notes xmlns:a="http://schemas.openxmlformats.org/drawingml/2006/main" xmlns:r="http://schemas.openxmlformats.org/officeDocument/2006/relationships" xmlns:mc="http://schemas.openxmlformats.org/markup-compatibility/2006" xmlns:mv="urn:schemas-microsoft-com:mac:vml" xmlns:p="http://schemas.openxmlformats.org/presentationml/2006/main" xmlns:c="http://schemas.openxmlformats.org/drawingml/2006/chart" xmlns:dgm="http://schemas.openxmlformats.org/drawingml/2006/diagram" xmlns:o="urn:schemas-microsoft-com:office:office" xmlns:v="urn:schemas-microsoft-com:vml" xmlns:pvml="urn:schemas-microsoft-com:office:powerpoint" xmlns:com="http://schemas.openxmlformats.org/drawingml/2006/compatibility" xmlns:p14="http://schemas.microsoft.com/office/powerpoint/2010/main" xmlns:p15="http://schemas.microsoft.com/office/powerpoint/2012/main" xmlns:ahyp="http://schemas.microsoft.com/office/drawing/2018/hyperlinkcolor" showMasterPhAnim="0" showMasterSp="0">
+<p:notes xmlns:a="http://schemas.openxmlformats.org/drawingml/2006/main" xmlns:r="http://schemas.openxmlformats.org/officeDocument/2006/relationships" xmlns:p="http://schemas.openxmlformats.org/presentationml/2006/main" showMasterSp="0" showMasterPhAnim="0">
   <p:cSld>
     <p:spTree>
       <p:nvGrpSpPr>
-        <p:cNvPr id="160" name="Shape 160"/>
+        <p:cNvPr id="1" name="Shape 160"/>
         <p:cNvGrpSpPr/>
         <p:nvPr/>
       </p:nvGrpSpPr>
@@ -1658,9 +1701,11 @@
       <p:sp>
         <p:nvSpPr>
           <p:cNvPr id="161" name="Google Shape;161;g30176cd2910_0_254:notes"/>
-          <p:cNvSpPr txBox="1"/>
+          <p:cNvSpPr txBox="1">
+            <a:spLocks noGrp="1"/>
+          </p:cNvSpPr>
           <p:nvPr>
-            <p:ph idx="1" type="body"/>
+            <p:ph type="body" idx="1"/>
           </p:nvPr>
         </p:nvSpPr>
         <p:spPr>
@@ -1677,12 +1722,12 @@
           </a:ln>
         </p:spPr>
         <p:txBody>
-          <a:bodyPr anchorCtr="0" anchor="t" bIns="45700" lIns="91425" spcFirstLastPara="1" rIns="91425" wrap="square" tIns="45700">
+          <a:bodyPr spcFirstLastPara="1" wrap="square" lIns="91425" tIns="45700" rIns="91425" bIns="45700" anchor="t" anchorCtr="0">
             <a:noAutofit/>
           </a:bodyPr>
           <a:lstStyle/>
           <a:p>
-            <a:pPr indent="0" lvl="0" marL="0" rtl="0" algn="l">
+            <a:pPr marL="0" lvl="0" indent="0" algn="l" rtl="0">
               <a:spcBef>
                 <a:spcPts val="0"/>
               </a:spcBef>
@@ -1699,7 +1744,7 @@
             <a:endParaRPr/>
           </a:p>
           <a:p>
-            <a:pPr indent="0" lvl="0" marL="0" rtl="0" algn="l">
+            <a:pPr marL="0" lvl="0" indent="0" algn="l" rtl="0">
               <a:spcBef>
                 <a:spcPts val="0"/>
               </a:spcBef>
@@ -1713,13 +1758,10 @@
               <a:buFont typeface="Arial"/>
               <a:buNone/>
             </a:pPr>
-            <a:r>
-              <a:t/>
-            </a:r>
             <a:endParaRPr/>
           </a:p>
           <a:p>
-            <a:pPr indent="0" lvl="0" marL="0" rtl="0" algn="l">
+            <a:pPr marL="0" lvl="0" indent="0" algn="l" rtl="0">
               <a:spcBef>
                 <a:spcPts val="0"/>
               </a:spcBef>
@@ -1736,7 +1778,7 @@
             <a:endParaRPr/>
           </a:p>
           <a:p>
-            <a:pPr indent="0" lvl="0" marL="0" rtl="0" algn="l">
+            <a:pPr marL="0" lvl="0" indent="0" algn="l" rtl="0">
               <a:spcBef>
                 <a:spcPts val="0"/>
               </a:spcBef>
@@ -1750,13 +1792,10 @@
               <a:buFont typeface="Arial"/>
               <a:buNone/>
             </a:pPr>
-            <a:r>
-              <a:t/>
-            </a:r>
             <a:endParaRPr/>
           </a:p>
           <a:p>
-            <a:pPr indent="0" lvl="0" marL="0" rtl="0" algn="l">
+            <a:pPr marL="0" lvl="0" indent="0" algn="l" rtl="0">
               <a:spcBef>
                 <a:spcPts val="0"/>
               </a:spcBef>
@@ -1777,7 +1816,7 @@
             <a:endParaRPr/>
           </a:p>
           <a:p>
-            <a:pPr indent="0" lvl="0" marL="0" rtl="0" algn="l">
+            <a:pPr marL="0" lvl="0" indent="0" algn="l" rtl="0">
               <a:lnSpc>
                 <a:spcPct val="100000"/>
               </a:lnSpc>
@@ -1790,9 +1829,6 @@
               <a:buSzPts val="1400"/>
               <a:buNone/>
             </a:pPr>
-            <a:r>
-              <a:t/>
-            </a:r>
             <a:endParaRPr/>
           </a:p>
         </p:txBody>
@@ -1800,9 +1836,11 @@
       <p:sp>
         <p:nvSpPr>
           <p:cNvPr id="162" name="Google Shape;162;g30176cd2910_0_254:notes"/>
-          <p:cNvSpPr/>
+          <p:cNvSpPr>
+            <a:spLocks noGrp="1" noRot="1" noChangeAspect="1"/>
+          </p:cNvSpPr>
           <p:nvPr>
-            <p:ph idx="2" type="sldImg"/>
+            <p:ph type="sldImg" idx="2"/>
           </p:nvPr>
         </p:nvSpPr>
         <p:spPr>
@@ -1811,9 +1849,13 @@
             <a:ext cx="5486400" cy="3086100"/>
           </a:xfrm>
           <a:custGeom>
-            <a:rect b="b" l="l" r="r" t="t"/>
+            <a:avLst/>
+            <a:gdLst/>
+            <a:ahLst/>
+            <a:cxnLst/>
+            <a:rect l="l" t="t" r="r" b="b"/>
             <a:pathLst>
-              <a:path extrusionOk="0" h="120000" w="120000">
+              <a:path w="120000" h="120000" extrusionOk="0">
                 <a:moveTo>
                   <a:pt x="0" y="0"/>
                 </a:moveTo>
@@ -1831,14 +1873,14 @@
             </a:pathLst>
           </a:custGeom>
           <a:noFill/>
-          <a:ln cap="flat" cmpd="sng" w="12700">
+          <a:ln w="12700" cap="flat" cmpd="sng">
             <a:solidFill>
               <a:srgbClr val="000000"/>
             </a:solidFill>
             <a:prstDash val="solid"/>
             <a:round/>
-            <a:headEnd len="sm" w="sm" type="none"/>
-            <a:tailEnd len="sm" w="sm" type="none"/>
+            <a:headEnd type="none" w="sm" len="sm"/>
+            <a:tailEnd type="none" w="sm" len="sm"/>
           </a:ln>
         </p:spPr>
       </p:sp>
@@ -1851,11 +1893,11 @@
 </file>
 
 <file path=ppt/notesSlides/notesSlide8.xml><?xml version="1.0" encoding="utf-8"?>
-<p:notes xmlns:a="http://schemas.openxmlformats.org/drawingml/2006/main" xmlns:r="http://schemas.openxmlformats.org/officeDocument/2006/relationships" xmlns:mc="http://schemas.openxmlformats.org/markup-compatibility/2006" xmlns:mv="urn:schemas-microsoft-com:mac:vml" xmlns:p="http://schemas.openxmlformats.org/presentationml/2006/main" xmlns:c="http://schemas.openxmlformats.org/drawingml/2006/chart" xmlns:dgm="http://schemas.openxmlformats.org/drawingml/2006/diagram" xmlns:o="urn:schemas-microsoft-com:office:office" xmlns:v="urn:schemas-microsoft-com:vml" xmlns:pvml="urn:schemas-microsoft-com:office:powerpoint" xmlns:com="http://schemas.openxmlformats.org/drawingml/2006/compatibility" xmlns:p14="http://schemas.microsoft.com/office/powerpoint/2010/main" xmlns:p15="http://schemas.microsoft.com/office/powerpoint/2012/main" xmlns:ahyp="http://schemas.microsoft.com/office/drawing/2018/hyperlinkcolor" showMasterPhAnim="0" showMasterSp="0">
+<p:notes xmlns:a="http://schemas.openxmlformats.org/drawingml/2006/main" xmlns:r="http://schemas.openxmlformats.org/officeDocument/2006/relationships" xmlns:p="http://schemas.openxmlformats.org/presentationml/2006/main" showMasterSp="0" showMasterPhAnim="0">
   <p:cSld>
     <p:spTree>
       <p:nvGrpSpPr>
-        <p:cNvPr id="170" name="Shape 170"/>
+        <p:cNvPr id="1" name="Shape 170"/>
         <p:cNvGrpSpPr/>
         <p:nvPr/>
       </p:nvGrpSpPr>
@@ -1870,9 +1912,11 @@
       <p:sp>
         <p:nvSpPr>
           <p:cNvPr id="171" name="Google Shape;171;g30176cd2910_0_307:notes"/>
-          <p:cNvSpPr txBox="1"/>
+          <p:cNvSpPr txBox="1">
+            <a:spLocks noGrp="1"/>
+          </p:cNvSpPr>
           <p:nvPr>
-            <p:ph idx="1" type="body"/>
+            <p:ph type="body" idx="1"/>
           </p:nvPr>
         </p:nvSpPr>
         <p:spPr>
@@ -1889,12 +1933,12 @@
           </a:ln>
         </p:spPr>
         <p:txBody>
-          <a:bodyPr anchorCtr="0" anchor="t" bIns="45700" lIns="91425" spcFirstLastPara="1" rIns="91425" wrap="square" tIns="45700">
+          <a:bodyPr spcFirstLastPara="1" wrap="square" lIns="91425" tIns="45700" rIns="91425" bIns="45700" anchor="t" anchorCtr="0">
             <a:noAutofit/>
           </a:bodyPr>
           <a:lstStyle/>
           <a:p>
-            <a:pPr indent="0" lvl="0" marL="0" rtl="0" algn="l">
+            <a:pPr marL="0" lvl="0" indent="0" algn="l" rtl="0">
               <a:lnSpc>
                 <a:spcPct val="100000"/>
               </a:lnSpc>
@@ -1907,9 +1951,6 @@
               <a:buSzPts val="1400"/>
               <a:buNone/>
             </a:pPr>
-            <a:r>
-              <a:t/>
-            </a:r>
             <a:endParaRPr/>
           </a:p>
         </p:txBody>
@@ -1917,9 +1958,11 @@
       <p:sp>
         <p:nvSpPr>
           <p:cNvPr id="172" name="Google Shape;172;g30176cd2910_0_307:notes"/>
-          <p:cNvSpPr/>
+          <p:cNvSpPr>
+            <a:spLocks noGrp="1" noRot="1" noChangeAspect="1"/>
+          </p:cNvSpPr>
           <p:nvPr>
-            <p:ph idx="2" type="sldImg"/>
+            <p:ph type="sldImg" idx="2"/>
           </p:nvPr>
         </p:nvSpPr>
         <p:spPr>
@@ -1928,9 +1971,13 @@
             <a:ext cx="5486400" cy="3086100"/>
           </a:xfrm>
           <a:custGeom>
-            <a:rect b="b" l="l" r="r" t="t"/>
+            <a:avLst/>
+            <a:gdLst/>
+            <a:ahLst/>
+            <a:cxnLst/>
+            <a:rect l="l" t="t" r="r" b="b"/>
             <a:pathLst>
-              <a:path extrusionOk="0" h="120000" w="120000">
+              <a:path w="120000" h="120000" extrusionOk="0">
                 <a:moveTo>
                   <a:pt x="0" y="0"/>
                 </a:moveTo>
@@ -1948,14 +1995,14 @@
             </a:pathLst>
           </a:custGeom>
           <a:noFill/>
-          <a:ln cap="flat" cmpd="sng" w="12700">
+          <a:ln w="12700" cap="flat" cmpd="sng">
             <a:solidFill>
               <a:srgbClr val="000000"/>
             </a:solidFill>
             <a:prstDash val="solid"/>
             <a:round/>
-            <a:headEnd len="sm" w="sm" type="none"/>
-            <a:tailEnd len="sm" w="sm" type="none"/>
+            <a:headEnd type="none" w="sm" len="sm"/>
+            <a:tailEnd type="none" w="sm" len="sm"/>
           </a:ln>
         </p:spPr>
       </p:sp>
@@ -1968,11 +2015,11 @@
 </file>
 
 <file path=ppt/slideLayouts/slideLayout1.xml><?xml version="1.0" encoding="utf-8"?>
-<p:sldLayout xmlns:a="http://schemas.openxmlformats.org/drawingml/2006/main" xmlns:r="http://schemas.openxmlformats.org/officeDocument/2006/relationships" xmlns:mc="http://schemas.openxmlformats.org/markup-compatibility/2006" xmlns:mv="urn:schemas-microsoft-com:mac:vml" xmlns:p="http://schemas.openxmlformats.org/presentationml/2006/main" xmlns:c="http://schemas.openxmlformats.org/drawingml/2006/chart" xmlns:dgm="http://schemas.openxmlformats.org/drawingml/2006/diagram" xmlns:o="urn:schemas-microsoft-com:office:office" xmlns:v="urn:schemas-microsoft-com:vml" xmlns:pvml="urn:schemas-microsoft-com:office:powerpoint" xmlns:com="http://schemas.openxmlformats.org/drawingml/2006/compatibility" xmlns:p14="http://schemas.microsoft.com/office/powerpoint/2010/main" xmlns:p15="http://schemas.microsoft.com/office/powerpoint/2012/main" xmlns:ahyp="http://schemas.microsoft.com/office/drawing/2018/hyperlinkcolor" matchingName="Title slide" type="title">
+<p:sldLayout xmlns:a="http://schemas.openxmlformats.org/drawingml/2006/main" xmlns:r="http://schemas.openxmlformats.org/officeDocument/2006/relationships" xmlns:p="http://schemas.openxmlformats.org/presentationml/2006/main" matchingName="Title slide" type="title">
   <p:cSld name="TITLE">
     <p:spTree>
       <p:nvGrpSpPr>
-        <p:cNvPr id="9" name="Shape 9"/>
+        <p:cNvPr id="1" name="Shape 9"/>
         <p:cNvGrpSpPr/>
         <p:nvPr/>
       </p:nvGrpSpPr>
@@ -1987,7 +2034,9 @@
       <p:sp>
         <p:nvSpPr>
           <p:cNvPr id="10" name="Google Shape;10;p2"/>
-          <p:cNvSpPr txBox="1"/>
+          <p:cNvSpPr txBox="1">
+            <a:spLocks noGrp="1"/>
+          </p:cNvSpPr>
           <p:nvPr>
             <p:ph type="ctrTitle"/>
           </p:nvPr>
@@ -2002,7 +2051,7 @@
           </a:prstGeom>
         </p:spPr>
         <p:txBody>
-          <a:bodyPr anchorCtr="0" anchor="b" bIns="91425" lIns="91425" spcFirstLastPara="1" rIns="91425" wrap="square" tIns="91425">
+          <a:bodyPr spcFirstLastPara="1" wrap="square" lIns="91425" tIns="91425" rIns="91425" bIns="91425" anchor="b" anchorCtr="0">
             <a:normAutofit/>
           </a:bodyPr>
           <a:lstStyle>
@@ -2106,15 +2155,19 @@
               <a:defRPr sz="5200"/>
             </a:lvl9pPr>
           </a:lstStyle>
-          <a:p/>
+          <a:p>
+            <a:endParaRPr/>
+          </a:p>
         </p:txBody>
       </p:sp>
       <p:sp>
         <p:nvSpPr>
           <p:cNvPr id="11" name="Google Shape;11;p2"/>
-          <p:cNvSpPr txBox="1"/>
+          <p:cNvSpPr txBox="1">
+            <a:spLocks noGrp="1"/>
+          </p:cNvSpPr>
           <p:nvPr>
-            <p:ph idx="1" type="subTitle"/>
+            <p:ph type="subTitle" idx="1"/>
           </p:nvPr>
         </p:nvSpPr>
         <p:spPr>
@@ -2127,7 +2180,7 @@
           </a:prstGeom>
         </p:spPr>
         <p:txBody>
-          <a:bodyPr anchorCtr="0" anchor="t" bIns="91425" lIns="91425" spcFirstLastPara="1" rIns="91425" wrap="square" tIns="91425">
+          <a:bodyPr spcFirstLastPara="1" wrap="square" lIns="91425" tIns="91425" rIns="91425" bIns="91425" anchor="t" anchorCtr="0">
             <a:normAutofit/>
           </a:bodyPr>
           <a:lstStyle>
@@ -2258,15 +2311,19 @@
               <a:defRPr sz="2800"/>
             </a:lvl9pPr>
           </a:lstStyle>
-          <a:p/>
+          <a:p>
+            <a:endParaRPr/>
+          </a:p>
         </p:txBody>
       </p:sp>
       <p:sp>
         <p:nvSpPr>
           <p:cNvPr id="12" name="Google Shape;12;p2"/>
-          <p:cNvSpPr txBox="1"/>
+          <p:cNvSpPr txBox="1">
+            <a:spLocks noGrp="1"/>
+          </p:cNvSpPr>
           <p:nvPr>
-            <p:ph idx="12" type="sldNum"/>
+            <p:ph type="sldNum" idx="12"/>
           </p:nvPr>
         </p:nvSpPr>
         <p:spPr>
@@ -2279,7 +2336,7 @@
           </a:prstGeom>
         </p:spPr>
         <p:txBody>
-          <a:bodyPr anchorCtr="0" anchor="ctr" bIns="91425" lIns="91425" spcFirstLastPara="1" rIns="91425" wrap="square" tIns="91425">
+          <a:bodyPr spcFirstLastPara="1" wrap="square" lIns="91425" tIns="91425" rIns="91425" bIns="91425" anchor="ctr" anchorCtr="0">
             <a:normAutofit/>
           </a:bodyPr>
           <a:lstStyle>
@@ -2321,7 +2378,7 @@
             </a:lvl9pPr>
           </a:lstStyle>
           <a:p>
-            <a:pPr indent="0" lvl="0" marL="0" rtl="0" algn="r">
+            <a:pPr marL="0" lvl="0" indent="0" algn="r" rtl="0">
               <a:spcBef>
                 <a:spcPts val="0"/>
               </a:spcBef>
@@ -2347,11 +2404,11 @@
 </file>
 
 <file path=ppt/slideLayouts/slideLayout10.xml><?xml version="1.0" encoding="utf-8"?>
-<p:sldLayout xmlns:a="http://schemas.openxmlformats.org/drawingml/2006/main" xmlns:r="http://schemas.openxmlformats.org/officeDocument/2006/relationships" xmlns:mc="http://schemas.openxmlformats.org/markup-compatibility/2006" xmlns:mv="urn:schemas-microsoft-com:mac:vml" xmlns:p="http://schemas.openxmlformats.org/presentationml/2006/main" xmlns:c="http://schemas.openxmlformats.org/drawingml/2006/chart" xmlns:dgm="http://schemas.openxmlformats.org/drawingml/2006/diagram" xmlns:o="urn:schemas-microsoft-com:office:office" xmlns:v="urn:schemas-microsoft-com:vml" xmlns:pvml="urn:schemas-microsoft-com:office:powerpoint" xmlns:com="http://schemas.openxmlformats.org/drawingml/2006/compatibility" xmlns:p14="http://schemas.microsoft.com/office/powerpoint/2010/main" xmlns:p15="http://schemas.microsoft.com/office/powerpoint/2012/main" xmlns:ahyp="http://schemas.microsoft.com/office/drawing/2018/hyperlinkcolor" matchingName="Big number">
+<p:sldLayout xmlns:a="http://schemas.openxmlformats.org/drawingml/2006/main" xmlns:r="http://schemas.openxmlformats.org/officeDocument/2006/relationships" xmlns:p="http://schemas.openxmlformats.org/presentationml/2006/main" matchingName="Big number">
   <p:cSld name="BIG_NUMBER">
     <p:spTree>
       <p:nvGrpSpPr>
-        <p:cNvPr id="44" name="Shape 44"/>
+        <p:cNvPr id="1" name="Shape 44"/>
         <p:cNvGrpSpPr/>
         <p:nvPr/>
       </p:nvGrpSpPr>
@@ -2366,9 +2423,11 @@
       <p:sp>
         <p:nvSpPr>
           <p:cNvPr id="45" name="Google Shape;45;p11"/>
-          <p:cNvSpPr txBox="1"/>
+          <p:cNvSpPr txBox="1">
+            <a:spLocks noGrp="1"/>
+          </p:cNvSpPr>
           <p:nvPr>
-            <p:ph hasCustomPrompt="1" type="title"/>
+            <p:ph type="title" hasCustomPrompt="1"/>
           </p:nvPr>
         </p:nvSpPr>
         <p:spPr>
@@ -2381,7 +2440,7 @@
           </a:prstGeom>
         </p:spPr>
         <p:txBody>
-          <a:bodyPr anchorCtr="0" anchor="b" bIns="91425" lIns="91425" spcFirstLastPara="1" rIns="91425" wrap="square" tIns="91425">
+          <a:bodyPr spcFirstLastPara="1" wrap="square" lIns="91425" tIns="91425" rIns="91425" bIns="91425" anchor="b" anchorCtr="0">
             <a:normAutofit/>
           </a:bodyPr>
           <a:lstStyle>
@@ -2495,9 +2554,11 @@
       <p:sp>
         <p:nvSpPr>
           <p:cNvPr id="46" name="Google Shape;46;p11"/>
-          <p:cNvSpPr txBox="1"/>
+          <p:cNvSpPr txBox="1">
+            <a:spLocks noGrp="1"/>
+          </p:cNvSpPr>
           <p:nvPr>
-            <p:ph idx="1" type="body"/>
+            <p:ph type="body" idx="1"/>
           </p:nvPr>
         </p:nvSpPr>
         <p:spPr>
@@ -2510,11 +2571,11 @@
           </a:prstGeom>
         </p:spPr>
         <p:txBody>
-          <a:bodyPr anchorCtr="0" anchor="t" bIns="91425" lIns="91425" spcFirstLastPara="1" rIns="91425" wrap="square" tIns="91425">
+          <a:bodyPr spcFirstLastPara="1" wrap="square" lIns="91425" tIns="91425" rIns="91425" bIns="91425" anchor="t" anchorCtr="0">
             <a:normAutofit/>
           </a:bodyPr>
           <a:lstStyle>
-            <a:lvl1pPr indent="-342900" lvl="0" marL="457200" algn="ctr">
+            <a:lvl1pPr marL="457200" lvl="0" indent="-342900" algn="ctr">
               <a:spcBef>
                 <a:spcPts val="0"/>
               </a:spcBef>
@@ -2525,7 +2586,7 @@
               <a:buChar char="●"/>
               <a:defRPr/>
             </a:lvl1pPr>
-            <a:lvl2pPr indent="-317500" lvl="1" marL="914400" algn="ctr">
+            <a:lvl2pPr marL="914400" lvl="1" indent="-317500" algn="ctr">
               <a:spcBef>
                 <a:spcPts val="0"/>
               </a:spcBef>
@@ -2536,7 +2597,7 @@
               <a:buChar char="○"/>
               <a:defRPr/>
             </a:lvl2pPr>
-            <a:lvl3pPr indent="-317500" lvl="2" marL="1371600" algn="ctr">
+            <a:lvl3pPr marL="1371600" lvl="2" indent="-317500" algn="ctr">
               <a:spcBef>
                 <a:spcPts val="0"/>
               </a:spcBef>
@@ -2547,7 +2608,7 @@
               <a:buChar char="■"/>
               <a:defRPr/>
             </a:lvl3pPr>
-            <a:lvl4pPr indent="-317500" lvl="3" marL="1828800" algn="ctr">
+            <a:lvl4pPr marL="1828800" lvl="3" indent="-317500" algn="ctr">
               <a:spcBef>
                 <a:spcPts val="0"/>
               </a:spcBef>
@@ -2558,7 +2619,7 @@
               <a:buChar char="●"/>
               <a:defRPr/>
             </a:lvl4pPr>
-            <a:lvl5pPr indent="-317500" lvl="4" marL="2286000" algn="ctr">
+            <a:lvl5pPr marL="2286000" lvl="4" indent="-317500" algn="ctr">
               <a:spcBef>
                 <a:spcPts val="0"/>
               </a:spcBef>
@@ -2569,7 +2630,7 @@
               <a:buChar char="○"/>
               <a:defRPr/>
             </a:lvl5pPr>
-            <a:lvl6pPr indent="-317500" lvl="5" marL="2743200" algn="ctr">
+            <a:lvl6pPr marL="2743200" lvl="5" indent="-317500" algn="ctr">
               <a:spcBef>
                 <a:spcPts val="0"/>
               </a:spcBef>
@@ -2580,7 +2641,7 @@
               <a:buChar char="■"/>
               <a:defRPr/>
             </a:lvl6pPr>
-            <a:lvl7pPr indent="-317500" lvl="6" marL="3200400" algn="ctr">
+            <a:lvl7pPr marL="3200400" lvl="6" indent="-317500" algn="ctr">
               <a:spcBef>
                 <a:spcPts val="0"/>
               </a:spcBef>
@@ -2591,7 +2652,7 @@
               <a:buChar char="●"/>
               <a:defRPr/>
             </a:lvl7pPr>
-            <a:lvl8pPr indent="-317500" lvl="7" marL="3657600" algn="ctr">
+            <a:lvl8pPr marL="3657600" lvl="7" indent="-317500" algn="ctr">
               <a:spcBef>
                 <a:spcPts val="0"/>
               </a:spcBef>
@@ -2602,7 +2663,7 @@
               <a:buChar char="○"/>
               <a:defRPr/>
             </a:lvl8pPr>
-            <a:lvl9pPr indent="-317500" lvl="8" marL="4114800" algn="ctr">
+            <a:lvl9pPr marL="4114800" lvl="8" indent="-317500" algn="ctr">
               <a:spcBef>
                 <a:spcPts val="0"/>
               </a:spcBef>
@@ -2614,15 +2675,19 @@
               <a:defRPr/>
             </a:lvl9pPr>
           </a:lstStyle>
-          <a:p/>
+          <a:p>
+            <a:endParaRPr/>
+          </a:p>
         </p:txBody>
       </p:sp>
       <p:sp>
         <p:nvSpPr>
           <p:cNvPr id="47" name="Google Shape;47;p11"/>
-          <p:cNvSpPr txBox="1"/>
+          <p:cNvSpPr txBox="1">
+            <a:spLocks noGrp="1"/>
+          </p:cNvSpPr>
           <p:nvPr>
-            <p:ph idx="12" type="sldNum"/>
+            <p:ph type="sldNum" idx="12"/>
           </p:nvPr>
         </p:nvSpPr>
         <p:spPr>
@@ -2635,7 +2700,7 @@
           </a:prstGeom>
         </p:spPr>
         <p:txBody>
-          <a:bodyPr anchorCtr="0" anchor="ctr" bIns="91425" lIns="91425" spcFirstLastPara="1" rIns="91425" wrap="square" tIns="91425">
+          <a:bodyPr spcFirstLastPara="1" wrap="square" lIns="91425" tIns="91425" rIns="91425" bIns="91425" anchor="ctr" anchorCtr="0">
             <a:normAutofit/>
           </a:bodyPr>
           <a:lstStyle>
@@ -2677,7 +2742,7 @@
             </a:lvl9pPr>
           </a:lstStyle>
           <a:p>
-            <a:pPr indent="0" lvl="0" marL="0" rtl="0" algn="r">
+            <a:pPr marL="0" lvl="0" indent="0" algn="r" rtl="0">
               <a:spcBef>
                 <a:spcPts val="0"/>
               </a:spcBef>
@@ -2703,11 +2768,11 @@
 </file>
 
 <file path=ppt/slideLayouts/slideLayout11.xml><?xml version="1.0" encoding="utf-8"?>
-<p:sldLayout xmlns:a="http://schemas.openxmlformats.org/drawingml/2006/main" xmlns:r="http://schemas.openxmlformats.org/officeDocument/2006/relationships" xmlns:mc="http://schemas.openxmlformats.org/markup-compatibility/2006" xmlns:mv="urn:schemas-microsoft-com:mac:vml" xmlns:p="http://schemas.openxmlformats.org/presentationml/2006/main" xmlns:c="http://schemas.openxmlformats.org/drawingml/2006/chart" xmlns:dgm="http://schemas.openxmlformats.org/drawingml/2006/diagram" xmlns:o="urn:schemas-microsoft-com:office:office" xmlns:v="urn:schemas-microsoft-com:vml" xmlns:pvml="urn:schemas-microsoft-com:office:powerpoint" xmlns:com="http://schemas.openxmlformats.org/drawingml/2006/compatibility" xmlns:p14="http://schemas.microsoft.com/office/powerpoint/2010/main" xmlns:p15="http://schemas.microsoft.com/office/powerpoint/2012/main" xmlns:ahyp="http://schemas.microsoft.com/office/drawing/2018/hyperlinkcolor" matchingName="Blank" type="blank">
+<p:sldLayout xmlns:a="http://schemas.openxmlformats.org/drawingml/2006/main" xmlns:r="http://schemas.openxmlformats.org/officeDocument/2006/relationships" xmlns:p="http://schemas.openxmlformats.org/presentationml/2006/main" matchingName="Blank" type="blank">
   <p:cSld name="BLANK">
     <p:spTree>
       <p:nvGrpSpPr>
-        <p:cNvPr id="48" name="Shape 48"/>
+        <p:cNvPr id="1" name="Shape 48"/>
         <p:cNvGrpSpPr/>
         <p:nvPr/>
       </p:nvGrpSpPr>
@@ -2722,9 +2787,11 @@
       <p:sp>
         <p:nvSpPr>
           <p:cNvPr id="49" name="Google Shape;49;p12"/>
-          <p:cNvSpPr txBox="1"/>
+          <p:cNvSpPr txBox="1">
+            <a:spLocks noGrp="1"/>
+          </p:cNvSpPr>
           <p:nvPr>
-            <p:ph idx="12" type="sldNum"/>
+            <p:ph type="sldNum" idx="12"/>
           </p:nvPr>
         </p:nvSpPr>
         <p:spPr>
@@ -2737,7 +2804,7 @@
           </a:prstGeom>
         </p:spPr>
         <p:txBody>
-          <a:bodyPr anchorCtr="0" anchor="ctr" bIns="91425" lIns="91425" spcFirstLastPara="1" rIns="91425" wrap="square" tIns="91425">
+          <a:bodyPr spcFirstLastPara="1" wrap="square" lIns="91425" tIns="91425" rIns="91425" bIns="91425" anchor="ctr" anchorCtr="0">
             <a:normAutofit/>
           </a:bodyPr>
           <a:lstStyle>
@@ -2779,7 +2846,7 @@
             </a:lvl9pPr>
           </a:lstStyle>
           <a:p>
-            <a:pPr indent="0" lvl="0" marL="0" rtl="0" algn="r">
+            <a:pPr marL="0" lvl="0" indent="0" algn="r" rtl="0">
               <a:spcBef>
                 <a:spcPts val="0"/>
               </a:spcBef>
@@ -2805,11 +2872,11 @@
 </file>
 
 <file path=ppt/slideLayouts/slideLayout12.xml><?xml version="1.0" encoding="utf-8"?>
-<p:sldLayout xmlns:a="http://schemas.openxmlformats.org/drawingml/2006/main" xmlns:r="http://schemas.openxmlformats.org/officeDocument/2006/relationships" xmlns:mc="http://schemas.openxmlformats.org/markup-compatibility/2006" xmlns:mv="urn:schemas-microsoft-com:mac:vml" xmlns:p="http://schemas.openxmlformats.org/presentationml/2006/main" xmlns:c="http://schemas.openxmlformats.org/drawingml/2006/chart" xmlns:dgm="http://schemas.openxmlformats.org/drawingml/2006/diagram" xmlns:o="urn:schemas-microsoft-com:office:office" xmlns:v="urn:schemas-microsoft-com:vml" xmlns:pvml="urn:schemas-microsoft-com:office:powerpoint" xmlns:com="http://schemas.openxmlformats.org/drawingml/2006/compatibility" xmlns:p14="http://schemas.microsoft.com/office/powerpoint/2010/main" xmlns:p15="http://schemas.microsoft.com/office/powerpoint/2012/main" xmlns:ahyp="http://schemas.microsoft.com/office/drawing/2018/hyperlinkcolor" matchingName="Title and content" type="obj">
+<p:sldLayout xmlns:a="http://schemas.openxmlformats.org/drawingml/2006/main" xmlns:r="http://schemas.openxmlformats.org/officeDocument/2006/relationships" xmlns:p="http://schemas.openxmlformats.org/presentationml/2006/main" matchingName="Title and content" type="obj">
   <p:cSld name="OBJECT">
     <p:spTree>
       <p:nvGrpSpPr>
-        <p:cNvPr id="50" name="Shape 50"/>
+        <p:cNvPr id="1" name="Shape 50"/>
         <p:cNvGrpSpPr/>
         <p:nvPr/>
       </p:nvGrpSpPr>
@@ -2824,7 +2891,9 @@
       <p:sp>
         <p:nvSpPr>
           <p:cNvPr id="51" name="Google Shape;51;p13"/>
-          <p:cNvSpPr txBox="1"/>
+          <p:cNvSpPr txBox="1">
+            <a:spLocks noGrp="1"/>
+          </p:cNvSpPr>
           <p:nvPr>
             <p:ph type="title"/>
           </p:nvPr>
@@ -2843,7 +2912,7 @@
           </a:ln>
         </p:spPr>
         <p:txBody>
-          <a:bodyPr anchorCtr="0" anchor="ctr" bIns="34275" lIns="68575" spcFirstLastPara="1" rIns="68575" wrap="square" tIns="34275">
+          <a:bodyPr spcFirstLastPara="1" wrap="square" lIns="68575" tIns="34275" rIns="68575" bIns="34275" anchor="ctr" anchorCtr="0">
             <a:noAutofit/>
           </a:bodyPr>
           <a:lstStyle>
@@ -2977,15 +3046,19 @@
               <a:defRPr/>
             </a:lvl9pPr>
           </a:lstStyle>
-          <a:p/>
+          <a:p>
+            <a:endParaRPr/>
+          </a:p>
         </p:txBody>
       </p:sp>
       <p:sp>
         <p:nvSpPr>
           <p:cNvPr id="52" name="Google Shape;52;p13"/>
-          <p:cNvSpPr txBox="1"/>
+          <p:cNvSpPr txBox="1">
+            <a:spLocks noGrp="1"/>
+          </p:cNvSpPr>
           <p:nvPr>
-            <p:ph idx="1" type="body"/>
+            <p:ph type="body" idx="1"/>
           </p:nvPr>
         </p:nvSpPr>
         <p:spPr>
@@ -3002,11 +3075,11 @@
           </a:ln>
         </p:spPr>
         <p:txBody>
-          <a:bodyPr anchorCtr="0" anchor="t" bIns="34275" lIns="68575" spcFirstLastPara="1" rIns="68575" wrap="square" tIns="34275">
+          <a:bodyPr spcFirstLastPara="1" wrap="square" lIns="68575" tIns="34275" rIns="68575" bIns="34275" anchor="t" anchorCtr="0">
             <a:noAutofit/>
           </a:bodyPr>
           <a:lstStyle>
-            <a:lvl1pPr indent="-317500" lvl="0" marL="457200" algn="l">
+            <a:lvl1pPr marL="457200" lvl="0" indent="-317500" algn="l">
               <a:lnSpc>
                 <a:spcPct val="90000"/>
               </a:lnSpc>
@@ -3023,7 +3096,7 @@
               <a:buChar char="•"/>
               <a:defRPr/>
             </a:lvl1pPr>
-            <a:lvl2pPr indent="-317500" lvl="1" marL="914400" algn="l">
+            <a:lvl2pPr marL="914400" lvl="1" indent="-317500" algn="l">
               <a:lnSpc>
                 <a:spcPct val="90000"/>
               </a:lnSpc>
@@ -3040,7 +3113,7 @@
               <a:buChar char="•"/>
               <a:defRPr/>
             </a:lvl2pPr>
-            <a:lvl3pPr indent="-317500" lvl="2" marL="1371600" algn="l">
+            <a:lvl3pPr marL="1371600" lvl="2" indent="-317500" algn="l">
               <a:lnSpc>
                 <a:spcPct val="90000"/>
               </a:lnSpc>
@@ -3057,7 +3130,7 @@
               <a:buChar char="•"/>
               <a:defRPr/>
             </a:lvl3pPr>
-            <a:lvl4pPr indent="-317500" lvl="3" marL="1828800" algn="l">
+            <a:lvl4pPr marL="1828800" lvl="3" indent="-317500" algn="l">
               <a:lnSpc>
                 <a:spcPct val="90000"/>
               </a:lnSpc>
@@ -3074,7 +3147,7 @@
               <a:buChar char="•"/>
               <a:defRPr/>
             </a:lvl4pPr>
-            <a:lvl5pPr indent="-317500" lvl="4" marL="2286000" algn="l">
+            <a:lvl5pPr marL="2286000" lvl="4" indent="-317500" algn="l">
               <a:lnSpc>
                 <a:spcPct val="90000"/>
               </a:lnSpc>
@@ -3091,7 +3164,7 @@
               <a:buChar char="•"/>
               <a:defRPr/>
             </a:lvl5pPr>
-            <a:lvl6pPr indent="-317500" lvl="5" marL="2743200" algn="l">
+            <a:lvl6pPr marL="2743200" lvl="5" indent="-317500" algn="l">
               <a:lnSpc>
                 <a:spcPct val="90000"/>
               </a:lnSpc>
@@ -3108,7 +3181,7 @@
               <a:buChar char="•"/>
               <a:defRPr/>
             </a:lvl6pPr>
-            <a:lvl7pPr indent="-317500" lvl="6" marL="3200400" algn="l">
+            <a:lvl7pPr marL="3200400" lvl="6" indent="-317500" algn="l">
               <a:lnSpc>
                 <a:spcPct val="90000"/>
               </a:lnSpc>
@@ -3125,7 +3198,7 @@
               <a:buChar char="•"/>
               <a:defRPr/>
             </a:lvl7pPr>
-            <a:lvl8pPr indent="-317500" lvl="7" marL="3657600" algn="l">
+            <a:lvl8pPr marL="3657600" lvl="7" indent="-317500" algn="l">
               <a:lnSpc>
                 <a:spcPct val="90000"/>
               </a:lnSpc>
@@ -3142,7 +3215,7 @@
               <a:buChar char="•"/>
               <a:defRPr/>
             </a:lvl8pPr>
-            <a:lvl9pPr indent="-317500" lvl="8" marL="4114800" algn="l">
+            <a:lvl9pPr marL="4114800" lvl="8" indent="-317500" algn="l">
               <a:lnSpc>
                 <a:spcPct val="90000"/>
               </a:lnSpc>
@@ -3160,15 +3233,19 @@
               <a:defRPr/>
             </a:lvl9pPr>
           </a:lstStyle>
-          <a:p/>
+          <a:p>
+            <a:endParaRPr/>
+          </a:p>
         </p:txBody>
       </p:sp>
       <p:sp>
         <p:nvSpPr>
           <p:cNvPr id="53" name="Google Shape;53;p13"/>
-          <p:cNvSpPr txBox="1"/>
+          <p:cNvSpPr txBox="1">
+            <a:spLocks noGrp="1"/>
+          </p:cNvSpPr>
           <p:nvPr>
-            <p:ph idx="10" type="dt"/>
+            <p:ph type="dt" idx="10"/>
           </p:nvPr>
         </p:nvSpPr>
         <p:spPr>
@@ -3185,7 +3262,7 @@
           </a:ln>
         </p:spPr>
         <p:txBody>
-          <a:bodyPr anchorCtr="0" anchor="ctr" bIns="34275" lIns="68575" spcFirstLastPara="1" rIns="68575" wrap="square" tIns="34275">
+          <a:bodyPr spcFirstLastPara="1" wrap="square" lIns="68575" tIns="34275" rIns="68575" bIns="34275" anchor="ctr" anchorCtr="0">
             <a:noAutofit/>
           </a:bodyPr>
           <a:lstStyle>
@@ -3343,15 +3420,19 @@
               <a:defRPr sz="1100"/>
             </a:lvl9pPr>
           </a:lstStyle>
-          <a:p/>
+          <a:p>
+            <a:endParaRPr/>
+          </a:p>
         </p:txBody>
       </p:sp>
       <p:sp>
         <p:nvSpPr>
           <p:cNvPr id="54" name="Google Shape;54;p13"/>
-          <p:cNvSpPr txBox="1"/>
+          <p:cNvSpPr txBox="1">
+            <a:spLocks noGrp="1"/>
+          </p:cNvSpPr>
           <p:nvPr>
-            <p:ph idx="11" type="ftr"/>
+            <p:ph type="ftr" idx="11"/>
           </p:nvPr>
         </p:nvSpPr>
         <p:spPr>
@@ -3368,7 +3449,7 @@
           </a:ln>
         </p:spPr>
         <p:txBody>
-          <a:bodyPr anchorCtr="0" anchor="ctr" bIns="34275" lIns="68575" spcFirstLastPara="1" rIns="68575" wrap="square" tIns="34275">
+          <a:bodyPr spcFirstLastPara="1" wrap="square" lIns="68575" tIns="34275" rIns="68575" bIns="34275" anchor="ctr" anchorCtr="0">
             <a:noAutofit/>
           </a:bodyPr>
           <a:lstStyle>
@@ -3526,15 +3607,19 @@
               <a:defRPr sz="1100"/>
             </a:lvl9pPr>
           </a:lstStyle>
-          <a:p/>
+          <a:p>
+            <a:endParaRPr/>
+          </a:p>
         </p:txBody>
       </p:sp>
       <p:sp>
         <p:nvSpPr>
           <p:cNvPr id="55" name="Google Shape;55;p13"/>
-          <p:cNvSpPr txBox="1"/>
+          <p:cNvSpPr txBox="1">
+            <a:spLocks noGrp="1"/>
+          </p:cNvSpPr>
           <p:nvPr>
-            <p:ph idx="12" type="sldNum"/>
+            <p:ph type="sldNum" idx="12"/>
           </p:nvPr>
         </p:nvSpPr>
         <p:spPr>
@@ -3551,11 +3636,11 @@
           </a:ln>
         </p:spPr>
         <p:txBody>
-          <a:bodyPr anchorCtr="0" anchor="ctr" bIns="34275" lIns="68575" spcFirstLastPara="1" rIns="68575" wrap="square" tIns="34275">
+          <a:bodyPr spcFirstLastPara="1" wrap="square" lIns="68575" tIns="34275" rIns="68575" bIns="34275" anchor="ctr" anchorCtr="0">
             <a:noAutofit/>
           </a:bodyPr>
           <a:lstStyle>
-            <a:lvl1pPr indent="0" lvl="0" marL="0" marR="0" algn="r">
+            <a:lvl1pPr marL="0" marR="0" lvl="0" indent="0" algn="r">
               <a:lnSpc>
                 <a:spcPct val="100000"/>
               </a:lnSpc>
@@ -3571,7 +3656,7 @@
               <a:buSzPts val="900"/>
               <a:buFont typeface="Calibri"/>
               <a:buNone/>
-              <a:defRPr b="0" i="0" sz="900" u="none" cap="none" strike="noStrike">
+              <a:defRPr sz="900" b="0" i="0" u="none" strike="noStrike" cap="none">
                 <a:solidFill>
                   <a:srgbClr val="888888"/>
                 </a:solidFill>
@@ -3581,7 +3666,7 @@
                 <a:sym typeface="Calibri"/>
               </a:defRPr>
             </a:lvl1pPr>
-            <a:lvl2pPr indent="0" lvl="1" marL="0" marR="0" algn="r">
+            <a:lvl2pPr marL="0" marR="0" lvl="1" indent="0" algn="r">
               <a:lnSpc>
                 <a:spcPct val="100000"/>
               </a:lnSpc>
@@ -3597,7 +3682,7 @@
               <a:buSzPts val="900"/>
               <a:buFont typeface="Calibri"/>
               <a:buNone/>
-              <a:defRPr b="0" i="0" sz="900" u="none" cap="none" strike="noStrike">
+              <a:defRPr sz="900" b="0" i="0" u="none" strike="noStrike" cap="none">
                 <a:solidFill>
                   <a:srgbClr val="888888"/>
                 </a:solidFill>
@@ -3607,7 +3692,7 @@
                 <a:sym typeface="Calibri"/>
               </a:defRPr>
             </a:lvl2pPr>
-            <a:lvl3pPr indent="0" lvl="2" marL="0" marR="0" algn="r">
+            <a:lvl3pPr marL="0" marR="0" lvl="2" indent="0" algn="r">
               <a:lnSpc>
                 <a:spcPct val="100000"/>
               </a:lnSpc>
@@ -3623,7 +3708,7 @@
               <a:buSzPts val="900"/>
               <a:buFont typeface="Calibri"/>
               <a:buNone/>
-              <a:defRPr b="0" i="0" sz="900" u="none" cap="none" strike="noStrike">
+              <a:defRPr sz="900" b="0" i="0" u="none" strike="noStrike" cap="none">
                 <a:solidFill>
                   <a:srgbClr val="888888"/>
                 </a:solidFill>
@@ -3633,7 +3718,7 @@
                 <a:sym typeface="Calibri"/>
               </a:defRPr>
             </a:lvl3pPr>
-            <a:lvl4pPr indent="0" lvl="3" marL="0" marR="0" algn="r">
+            <a:lvl4pPr marL="0" marR="0" lvl="3" indent="0" algn="r">
               <a:lnSpc>
                 <a:spcPct val="100000"/>
               </a:lnSpc>
@@ -3649,7 +3734,7 @@
               <a:buSzPts val="900"/>
               <a:buFont typeface="Calibri"/>
               <a:buNone/>
-              <a:defRPr b="0" i="0" sz="900" u="none" cap="none" strike="noStrike">
+              <a:defRPr sz="900" b="0" i="0" u="none" strike="noStrike" cap="none">
                 <a:solidFill>
                   <a:srgbClr val="888888"/>
                 </a:solidFill>
@@ -3659,7 +3744,7 @@
                 <a:sym typeface="Calibri"/>
               </a:defRPr>
             </a:lvl4pPr>
-            <a:lvl5pPr indent="0" lvl="4" marL="0" marR="0" algn="r">
+            <a:lvl5pPr marL="0" marR="0" lvl="4" indent="0" algn="r">
               <a:lnSpc>
                 <a:spcPct val="100000"/>
               </a:lnSpc>
@@ -3675,7 +3760,7 @@
               <a:buSzPts val="900"/>
               <a:buFont typeface="Calibri"/>
               <a:buNone/>
-              <a:defRPr b="0" i="0" sz="900" u="none" cap="none" strike="noStrike">
+              <a:defRPr sz="900" b="0" i="0" u="none" strike="noStrike" cap="none">
                 <a:solidFill>
                   <a:srgbClr val="888888"/>
                 </a:solidFill>
@@ -3685,7 +3770,7 @@
                 <a:sym typeface="Calibri"/>
               </a:defRPr>
             </a:lvl5pPr>
-            <a:lvl6pPr indent="0" lvl="5" marL="0" marR="0" algn="r">
+            <a:lvl6pPr marL="0" marR="0" lvl="5" indent="0" algn="r">
               <a:lnSpc>
                 <a:spcPct val="100000"/>
               </a:lnSpc>
@@ -3701,7 +3786,7 @@
               <a:buSzPts val="900"/>
               <a:buFont typeface="Calibri"/>
               <a:buNone/>
-              <a:defRPr b="0" i="0" sz="900" u="none" cap="none" strike="noStrike">
+              <a:defRPr sz="900" b="0" i="0" u="none" strike="noStrike" cap="none">
                 <a:solidFill>
                   <a:srgbClr val="888888"/>
                 </a:solidFill>
@@ -3711,7 +3796,7 @@
                 <a:sym typeface="Calibri"/>
               </a:defRPr>
             </a:lvl6pPr>
-            <a:lvl7pPr indent="0" lvl="6" marL="0" marR="0" algn="r">
+            <a:lvl7pPr marL="0" marR="0" lvl="6" indent="0" algn="r">
               <a:lnSpc>
                 <a:spcPct val="100000"/>
               </a:lnSpc>
@@ -3727,7 +3812,7 @@
               <a:buSzPts val="900"/>
               <a:buFont typeface="Calibri"/>
               <a:buNone/>
-              <a:defRPr b="0" i="0" sz="900" u="none" cap="none" strike="noStrike">
+              <a:defRPr sz="900" b="0" i="0" u="none" strike="noStrike" cap="none">
                 <a:solidFill>
                   <a:srgbClr val="888888"/>
                 </a:solidFill>
@@ -3737,7 +3822,7 @@
                 <a:sym typeface="Calibri"/>
               </a:defRPr>
             </a:lvl7pPr>
-            <a:lvl8pPr indent="0" lvl="7" marL="0" marR="0" algn="r">
+            <a:lvl8pPr marL="0" marR="0" lvl="7" indent="0" algn="r">
               <a:lnSpc>
                 <a:spcPct val="100000"/>
               </a:lnSpc>
@@ -3753,7 +3838,7 @@
               <a:buSzPts val="900"/>
               <a:buFont typeface="Calibri"/>
               <a:buNone/>
-              <a:defRPr b="0" i="0" sz="900" u="none" cap="none" strike="noStrike">
+              <a:defRPr sz="900" b="0" i="0" u="none" strike="noStrike" cap="none">
                 <a:solidFill>
                   <a:srgbClr val="888888"/>
                 </a:solidFill>
@@ -3763,7 +3848,7 @@
                 <a:sym typeface="Calibri"/>
               </a:defRPr>
             </a:lvl8pPr>
-            <a:lvl9pPr indent="0" lvl="8" marL="0" marR="0" algn="r">
+            <a:lvl9pPr marL="0" marR="0" lvl="8" indent="0" algn="r">
               <a:lnSpc>
                 <a:spcPct val="100000"/>
               </a:lnSpc>
@@ -3779,7 +3864,7 @@
               <a:buSzPts val="900"/>
               <a:buFont typeface="Calibri"/>
               <a:buNone/>
-              <a:defRPr b="0" i="0" sz="900" u="none" cap="none" strike="noStrike">
+              <a:defRPr sz="900" b="0" i="0" u="none" strike="noStrike" cap="none">
                 <a:solidFill>
                   <a:srgbClr val="888888"/>
                 </a:solidFill>
@@ -3791,7 +3876,7 @@
             </a:lvl9pPr>
           </a:lstStyle>
           <a:p>
-            <a:pPr indent="0" lvl="0" marL="0" rtl="0" algn="r">
+            <a:pPr marL="0" lvl="0" indent="0" algn="r" rtl="0">
               <a:spcBef>
                 <a:spcPts val="0"/>
               </a:spcBef>
@@ -3817,11 +3902,11 @@
 </file>
 
 <file path=ppt/slideLayouts/slideLayout2.xml><?xml version="1.0" encoding="utf-8"?>
-<p:sldLayout xmlns:a="http://schemas.openxmlformats.org/drawingml/2006/main" xmlns:r="http://schemas.openxmlformats.org/officeDocument/2006/relationships" xmlns:mc="http://schemas.openxmlformats.org/markup-compatibility/2006" xmlns:mv="urn:schemas-microsoft-com:mac:vml" xmlns:p="http://schemas.openxmlformats.org/presentationml/2006/main" xmlns:c="http://schemas.openxmlformats.org/drawingml/2006/chart" xmlns:dgm="http://schemas.openxmlformats.org/drawingml/2006/diagram" xmlns:o="urn:schemas-microsoft-com:office:office" xmlns:v="urn:schemas-microsoft-com:vml" xmlns:pvml="urn:schemas-microsoft-com:office:powerpoint" xmlns:com="http://schemas.openxmlformats.org/drawingml/2006/compatibility" xmlns:p14="http://schemas.microsoft.com/office/powerpoint/2010/main" xmlns:p15="http://schemas.microsoft.com/office/powerpoint/2012/main" xmlns:ahyp="http://schemas.microsoft.com/office/drawing/2018/hyperlinkcolor" matchingName="Section header" type="secHead">
+<p:sldLayout xmlns:a="http://schemas.openxmlformats.org/drawingml/2006/main" xmlns:r="http://schemas.openxmlformats.org/officeDocument/2006/relationships" xmlns:p="http://schemas.openxmlformats.org/presentationml/2006/main" matchingName="Section header" type="secHead">
   <p:cSld name="SECTION_HEADER">
     <p:spTree>
       <p:nvGrpSpPr>
-        <p:cNvPr id="13" name="Shape 13"/>
+        <p:cNvPr id="1" name="Shape 13"/>
         <p:cNvGrpSpPr/>
         <p:nvPr/>
       </p:nvGrpSpPr>
@@ -3836,7 +3921,9 @@
       <p:sp>
         <p:nvSpPr>
           <p:cNvPr id="14" name="Google Shape;14;p3"/>
-          <p:cNvSpPr txBox="1"/>
+          <p:cNvSpPr txBox="1">
+            <a:spLocks noGrp="1"/>
+          </p:cNvSpPr>
           <p:nvPr>
             <p:ph type="title"/>
           </p:nvPr>
@@ -3851,7 +3938,7 @@
           </a:prstGeom>
         </p:spPr>
         <p:txBody>
-          <a:bodyPr anchorCtr="0" anchor="ctr" bIns="91425" lIns="91425" spcFirstLastPara="1" rIns="91425" wrap="square" tIns="91425">
+          <a:bodyPr spcFirstLastPara="1" wrap="square" lIns="91425" tIns="91425" rIns="91425" bIns="91425" anchor="ctr" anchorCtr="0">
             <a:normAutofit/>
           </a:bodyPr>
           <a:lstStyle>
@@ -3955,15 +4042,19 @@
               <a:defRPr sz="3600"/>
             </a:lvl9pPr>
           </a:lstStyle>
-          <a:p/>
+          <a:p>
+            <a:endParaRPr/>
+          </a:p>
         </p:txBody>
       </p:sp>
       <p:sp>
         <p:nvSpPr>
           <p:cNvPr id="15" name="Google Shape;15;p3"/>
-          <p:cNvSpPr txBox="1"/>
+          <p:cNvSpPr txBox="1">
+            <a:spLocks noGrp="1"/>
+          </p:cNvSpPr>
           <p:nvPr>
-            <p:ph idx="12" type="sldNum"/>
+            <p:ph type="sldNum" idx="12"/>
           </p:nvPr>
         </p:nvSpPr>
         <p:spPr>
@@ -3976,7 +4067,7 @@
           </a:prstGeom>
         </p:spPr>
         <p:txBody>
-          <a:bodyPr anchorCtr="0" anchor="ctr" bIns="91425" lIns="91425" spcFirstLastPara="1" rIns="91425" wrap="square" tIns="91425">
+          <a:bodyPr spcFirstLastPara="1" wrap="square" lIns="91425" tIns="91425" rIns="91425" bIns="91425" anchor="ctr" anchorCtr="0">
             <a:normAutofit/>
           </a:bodyPr>
           <a:lstStyle>
@@ -4018,7 +4109,7 @@
             </a:lvl9pPr>
           </a:lstStyle>
           <a:p>
-            <a:pPr indent="0" lvl="0" marL="0" rtl="0" algn="r">
+            <a:pPr marL="0" lvl="0" indent="0" algn="r" rtl="0">
               <a:spcBef>
                 <a:spcPts val="0"/>
               </a:spcBef>
@@ -4044,11 +4135,11 @@
 </file>
 
 <file path=ppt/slideLayouts/slideLayout3.xml><?xml version="1.0" encoding="utf-8"?>
-<p:sldLayout xmlns:a="http://schemas.openxmlformats.org/drawingml/2006/main" xmlns:r="http://schemas.openxmlformats.org/officeDocument/2006/relationships" xmlns:mc="http://schemas.openxmlformats.org/markup-compatibility/2006" xmlns:mv="urn:schemas-microsoft-com:mac:vml" xmlns:p="http://schemas.openxmlformats.org/presentationml/2006/main" xmlns:c="http://schemas.openxmlformats.org/drawingml/2006/chart" xmlns:dgm="http://schemas.openxmlformats.org/drawingml/2006/diagram" xmlns:o="urn:schemas-microsoft-com:office:office" xmlns:v="urn:schemas-microsoft-com:vml" xmlns:pvml="urn:schemas-microsoft-com:office:powerpoint" xmlns:com="http://schemas.openxmlformats.org/drawingml/2006/compatibility" xmlns:p14="http://schemas.microsoft.com/office/powerpoint/2010/main" xmlns:p15="http://schemas.microsoft.com/office/powerpoint/2012/main" xmlns:ahyp="http://schemas.microsoft.com/office/drawing/2018/hyperlinkcolor" matchingName="Title and body" type="tx">
+<p:sldLayout xmlns:a="http://schemas.openxmlformats.org/drawingml/2006/main" xmlns:r="http://schemas.openxmlformats.org/officeDocument/2006/relationships" xmlns:p="http://schemas.openxmlformats.org/presentationml/2006/main" matchingName="Title and body" type="tx">
   <p:cSld name="TITLE_AND_BODY">
     <p:spTree>
       <p:nvGrpSpPr>
-        <p:cNvPr id="16" name="Shape 16"/>
+        <p:cNvPr id="1" name="Shape 16"/>
         <p:cNvGrpSpPr/>
         <p:nvPr/>
       </p:nvGrpSpPr>
@@ -4063,7 +4154,9 @@
       <p:sp>
         <p:nvSpPr>
           <p:cNvPr id="17" name="Google Shape;17;p4"/>
-          <p:cNvSpPr txBox="1"/>
+          <p:cNvSpPr txBox="1">
+            <a:spLocks noGrp="1"/>
+          </p:cNvSpPr>
           <p:nvPr>
             <p:ph type="title"/>
           </p:nvPr>
@@ -4078,7 +4171,7 @@
           </a:prstGeom>
         </p:spPr>
         <p:txBody>
-          <a:bodyPr anchorCtr="0" anchor="t" bIns="91425" lIns="91425" spcFirstLastPara="1" rIns="91425" wrap="square" tIns="91425">
+          <a:bodyPr spcFirstLastPara="1" wrap="square" lIns="91425" tIns="91425" rIns="91425" bIns="91425" anchor="t" anchorCtr="0">
             <a:normAutofit/>
           </a:bodyPr>
           <a:lstStyle>
@@ -4182,15 +4275,19 @@
               <a:defRPr/>
             </a:lvl9pPr>
           </a:lstStyle>
-          <a:p/>
+          <a:p>
+            <a:endParaRPr/>
+          </a:p>
         </p:txBody>
       </p:sp>
       <p:sp>
         <p:nvSpPr>
           <p:cNvPr id="18" name="Google Shape;18;p4"/>
-          <p:cNvSpPr txBox="1"/>
+          <p:cNvSpPr txBox="1">
+            <a:spLocks noGrp="1"/>
+          </p:cNvSpPr>
           <p:nvPr>
-            <p:ph idx="1" type="body"/>
+            <p:ph type="body" idx="1"/>
           </p:nvPr>
         </p:nvSpPr>
         <p:spPr>
@@ -4203,11 +4300,11 @@
           </a:prstGeom>
         </p:spPr>
         <p:txBody>
-          <a:bodyPr anchorCtr="0" anchor="t" bIns="91425" lIns="91425" spcFirstLastPara="1" rIns="91425" wrap="square" tIns="91425">
+          <a:bodyPr spcFirstLastPara="1" wrap="square" lIns="91425" tIns="91425" rIns="91425" bIns="91425" anchor="t" anchorCtr="0">
             <a:normAutofit/>
           </a:bodyPr>
           <a:lstStyle>
-            <a:lvl1pPr indent="-342900" lvl="0" marL="457200">
+            <a:lvl1pPr marL="457200" lvl="0" indent="-342900">
               <a:spcBef>
                 <a:spcPts val="0"/>
               </a:spcBef>
@@ -4218,7 +4315,7 @@
               <a:buChar char="●"/>
               <a:defRPr/>
             </a:lvl1pPr>
-            <a:lvl2pPr indent="-317500" lvl="1" marL="914400">
+            <a:lvl2pPr marL="914400" lvl="1" indent="-317500">
               <a:spcBef>
                 <a:spcPts val="0"/>
               </a:spcBef>
@@ -4229,7 +4326,7 @@
               <a:buChar char="○"/>
               <a:defRPr/>
             </a:lvl2pPr>
-            <a:lvl3pPr indent="-317500" lvl="2" marL="1371600">
+            <a:lvl3pPr marL="1371600" lvl="2" indent="-317500">
               <a:spcBef>
                 <a:spcPts val="0"/>
               </a:spcBef>
@@ -4240,7 +4337,7 @@
               <a:buChar char="■"/>
               <a:defRPr/>
             </a:lvl3pPr>
-            <a:lvl4pPr indent="-317500" lvl="3" marL="1828800">
+            <a:lvl4pPr marL="1828800" lvl="3" indent="-317500">
               <a:spcBef>
                 <a:spcPts val="0"/>
               </a:spcBef>
@@ -4251,7 +4348,7 @@
               <a:buChar char="●"/>
               <a:defRPr/>
             </a:lvl4pPr>
-            <a:lvl5pPr indent="-317500" lvl="4" marL="2286000">
+            <a:lvl5pPr marL="2286000" lvl="4" indent="-317500">
               <a:spcBef>
                 <a:spcPts val="0"/>
               </a:spcBef>
@@ -4262,7 +4359,7 @@
               <a:buChar char="○"/>
               <a:defRPr/>
             </a:lvl5pPr>
-            <a:lvl6pPr indent="-317500" lvl="5" marL="2743200">
+            <a:lvl6pPr marL="2743200" lvl="5" indent="-317500">
               <a:spcBef>
                 <a:spcPts val="0"/>
               </a:spcBef>
@@ -4273,7 +4370,7 @@
               <a:buChar char="■"/>
               <a:defRPr/>
             </a:lvl6pPr>
-            <a:lvl7pPr indent="-317500" lvl="6" marL="3200400">
+            <a:lvl7pPr marL="3200400" lvl="6" indent="-317500">
               <a:spcBef>
                 <a:spcPts val="0"/>
               </a:spcBef>
@@ -4284,7 +4381,7 @@
               <a:buChar char="●"/>
               <a:defRPr/>
             </a:lvl7pPr>
-            <a:lvl8pPr indent="-317500" lvl="7" marL="3657600">
+            <a:lvl8pPr marL="3657600" lvl="7" indent="-317500">
               <a:spcBef>
                 <a:spcPts val="0"/>
               </a:spcBef>
@@ -4295,7 +4392,7 @@
               <a:buChar char="○"/>
               <a:defRPr/>
             </a:lvl8pPr>
-            <a:lvl9pPr indent="-317500" lvl="8" marL="4114800">
+            <a:lvl9pPr marL="4114800" lvl="8" indent="-317500">
               <a:spcBef>
                 <a:spcPts val="0"/>
               </a:spcBef>
@@ -4307,15 +4404,19 @@
               <a:defRPr/>
             </a:lvl9pPr>
           </a:lstStyle>
-          <a:p/>
+          <a:p>
+            <a:endParaRPr/>
+          </a:p>
         </p:txBody>
       </p:sp>
       <p:sp>
         <p:nvSpPr>
           <p:cNvPr id="19" name="Google Shape;19;p4"/>
-          <p:cNvSpPr txBox="1"/>
+          <p:cNvSpPr txBox="1">
+            <a:spLocks noGrp="1"/>
+          </p:cNvSpPr>
           <p:nvPr>
-            <p:ph idx="12" type="sldNum"/>
+            <p:ph type="sldNum" idx="12"/>
           </p:nvPr>
         </p:nvSpPr>
         <p:spPr>
@@ -4328,7 +4429,7 @@
           </a:prstGeom>
         </p:spPr>
         <p:txBody>
-          <a:bodyPr anchorCtr="0" anchor="ctr" bIns="91425" lIns="91425" spcFirstLastPara="1" rIns="91425" wrap="square" tIns="91425">
+          <a:bodyPr spcFirstLastPara="1" wrap="square" lIns="91425" tIns="91425" rIns="91425" bIns="91425" anchor="ctr" anchorCtr="0">
             <a:normAutofit/>
           </a:bodyPr>
           <a:lstStyle>
@@ -4370,7 +4471,7 @@
             </a:lvl9pPr>
           </a:lstStyle>
           <a:p>
-            <a:pPr indent="0" lvl="0" marL="0" rtl="0" algn="r">
+            <a:pPr marL="0" lvl="0" indent="0" algn="r" rtl="0">
               <a:spcBef>
                 <a:spcPts val="0"/>
               </a:spcBef>
@@ -4396,11 +4497,11 @@
 </file>
 
 <file path=ppt/slideLayouts/slideLayout4.xml><?xml version="1.0" encoding="utf-8"?>
-<p:sldLayout xmlns:a="http://schemas.openxmlformats.org/drawingml/2006/main" xmlns:r="http://schemas.openxmlformats.org/officeDocument/2006/relationships" xmlns:mc="http://schemas.openxmlformats.org/markup-compatibility/2006" xmlns:mv="urn:schemas-microsoft-com:mac:vml" xmlns:p="http://schemas.openxmlformats.org/presentationml/2006/main" xmlns:c="http://schemas.openxmlformats.org/drawingml/2006/chart" xmlns:dgm="http://schemas.openxmlformats.org/drawingml/2006/diagram" xmlns:o="urn:schemas-microsoft-com:office:office" xmlns:v="urn:schemas-microsoft-com:vml" xmlns:pvml="urn:schemas-microsoft-com:office:powerpoint" xmlns:com="http://schemas.openxmlformats.org/drawingml/2006/compatibility" xmlns:p14="http://schemas.microsoft.com/office/powerpoint/2010/main" xmlns:p15="http://schemas.microsoft.com/office/powerpoint/2012/main" xmlns:ahyp="http://schemas.microsoft.com/office/drawing/2018/hyperlinkcolor" matchingName="Title and two columns" type="twoColTx">
+<p:sldLayout xmlns:a="http://schemas.openxmlformats.org/drawingml/2006/main" xmlns:r="http://schemas.openxmlformats.org/officeDocument/2006/relationships" xmlns:p="http://schemas.openxmlformats.org/presentationml/2006/main" matchingName="Title and two columns" type="twoColTx">
   <p:cSld name="TITLE_AND_TWO_COLUMNS">
     <p:spTree>
       <p:nvGrpSpPr>
-        <p:cNvPr id="20" name="Shape 20"/>
+        <p:cNvPr id="1" name="Shape 20"/>
         <p:cNvGrpSpPr/>
         <p:nvPr/>
       </p:nvGrpSpPr>
@@ -4415,7 +4516,9 @@
       <p:sp>
         <p:nvSpPr>
           <p:cNvPr id="21" name="Google Shape;21;p5"/>
-          <p:cNvSpPr txBox="1"/>
+          <p:cNvSpPr txBox="1">
+            <a:spLocks noGrp="1"/>
+          </p:cNvSpPr>
           <p:nvPr>
             <p:ph type="title"/>
           </p:nvPr>
@@ -4430,7 +4533,7 @@
           </a:prstGeom>
         </p:spPr>
         <p:txBody>
-          <a:bodyPr anchorCtr="0" anchor="t" bIns="91425" lIns="91425" spcFirstLastPara="1" rIns="91425" wrap="square" tIns="91425">
+          <a:bodyPr spcFirstLastPara="1" wrap="square" lIns="91425" tIns="91425" rIns="91425" bIns="91425" anchor="t" anchorCtr="0">
             <a:normAutofit/>
           </a:bodyPr>
           <a:lstStyle>
@@ -4534,15 +4637,19 @@
               <a:defRPr/>
             </a:lvl9pPr>
           </a:lstStyle>
-          <a:p/>
+          <a:p>
+            <a:endParaRPr/>
+          </a:p>
         </p:txBody>
       </p:sp>
       <p:sp>
         <p:nvSpPr>
           <p:cNvPr id="22" name="Google Shape;22;p5"/>
-          <p:cNvSpPr txBox="1"/>
+          <p:cNvSpPr txBox="1">
+            <a:spLocks noGrp="1"/>
+          </p:cNvSpPr>
           <p:nvPr>
-            <p:ph idx="1" type="body"/>
+            <p:ph type="body" idx="1"/>
           </p:nvPr>
         </p:nvSpPr>
         <p:spPr>
@@ -4555,11 +4662,11 @@
           </a:prstGeom>
         </p:spPr>
         <p:txBody>
-          <a:bodyPr anchorCtr="0" anchor="t" bIns="91425" lIns="91425" spcFirstLastPara="1" rIns="91425" wrap="square" tIns="91425">
+          <a:bodyPr spcFirstLastPara="1" wrap="square" lIns="91425" tIns="91425" rIns="91425" bIns="91425" anchor="t" anchorCtr="0">
             <a:normAutofit/>
           </a:bodyPr>
           <a:lstStyle>
-            <a:lvl1pPr indent="-317500" lvl="0" marL="457200">
+            <a:lvl1pPr marL="457200" lvl="0" indent="-317500">
               <a:spcBef>
                 <a:spcPts val="0"/>
               </a:spcBef>
@@ -4570,7 +4677,7 @@
               <a:buChar char="●"/>
               <a:defRPr sz="1400"/>
             </a:lvl1pPr>
-            <a:lvl2pPr indent="-304800" lvl="1" marL="914400">
+            <a:lvl2pPr marL="914400" lvl="1" indent="-304800">
               <a:spcBef>
                 <a:spcPts val="0"/>
               </a:spcBef>
@@ -4581,7 +4688,7 @@
               <a:buChar char="○"/>
               <a:defRPr sz="1200"/>
             </a:lvl2pPr>
-            <a:lvl3pPr indent="-304800" lvl="2" marL="1371600">
+            <a:lvl3pPr marL="1371600" lvl="2" indent="-304800">
               <a:spcBef>
                 <a:spcPts val="0"/>
               </a:spcBef>
@@ -4592,7 +4699,7 @@
               <a:buChar char="■"/>
               <a:defRPr sz="1200"/>
             </a:lvl3pPr>
-            <a:lvl4pPr indent="-304800" lvl="3" marL="1828800">
+            <a:lvl4pPr marL="1828800" lvl="3" indent="-304800">
               <a:spcBef>
                 <a:spcPts val="0"/>
               </a:spcBef>
@@ -4603,7 +4710,7 @@
               <a:buChar char="●"/>
               <a:defRPr sz="1200"/>
             </a:lvl4pPr>
-            <a:lvl5pPr indent="-304800" lvl="4" marL="2286000">
+            <a:lvl5pPr marL="2286000" lvl="4" indent="-304800">
               <a:spcBef>
                 <a:spcPts val="0"/>
               </a:spcBef>
@@ -4614,7 +4721,7 @@
               <a:buChar char="○"/>
               <a:defRPr sz="1200"/>
             </a:lvl5pPr>
-            <a:lvl6pPr indent="-304800" lvl="5" marL="2743200">
+            <a:lvl6pPr marL="2743200" lvl="5" indent="-304800">
               <a:spcBef>
                 <a:spcPts val="0"/>
               </a:spcBef>
@@ -4625,7 +4732,7 @@
               <a:buChar char="■"/>
               <a:defRPr sz="1200"/>
             </a:lvl6pPr>
-            <a:lvl7pPr indent="-304800" lvl="6" marL="3200400">
+            <a:lvl7pPr marL="3200400" lvl="6" indent="-304800">
               <a:spcBef>
                 <a:spcPts val="0"/>
               </a:spcBef>
@@ -4636,7 +4743,7 @@
               <a:buChar char="●"/>
               <a:defRPr sz="1200"/>
             </a:lvl7pPr>
-            <a:lvl8pPr indent="-304800" lvl="7" marL="3657600">
+            <a:lvl8pPr marL="3657600" lvl="7" indent="-304800">
               <a:spcBef>
                 <a:spcPts val="0"/>
               </a:spcBef>
@@ -4647,7 +4754,7 @@
               <a:buChar char="○"/>
               <a:defRPr sz="1200"/>
             </a:lvl8pPr>
-            <a:lvl9pPr indent="-304800" lvl="8" marL="4114800">
+            <a:lvl9pPr marL="4114800" lvl="8" indent="-304800">
               <a:spcBef>
                 <a:spcPts val="0"/>
               </a:spcBef>
@@ -4659,15 +4766,19 @@
               <a:defRPr sz="1200"/>
             </a:lvl9pPr>
           </a:lstStyle>
-          <a:p/>
+          <a:p>
+            <a:endParaRPr/>
+          </a:p>
         </p:txBody>
       </p:sp>
       <p:sp>
         <p:nvSpPr>
           <p:cNvPr id="23" name="Google Shape;23;p5"/>
-          <p:cNvSpPr txBox="1"/>
+          <p:cNvSpPr txBox="1">
+            <a:spLocks noGrp="1"/>
+          </p:cNvSpPr>
           <p:nvPr>
-            <p:ph idx="2" type="body"/>
+            <p:ph type="body" idx="2"/>
           </p:nvPr>
         </p:nvSpPr>
         <p:spPr>
@@ -4680,11 +4791,11 @@
           </a:prstGeom>
         </p:spPr>
         <p:txBody>
-          <a:bodyPr anchorCtr="0" anchor="t" bIns="91425" lIns="91425" spcFirstLastPara="1" rIns="91425" wrap="square" tIns="91425">
+          <a:bodyPr spcFirstLastPara="1" wrap="square" lIns="91425" tIns="91425" rIns="91425" bIns="91425" anchor="t" anchorCtr="0">
             <a:normAutofit/>
           </a:bodyPr>
           <a:lstStyle>
-            <a:lvl1pPr indent="-317500" lvl="0" marL="457200">
+            <a:lvl1pPr marL="457200" lvl="0" indent="-317500">
               <a:spcBef>
                 <a:spcPts val="0"/>
               </a:spcBef>
@@ -4695,7 +4806,7 @@
               <a:buChar char="●"/>
               <a:defRPr sz="1400"/>
             </a:lvl1pPr>
-            <a:lvl2pPr indent="-304800" lvl="1" marL="914400">
+            <a:lvl2pPr marL="914400" lvl="1" indent="-304800">
               <a:spcBef>
                 <a:spcPts val="0"/>
               </a:spcBef>
@@ -4706,7 +4817,7 @@
               <a:buChar char="○"/>
               <a:defRPr sz="1200"/>
             </a:lvl2pPr>
-            <a:lvl3pPr indent="-304800" lvl="2" marL="1371600">
+            <a:lvl3pPr marL="1371600" lvl="2" indent="-304800">
               <a:spcBef>
                 <a:spcPts val="0"/>
               </a:spcBef>
@@ -4717,7 +4828,7 @@
               <a:buChar char="■"/>
               <a:defRPr sz="1200"/>
             </a:lvl3pPr>
-            <a:lvl4pPr indent="-304800" lvl="3" marL="1828800">
+            <a:lvl4pPr marL="1828800" lvl="3" indent="-304800">
               <a:spcBef>
                 <a:spcPts val="0"/>
               </a:spcBef>
@@ -4728,7 +4839,7 @@
               <a:buChar char="●"/>
               <a:defRPr sz="1200"/>
             </a:lvl4pPr>
-            <a:lvl5pPr indent="-304800" lvl="4" marL="2286000">
+            <a:lvl5pPr marL="2286000" lvl="4" indent="-304800">
               <a:spcBef>
                 <a:spcPts val="0"/>
               </a:spcBef>
@@ -4739,7 +4850,7 @@
               <a:buChar char="○"/>
               <a:defRPr sz="1200"/>
             </a:lvl5pPr>
-            <a:lvl6pPr indent="-304800" lvl="5" marL="2743200">
+            <a:lvl6pPr marL="2743200" lvl="5" indent="-304800">
               <a:spcBef>
                 <a:spcPts val="0"/>
               </a:spcBef>
@@ -4750,7 +4861,7 @@
               <a:buChar char="■"/>
               <a:defRPr sz="1200"/>
             </a:lvl6pPr>
-            <a:lvl7pPr indent="-304800" lvl="6" marL="3200400">
+            <a:lvl7pPr marL="3200400" lvl="6" indent="-304800">
               <a:spcBef>
                 <a:spcPts val="0"/>
               </a:spcBef>
@@ -4761,7 +4872,7 @@
               <a:buChar char="●"/>
               <a:defRPr sz="1200"/>
             </a:lvl7pPr>
-            <a:lvl8pPr indent="-304800" lvl="7" marL="3657600">
+            <a:lvl8pPr marL="3657600" lvl="7" indent="-304800">
               <a:spcBef>
                 <a:spcPts val="0"/>
               </a:spcBef>
@@ -4772,7 +4883,7 @@
               <a:buChar char="○"/>
               <a:defRPr sz="1200"/>
             </a:lvl8pPr>
-            <a:lvl9pPr indent="-304800" lvl="8" marL="4114800">
+            <a:lvl9pPr marL="4114800" lvl="8" indent="-304800">
               <a:spcBef>
                 <a:spcPts val="0"/>
               </a:spcBef>
@@ -4784,15 +4895,19 @@
               <a:defRPr sz="1200"/>
             </a:lvl9pPr>
           </a:lstStyle>
-          <a:p/>
+          <a:p>
+            <a:endParaRPr/>
+          </a:p>
         </p:txBody>
       </p:sp>
       <p:sp>
         <p:nvSpPr>
           <p:cNvPr id="24" name="Google Shape;24;p5"/>
-          <p:cNvSpPr txBox="1"/>
+          <p:cNvSpPr txBox="1">
+            <a:spLocks noGrp="1"/>
+          </p:cNvSpPr>
           <p:nvPr>
-            <p:ph idx="12" type="sldNum"/>
+            <p:ph type="sldNum" idx="12"/>
           </p:nvPr>
         </p:nvSpPr>
         <p:spPr>
@@ -4805,7 +4920,7 @@
           </a:prstGeom>
         </p:spPr>
         <p:txBody>
-          <a:bodyPr anchorCtr="0" anchor="ctr" bIns="91425" lIns="91425" spcFirstLastPara="1" rIns="91425" wrap="square" tIns="91425">
+          <a:bodyPr spcFirstLastPara="1" wrap="square" lIns="91425" tIns="91425" rIns="91425" bIns="91425" anchor="ctr" anchorCtr="0">
             <a:normAutofit/>
           </a:bodyPr>
           <a:lstStyle>
@@ -4847,7 +4962,7 @@
             </a:lvl9pPr>
           </a:lstStyle>
           <a:p>
-            <a:pPr indent="0" lvl="0" marL="0" rtl="0" algn="r">
+            <a:pPr marL="0" lvl="0" indent="0" algn="r" rtl="0">
               <a:spcBef>
                 <a:spcPts val="0"/>
               </a:spcBef>
@@ -4873,11 +4988,11 @@
 </file>
 
 <file path=ppt/slideLayouts/slideLayout5.xml><?xml version="1.0" encoding="utf-8"?>
-<p:sldLayout xmlns:a="http://schemas.openxmlformats.org/drawingml/2006/main" xmlns:r="http://schemas.openxmlformats.org/officeDocument/2006/relationships" xmlns:mc="http://schemas.openxmlformats.org/markup-compatibility/2006" xmlns:mv="urn:schemas-microsoft-com:mac:vml" xmlns:p="http://schemas.openxmlformats.org/presentationml/2006/main" xmlns:c="http://schemas.openxmlformats.org/drawingml/2006/chart" xmlns:dgm="http://schemas.openxmlformats.org/drawingml/2006/diagram" xmlns:o="urn:schemas-microsoft-com:office:office" xmlns:v="urn:schemas-microsoft-com:vml" xmlns:pvml="urn:schemas-microsoft-com:office:powerpoint" xmlns:com="http://schemas.openxmlformats.org/drawingml/2006/compatibility" xmlns:p14="http://schemas.microsoft.com/office/powerpoint/2010/main" xmlns:p15="http://schemas.microsoft.com/office/powerpoint/2012/main" xmlns:ahyp="http://schemas.microsoft.com/office/drawing/2018/hyperlinkcolor" matchingName="Title only" type="titleOnly">
+<p:sldLayout xmlns:a="http://schemas.openxmlformats.org/drawingml/2006/main" xmlns:r="http://schemas.openxmlformats.org/officeDocument/2006/relationships" xmlns:p="http://schemas.openxmlformats.org/presentationml/2006/main" matchingName="Title only" type="titleOnly">
   <p:cSld name="TITLE_ONLY">
     <p:spTree>
       <p:nvGrpSpPr>
-        <p:cNvPr id="25" name="Shape 25"/>
+        <p:cNvPr id="1" name="Shape 25"/>
         <p:cNvGrpSpPr/>
         <p:nvPr/>
       </p:nvGrpSpPr>
@@ -4892,7 +5007,9 @@
       <p:sp>
         <p:nvSpPr>
           <p:cNvPr id="26" name="Google Shape;26;p6"/>
-          <p:cNvSpPr txBox="1"/>
+          <p:cNvSpPr txBox="1">
+            <a:spLocks noGrp="1"/>
+          </p:cNvSpPr>
           <p:nvPr>
             <p:ph type="title"/>
           </p:nvPr>
@@ -4907,7 +5024,7 @@
           </a:prstGeom>
         </p:spPr>
         <p:txBody>
-          <a:bodyPr anchorCtr="0" anchor="t" bIns="91425" lIns="91425" spcFirstLastPara="1" rIns="91425" wrap="square" tIns="91425">
+          <a:bodyPr spcFirstLastPara="1" wrap="square" lIns="91425" tIns="91425" rIns="91425" bIns="91425" anchor="t" anchorCtr="0">
             <a:normAutofit/>
           </a:bodyPr>
           <a:lstStyle>
@@ -5011,15 +5128,19 @@
               <a:defRPr/>
             </a:lvl9pPr>
           </a:lstStyle>
-          <a:p/>
+          <a:p>
+            <a:endParaRPr/>
+          </a:p>
         </p:txBody>
       </p:sp>
       <p:sp>
         <p:nvSpPr>
           <p:cNvPr id="27" name="Google Shape;27;p6"/>
-          <p:cNvSpPr txBox="1"/>
+          <p:cNvSpPr txBox="1">
+            <a:spLocks noGrp="1"/>
+          </p:cNvSpPr>
           <p:nvPr>
-            <p:ph idx="12" type="sldNum"/>
+            <p:ph type="sldNum" idx="12"/>
           </p:nvPr>
         </p:nvSpPr>
         <p:spPr>
@@ -5032,7 +5153,7 @@
           </a:prstGeom>
         </p:spPr>
         <p:txBody>
-          <a:bodyPr anchorCtr="0" anchor="ctr" bIns="91425" lIns="91425" spcFirstLastPara="1" rIns="91425" wrap="square" tIns="91425">
+          <a:bodyPr spcFirstLastPara="1" wrap="square" lIns="91425" tIns="91425" rIns="91425" bIns="91425" anchor="ctr" anchorCtr="0">
             <a:normAutofit/>
           </a:bodyPr>
           <a:lstStyle>
@@ -5074,7 +5195,7 @@
             </a:lvl9pPr>
           </a:lstStyle>
           <a:p>
-            <a:pPr indent="0" lvl="0" marL="0" rtl="0" algn="r">
+            <a:pPr marL="0" lvl="0" indent="0" algn="r" rtl="0">
               <a:spcBef>
                 <a:spcPts val="0"/>
               </a:spcBef>
@@ -5100,11 +5221,11 @@
 </file>
 
 <file path=ppt/slideLayouts/slideLayout6.xml><?xml version="1.0" encoding="utf-8"?>
-<p:sldLayout xmlns:a="http://schemas.openxmlformats.org/drawingml/2006/main" xmlns:r="http://schemas.openxmlformats.org/officeDocument/2006/relationships" xmlns:mc="http://schemas.openxmlformats.org/markup-compatibility/2006" xmlns:mv="urn:schemas-microsoft-com:mac:vml" xmlns:p="http://schemas.openxmlformats.org/presentationml/2006/main" xmlns:c="http://schemas.openxmlformats.org/drawingml/2006/chart" xmlns:dgm="http://schemas.openxmlformats.org/drawingml/2006/diagram" xmlns:o="urn:schemas-microsoft-com:office:office" xmlns:v="urn:schemas-microsoft-com:vml" xmlns:pvml="urn:schemas-microsoft-com:office:powerpoint" xmlns:com="http://schemas.openxmlformats.org/drawingml/2006/compatibility" xmlns:p14="http://schemas.microsoft.com/office/powerpoint/2010/main" xmlns:p15="http://schemas.microsoft.com/office/powerpoint/2012/main" xmlns:ahyp="http://schemas.microsoft.com/office/drawing/2018/hyperlinkcolor" matchingName="One column text">
+<p:sldLayout xmlns:a="http://schemas.openxmlformats.org/drawingml/2006/main" xmlns:r="http://schemas.openxmlformats.org/officeDocument/2006/relationships" xmlns:p="http://schemas.openxmlformats.org/presentationml/2006/main" matchingName="One column text">
   <p:cSld name="ONE_COLUMN_TEXT">
     <p:spTree>
       <p:nvGrpSpPr>
-        <p:cNvPr id="28" name="Shape 28"/>
+        <p:cNvPr id="1" name="Shape 28"/>
         <p:cNvGrpSpPr/>
         <p:nvPr/>
       </p:nvGrpSpPr>
@@ -5119,7 +5240,9 @@
       <p:sp>
         <p:nvSpPr>
           <p:cNvPr id="29" name="Google Shape;29;p7"/>
-          <p:cNvSpPr txBox="1"/>
+          <p:cNvSpPr txBox="1">
+            <a:spLocks noGrp="1"/>
+          </p:cNvSpPr>
           <p:nvPr>
             <p:ph type="title"/>
           </p:nvPr>
@@ -5134,7 +5257,7 @@
           </a:prstGeom>
         </p:spPr>
         <p:txBody>
-          <a:bodyPr anchorCtr="0" anchor="b" bIns="91425" lIns="91425" spcFirstLastPara="1" rIns="91425" wrap="square" tIns="91425">
+          <a:bodyPr spcFirstLastPara="1" wrap="square" lIns="91425" tIns="91425" rIns="91425" bIns="91425" anchor="b" anchorCtr="0">
             <a:normAutofit/>
           </a:bodyPr>
           <a:lstStyle>
@@ -5238,15 +5361,19 @@
               <a:defRPr sz="2400"/>
             </a:lvl9pPr>
           </a:lstStyle>
-          <a:p/>
+          <a:p>
+            <a:endParaRPr/>
+          </a:p>
         </p:txBody>
       </p:sp>
       <p:sp>
         <p:nvSpPr>
           <p:cNvPr id="30" name="Google Shape;30;p7"/>
-          <p:cNvSpPr txBox="1"/>
+          <p:cNvSpPr txBox="1">
+            <a:spLocks noGrp="1"/>
+          </p:cNvSpPr>
           <p:nvPr>
-            <p:ph idx="1" type="body"/>
+            <p:ph type="body" idx="1"/>
           </p:nvPr>
         </p:nvSpPr>
         <p:spPr>
@@ -5259,11 +5386,11 @@
           </a:prstGeom>
         </p:spPr>
         <p:txBody>
-          <a:bodyPr anchorCtr="0" anchor="t" bIns="91425" lIns="91425" spcFirstLastPara="1" rIns="91425" wrap="square" tIns="91425">
+          <a:bodyPr spcFirstLastPara="1" wrap="square" lIns="91425" tIns="91425" rIns="91425" bIns="91425" anchor="t" anchorCtr="0">
             <a:normAutofit/>
           </a:bodyPr>
           <a:lstStyle>
-            <a:lvl1pPr indent="-304800" lvl="0" marL="457200">
+            <a:lvl1pPr marL="457200" lvl="0" indent="-304800">
               <a:spcBef>
                 <a:spcPts val="0"/>
               </a:spcBef>
@@ -5274,7 +5401,7 @@
               <a:buChar char="●"/>
               <a:defRPr sz="1200"/>
             </a:lvl1pPr>
-            <a:lvl2pPr indent="-304800" lvl="1" marL="914400">
+            <a:lvl2pPr marL="914400" lvl="1" indent="-304800">
               <a:spcBef>
                 <a:spcPts val="0"/>
               </a:spcBef>
@@ -5285,7 +5412,7 @@
               <a:buChar char="○"/>
               <a:defRPr sz="1200"/>
             </a:lvl2pPr>
-            <a:lvl3pPr indent="-304800" lvl="2" marL="1371600">
+            <a:lvl3pPr marL="1371600" lvl="2" indent="-304800">
               <a:spcBef>
                 <a:spcPts val="0"/>
               </a:spcBef>
@@ -5296,7 +5423,7 @@
               <a:buChar char="■"/>
               <a:defRPr sz="1200"/>
             </a:lvl3pPr>
-            <a:lvl4pPr indent="-304800" lvl="3" marL="1828800">
+            <a:lvl4pPr marL="1828800" lvl="3" indent="-304800">
               <a:spcBef>
                 <a:spcPts val="0"/>
               </a:spcBef>
@@ -5307,7 +5434,7 @@
               <a:buChar char="●"/>
               <a:defRPr sz="1200"/>
             </a:lvl4pPr>
-            <a:lvl5pPr indent="-304800" lvl="4" marL="2286000">
+            <a:lvl5pPr marL="2286000" lvl="4" indent="-304800">
               <a:spcBef>
                 <a:spcPts val="0"/>
               </a:spcBef>
@@ -5318,7 +5445,7 @@
               <a:buChar char="○"/>
               <a:defRPr sz="1200"/>
             </a:lvl5pPr>
-            <a:lvl6pPr indent="-304800" lvl="5" marL="2743200">
+            <a:lvl6pPr marL="2743200" lvl="5" indent="-304800">
               <a:spcBef>
                 <a:spcPts val="0"/>
               </a:spcBef>
@@ -5329,7 +5456,7 @@
               <a:buChar char="■"/>
               <a:defRPr sz="1200"/>
             </a:lvl6pPr>
-            <a:lvl7pPr indent="-304800" lvl="6" marL="3200400">
+            <a:lvl7pPr marL="3200400" lvl="6" indent="-304800">
               <a:spcBef>
                 <a:spcPts val="0"/>
               </a:spcBef>
@@ -5340,7 +5467,7 @@
               <a:buChar char="●"/>
               <a:defRPr sz="1200"/>
             </a:lvl7pPr>
-            <a:lvl8pPr indent="-304800" lvl="7" marL="3657600">
+            <a:lvl8pPr marL="3657600" lvl="7" indent="-304800">
               <a:spcBef>
                 <a:spcPts val="0"/>
               </a:spcBef>
@@ -5351,7 +5478,7 @@
               <a:buChar char="○"/>
               <a:defRPr sz="1200"/>
             </a:lvl8pPr>
-            <a:lvl9pPr indent="-304800" lvl="8" marL="4114800">
+            <a:lvl9pPr marL="4114800" lvl="8" indent="-304800">
               <a:spcBef>
                 <a:spcPts val="0"/>
               </a:spcBef>
@@ -5363,15 +5490,19 @@
               <a:defRPr sz="1200"/>
             </a:lvl9pPr>
           </a:lstStyle>
-          <a:p/>
+          <a:p>
+            <a:endParaRPr/>
+          </a:p>
         </p:txBody>
       </p:sp>
       <p:sp>
         <p:nvSpPr>
           <p:cNvPr id="31" name="Google Shape;31;p7"/>
-          <p:cNvSpPr txBox="1"/>
+          <p:cNvSpPr txBox="1">
+            <a:spLocks noGrp="1"/>
+          </p:cNvSpPr>
           <p:nvPr>
-            <p:ph idx="12" type="sldNum"/>
+            <p:ph type="sldNum" idx="12"/>
           </p:nvPr>
         </p:nvSpPr>
         <p:spPr>
@@ -5384,7 +5515,7 @@
           </a:prstGeom>
         </p:spPr>
         <p:txBody>
-          <a:bodyPr anchorCtr="0" anchor="ctr" bIns="91425" lIns="91425" spcFirstLastPara="1" rIns="91425" wrap="square" tIns="91425">
+          <a:bodyPr spcFirstLastPara="1" wrap="square" lIns="91425" tIns="91425" rIns="91425" bIns="91425" anchor="ctr" anchorCtr="0">
             <a:normAutofit/>
           </a:bodyPr>
           <a:lstStyle>
@@ -5426,7 +5557,7 @@
             </a:lvl9pPr>
           </a:lstStyle>
           <a:p>
-            <a:pPr indent="0" lvl="0" marL="0" rtl="0" algn="r">
+            <a:pPr marL="0" lvl="0" indent="0" algn="r" rtl="0">
               <a:spcBef>
                 <a:spcPts val="0"/>
               </a:spcBef>
@@ -5452,11 +5583,11 @@
 </file>
 
 <file path=ppt/slideLayouts/slideLayout7.xml><?xml version="1.0" encoding="utf-8"?>
-<p:sldLayout xmlns:a="http://schemas.openxmlformats.org/drawingml/2006/main" xmlns:r="http://schemas.openxmlformats.org/officeDocument/2006/relationships" xmlns:mc="http://schemas.openxmlformats.org/markup-compatibility/2006" xmlns:mv="urn:schemas-microsoft-com:mac:vml" xmlns:p="http://schemas.openxmlformats.org/presentationml/2006/main" xmlns:c="http://schemas.openxmlformats.org/drawingml/2006/chart" xmlns:dgm="http://schemas.openxmlformats.org/drawingml/2006/diagram" xmlns:o="urn:schemas-microsoft-com:office:office" xmlns:v="urn:schemas-microsoft-com:vml" xmlns:pvml="urn:schemas-microsoft-com:office:powerpoint" xmlns:com="http://schemas.openxmlformats.org/drawingml/2006/compatibility" xmlns:p14="http://schemas.microsoft.com/office/powerpoint/2010/main" xmlns:p15="http://schemas.microsoft.com/office/powerpoint/2012/main" xmlns:ahyp="http://schemas.microsoft.com/office/drawing/2018/hyperlinkcolor" matchingName="Main point">
+<p:sldLayout xmlns:a="http://schemas.openxmlformats.org/drawingml/2006/main" xmlns:r="http://schemas.openxmlformats.org/officeDocument/2006/relationships" xmlns:p="http://schemas.openxmlformats.org/presentationml/2006/main" matchingName="Main point">
   <p:cSld name="MAIN_POINT">
     <p:spTree>
       <p:nvGrpSpPr>
-        <p:cNvPr id="32" name="Shape 32"/>
+        <p:cNvPr id="1" name="Shape 32"/>
         <p:cNvGrpSpPr/>
         <p:nvPr/>
       </p:nvGrpSpPr>
@@ -5471,7 +5602,9 @@
       <p:sp>
         <p:nvSpPr>
           <p:cNvPr id="33" name="Google Shape;33;p8"/>
-          <p:cNvSpPr txBox="1"/>
+          <p:cNvSpPr txBox="1">
+            <a:spLocks noGrp="1"/>
+          </p:cNvSpPr>
           <p:nvPr>
             <p:ph type="title"/>
           </p:nvPr>
@@ -5486,7 +5619,7 @@
           </a:prstGeom>
         </p:spPr>
         <p:txBody>
-          <a:bodyPr anchorCtr="0" anchor="ctr" bIns="91425" lIns="91425" spcFirstLastPara="1" rIns="91425" wrap="square" tIns="91425">
+          <a:bodyPr spcFirstLastPara="1" wrap="square" lIns="91425" tIns="91425" rIns="91425" bIns="91425" anchor="ctr" anchorCtr="0">
             <a:normAutofit/>
           </a:bodyPr>
           <a:lstStyle>
@@ -5590,15 +5723,19 @@
               <a:defRPr sz="4800"/>
             </a:lvl9pPr>
           </a:lstStyle>
-          <a:p/>
+          <a:p>
+            <a:endParaRPr/>
+          </a:p>
         </p:txBody>
       </p:sp>
       <p:sp>
         <p:nvSpPr>
           <p:cNvPr id="34" name="Google Shape;34;p8"/>
-          <p:cNvSpPr txBox="1"/>
+          <p:cNvSpPr txBox="1">
+            <a:spLocks noGrp="1"/>
+          </p:cNvSpPr>
           <p:nvPr>
-            <p:ph idx="12" type="sldNum"/>
+            <p:ph type="sldNum" idx="12"/>
           </p:nvPr>
         </p:nvSpPr>
         <p:spPr>
@@ -5611,7 +5748,7 @@
           </a:prstGeom>
         </p:spPr>
         <p:txBody>
-          <a:bodyPr anchorCtr="0" anchor="ctr" bIns="91425" lIns="91425" spcFirstLastPara="1" rIns="91425" wrap="square" tIns="91425">
+          <a:bodyPr spcFirstLastPara="1" wrap="square" lIns="91425" tIns="91425" rIns="91425" bIns="91425" anchor="ctr" anchorCtr="0">
             <a:normAutofit/>
           </a:bodyPr>
           <a:lstStyle>
@@ -5653,7 +5790,7 @@
             </a:lvl9pPr>
           </a:lstStyle>
           <a:p>
-            <a:pPr indent="0" lvl="0" marL="0" rtl="0" algn="r">
+            <a:pPr marL="0" lvl="0" indent="0" algn="r" rtl="0">
               <a:spcBef>
                 <a:spcPts val="0"/>
               </a:spcBef>
@@ -5679,11 +5816,11 @@
 </file>
 
 <file path=ppt/slideLayouts/slideLayout8.xml><?xml version="1.0" encoding="utf-8"?>
-<p:sldLayout xmlns:a="http://schemas.openxmlformats.org/drawingml/2006/main" xmlns:r="http://schemas.openxmlformats.org/officeDocument/2006/relationships" xmlns:mc="http://schemas.openxmlformats.org/markup-compatibility/2006" xmlns:mv="urn:schemas-microsoft-com:mac:vml" xmlns:p="http://schemas.openxmlformats.org/presentationml/2006/main" xmlns:c="http://schemas.openxmlformats.org/drawingml/2006/chart" xmlns:dgm="http://schemas.openxmlformats.org/drawingml/2006/diagram" xmlns:o="urn:schemas-microsoft-com:office:office" xmlns:v="urn:schemas-microsoft-com:vml" xmlns:pvml="urn:schemas-microsoft-com:office:powerpoint" xmlns:com="http://schemas.openxmlformats.org/drawingml/2006/compatibility" xmlns:p14="http://schemas.microsoft.com/office/powerpoint/2010/main" xmlns:p15="http://schemas.microsoft.com/office/powerpoint/2012/main" xmlns:ahyp="http://schemas.microsoft.com/office/drawing/2018/hyperlinkcolor" matchingName="Section title and description">
+<p:sldLayout xmlns:a="http://schemas.openxmlformats.org/drawingml/2006/main" xmlns:r="http://schemas.openxmlformats.org/officeDocument/2006/relationships" xmlns:p="http://schemas.openxmlformats.org/presentationml/2006/main" matchingName="Section title and description">
   <p:cSld name="SECTION_TITLE_AND_DESCRIPTION">
     <p:spTree>
       <p:nvGrpSpPr>
-        <p:cNvPr id="35" name="Shape 35"/>
+        <p:cNvPr id="1" name="Shape 35"/>
         <p:cNvGrpSpPr/>
         <p:nvPr/>
       </p:nvGrpSpPr>
@@ -5717,12 +5854,12 @@
           </a:ln>
         </p:spPr>
         <p:txBody>
-          <a:bodyPr anchorCtr="0" anchor="ctr" bIns="91425" lIns="91425" spcFirstLastPara="1" rIns="91425" wrap="square" tIns="91425">
+          <a:bodyPr spcFirstLastPara="1" wrap="square" lIns="91425" tIns="91425" rIns="91425" bIns="91425" anchor="ctr" anchorCtr="0">
             <a:noAutofit/>
           </a:bodyPr>
           <a:lstStyle/>
           <a:p>
-            <a:pPr indent="0" lvl="0" marL="0" rtl="0" algn="l">
+            <a:pPr marL="0" lvl="0" indent="0" algn="l" rtl="0">
               <a:spcBef>
                 <a:spcPts val="0"/>
               </a:spcBef>
@@ -5731,9 +5868,6 @@
               </a:spcAft>
               <a:buNone/>
             </a:pPr>
-            <a:r>
-              <a:t/>
-            </a:r>
             <a:endParaRPr/>
           </a:p>
         </p:txBody>
@@ -5741,7 +5875,9 @@
       <p:sp>
         <p:nvSpPr>
           <p:cNvPr id="37" name="Google Shape;37;p9"/>
-          <p:cNvSpPr txBox="1"/>
+          <p:cNvSpPr txBox="1">
+            <a:spLocks noGrp="1"/>
+          </p:cNvSpPr>
           <p:nvPr>
             <p:ph type="title"/>
           </p:nvPr>
@@ -5756,7 +5892,7 @@
           </a:prstGeom>
         </p:spPr>
         <p:txBody>
-          <a:bodyPr anchorCtr="0" anchor="b" bIns="91425" lIns="91425" spcFirstLastPara="1" rIns="91425" wrap="square" tIns="91425">
+          <a:bodyPr spcFirstLastPara="1" wrap="square" lIns="91425" tIns="91425" rIns="91425" bIns="91425" anchor="b" anchorCtr="0">
             <a:normAutofit/>
           </a:bodyPr>
           <a:lstStyle>
@@ -5860,15 +5996,19 @@
               <a:defRPr sz="4200"/>
             </a:lvl9pPr>
           </a:lstStyle>
-          <a:p/>
+          <a:p>
+            <a:endParaRPr/>
+          </a:p>
         </p:txBody>
       </p:sp>
       <p:sp>
         <p:nvSpPr>
           <p:cNvPr id="38" name="Google Shape;38;p9"/>
-          <p:cNvSpPr txBox="1"/>
+          <p:cNvSpPr txBox="1">
+            <a:spLocks noGrp="1"/>
+          </p:cNvSpPr>
           <p:nvPr>
-            <p:ph idx="1" type="subTitle"/>
+            <p:ph type="subTitle" idx="1"/>
           </p:nvPr>
         </p:nvSpPr>
         <p:spPr>
@@ -5881,7 +6021,7 @@
           </a:prstGeom>
         </p:spPr>
         <p:txBody>
-          <a:bodyPr anchorCtr="0" anchor="t" bIns="91425" lIns="91425" spcFirstLastPara="1" rIns="91425" wrap="square" tIns="91425">
+          <a:bodyPr spcFirstLastPara="1" wrap="square" lIns="91425" tIns="91425" rIns="91425" bIns="91425" anchor="t" anchorCtr="0">
             <a:normAutofit/>
           </a:bodyPr>
           <a:lstStyle>
@@ -6012,15 +6152,19 @@
               <a:defRPr sz="2100"/>
             </a:lvl9pPr>
           </a:lstStyle>
-          <a:p/>
+          <a:p>
+            <a:endParaRPr/>
+          </a:p>
         </p:txBody>
       </p:sp>
       <p:sp>
         <p:nvSpPr>
           <p:cNvPr id="39" name="Google Shape;39;p9"/>
-          <p:cNvSpPr txBox="1"/>
+          <p:cNvSpPr txBox="1">
+            <a:spLocks noGrp="1"/>
+          </p:cNvSpPr>
           <p:nvPr>
-            <p:ph idx="2" type="body"/>
+            <p:ph type="body" idx="2"/>
           </p:nvPr>
         </p:nvSpPr>
         <p:spPr>
@@ -6033,11 +6177,11 @@
           </a:prstGeom>
         </p:spPr>
         <p:txBody>
-          <a:bodyPr anchorCtr="0" anchor="ctr" bIns="91425" lIns="91425" spcFirstLastPara="1" rIns="91425" wrap="square" tIns="91425">
+          <a:bodyPr spcFirstLastPara="1" wrap="square" lIns="91425" tIns="91425" rIns="91425" bIns="91425" anchor="ctr" anchorCtr="0">
             <a:normAutofit/>
           </a:bodyPr>
           <a:lstStyle>
-            <a:lvl1pPr indent="-342900" lvl="0" marL="457200">
+            <a:lvl1pPr marL="457200" lvl="0" indent="-342900">
               <a:spcBef>
                 <a:spcPts val="0"/>
               </a:spcBef>
@@ -6048,7 +6192,7 @@
               <a:buChar char="●"/>
               <a:defRPr/>
             </a:lvl1pPr>
-            <a:lvl2pPr indent="-317500" lvl="1" marL="914400">
+            <a:lvl2pPr marL="914400" lvl="1" indent="-317500">
               <a:spcBef>
                 <a:spcPts val="0"/>
               </a:spcBef>
@@ -6059,7 +6203,7 @@
               <a:buChar char="○"/>
               <a:defRPr/>
             </a:lvl2pPr>
-            <a:lvl3pPr indent="-317500" lvl="2" marL="1371600">
+            <a:lvl3pPr marL="1371600" lvl="2" indent="-317500">
               <a:spcBef>
                 <a:spcPts val="0"/>
               </a:spcBef>
@@ -6070,7 +6214,7 @@
               <a:buChar char="■"/>
               <a:defRPr/>
             </a:lvl3pPr>
-            <a:lvl4pPr indent="-317500" lvl="3" marL="1828800">
+            <a:lvl4pPr marL="1828800" lvl="3" indent="-317500">
               <a:spcBef>
                 <a:spcPts val="0"/>
               </a:spcBef>
@@ -6081,7 +6225,7 @@
               <a:buChar char="●"/>
               <a:defRPr/>
             </a:lvl4pPr>
-            <a:lvl5pPr indent="-317500" lvl="4" marL="2286000">
+            <a:lvl5pPr marL="2286000" lvl="4" indent="-317500">
               <a:spcBef>
                 <a:spcPts val="0"/>
               </a:spcBef>
@@ -6092,7 +6236,7 @@
               <a:buChar char="○"/>
               <a:defRPr/>
             </a:lvl5pPr>
-            <a:lvl6pPr indent="-317500" lvl="5" marL="2743200">
+            <a:lvl6pPr marL="2743200" lvl="5" indent="-317500">
               <a:spcBef>
                 <a:spcPts val="0"/>
               </a:spcBef>
@@ -6103,7 +6247,7 @@
               <a:buChar char="■"/>
               <a:defRPr/>
             </a:lvl6pPr>
-            <a:lvl7pPr indent="-317500" lvl="6" marL="3200400">
+            <a:lvl7pPr marL="3200400" lvl="6" indent="-317500">
               <a:spcBef>
                 <a:spcPts val="0"/>
               </a:spcBef>
@@ -6114,7 +6258,7 @@
               <a:buChar char="●"/>
               <a:defRPr/>
             </a:lvl7pPr>
-            <a:lvl8pPr indent="-317500" lvl="7" marL="3657600">
+            <a:lvl8pPr marL="3657600" lvl="7" indent="-317500">
               <a:spcBef>
                 <a:spcPts val="0"/>
               </a:spcBef>
@@ -6125,7 +6269,7 @@
               <a:buChar char="○"/>
               <a:defRPr/>
             </a:lvl8pPr>
-            <a:lvl9pPr indent="-317500" lvl="8" marL="4114800">
+            <a:lvl9pPr marL="4114800" lvl="8" indent="-317500">
               <a:spcBef>
                 <a:spcPts val="0"/>
               </a:spcBef>
@@ -6137,15 +6281,19 @@
               <a:defRPr/>
             </a:lvl9pPr>
           </a:lstStyle>
-          <a:p/>
+          <a:p>
+            <a:endParaRPr/>
+          </a:p>
         </p:txBody>
       </p:sp>
       <p:sp>
         <p:nvSpPr>
           <p:cNvPr id="40" name="Google Shape;40;p9"/>
-          <p:cNvSpPr txBox="1"/>
+          <p:cNvSpPr txBox="1">
+            <a:spLocks noGrp="1"/>
+          </p:cNvSpPr>
           <p:nvPr>
-            <p:ph idx="12" type="sldNum"/>
+            <p:ph type="sldNum" idx="12"/>
           </p:nvPr>
         </p:nvSpPr>
         <p:spPr>
@@ -6158,7 +6306,7 @@
           </a:prstGeom>
         </p:spPr>
         <p:txBody>
-          <a:bodyPr anchorCtr="0" anchor="ctr" bIns="91425" lIns="91425" spcFirstLastPara="1" rIns="91425" wrap="square" tIns="91425">
+          <a:bodyPr spcFirstLastPara="1" wrap="square" lIns="91425" tIns="91425" rIns="91425" bIns="91425" anchor="ctr" anchorCtr="0">
             <a:normAutofit/>
           </a:bodyPr>
           <a:lstStyle>
@@ -6200,7 +6348,7 @@
             </a:lvl9pPr>
           </a:lstStyle>
           <a:p>
-            <a:pPr indent="0" lvl="0" marL="0" rtl="0" algn="r">
+            <a:pPr marL="0" lvl="0" indent="0" algn="r" rtl="0">
               <a:spcBef>
                 <a:spcPts val="0"/>
               </a:spcBef>
@@ -6226,11 +6374,11 @@
 </file>
 
 <file path=ppt/slideLayouts/slideLayout9.xml><?xml version="1.0" encoding="utf-8"?>
-<p:sldLayout xmlns:a="http://schemas.openxmlformats.org/drawingml/2006/main" xmlns:r="http://schemas.openxmlformats.org/officeDocument/2006/relationships" xmlns:mc="http://schemas.openxmlformats.org/markup-compatibility/2006" xmlns:mv="urn:schemas-microsoft-com:mac:vml" xmlns:p="http://schemas.openxmlformats.org/presentationml/2006/main" xmlns:c="http://schemas.openxmlformats.org/drawingml/2006/chart" xmlns:dgm="http://schemas.openxmlformats.org/drawingml/2006/diagram" xmlns:o="urn:schemas-microsoft-com:office:office" xmlns:v="urn:schemas-microsoft-com:vml" xmlns:pvml="urn:schemas-microsoft-com:office:powerpoint" xmlns:com="http://schemas.openxmlformats.org/drawingml/2006/compatibility" xmlns:p14="http://schemas.microsoft.com/office/powerpoint/2010/main" xmlns:p15="http://schemas.microsoft.com/office/powerpoint/2012/main" xmlns:ahyp="http://schemas.microsoft.com/office/drawing/2018/hyperlinkcolor" matchingName="Caption">
+<p:sldLayout xmlns:a="http://schemas.openxmlformats.org/drawingml/2006/main" xmlns:r="http://schemas.openxmlformats.org/officeDocument/2006/relationships" xmlns:p="http://schemas.openxmlformats.org/presentationml/2006/main" matchingName="Caption">
   <p:cSld name="CAPTION_ONLY">
     <p:spTree>
       <p:nvGrpSpPr>
-        <p:cNvPr id="41" name="Shape 41"/>
+        <p:cNvPr id="1" name="Shape 41"/>
         <p:cNvGrpSpPr/>
         <p:nvPr/>
       </p:nvGrpSpPr>
@@ -6245,9 +6393,11 @@
       <p:sp>
         <p:nvSpPr>
           <p:cNvPr id="42" name="Google Shape;42;p10"/>
-          <p:cNvSpPr txBox="1"/>
+          <p:cNvSpPr txBox="1">
+            <a:spLocks noGrp="1"/>
+          </p:cNvSpPr>
           <p:nvPr>
-            <p:ph idx="1" type="body"/>
+            <p:ph type="body" idx="1"/>
           </p:nvPr>
         </p:nvSpPr>
         <p:spPr>
@@ -6260,11 +6410,11 @@
           </a:prstGeom>
         </p:spPr>
         <p:txBody>
-          <a:bodyPr anchorCtr="0" anchor="ctr" bIns="91425" lIns="91425" spcFirstLastPara="1" rIns="91425" wrap="square" tIns="91425">
+          <a:bodyPr spcFirstLastPara="1" wrap="square" lIns="91425" tIns="91425" rIns="91425" bIns="91425" anchor="ctr" anchorCtr="0">
             <a:normAutofit/>
           </a:bodyPr>
           <a:lstStyle>
-            <a:lvl1pPr indent="-228600" lvl="0" marL="457200">
+            <a:lvl1pPr marL="457200" lvl="0" indent="-228600">
               <a:lnSpc>
                 <a:spcPct val="100000"/>
               </a:lnSpc>
@@ -6279,15 +6429,19 @@
               <a:defRPr/>
             </a:lvl1pPr>
           </a:lstStyle>
-          <a:p/>
+          <a:p>
+            <a:endParaRPr/>
+          </a:p>
         </p:txBody>
       </p:sp>
       <p:sp>
         <p:nvSpPr>
           <p:cNvPr id="43" name="Google Shape;43;p10"/>
-          <p:cNvSpPr txBox="1"/>
+          <p:cNvSpPr txBox="1">
+            <a:spLocks noGrp="1"/>
+          </p:cNvSpPr>
           <p:nvPr>
-            <p:ph idx="12" type="sldNum"/>
+            <p:ph type="sldNum" idx="12"/>
           </p:nvPr>
         </p:nvSpPr>
         <p:spPr>
@@ -6300,7 +6454,7 @@
           </a:prstGeom>
         </p:spPr>
         <p:txBody>
-          <a:bodyPr anchorCtr="0" anchor="ctr" bIns="91425" lIns="91425" spcFirstLastPara="1" rIns="91425" wrap="square" tIns="91425">
+          <a:bodyPr spcFirstLastPara="1" wrap="square" lIns="91425" tIns="91425" rIns="91425" bIns="91425" anchor="ctr" anchorCtr="0">
             <a:normAutofit/>
           </a:bodyPr>
           <a:lstStyle>
@@ -6342,7 +6496,7 @@
             </a:lvl9pPr>
           </a:lstStyle>
           <a:p>
-            <a:pPr indent="0" lvl="0" marL="0" rtl="0" algn="r">
+            <a:pPr marL="0" lvl="0" indent="0" algn="r" rtl="0">
               <a:spcBef>
                 <a:spcPts val="0"/>
               </a:spcBef>
@@ -6368,18 +6522,19 @@
 </file>
 
 <file path=ppt/slideMasters/slideMaster1.xml><?xml version="1.0" encoding="utf-8"?>
-<p:sldMaster xmlns:a="http://schemas.openxmlformats.org/drawingml/2006/main" xmlns:r="http://schemas.openxmlformats.org/officeDocument/2006/relationships" xmlns:mc="http://schemas.openxmlformats.org/markup-compatibility/2006" xmlns:mv="urn:schemas-microsoft-com:mac:vml" xmlns:p="http://schemas.openxmlformats.org/presentationml/2006/main" xmlns:c="http://schemas.openxmlformats.org/drawingml/2006/chart" xmlns:dgm="http://schemas.openxmlformats.org/drawingml/2006/diagram" xmlns:o="urn:schemas-microsoft-com:office:office" xmlns:v="urn:schemas-microsoft-com:vml" xmlns:pvml="urn:schemas-microsoft-com:office:powerpoint" xmlns:com="http://schemas.openxmlformats.org/drawingml/2006/compatibility" xmlns:p14="http://schemas.microsoft.com/office/powerpoint/2010/main" xmlns:p15="http://schemas.microsoft.com/office/powerpoint/2012/main" xmlns:ahyp="http://schemas.microsoft.com/office/drawing/2018/hyperlinkcolor">
+<p:sldMaster xmlns:a="http://schemas.openxmlformats.org/drawingml/2006/main" xmlns:r="http://schemas.openxmlformats.org/officeDocument/2006/relationships" xmlns:p="http://schemas.openxmlformats.org/presentationml/2006/main">
   <p:cSld name="simple-light-2">
     <p:bg>
       <p:bgPr>
         <a:solidFill>
           <a:schemeClr val="lt1"/>
         </a:solidFill>
+        <a:effectLst/>
       </p:bgPr>
     </p:bg>
     <p:spTree>
       <p:nvGrpSpPr>
-        <p:cNvPr id="5" name="Shape 5"/>
+        <p:cNvPr id="1" name="Shape 5"/>
         <p:cNvGrpSpPr/>
         <p:nvPr/>
       </p:nvGrpSpPr>
@@ -6394,7 +6549,9 @@
       <p:sp>
         <p:nvSpPr>
           <p:cNvPr id="6" name="Google Shape;6;p1"/>
-          <p:cNvSpPr txBox="1"/>
+          <p:cNvSpPr txBox="1">
+            <a:spLocks noGrp="1"/>
+          </p:cNvSpPr>
           <p:nvPr>
             <p:ph type="title"/>
           </p:nvPr>
@@ -6413,7 +6570,7 @@
           </a:ln>
         </p:spPr>
         <p:txBody>
-          <a:bodyPr anchorCtr="0" anchor="t" bIns="91425" lIns="91425" spcFirstLastPara="1" rIns="91425" wrap="square" tIns="91425">
+          <a:bodyPr spcFirstLastPara="1" wrap="square" lIns="91425" tIns="91425" rIns="91425" bIns="91425" anchor="t" anchorCtr="0">
             <a:normAutofit/>
           </a:bodyPr>
           <a:lstStyle>
@@ -6580,15 +6737,19 @@
               </a:defRPr>
             </a:lvl9pPr>
           </a:lstStyle>
-          <a:p/>
+          <a:p>
+            <a:endParaRPr/>
+          </a:p>
         </p:txBody>
       </p:sp>
       <p:sp>
         <p:nvSpPr>
           <p:cNvPr id="7" name="Google Shape;7;p1"/>
-          <p:cNvSpPr txBox="1"/>
+          <p:cNvSpPr txBox="1">
+            <a:spLocks noGrp="1"/>
+          </p:cNvSpPr>
           <p:nvPr>
-            <p:ph idx="1" type="body"/>
+            <p:ph type="body" idx="1"/>
           </p:nvPr>
         </p:nvSpPr>
         <p:spPr>
@@ -6605,11 +6766,11 @@
           </a:ln>
         </p:spPr>
         <p:txBody>
-          <a:bodyPr anchorCtr="0" anchor="t" bIns="91425" lIns="91425" spcFirstLastPara="1" rIns="91425" wrap="square" tIns="91425">
+          <a:bodyPr spcFirstLastPara="1" wrap="square" lIns="91425" tIns="91425" rIns="91425" bIns="91425" anchor="t" anchorCtr="0">
             <a:normAutofit/>
           </a:bodyPr>
           <a:lstStyle>
-            <a:lvl1pPr indent="-342900" lvl="0" marL="457200">
+            <a:lvl1pPr marL="457200" lvl="0" indent="-342900">
               <a:lnSpc>
                 <a:spcPct val="115000"/>
               </a:lnSpc>
@@ -6630,7 +6791,7 @@
                 </a:solidFill>
               </a:defRPr>
             </a:lvl1pPr>
-            <a:lvl2pPr indent="-317500" lvl="1" marL="914400">
+            <a:lvl2pPr marL="914400" lvl="1" indent="-317500">
               <a:lnSpc>
                 <a:spcPct val="115000"/>
               </a:lnSpc>
@@ -6651,7 +6812,7 @@
                 </a:solidFill>
               </a:defRPr>
             </a:lvl2pPr>
-            <a:lvl3pPr indent="-317500" lvl="2" marL="1371600">
+            <a:lvl3pPr marL="1371600" lvl="2" indent="-317500">
               <a:lnSpc>
                 <a:spcPct val="115000"/>
               </a:lnSpc>
@@ -6672,7 +6833,7 @@
                 </a:solidFill>
               </a:defRPr>
             </a:lvl3pPr>
-            <a:lvl4pPr indent="-317500" lvl="3" marL="1828800">
+            <a:lvl4pPr marL="1828800" lvl="3" indent="-317500">
               <a:lnSpc>
                 <a:spcPct val="115000"/>
               </a:lnSpc>
@@ -6693,7 +6854,7 @@
                 </a:solidFill>
               </a:defRPr>
             </a:lvl4pPr>
-            <a:lvl5pPr indent="-317500" lvl="4" marL="2286000">
+            <a:lvl5pPr marL="2286000" lvl="4" indent="-317500">
               <a:lnSpc>
                 <a:spcPct val="115000"/>
               </a:lnSpc>
@@ -6714,7 +6875,7 @@
                 </a:solidFill>
               </a:defRPr>
             </a:lvl5pPr>
-            <a:lvl6pPr indent="-317500" lvl="5" marL="2743200">
+            <a:lvl6pPr marL="2743200" lvl="5" indent="-317500">
               <a:lnSpc>
                 <a:spcPct val="115000"/>
               </a:lnSpc>
@@ -6735,7 +6896,7 @@
                 </a:solidFill>
               </a:defRPr>
             </a:lvl6pPr>
-            <a:lvl7pPr indent="-317500" lvl="6" marL="3200400">
+            <a:lvl7pPr marL="3200400" lvl="6" indent="-317500">
               <a:lnSpc>
                 <a:spcPct val="115000"/>
               </a:lnSpc>
@@ -6756,7 +6917,7 @@
                 </a:solidFill>
               </a:defRPr>
             </a:lvl7pPr>
-            <a:lvl8pPr indent="-317500" lvl="7" marL="3657600">
+            <a:lvl8pPr marL="3657600" lvl="7" indent="-317500">
               <a:lnSpc>
                 <a:spcPct val="115000"/>
               </a:lnSpc>
@@ -6777,7 +6938,7 @@
                 </a:solidFill>
               </a:defRPr>
             </a:lvl8pPr>
-            <a:lvl9pPr indent="-317500" lvl="8" marL="4114800">
+            <a:lvl9pPr marL="4114800" lvl="8" indent="-317500">
               <a:lnSpc>
                 <a:spcPct val="115000"/>
               </a:lnSpc>
@@ -6799,15 +6960,19 @@
               </a:defRPr>
             </a:lvl9pPr>
           </a:lstStyle>
-          <a:p/>
+          <a:p>
+            <a:endParaRPr/>
+          </a:p>
         </p:txBody>
       </p:sp>
       <p:sp>
         <p:nvSpPr>
           <p:cNvPr id="8" name="Google Shape;8;p1"/>
-          <p:cNvSpPr txBox="1"/>
+          <p:cNvSpPr txBox="1">
+            <a:spLocks noGrp="1"/>
+          </p:cNvSpPr>
           <p:nvPr>
-            <p:ph idx="12" type="sldNum"/>
+            <p:ph type="sldNum" idx="12"/>
           </p:nvPr>
         </p:nvSpPr>
         <p:spPr>
@@ -6824,7 +6989,7 @@
           </a:ln>
         </p:spPr>
         <p:txBody>
-          <a:bodyPr anchorCtr="0" anchor="ctr" bIns="91425" lIns="91425" spcFirstLastPara="1" rIns="91425" wrap="square" tIns="91425">
+          <a:bodyPr spcFirstLastPara="1" wrap="square" lIns="91425" tIns="91425" rIns="91425" bIns="91425" anchor="ctr" anchorCtr="0">
             <a:normAutofit/>
           </a:bodyPr>
           <a:lstStyle>
@@ -6902,7 +7067,7 @@
             </a:lvl9pPr>
           </a:lstStyle>
           <a:p>
-            <a:pPr indent="0" lvl="0" marL="0" rtl="0" algn="r">
+            <a:pPr marL="0" lvl="0" indent="0" algn="r" rtl="0">
               <a:spcBef>
                 <a:spcPts val="0"/>
               </a:spcBef>
@@ -6921,7 +7086,7 @@
       </p:sp>
     </p:spTree>
   </p:cSld>
-  <p:clrMap accent1="accent1" accent2="accent2" accent3="accent3" accent4="accent4" accent5="accent5" accent6="accent6" bg1="lt1" bg2="dk2" tx1="dk1" tx2="lt2" folHlink="folHlink" hlink="hlink"/>
+  <p:clrMap bg1="lt1" tx1="dk1" bg2="dk2" tx2="lt2" accent1="accent1" accent2="accent2" accent3="accent3" accent4="accent4" accent5="accent5" accent6="accent6" hlink="hlink" folHlink="folHlink"/>
   <p:sldLayoutIdLst>
     <p:sldLayoutId id="2147483648" r:id="rId1"/>
     <p:sldLayoutId id="2147483649" r:id="rId2"/>
@@ -6936,10 +7101,10 @@
     <p:sldLayoutId id="2147483658" r:id="rId11"/>
     <p:sldLayoutId id="2147483659" r:id="rId12"/>
   </p:sldLayoutIdLst>
-  <p:hf dt="0" ftr="0" hdr="0" sldNum="0"/>
+  <p:hf sldNum="0" hdr="0" ftr="0" dt="0"/>
   <p:txStyles>
     <p:titleStyle>
-      <a:defPPr lvl="0" marR="0" rtl="0" algn="l">
+      <a:defPPr marR="0" lvl="0" algn="l" rtl="0">
         <a:lnSpc>
           <a:spcPct val="100000"/>
         </a:lnSpc>
@@ -6950,7 +7115,7 @@
           <a:spcPts val="0"/>
         </a:spcAft>
       </a:defPPr>
-      <a:lvl1pPr lvl="0" marR="0" rtl="0" algn="l">
+      <a:lvl1pPr marR="0" lvl="0" algn="l" rtl="0">
         <a:lnSpc>
           <a:spcPct val="100000"/>
         </a:lnSpc>
@@ -6964,7 +7129,7 @@
           <a:srgbClr val="000000"/>
         </a:buClr>
         <a:buFont typeface="Arial"/>
-        <a:defRPr b="0" i="0" sz="1400" u="none" cap="none" strike="noStrike">
+        <a:defRPr sz="1400" b="0" i="0" u="none" strike="noStrike" cap="none">
           <a:solidFill>
             <a:srgbClr val="000000"/>
           </a:solidFill>
@@ -6974,7 +7139,7 @@
           <a:sym typeface="Arial"/>
         </a:defRPr>
       </a:lvl1pPr>
-      <a:lvl2pPr lvl="1" marR="0" rtl="0" algn="l">
+      <a:lvl2pPr marR="0" lvl="1" algn="l" rtl="0">
         <a:lnSpc>
           <a:spcPct val="100000"/>
         </a:lnSpc>
@@ -6988,7 +7153,7 @@
           <a:srgbClr val="000000"/>
         </a:buClr>
         <a:buFont typeface="Arial"/>
-        <a:defRPr b="0" i="0" sz="1400" u="none" cap="none" strike="noStrike">
+        <a:defRPr sz="1400" b="0" i="0" u="none" strike="noStrike" cap="none">
           <a:solidFill>
             <a:srgbClr val="000000"/>
           </a:solidFill>
@@ -6998,7 +7163,7 @@
           <a:sym typeface="Arial"/>
         </a:defRPr>
       </a:lvl2pPr>
-      <a:lvl3pPr lvl="2" marR="0" rtl="0" algn="l">
+      <a:lvl3pPr marR="0" lvl="2" algn="l" rtl="0">
         <a:lnSpc>
           <a:spcPct val="100000"/>
         </a:lnSpc>
@@ -7012,7 +7177,7 @@
           <a:srgbClr val="000000"/>
         </a:buClr>
         <a:buFont typeface="Arial"/>
-        <a:defRPr b="0" i="0" sz="1400" u="none" cap="none" strike="noStrike">
+        <a:defRPr sz="1400" b="0" i="0" u="none" strike="noStrike" cap="none">
           <a:solidFill>
             <a:srgbClr val="000000"/>
           </a:solidFill>
@@ -7022,7 +7187,7 @@
           <a:sym typeface="Arial"/>
         </a:defRPr>
       </a:lvl3pPr>
-      <a:lvl4pPr lvl="3" marR="0" rtl="0" algn="l">
+      <a:lvl4pPr marR="0" lvl="3" algn="l" rtl="0">
         <a:lnSpc>
           <a:spcPct val="100000"/>
         </a:lnSpc>
@@ -7036,7 +7201,7 @@
           <a:srgbClr val="000000"/>
         </a:buClr>
         <a:buFont typeface="Arial"/>
-        <a:defRPr b="0" i="0" sz="1400" u="none" cap="none" strike="noStrike">
+        <a:defRPr sz="1400" b="0" i="0" u="none" strike="noStrike" cap="none">
           <a:solidFill>
             <a:srgbClr val="000000"/>
           </a:solidFill>
@@ -7046,7 +7211,7 @@
           <a:sym typeface="Arial"/>
         </a:defRPr>
       </a:lvl4pPr>
-      <a:lvl5pPr lvl="4" marR="0" rtl="0" algn="l">
+      <a:lvl5pPr marR="0" lvl="4" algn="l" rtl="0">
         <a:lnSpc>
           <a:spcPct val="100000"/>
         </a:lnSpc>
@@ -7060,7 +7225,7 @@
           <a:srgbClr val="000000"/>
         </a:buClr>
         <a:buFont typeface="Arial"/>
-        <a:defRPr b="0" i="0" sz="1400" u="none" cap="none" strike="noStrike">
+        <a:defRPr sz="1400" b="0" i="0" u="none" strike="noStrike" cap="none">
           <a:solidFill>
             <a:srgbClr val="000000"/>
           </a:solidFill>
@@ -7070,7 +7235,7 @@
           <a:sym typeface="Arial"/>
         </a:defRPr>
       </a:lvl5pPr>
-      <a:lvl6pPr lvl="5" marR="0" rtl="0" algn="l">
+      <a:lvl6pPr marR="0" lvl="5" algn="l" rtl="0">
         <a:lnSpc>
           <a:spcPct val="100000"/>
         </a:lnSpc>
@@ -7084,7 +7249,7 @@
           <a:srgbClr val="000000"/>
         </a:buClr>
         <a:buFont typeface="Arial"/>
-        <a:defRPr b="0" i="0" sz="1400" u="none" cap="none" strike="noStrike">
+        <a:defRPr sz="1400" b="0" i="0" u="none" strike="noStrike" cap="none">
           <a:solidFill>
             <a:srgbClr val="000000"/>
           </a:solidFill>
@@ -7094,7 +7259,7 @@
           <a:sym typeface="Arial"/>
         </a:defRPr>
       </a:lvl6pPr>
-      <a:lvl7pPr lvl="6" marR="0" rtl="0" algn="l">
+      <a:lvl7pPr marR="0" lvl="6" algn="l" rtl="0">
         <a:lnSpc>
           <a:spcPct val="100000"/>
         </a:lnSpc>
@@ -7108,7 +7273,7 @@
           <a:srgbClr val="000000"/>
         </a:buClr>
         <a:buFont typeface="Arial"/>
-        <a:defRPr b="0" i="0" sz="1400" u="none" cap="none" strike="noStrike">
+        <a:defRPr sz="1400" b="0" i="0" u="none" strike="noStrike" cap="none">
           <a:solidFill>
             <a:srgbClr val="000000"/>
           </a:solidFill>
@@ -7118,7 +7283,7 @@
           <a:sym typeface="Arial"/>
         </a:defRPr>
       </a:lvl7pPr>
-      <a:lvl8pPr lvl="7" marR="0" rtl="0" algn="l">
+      <a:lvl8pPr marR="0" lvl="7" algn="l" rtl="0">
         <a:lnSpc>
           <a:spcPct val="100000"/>
         </a:lnSpc>
@@ -7132,7 +7297,7 @@
           <a:srgbClr val="000000"/>
         </a:buClr>
         <a:buFont typeface="Arial"/>
-        <a:defRPr b="0" i="0" sz="1400" u="none" cap="none" strike="noStrike">
+        <a:defRPr sz="1400" b="0" i="0" u="none" strike="noStrike" cap="none">
           <a:solidFill>
             <a:srgbClr val="000000"/>
           </a:solidFill>
@@ -7142,7 +7307,7 @@
           <a:sym typeface="Arial"/>
         </a:defRPr>
       </a:lvl8pPr>
-      <a:lvl9pPr lvl="8" marR="0" rtl="0" algn="l">
+      <a:lvl9pPr marR="0" lvl="8" algn="l" rtl="0">
         <a:lnSpc>
           <a:spcPct val="100000"/>
         </a:lnSpc>
@@ -7156,7 +7321,7 @@
           <a:srgbClr val="000000"/>
         </a:buClr>
         <a:buFont typeface="Arial"/>
-        <a:defRPr b="0" i="0" sz="1400" u="none" cap="none" strike="noStrike">
+        <a:defRPr sz="1400" b="0" i="0" u="none" strike="noStrike" cap="none">
           <a:solidFill>
             <a:srgbClr val="000000"/>
           </a:solidFill>
@@ -7168,7 +7333,7 @@
       </a:lvl9pPr>
     </p:titleStyle>
     <p:bodyStyle>
-      <a:defPPr lvl="0" marR="0" rtl="0" algn="l">
+      <a:defPPr marR="0" lvl="0" algn="l" rtl="0">
         <a:lnSpc>
           <a:spcPct val="100000"/>
         </a:lnSpc>
@@ -7179,7 +7344,7 @@
           <a:spcPts val="0"/>
         </a:spcAft>
       </a:defPPr>
-      <a:lvl1pPr lvl="0" marR="0" rtl="0" algn="l">
+      <a:lvl1pPr marR="0" lvl="0" algn="l" rtl="0">
         <a:lnSpc>
           <a:spcPct val="100000"/>
         </a:lnSpc>
@@ -7193,7 +7358,7 @@
           <a:srgbClr val="000000"/>
         </a:buClr>
         <a:buFont typeface="Arial"/>
-        <a:defRPr b="0" i="0" sz="1400" u="none" cap="none" strike="noStrike">
+        <a:defRPr sz="1400" b="0" i="0" u="none" strike="noStrike" cap="none">
           <a:solidFill>
             <a:srgbClr val="000000"/>
           </a:solidFill>
@@ -7203,7 +7368,7 @@
           <a:sym typeface="Arial"/>
         </a:defRPr>
       </a:lvl1pPr>
-      <a:lvl2pPr lvl="1" marR="0" rtl="0" algn="l">
+      <a:lvl2pPr marR="0" lvl="1" algn="l" rtl="0">
         <a:lnSpc>
           <a:spcPct val="100000"/>
         </a:lnSpc>
@@ -7217,7 +7382,7 @@
           <a:srgbClr val="000000"/>
         </a:buClr>
         <a:buFont typeface="Arial"/>
-        <a:defRPr b="0" i="0" sz="1400" u="none" cap="none" strike="noStrike">
+        <a:defRPr sz="1400" b="0" i="0" u="none" strike="noStrike" cap="none">
           <a:solidFill>
             <a:srgbClr val="000000"/>
           </a:solidFill>
@@ -7227,7 +7392,7 @@
           <a:sym typeface="Arial"/>
         </a:defRPr>
       </a:lvl2pPr>
-      <a:lvl3pPr lvl="2" marR="0" rtl="0" algn="l">
+      <a:lvl3pPr marR="0" lvl="2" algn="l" rtl="0">
         <a:lnSpc>
           <a:spcPct val="100000"/>
         </a:lnSpc>
@@ -7241,7 +7406,7 @@
           <a:srgbClr val="000000"/>
         </a:buClr>
         <a:buFont typeface="Arial"/>
-        <a:defRPr b="0" i="0" sz="1400" u="none" cap="none" strike="noStrike">
+        <a:defRPr sz="1400" b="0" i="0" u="none" strike="noStrike" cap="none">
           <a:solidFill>
             <a:srgbClr val="000000"/>
           </a:solidFill>
@@ -7251,7 +7416,7 @@
           <a:sym typeface="Arial"/>
         </a:defRPr>
       </a:lvl3pPr>
-      <a:lvl4pPr lvl="3" marR="0" rtl="0" algn="l">
+      <a:lvl4pPr marR="0" lvl="3" algn="l" rtl="0">
         <a:lnSpc>
           <a:spcPct val="100000"/>
         </a:lnSpc>
@@ -7265,7 +7430,7 @@
           <a:srgbClr val="000000"/>
         </a:buClr>
         <a:buFont typeface="Arial"/>
-        <a:defRPr b="0" i="0" sz="1400" u="none" cap="none" strike="noStrike">
+        <a:defRPr sz="1400" b="0" i="0" u="none" strike="noStrike" cap="none">
           <a:solidFill>
             <a:srgbClr val="000000"/>
           </a:solidFill>
@@ -7275,7 +7440,7 @@
           <a:sym typeface="Arial"/>
         </a:defRPr>
       </a:lvl4pPr>
-      <a:lvl5pPr lvl="4" marR="0" rtl="0" algn="l">
+      <a:lvl5pPr marR="0" lvl="4" algn="l" rtl="0">
         <a:lnSpc>
           <a:spcPct val="100000"/>
         </a:lnSpc>
@@ -7289,7 +7454,7 @@
           <a:srgbClr val="000000"/>
         </a:buClr>
         <a:buFont typeface="Arial"/>
-        <a:defRPr b="0" i="0" sz="1400" u="none" cap="none" strike="noStrike">
+        <a:defRPr sz="1400" b="0" i="0" u="none" strike="noStrike" cap="none">
           <a:solidFill>
             <a:srgbClr val="000000"/>
           </a:solidFill>
@@ -7299,7 +7464,7 @@
           <a:sym typeface="Arial"/>
         </a:defRPr>
       </a:lvl5pPr>
-      <a:lvl6pPr lvl="5" marR="0" rtl="0" algn="l">
+      <a:lvl6pPr marR="0" lvl="5" algn="l" rtl="0">
         <a:lnSpc>
           <a:spcPct val="100000"/>
         </a:lnSpc>
@@ -7313,7 +7478,7 @@
           <a:srgbClr val="000000"/>
         </a:buClr>
         <a:buFont typeface="Arial"/>
-        <a:defRPr b="0" i="0" sz="1400" u="none" cap="none" strike="noStrike">
+        <a:defRPr sz="1400" b="0" i="0" u="none" strike="noStrike" cap="none">
           <a:solidFill>
             <a:srgbClr val="000000"/>
           </a:solidFill>
@@ -7323,7 +7488,7 @@
           <a:sym typeface="Arial"/>
         </a:defRPr>
       </a:lvl6pPr>
-      <a:lvl7pPr lvl="6" marR="0" rtl="0" algn="l">
+      <a:lvl7pPr marR="0" lvl="6" algn="l" rtl="0">
         <a:lnSpc>
           <a:spcPct val="100000"/>
         </a:lnSpc>
@@ -7337,7 +7502,7 @@
           <a:srgbClr val="000000"/>
         </a:buClr>
         <a:buFont typeface="Arial"/>
-        <a:defRPr b="0" i="0" sz="1400" u="none" cap="none" strike="noStrike">
+        <a:defRPr sz="1400" b="0" i="0" u="none" strike="noStrike" cap="none">
           <a:solidFill>
             <a:srgbClr val="000000"/>
           </a:solidFill>
@@ -7347,7 +7512,7 @@
           <a:sym typeface="Arial"/>
         </a:defRPr>
       </a:lvl7pPr>
-      <a:lvl8pPr lvl="7" marR="0" rtl="0" algn="l">
+      <a:lvl8pPr marR="0" lvl="7" algn="l" rtl="0">
         <a:lnSpc>
           <a:spcPct val="100000"/>
         </a:lnSpc>
@@ -7361,7 +7526,7 @@
           <a:srgbClr val="000000"/>
         </a:buClr>
         <a:buFont typeface="Arial"/>
-        <a:defRPr b="0" i="0" sz="1400" u="none" cap="none" strike="noStrike">
+        <a:defRPr sz="1400" b="0" i="0" u="none" strike="noStrike" cap="none">
           <a:solidFill>
             <a:srgbClr val="000000"/>
           </a:solidFill>
@@ -7371,7 +7536,7 @@
           <a:sym typeface="Arial"/>
         </a:defRPr>
       </a:lvl8pPr>
-      <a:lvl9pPr lvl="8" marR="0" rtl="0" algn="l">
+      <a:lvl9pPr marR="0" lvl="8" algn="l" rtl="0">
         <a:lnSpc>
           <a:spcPct val="100000"/>
         </a:lnSpc>
@@ -7385,7 +7550,7 @@
           <a:srgbClr val="000000"/>
         </a:buClr>
         <a:buFont typeface="Arial"/>
-        <a:defRPr b="0" i="0" sz="1400" u="none" cap="none" strike="noStrike">
+        <a:defRPr sz="1400" b="0" i="0" u="none" strike="noStrike" cap="none">
           <a:solidFill>
             <a:srgbClr val="000000"/>
           </a:solidFill>
@@ -7397,7 +7562,7 @@
       </a:lvl9pPr>
     </p:bodyStyle>
     <p:otherStyle>
-      <a:defPPr lvl="0" marR="0" rtl="0" algn="l">
+      <a:defPPr marR="0" lvl="0" algn="l" rtl="0">
         <a:lnSpc>
           <a:spcPct val="100000"/>
         </a:lnSpc>
@@ -7408,7 +7573,7 @@
           <a:spcPts val="0"/>
         </a:spcAft>
       </a:defPPr>
-      <a:lvl1pPr lvl="0" marR="0" rtl="0" algn="l">
+      <a:lvl1pPr marR="0" lvl="0" algn="l" rtl="0">
         <a:lnSpc>
           <a:spcPct val="100000"/>
         </a:lnSpc>
@@ -7422,7 +7587,7 @@
           <a:srgbClr val="000000"/>
         </a:buClr>
         <a:buFont typeface="Arial"/>
-        <a:defRPr b="0" i="0" sz="1400" u="none" cap="none" strike="noStrike">
+        <a:defRPr sz="1400" b="0" i="0" u="none" strike="noStrike" cap="none">
           <a:solidFill>
             <a:srgbClr val="000000"/>
           </a:solidFill>
@@ -7432,7 +7597,7 @@
           <a:sym typeface="Arial"/>
         </a:defRPr>
       </a:lvl1pPr>
-      <a:lvl2pPr lvl="1" marR="0" rtl="0" algn="l">
+      <a:lvl2pPr marR="0" lvl="1" algn="l" rtl="0">
         <a:lnSpc>
           <a:spcPct val="100000"/>
         </a:lnSpc>
@@ -7446,7 +7611,7 @@
           <a:srgbClr val="000000"/>
         </a:buClr>
         <a:buFont typeface="Arial"/>
-        <a:defRPr b="0" i="0" sz="1400" u="none" cap="none" strike="noStrike">
+        <a:defRPr sz="1400" b="0" i="0" u="none" strike="noStrike" cap="none">
           <a:solidFill>
             <a:srgbClr val="000000"/>
           </a:solidFill>
@@ -7456,7 +7621,7 @@
           <a:sym typeface="Arial"/>
         </a:defRPr>
       </a:lvl2pPr>
-      <a:lvl3pPr lvl="2" marR="0" rtl="0" algn="l">
+      <a:lvl3pPr marR="0" lvl="2" algn="l" rtl="0">
         <a:lnSpc>
           <a:spcPct val="100000"/>
         </a:lnSpc>
@@ -7470,7 +7635,7 @@
           <a:srgbClr val="000000"/>
         </a:buClr>
         <a:buFont typeface="Arial"/>
-        <a:defRPr b="0" i="0" sz="1400" u="none" cap="none" strike="noStrike">
+        <a:defRPr sz="1400" b="0" i="0" u="none" strike="noStrike" cap="none">
           <a:solidFill>
             <a:srgbClr val="000000"/>
           </a:solidFill>
@@ -7480,7 +7645,7 @@
           <a:sym typeface="Arial"/>
         </a:defRPr>
       </a:lvl3pPr>
-      <a:lvl4pPr lvl="3" marR="0" rtl="0" algn="l">
+      <a:lvl4pPr marR="0" lvl="3" algn="l" rtl="0">
         <a:lnSpc>
           <a:spcPct val="100000"/>
         </a:lnSpc>
@@ -7494,7 +7659,7 @@
           <a:srgbClr val="000000"/>
         </a:buClr>
         <a:buFont typeface="Arial"/>
-        <a:defRPr b="0" i="0" sz="1400" u="none" cap="none" strike="noStrike">
+        <a:defRPr sz="1400" b="0" i="0" u="none" strike="noStrike" cap="none">
           <a:solidFill>
             <a:srgbClr val="000000"/>
           </a:solidFill>
@@ -7504,7 +7669,7 @@
           <a:sym typeface="Arial"/>
         </a:defRPr>
       </a:lvl4pPr>
-      <a:lvl5pPr lvl="4" marR="0" rtl="0" algn="l">
+      <a:lvl5pPr marR="0" lvl="4" algn="l" rtl="0">
         <a:lnSpc>
           <a:spcPct val="100000"/>
         </a:lnSpc>
@@ -7518,7 +7683,7 @@
           <a:srgbClr val="000000"/>
         </a:buClr>
         <a:buFont typeface="Arial"/>
-        <a:defRPr b="0" i="0" sz="1400" u="none" cap="none" strike="noStrike">
+        <a:defRPr sz="1400" b="0" i="0" u="none" strike="noStrike" cap="none">
           <a:solidFill>
             <a:srgbClr val="000000"/>
           </a:solidFill>
@@ -7528,7 +7693,7 @@
           <a:sym typeface="Arial"/>
         </a:defRPr>
       </a:lvl5pPr>
-      <a:lvl6pPr lvl="5" marR="0" rtl="0" algn="l">
+      <a:lvl6pPr marR="0" lvl="5" algn="l" rtl="0">
         <a:lnSpc>
           <a:spcPct val="100000"/>
         </a:lnSpc>
@@ -7542,7 +7707,7 @@
           <a:srgbClr val="000000"/>
         </a:buClr>
         <a:buFont typeface="Arial"/>
-        <a:defRPr b="0" i="0" sz="1400" u="none" cap="none" strike="noStrike">
+        <a:defRPr sz="1400" b="0" i="0" u="none" strike="noStrike" cap="none">
           <a:solidFill>
             <a:srgbClr val="000000"/>
           </a:solidFill>
@@ -7552,7 +7717,7 @@
           <a:sym typeface="Arial"/>
         </a:defRPr>
       </a:lvl6pPr>
-      <a:lvl7pPr lvl="6" marR="0" rtl="0" algn="l">
+      <a:lvl7pPr marR="0" lvl="6" algn="l" rtl="0">
         <a:lnSpc>
           <a:spcPct val="100000"/>
         </a:lnSpc>
@@ -7566,7 +7731,7 @@
           <a:srgbClr val="000000"/>
         </a:buClr>
         <a:buFont typeface="Arial"/>
-        <a:defRPr b="0" i="0" sz="1400" u="none" cap="none" strike="noStrike">
+        <a:defRPr sz="1400" b="0" i="0" u="none" strike="noStrike" cap="none">
           <a:solidFill>
             <a:srgbClr val="000000"/>
           </a:solidFill>
@@ -7576,7 +7741,7 @@
           <a:sym typeface="Arial"/>
         </a:defRPr>
       </a:lvl7pPr>
-      <a:lvl8pPr lvl="7" marR="0" rtl="0" algn="l">
+      <a:lvl8pPr marR="0" lvl="7" algn="l" rtl="0">
         <a:lnSpc>
           <a:spcPct val="100000"/>
         </a:lnSpc>
@@ -7590,7 +7755,7 @@
           <a:srgbClr val="000000"/>
         </a:buClr>
         <a:buFont typeface="Arial"/>
-        <a:defRPr b="0" i="0" sz="1400" u="none" cap="none" strike="noStrike">
+        <a:defRPr sz="1400" b="0" i="0" u="none" strike="noStrike" cap="none">
           <a:solidFill>
             <a:srgbClr val="000000"/>
           </a:solidFill>
@@ -7600,7 +7765,7 @@
           <a:sym typeface="Arial"/>
         </a:defRPr>
       </a:lvl8pPr>
-      <a:lvl9pPr lvl="8" marR="0" rtl="0" algn="l">
+      <a:lvl9pPr marR="0" lvl="8" algn="l" rtl="0">
         <a:lnSpc>
           <a:spcPct val="100000"/>
         </a:lnSpc>
@@ -7614,7 +7779,7 @@
           <a:srgbClr val="000000"/>
         </a:buClr>
         <a:buFont typeface="Arial"/>
-        <a:defRPr b="0" i="0" sz="1400" u="none" cap="none" strike="noStrike">
+        <a:defRPr sz="1400" b="0" i="0" u="none" strike="noStrike" cap="none">
           <a:solidFill>
             <a:srgbClr val="000000"/>
           </a:solidFill>
@@ -7630,18 +7795,19 @@
 </file>
 
 <file path=ppt/slides/slide1.xml><?xml version="1.0" encoding="utf-8"?>
-<p:sld xmlns:a="http://schemas.openxmlformats.org/drawingml/2006/main" xmlns:r="http://schemas.openxmlformats.org/officeDocument/2006/relationships" xmlns:mc="http://schemas.openxmlformats.org/markup-compatibility/2006" xmlns:mv="urn:schemas-microsoft-com:mac:vml" xmlns:p="http://schemas.openxmlformats.org/presentationml/2006/main" xmlns:c="http://schemas.openxmlformats.org/drawingml/2006/chart" xmlns:dgm="http://schemas.openxmlformats.org/drawingml/2006/diagram" xmlns:o="urn:schemas-microsoft-com:office:office" xmlns:v="urn:schemas-microsoft-com:vml" xmlns:pvml="urn:schemas-microsoft-com:office:powerpoint" xmlns:com="http://schemas.openxmlformats.org/drawingml/2006/compatibility" xmlns:p14="http://schemas.microsoft.com/office/powerpoint/2010/main" xmlns:p15="http://schemas.microsoft.com/office/powerpoint/2012/main" xmlns:ahyp="http://schemas.microsoft.com/office/drawing/2018/hyperlinkcolor">
+<p:sld xmlns:a="http://schemas.openxmlformats.org/drawingml/2006/main" xmlns:r="http://schemas.openxmlformats.org/officeDocument/2006/relationships" xmlns:p="http://schemas.openxmlformats.org/presentationml/2006/main">
   <p:cSld>
     <p:bg>
       <p:bgPr>
         <a:solidFill>
           <a:srgbClr val="192F44"/>
         </a:solidFill>
+        <a:effectLst/>
       </p:bgPr>
     </p:bg>
     <p:spTree>
       <p:nvGrpSpPr>
-        <p:cNvPr id="60" name="Shape 60"/>
+        <p:cNvPr id="1" name="Shape 60"/>
         <p:cNvGrpSpPr/>
         <p:nvPr/>
       </p:nvGrpSpPr>
@@ -7689,12 +7855,12 @@
             </a:ln>
           </p:spPr>
           <p:txBody>
-            <a:bodyPr anchorCtr="0" anchor="ctr" bIns="34275" lIns="68575" spcFirstLastPara="1" rIns="68575" wrap="square" tIns="34275">
+            <a:bodyPr spcFirstLastPara="1" wrap="square" lIns="68575" tIns="34275" rIns="68575" bIns="34275" anchor="ctr" anchorCtr="0">
               <a:noAutofit/>
             </a:bodyPr>
             <a:lstStyle/>
             <a:p>
-              <a:pPr indent="0" lvl="0" marL="0" marR="0" rtl="0" algn="ctr">
+              <a:pPr marL="0" marR="0" lvl="0" indent="0" algn="ctr" rtl="0">
                 <a:lnSpc>
                   <a:spcPct val="100000"/>
                 </a:lnSpc>
@@ -7711,10 +7877,7 @@
                 <a:buFont typeface="Calibri"/>
                 <a:buNone/>
               </a:pPr>
-              <a:r>
-                <a:t/>
-              </a:r>
-              <a:endParaRPr b="0" i="0" sz="1400" u="none" cap="none" strike="noStrike">
+              <a:endParaRPr sz="1400" b="0" i="0" u="none" strike="noStrike" cap="none">
                 <a:solidFill>
                   <a:schemeClr val="lt1"/>
                 </a:solidFill>
@@ -7739,7 +7902,7 @@
             </a:xfrm>
             <a:prstGeom prst="triangle">
               <a:avLst>
-                <a:gd fmla="val 58808" name="adj"/>
+                <a:gd name="adj" fmla="val 58808"/>
               </a:avLst>
             </a:prstGeom>
             <a:solidFill>
@@ -7750,12 +7913,12 @@
             </a:ln>
           </p:spPr>
           <p:txBody>
-            <a:bodyPr anchorCtr="0" anchor="ctr" bIns="34275" lIns="68575" spcFirstLastPara="1" rIns="68575" wrap="square" tIns="34275">
+            <a:bodyPr spcFirstLastPara="1" wrap="square" lIns="68575" tIns="34275" rIns="68575" bIns="34275" anchor="ctr" anchorCtr="0">
               <a:noAutofit/>
             </a:bodyPr>
             <a:lstStyle/>
             <a:p>
-              <a:pPr indent="0" lvl="0" marL="0" marR="0" rtl="0" algn="ctr">
+              <a:pPr marL="0" marR="0" lvl="0" indent="0" algn="ctr" rtl="0">
                 <a:lnSpc>
                   <a:spcPct val="100000"/>
                 </a:lnSpc>
@@ -7772,10 +7935,7 @@
                 <a:buFont typeface="Calibri"/>
                 <a:buNone/>
               </a:pPr>
-              <a:r>
-                <a:t/>
-              </a:r>
-              <a:endParaRPr b="0" i="0" sz="1400" u="none" cap="none" strike="noStrike">
+              <a:endParaRPr sz="1400" b="0" i="0" u="none" strike="noStrike" cap="none">
                 <a:solidFill>
                   <a:schemeClr val="lt1"/>
                 </a:solidFill>
@@ -7814,9 +7974,13 @@
               <a:ext cx="791348" cy="1407726"/>
             </a:xfrm>
             <a:custGeom>
-              <a:rect b="b" l="l" r="r" t="t"/>
+              <a:avLst/>
+              <a:gdLst/>
+              <a:ahLst/>
+              <a:cxnLst/>
+              <a:rect l="l" t="t" r="r" b="b"/>
               <a:pathLst>
-                <a:path extrusionOk="0" h="1407726" w="791348">
+                <a:path w="791348" h="1407726" extrusionOk="0">
                   <a:moveTo>
                     <a:pt x="0" y="0"/>
                   </a:moveTo>
@@ -7844,12 +8008,12 @@
             </a:ln>
           </p:spPr>
           <p:txBody>
-            <a:bodyPr anchorCtr="0" anchor="ctr" bIns="34275" lIns="68575" spcFirstLastPara="1" rIns="68575" wrap="square" tIns="34275">
+            <a:bodyPr spcFirstLastPara="1" wrap="square" lIns="68575" tIns="34275" rIns="68575" bIns="34275" anchor="ctr" anchorCtr="0">
               <a:noAutofit/>
             </a:bodyPr>
             <a:lstStyle/>
             <a:p>
-              <a:pPr indent="0" lvl="0" marL="0" marR="0" rtl="0" algn="ctr">
+              <a:pPr marL="0" marR="0" lvl="0" indent="0" algn="ctr" rtl="0">
                 <a:lnSpc>
                   <a:spcPct val="100000"/>
                 </a:lnSpc>
@@ -7866,10 +8030,7 @@
                 <a:buFont typeface="Calibri"/>
                 <a:buNone/>
               </a:pPr>
-              <a:r>
-                <a:t/>
-              </a:r>
-              <a:endParaRPr b="0" i="0" sz="1400" u="none" cap="none" strike="noStrike">
+              <a:endParaRPr sz="1400" b="0" i="0" u="none" strike="noStrike" cap="none">
                 <a:solidFill>
                   <a:schemeClr val="lt1"/>
                 </a:solidFill>
@@ -7908,7 +8069,7 @@
               </a:xfrm>
               <a:prstGeom prst="triangle">
                 <a:avLst>
-                  <a:gd fmla="val 50000" name="adj"/>
+                  <a:gd name="adj" fmla="val 50000"/>
                 </a:avLst>
               </a:prstGeom>
               <a:solidFill>
@@ -7919,12 +8080,12 @@
               </a:ln>
             </p:spPr>
             <p:txBody>
-              <a:bodyPr anchorCtr="0" anchor="ctr" bIns="34275" lIns="68575" spcFirstLastPara="1" rIns="68575" wrap="square" tIns="34275">
+              <a:bodyPr spcFirstLastPara="1" wrap="square" lIns="68575" tIns="34275" rIns="68575" bIns="34275" anchor="ctr" anchorCtr="0">
                 <a:noAutofit/>
               </a:bodyPr>
               <a:lstStyle/>
               <a:p>
-                <a:pPr indent="0" lvl="0" marL="0" marR="0" rtl="0" algn="ctr">
+                <a:pPr marL="0" marR="0" lvl="0" indent="0" algn="ctr" rtl="0">
                   <a:lnSpc>
                     <a:spcPct val="100000"/>
                   </a:lnSpc>
@@ -7941,10 +8102,7 @@
                   <a:buFont typeface="Calibri"/>
                   <a:buNone/>
                 </a:pPr>
-                <a:r>
-                  <a:t/>
-                </a:r>
-                <a:endParaRPr b="0" i="0" sz="1400" u="none" cap="none" strike="noStrike">
+                <a:endParaRPr sz="1400" b="0" i="0" u="none" strike="noStrike" cap="none">
                   <a:solidFill>
                     <a:schemeClr val="lt1"/>
                   </a:solidFill>
@@ -7963,13 +8121,13 @@
               <p:nvPr/>
             </p:nvSpPr>
             <p:spPr>
-              <a:xfrm flipH="1" rot="-5400000">
+              <a:xfrm rot="-5400000" flipH="1">
                 <a:off x="-194441" y="3403592"/>
                 <a:ext cx="918000" cy="791400"/>
               </a:xfrm>
               <a:prstGeom prst="triangle">
                 <a:avLst>
-                  <a:gd fmla="val 50000" name="adj"/>
+                  <a:gd name="adj" fmla="val 50000"/>
                 </a:avLst>
               </a:prstGeom>
               <a:solidFill>
@@ -7980,12 +8138,12 @@
               </a:ln>
             </p:spPr>
             <p:txBody>
-              <a:bodyPr anchorCtr="0" anchor="ctr" bIns="34275" lIns="68575" spcFirstLastPara="1" rIns="68575" wrap="square" tIns="34275">
+              <a:bodyPr spcFirstLastPara="1" wrap="square" lIns="68575" tIns="34275" rIns="68575" bIns="34275" anchor="ctr" anchorCtr="0">
                 <a:noAutofit/>
               </a:bodyPr>
               <a:lstStyle/>
               <a:p>
-                <a:pPr indent="0" lvl="0" marL="0" marR="0" rtl="0" algn="ctr">
+                <a:pPr marL="0" marR="0" lvl="0" indent="0" algn="ctr" rtl="0">
                   <a:lnSpc>
                     <a:spcPct val="100000"/>
                   </a:lnSpc>
@@ -8002,10 +8160,7 @@
                   <a:buFont typeface="Calibri"/>
                   <a:buNone/>
                 </a:pPr>
-                <a:r>
-                  <a:t/>
-                </a:r>
-                <a:endParaRPr b="0" i="0" sz="1400" u="none" cap="none" strike="noStrike">
+                <a:endParaRPr sz="1400" b="0" i="0" u="none" strike="noStrike" cap="none">
                   <a:solidFill>
                     <a:schemeClr val="lt1"/>
                   </a:solidFill>
@@ -8055,12 +8210,12 @@
             </a:ln>
           </p:spPr>
           <p:txBody>
-            <a:bodyPr anchorCtr="0" anchor="ctr" bIns="34275" lIns="68575" spcFirstLastPara="1" rIns="68575" wrap="square" tIns="34275">
+            <a:bodyPr spcFirstLastPara="1" wrap="square" lIns="68575" tIns="34275" rIns="68575" bIns="34275" anchor="ctr" anchorCtr="0">
               <a:noAutofit/>
             </a:bodyPr>
             <a:lstStyle/>
             <a:p>
-              <a:pPr indent="0" lvl="0" marL="0" marR="0" rtl="0" algn="ctr">
+              <a:pPr marL="0" marR="0" lvl="0" indent="0" algn="ctr" rtl="0">
                 <a:lnSpc>
                   <a:spcPct val="100000"/>
                 </a:lnSpc>
@@ -8077,10 +8232,7 @@
                 <a:buFont typeface="Calibri"/>
                 <a:buNone/>
               </a:pPr>
-              <a:r>
-                <a:t/>
-              </a:r>
-              <a:endParaRPr b="0" i="0" sz="1400" u="none" cap="none" strike="noStrike">
+              <a:endParaRPr sz="1400" b="0" i="0" u="none" strike="noStrike" cap="none">
                 <a:solidFill>
                   <a:schemeClr val="lt1"/>
                 </a:solidFill>
@@ -8114,12 +8266,12 @@
             </a:ln>
           </p:spPr>
           <p:txBody>
-            <a:bodyPr anchorCtr="0" anchor="ctr" bIns="34275" lIns="68575" spcFirstLastPara="1" rIns="68575" wrap="square" tIns="34275">
+            <a:bodyPr spcFirstLastPara="1" wrap="square" lIns="68575" tIns="34275" rIns="68575" bIns="34275" anchor="ctr" anchorCtr="0">
               <a:noAutofit/>
             </a:bodyPr>
             <a:lstStyle/>
             <a:p>
-              <a:pPr indent="0" lvl="0" marL="0" marR="0" rtl="0" algn="ctr">
+              <a:pPr marL="0" marR="0" lvl="0" indent="0" algn="ctr" rtl="0">
                 <a:lnSpc>
                   <a:spcPct val="100000"/>
                 </a:lnSpc>
@@ -8136,10 +8288,7 @@
                 <a:buFont typeface="Calibri"/>
                 <a:buNone/>
               </a:pPr>
-              <a:r>
-                <a:t/>
-              </a:r>
-              <a:endParaRPr b="0" i="0" sz="1400" u="none" cap="none" strike="noStrike">
+              <a:endParaRPr sz="1400" b="0" i="0" u="none" strike="noStrike" cap="none">
                 <a:solidFill>
                   <a:schemeClr val="lt1"/>
                 </a:solidFill>
@@ -8172,7 +8321,7 @@
               <p:nvPr/>
             </p:nvSpPr>
             <p:spPr>
-              <a:xfrm flipH="1" rot="10800000">
+              <a:xfrm rot="10800000" flipH="1">
                 <a:off x="4713463" y="1638613"/>
                 <a:ext cx="817500" cy="817500"/>
               </a:xfrm>
@@ -8187,12 +8336,12 @@
               </a:ln>
             </p:spPr>
             <p:txBody>
-              <a:bodyPr anchorCtr="0" anchor="ctr" bIns="34275" lIns="68575" spcFirstLastPara="1" rIns="68575" wrap="square" tIns="34275">
+              <a:bodyPr spcFirstLastPara="1" wrap="square" lIns="68575" tIns="34275" rIns="68575" bIns="34275" anchor="ctr" anchorCtr="0">
                 <a:noAutofit/>
               </a:bodyPr>
               <a:lstStyle/>
               <a:p>
-                <a:pPr indent="0" lvl="0" marL="0" marR="0" rtl="0" algn="ctr">
+                <a:pPr marL="0" marR="0" lvl="0" indent="0" algn="ctr" rtl="0">
                   <a:lnSpc>
                     <a:spcPct val="100000"/>
                   </a:lnSpc>
@@ -8209,10 +8358,7 @@
                   <a:buFont typeface="Calibri"/>
                   <a:buNone/>
                 </a:pPr>
-                <a:r>
-                  <a:t/>
-                </a:r>
-                <a:endParaRPr b="0" i="0" sz="1400" u="none" cap="none" strike="noStrike">
+                <a:endParaRPr sz="1400" b="0" i="0" u="none" strike="noStrike" cap="none">
                   <a:solidFill>
                     <a:schemeClr val="lt1"/>
                   </a:solidFill>
@@ -8246,12 +8392,12 @@
               </a:ln>
             </p:spPr>
             <p:txBody>
-              <a:bodyPr anchorCtr="0" anchor="ctr" bIns="34275" lIns="68575" spcFirstLastPara="1" rIns="68575" wrap="square" tIns="34275">
+              <a:bodyPr spcFirstLastPara="1" wrap="square" lIns="68575" tIns="34275" rIns="68575" bIns="34275" anchor="ctr" anchorCtr="0">
                 <a:noAutofit/>
               </a:bodyPr>
               <a:lstStyle/>
               <a:p>
-                <a:pPr indent="0" lvl="0" marL="0" marR="0" rtl="0" algn="ctr">
+                <a:pPr marL="0" marR="0" lvl="0" indent="0" algn="ctr" rtl="0">
                   <a:lnSpc>
                     <a:spcPct val="100000"/>
                   </a:lnSpc>
@@ -8268,10 +8414,7 @@
                   <a:buFont typeface="Calibri"/>
                   <a:buNone/>
                 </a:pPr>
-                <a:r>
-                  <a:t/>
-                </a:r>
-                <a:endParaRPr b="0" i="0" sz="1400" u="none" cap="none" strike="noStrike">
+                <a:endParaRPr sz="1400" b="0" i="0" u="none" strike="noStrike" cap="none">
                   <a:solidFill>
                     <a:schemeClr val="lt1"/>
                   </a:solidFill>
@@ -8314,14 +8457,14 @@
               <a:avLst/>
             </a:prstGeom>
             <a:noFill/>
-            <a:ln cap="flat" cmpd="sng" w="9525">
+            <a:ln w="9525" cap="flat" cmpd="sng">
               <a:solidFill>
                 <a:schemeClr val="lt1"/>
               </a:solidFill>
               <a:prstDash val="solid"/>
               <a:miter lim="800000"/>
-              <a:headEnd len="sm" w="sm" type="none"/>
-              <a:tailEnd len="sm" w="sm" type="none"/>
+              <a:headEnd type="none" w="sm" len="sm"/>
+              <a:tailEnd type="none" w="sm" len="sm"/>
             </a:ln>
           </p:spPr>
         </p:cxnSp>
@@ -8340,14 +8483,14 @@
               <a:avLst/>
             </a:prstGeom>
             <a:noFill/>
-            <a:ln cap="flat" cmpd="sng" w="9525">
+            <a:ln w="9525" cap="flat" cmpd="sng">
               <a:solidFill>
                 <a:schemeClr val="lt1"/>
               </a:solidFill>
               <a:prstDash val="solid"/>
               <a:miter lim="800000"/>
-              <a:headEnd len="sm" w="sm" type="none"/>
-              <a:tailEnd len="sm" w="sm" type="none"/>
+              <a:headEnd type="none" w="sm" len="sm"/>
+              <a:tailEnd type="none" w="sm" len="sm"/>
             </a:ln>
           </p:spPr>
         </p:cxnSp>
@@ -8366,14 +8509,14 @@
               <a:avLst/>
             </a:prstGeom>
             <a:noFill/>
-            <a:ln cap="flat" cmpd="sng" w="9525">
+            <a:ln w="9525" cap="flat" cmpd="sng">
               <a:solidFill>
                 <a:schemeClr val="lt1"/>
               </a:solidFill>
               <a:prstDash val="solid"/>
               <a:miter lim="800000"/>
-              <a:headEnd len="sm" w="sm" type="none"/>
-              <a:tailEnd len="sm" w="sm" type="none"/>
+              <a:headEnd type="none" w="sm" len="sm"/>
+              <a:tailEnd type="none" w="sm" len="sm"/>
             </a:ln>
           </p:spPr>
         </p:cxnSp>
@@ -8392,14 +8535,14 @@
               <a:avLst/>
             </a:prstGeom>
             <a:noFill/>
-            <a:ln cap="flat" cmpd="sng" w="9525">
+            <a:ln w="9525" cap="flat" cmpd="sng">
               <a:solidFill>
                 <a:schemeClr val="lt1"/>
               </a:solidFill>
               <a:prstDash val="solid"/>
               <a:miter lim="800000"/>
-              <a:headEnd len="sm" w="sm" type="none"/>
-              <a:tailEnd len="sm" w="sm" type="none"/>
+              <a:headEnd type="none" w="sm" len="sm"/>
+              <a:tailEnd type="none" w="sm" len="sm"/>
             </a:ln>
           </p:spPr>
         </p:cxnSp>
@@ -8418,14 +8561,14 @@
               <a:avLst/>
             </a:prstGeom>
             <a:noFill/>
-            <a:ln cap="flat" cmpd="sng" w="9525">
+            <a:ln w="9525" cap="flat" cmpd="sng">
               <a:solidFill>
                 <a:schemeClr val="lt1"/>
               </a:solidFill>
               <a:prstDash val="solid"/>
               <a:miter lim="800000"/>
-              <a:headEnd len="sm" w="sm" type="none"/>
-              <a:tailEnd len="sm" w="sm" type="none"/>
+              <a:headEnd type="none" w="sm" len="sm"/>
+              <a:tailEnd type="none" w="sm" len="sm"/>
             </a:ln>
           </p:spPr>
         </p:cxnSp>
@@ -8450,12 +8593,12 @@
           </a:ln>
         </p:spPr>
         <p:txBody>
-          <a:bodyPr anchorCtr="0" anchor="t" bIns="34275" lIns="68575" spcFirstLastPara="1" rIns="68575" wrap="square" tIns="34275">
+          <a:bodyPr spcFirstLastPara="1" wrap="square" lIns="68575" tIns="34275" rIns="68575" bIns="34275" anchor="t" anchorCtr="0">
             <a:spAutoFit/>
           </a:bodyPr>
           <a:lstStyle/>
           <a:p>
-            <a:pPr indent="0" lvl="0" marL="0" marR="0" rtl="0" algn="ctr">
+            <a:pPr marL="0" marR="0" lvl="0" indent="0" algn="ctr" rtl="0">
               <a:lnSpc>
                 <a:spcPct val="100000"/>
               </a:lnSpc>
@@ -8473,7 +8616,7 @@
               <a:buNone/>
             </a:pPr>
             <a:r>
-              <a:rPr b="1" i="0" lang="en" sz="2100" u="none" cap="none" strike="noStrike">
+              <a:rPr lang="en" sz="2100" b="1" i="0" u="none" strike="noStrike" cap="none">
                 <a:solidFill>
                   <a:schemeClr val="lt1"/>
                 </a:solidFill>
@@ -8484,7 +8627,7 @@
               </a:rPr>
               <a:t>&amp; </a:t>
             </a:r>
-            <a:endParaRPr b="0" i="0" sz="1100" u="none" cap="none" strike="noStrike">
+            <a:endParaRPr sz="1100" b="0" i="0" u="none" strike="noStrike" cap="none">
               <a:solidFill>
                 <a:srgbClr val="000000"/>
               </a:solidFill>
@@ -8495,7 +8638,7 @@
             </a:endParaRPr>
           </a:p>
           <a:p>
-            <a:pPr indent="0" lvl="0" marL="0" marR="0" rtl="0" algn="ctr">
+            <a:pPr marL="0" marR="0" lvl="0" indent="0" algn="ctr" rtl="0">
               <a:lnSpc>
                 <a:spcPct val="100000"/>
               </a:lnSpc>
@@ -8513,7 +8656,7 @@
               <a:buNone/>
             </a:pPr>
             <a:r>
-              <a:rPr b="1" i="0" lang="en" sz="2100" u="none" cap="none" strike="noStrike">
+              <a:rPr lang="en" sz="2100" b="1" i="0" u="none" strike="noStrike" cap="none">
                 <a:solidFill>
                   <a:schemeClr val="lt1"/>
                 </a:solidFill>
@@ -8524,7 +8667,7 @@
               </a:rPr>
               <a:t>Techniques</a:t>
             </a:r>
-            <a:endParaRPr b="0" i="0" sz="1100" u="none" cap="none" strike="noStrike">
+            <a:endParaRPr sz="1100" b="0" i="0" u="none" strike="noStrike" cap="none">
               <a:solidFill>
                 <a:srgbClr val="000000"/>
               </a:solidFill>
@@ -8556,12 +8699,12 @@
           </a:ln>
         </p:spPr>
         <p:txBody>
-          <a:bodyPr anchorCtr="0" anchor="t" bIns="34275" lIns="68575" spcFirstLastPara="1" rIns="68575" wrap="square" tIns="34275">
+          <a:bodyPr spcFirstLastPara="1" wrap="square" lIns="68575" tIns="34275" rIns="68575" bIns="34275" anchor="t" anchorCtr="0">
             <a:spAutoFit/>
           </a:bodyPr>
           <a:lstStyle/>
           <a:p>
-            <a:pPr indent="0" lvl="0" marL="0" marR="0" rtl="0" algn="just">
+            <a:pPr marL="0" marR="0" lvl="0" indent="0" algn="just" rtl="0">
               <a:lnSpc>
                 <a:spcPct val="100000"/>
               </a:lnSpc>
@@ -8579,7 +8722,7 @@
               <a:buNone/>
             </a:pPr>
             <a:r>
-              <a:rPr b="1" i="0" lang="en" sz="2400" u="none" cap="none" strike="noStrike">
+              <a:rPr lang="en" sz="2400" b="1" i="0" u="none" strike="noStrike" cap="none">
                 <a:solidFill>
                   <a:srgbClr val="0DB1C4"/>
                 </a:solidFill>
@@ -8590,7 +8733,7 @@
               </a:rPr>
               <a:t>Exception Handling Fundamentals</a:t>
             </a:r>
-            <a:endParaRPr b="0" i="0" sz="1100" u="none" cap="none" strike="noStrike">
+            <a:endParaRPr sz="1100" b="0" i="0" u="none" strike="noStrike" cap="none">
               <a:solidFill>
                 <a:srgbClr val="000000"/>
               </a:solidFill>
@@ -8638,12 +8781,12 @@
             </a:ln>
           </p:spPr>
           <p:txBody>
-            <a:bodyPr anchorCtr="0" anchor="ctr" bIns="34275" lIns="68575" spcFirstLastPara="1" rIns="68575" wrap="square" tIns="34275">
+            <a:bodyPr spcFirstLastPara="1" wrap="square" lIns="68575" tIns="34275" rIns="68575" bIns="34275" anchor="ctr" anchorCtr="0">
               <a:noAutofit/>
             </a:bodyPr>
             <a:lstStyle/>
             <a:p>
-              <a:pPr indent="0" lvl="0" marL="0" marR="0" rtl="0" algn="ctr">
+              <a:pPr marL="0" marR="0" lvl="0" indent="0" algn="ctr" rtl="0">
                 <a:lnSpc>
                   <a:spcPct val="100000"/>
                 </a:lnSpc>
@@ -8660,10 +8803,7 @@
                 <a:buFont typeface="Calibri"/>
                 <a:buNone/>
               </a:pPr>
-              <a:r>
-                <a:t/>
-              </a:r>
-              <a:endParaRPr b="0" i="0" sz="1400" u="none" cap="none" strike="noStrike">
+              <a:endParaRPr sz="1400" b="0" i="0" u="none" strike="noStrike" cap="none">
                 <a:solidFill>
                   <a:schemeClr val="lt1"/>
                 </a:solidFill>
@@ -8697,12 +8837,12 @@
             </a:ln>
           </p:spPr>
           <p:txBody>
-            <a:bodyPr anchorCtr="0" anchor="ctr" bIns="34275" lIns="68575" spcFirstLastPara="1" rIns="68575" wrap="square" tIns="34275">
+            <a:bodyPr spcFirstLastPara="1" wrap="square" lIns="68575" tIns="34275" rIns="68575" bIns="34275" anchor="ctr" anchorCtr="0">
               <a:noAutofit/>
             </a:bodyPr>
             <a:lstStyle/>
             <a:p>
-              <a:pPr indent="0" lvl="0" marL="0" marR="0" rtl="0" algn="ctr">
+              <a:pPr marL="0" marR="0" lvl="0" indent="0" algn="ctr" rtl="0">
                 <a:lnSpc>
                   <a:spcPct val="100000"/>
                 </a:lnSpc>
@@ -8719,10 +8859,7 @@
                 <a:buFont typeface="Calibri"/>
                 <a:buNone/>
               </a:pPr>
-              <a:r>
-                <a:t/>
-              </a:r>
-              <a:endParaRPr b="0" i="0" sz="1400" u="none" cap="none" strike="noStrike">
+              <a:endParaRPr sz="1400" b="0" i="0" u="none" strike="noStrike" cap="none">
                 <a:solidFill>
                   <a:schemeClr val="lt1"/>
                 </a:solidFill>
@@ -8755,7 +8892,7 @@
               <p:nvPr/>
             </p:nvSpPr>
             <p:spPr>
-              <a:xfrm flipH="1" rot="10800000">
+              <a:xfrm rot="10800000" flipH="1">
                 <a:off x="4713463" y="1638613"/>
                 <a:ext cx="817500" cy="817500"/>
               </a:xfrm>
@@ -8770,12 +8907,12 @@
               </a:ln>
             </p:spPr>
             <p:txBody>
-              <a:bodyPr anchorCtr="0" anchor="ctr" bIns="34275" lIns="68575" spcFirstLastPara="1" rIns="68575" wrap="square" tIns="34275">
+              <a:bodyPr spcFirstLastPara="1" wrap="square" lIns="68575" tIns="34275" rIns="68575" bIns="34275" anchor="ctr" anchorCtr="0">
                 <a:noAutofit/>
               </a:bodyPr>
               <a:lstStyle/>
               <a:p>
-                <a:pPr indent="0" lvl="0" marL="0" marR="0" rtl="0" algn="ctr">
+                <a:pPr marL="0" marR="0" lvl="0" indent="0" algn="ctr" rtl="0">
                   <a:lnSpc>
                     <a:spcPct val="100000"/>
                   </a:lnSpc>
@@ -8792,10 +8929,7 @@
                   <a:buFont typeface="Calibri"/>
                   <a:buNone/>
                 </a:pPr>
-                <a:r>
-                  <a:t/>
-                </a:r>
-                <a:endParaRPr b="0" i="0" sz="1400" u="none" cap="none" strike="noStrike">
+                <a:endParaRPr sz="1400" b="0" i="0" u="none" strike="noStrike" cap="none">
                   <a:solidFill>
                     <a:schemeClr val="lt1"/>
                   </a:solidFill>
@@ -8829,12 +8963,12 @@
               </a:ln>
             </p:spPr>
             <p:txBody>
-              <a:bodyPr anchorCtr="0" anchor="ctr" bIns="34275" lIns="68575" spcFirstLastPara="1" rIns="68575" wrap="square" tIns="34275">
+              <a:bodyPr spcFirstLastPara="1" wrap="square" lIns="68575" tIns="34275" rIns="68575" bIns="34275" anchor="ctr" anchorCtr="0">
                 <a:noAutofit/>
               </a:bodyPr>
               <a:lstStyle/>
               <a:p>
-                <a:pPr indent="0" lvl="0" marL="0" marR="0" rtl="0" algn="ctr">
+                <a:pPr marL="0" marR="0" lvl="0" indent="0" algn="ctr" rtl="0">
                   <a:lnSpc>
                     <a:spcPct val="100000"/>
                   </a:lnSpc>
@@ -8851,10 +8985,7 @@
                   <a:buFont typeface="Calibri"/>
                   <a:buNone/>
                 </a:pPr>
-                <a:r>
-                  <a:t/>
-                </a:r>
-                <a:endParaRPr b="0" i="0" sz="1400" u="none" cap="none" strike="noStrike">
+                <a:endParaRPr sz="1400" b="0" i="0" u="none" strike="noStrike" cap="none">
                   <a:solidFill>
                     <a:schemeClr val="lt1"/>
                   </a:solidFill>
@@ -8878,7 +9009,7 @@
           <a:blip r:embed="rId3">
             <a:alphaModFix/>
           </a:blip>
-          <a:srcRect b="0" l="0" r="0" t="0"/>
+          <a:srcRect/>
           <a:stretch/>
         </p:blipFill>
         <p:spPr>
@@ -8903,32 +9034,32 @@
   <p:timing>
     <p:tnLst>
       <p:par>
-        <p:cTn dur="indefinite" nodeType="tmRoot" restart="never">
+        <p:cTn id="1" dur="indefinite" restart="never" nodeType="tmRoot">
           <p:childTnLst>
             <p:seq concurrent="1" nextAc="seek">
-              <p:cTn dur="indefinite" id="2" nodeType="mainSeq">
+              <p:cTn id="2" dur="indefinite" nodeType="mainSeq">
                 <p:childTnLst>
                   <p:par>
-                    <p:cTn fill="hold">
+                    <p:cTn id="3" fill="hold">
                       <p:stCondLst>
                         <p:cond delay="indefinite"/>
                       </p:stCondLst>
                       <p:childTnLst>
                         <p:par>
-                          <p:cTn fill="hold">
+                          <p:cTn id="4" fill="hold">
                             <p:stCondLst>
                               <p:cond delay="0"/>
                             </p:stCondLst>
                             <p:childTnLst>
                               <p:par>
-                                <p:cTn fill="hold" nodeType="clickEffect" presetClass="entr" presetID="10" presetSubtype="0">
+                                <p:cTn id="5" presetID="10" presetClass="entr" presetSubtype="0" fill="hold" nodeType="clickEffect">
                                   <p:stCondLst>
                                     <p:cond delay="0"/>
                                   </p:stCondLst>
                                   <p:childTnLst>
                                     <p:set>
                                       <p:cBhvr>
-                                        <p:cTn dur="1" fill="hold">
+                                        <p:cTn id="6" dur="1" fill="hold">
                                           <p:stCondLst>
                                             <p:cond delay="0"/>
                                           </p:stCondLst>
@@ -8944,9 +9075,9 @@
                                         <p:strVal val="visible"/>
                                       </p:to>
                                     </p:set>
-                                    <p:animEffect filter="fade" transition="in">
+                                    <p:animEffect transition="in" filter="fade">
                                       <p:cBhvr>
-                                        <p:cTn dur="500"/>
+                                        <p:cTn id="7" dur="500"/>
                                         <p:tgtEl>
                                           <p:spTgt spid="75"/>
                                         </p:tgtEl>
@@ -8956,14 +9087,14 @@
                                 </p:cTn>
                               </p:par>
                               <p:par>
-                                <p:cTn fill="hold" nodeType="withEffect" presetClass="entr" presetID="10" presetSubtype="0">
+                                <p:cTn id="8" presetID="10" presetClass="entr" presetSubtype="0" fill="hold" nodeType="withEffect">
                                   <p:stCondLst>
                                     <p:cond delay="0"/>
                                   </p:stCondLst>
                                   <p:childTnLst>
                                     <p:set>
                                       <p:cBhvr>
-                                        <p:cTn dur="1" fill="hold">
+                                        <p:cTn id="9" dur="1" fill="hold">
                                           <p:stCondLst>
                                             <p:cond delay="0"/>
                                           </p:stCondLst>
@@ -8979,9 +9110,9 @@
                                         <p:strVal val="visible"/>
                                       </p:to>
                                     </p:set>
-                                    <p:animEffect filter="fade" transition="in">
+                                    <p:animEffect transition="in" filter="fade">
                                       <p:cBhvr>
-                                        <p:cTn dur="500"/>
+                                        <p:cTn id="10" dur="500"/>
                                         <p:tgtEl>
                                           <p:spTgt spid="82"/>
                                         </p:tgtEl>
@@ -8991,14 +9122,14 @@
                                 </p:cTn>
                               </p:par>
                               <p:par>
-                                <p:cTn fill="hold" nodeType="withEffect" presetClass="entr" presetID="10" presetSubtype="0">
+                                <p:cTn id="11" presetID="10" presetClass="entr" presetSubtype="0" fill="hold" nodeType="withEffect">
                                   <p:stCondLst>
                                     <p:cond delay="0"/>
                                   </p:stCondLst>
                                   <p:childTnLst>
                                     <p:set>
                                       <p:cBhvr>
-                                        <p:cTn dur="1" fill="hold">
+                                        <p:cTn id="12" dur="1" fill="hold">
                                           <p:stCondLst>
                                             <p:cond delay="0"/>
                                           </p:stCondLst>
@@ -9014,9 +9145,9 @@
                                         <p:strVal val="visible"/>
                                       </p:to>
                                     </p:set>
-                                    <p:animEffect filter="fade" transition="in">
+                                    <p:animEffect transition="in" filter="fade">
                                       <p:cBhvr>
-                                        <p:cTn dur="500"/>
+                                        <p:cTn id="13" dur="500"/>
                                         <p:tgtEl>
                                           <p:spTgt spid="81"/>
                                         </p:tgtEl>
@@ -9034,14 +9165,14 @@
                 </p:childTnLst>
               </p:cTn>
               <p:prevCondLst>
-                <p:cond evt="onPrev">
+                <p:cond evt="onPrev" delay="0">
                   <p:tgtEl>
                     <p:sldTgt/>
                   </p:tgtEl>
                 </p:cond>
               </p:prevCondLst>
               <p:nextCondLst>
-                <p:cond evt="onNext">
+                <p:cond evt="onNext" delay="0">
                   <p:tgtEl>
                     <p:sldTgt/>
                   </p:tgtEl>
@@ -9057,11 +9188,11 @@
 </file>
 
 <file path=ppt/slides/slide2.xml><?xml version="1.0" encoding="utf-8"?>
-<p:sld xmlns:a="http://schemas.openxmlformats.org/drawingml/2006/main" xmlns:r="http://schemas.openxmlformats.org/officeDocument/2006/relationships" xmlns:mc="http://schemas.openxmlformats.org/markup-compatibility/2006" xmlns:mv="urn:schemas-microsoft-com:mac:vml" xmlns:p="http://schemas.openxmlformats.org/presentationml/2006/main" xmlns:c="http://schemas.openxmlformats.org/drawingml/2006/chart" xmlns:dgm="http://schemas.openxmlformats.org/drawingml/2006/diagram" xmlns:o="urn:schemas-microsoft-com:office:office" xmlns:v="urn:schemas-microsoft-com:vml" xmlns:pvml="urn:schemas-microsoft-com:office:powerpoint" xmlns:com="http://schemas.openxmlformats.org/drawingml/2006/compatibility" xmlns:p14="http://schemas.microsoft.com/office/powerpoint/2010/main" xmlns:p15="http://schemas.microsoft.com/office/powerpoint/2012/main" xmlns:ahyp="http://schemas.microsoft.com/office/drawing/2018/hyperlinkcolor">
+<p:sld xmlns:a="http://schemas.openxmlformats.org/drawingml/2006/main" xmlns:r="http://schemas.openxmlformats.org/officeDocument/2006/relationships" xmlns:p="http://schemas.openxmlformats.org/presentationml/2006/main">
   <p:cSld>
     <p:spTree>
       <p:nvGrpSpPr>
-        <p:cNvPr id="93" name="Shape 93"/>
+        <p:cNvPr id="1" name="Shape 93"/>
         <p:cNvGrpSpPr/>
         <p:nvPr/>
       </p:nvGrpSpPr>
@@ -9095,12 +9226,12 @@
           </a:ln>
         </p:spPr>
         <p:txBody>
-          <a:bodyPr anchorCtr="0" anchor="ctr" bIns="34275" lIns="68575" spcFirstLastPara="1" rIns="68575" wrap="square" tIns="34275">
+          <a:bodyPr spcFirstLastPara="1" wrap="square" lIns="68575" tIns="34275" rIns="68575" bIns="34275" anchor="ctr" anchorCtr="0">
             <a:noAutofit/>
           </a:bodyPr>
           <a:lstStyle/>
           <a:p>
-            <a:pPr indent="0" lvl="0" marL="0" marR="0" rtl="0" algn="ctr">
+            <a:pPr marL="0" marR="0" lvl="0" indent="0" algn="ctr" rtl="0">
               <a:lnSpc>
                 <a:spcPct val="100000"/>
               </a:lnSpc>
@@ -9117,10 +9248,7 @@
               <a:buFont typeface="Calibri"/>
               <a:buNone/>
             </a:pPr>
-            <a:r>
-              <a:t/>
-            </a:r>
-            <a:endParaRPr b="0" i="0" sz="1400" u="none" cap="none" strike="noStrike">
+            <a:endParaRPr sz="1400" b="0" i="0" u="none" strike="noStrike" cap="none">
               <a:solidFill>
                 <a:srgbClr val="FFFFFF"/>
               </a:solidFill>
@@ -9152,12 +9280,12 @@
           </a:ln>
         </p:spPr>
         <p:txBody>
-          <a:bodyPr anchorCtr="0" anchor="t" bIns="34275" lIns="68575" spcFirstLastPara="1" rIns="68575" wrap="square" tIns="34275">
+          <a:bodyPr spcFirstLastPara="1" wrap="square" lIns="68575" tIns="34275" rIns="68575" bIns="34275" anchor="t" anchorCtr="0">
             <a:noAutofit/>
           </a:bodyPr>
           <a:lstStyle/>
           <a:p>
-            <a:pPr indent="0" lvl="0" marL="0" marR="0" rtl="0" algn="l">
+            <a:pPr marL="0" marR="0" lvl="0" indent="0" algn="l" rtl="0">
               <a:lnSpc>
                 <a:spcPct val="100000"/>
               </a:lnSpc>
@@ -9174,10 +9302,7 @@
               <a:buFont typeface="Calibri"/>
               <a:buNone/>
             </a:pPr>
-            <a:r>
-              <a:t/>
-            </a:r>
-            <a:endParaRPr b="1" i="0" sz="1400" u="none" cap="none" strike="noStrike">
+            <a:endParaRPr sz="1400" b="1" i="0" u="none" strike="noStrike" cap="none">
               <a:solidFill>
                 <a:schemeClr val="dk1"/>
               </a:solidFill>
@@ -9188,7 +9313,7 @@
             </a:endParaRPr>
           </a:p>
           <a:p>
-            <a:pPr indent="0" lvl="0" marL="0" marR="0" rtl="0" algn="l">
+            <a:pPr marL="0" marR="0" lvl="0" indent="0" algn="l" rtl="0">
               <a:lnSpc>
                 <a:spcPct val="100000"/>
               </a:lnSpc>
@@ -9205,10 +9330,7 @@
               <a:buFont typeface="Calibri"/>
               <a:buNone/>
             </a:pPr>
-            <a:r>
-              <a:t/>
-            </a:r>
-            <a:endParaRPr b="1" i="0" sz="1400" u="none" cap="none" strike="noStrike">
+            <a:endParaRPr sz="1400" b="1" i="0" u="none" strike="noStrike" cap="none">
               <a:solidFill>
                 <a:schemeClr val="lt1"/>
               </a:solidFill>
@@ -9240,12 +9362,12 @@
           </a:ln>
         </p:spPr>
         <p:txBody>
-          <a:bodyPr anchorCtr="0" anchor="t" bIns="34275" lIns="68575" spcFirstLastPara="1" rIns="68575" wrap="square" tIns="34275">
+          <a:bodyPr spcFirstLastPara="1" wrap="square" lIns="68575" tIns="34275" rIns="68575" bIns="34275" anchor="t" anchorCtr="0">
             <a:spAutoFit/>
           </a:bodyPr>
           <a:lstStyle/>
           <a:p>
-            <a:pPr indent="0" lvl="0" marL="0" marR="0" rtl="0" algn="l">
+            <a:pPr marL="0" marR="0" lvl="0" indent="0" algn="l" rtl="0">
               <a:lnSpc>
                 <a:spcPct val="100000"/>
               </a:lnSpc>
@@ -9263,7 +9385,7 @@
               <a:buNone/>
             </a:pPr>
             <a:r>
-              <a:rPr b="1" i="0" lang="en" sz="2400" u="none" cap="none" strike="noStrike">
+              <a:rPr lang="en" sz="2400" b="1" i="0" u="none" strike="noStrike" cap="none">
                 <a:solidFill>
                   <a:schemeClr val="dk1"/>
                 </a:solidFill>
@@ -9274,7 +9396,7 @@
               </a:rPr>
               <a:t>Introduction &amp; Importance</a:t>
             </a:r>
-            <a:endParaRPr b="1" i="0" sz="2400" u="none" cap="none" strike="noStrike">
+            <a:endParaRPr sz="2400" b="1" i="0" u="none" strike="noStrike" cap="none">
               <a:solidFill>
                 <a:srgbClr val="000000"/>
               </a:solidFill>
@@ -9288,7 +9410,7 @@
       </p:sp>
       <p:pic>
         <p:nvPicPr>
-          <p:cNvPr descr="Dart_logo" id="97" name="Google Shape;97;p15"/>
+          <p:cNvPr id="97" name="Google Shape;97;p15" descr="Dart_logo"/>
           <p:cNvPicPr preferRelativeResize="0"/>
           <p:nvPr/>
         </p:nvPicPr>
@@ -9296,7 +9418,7 @@
           <a:blip r:embed="rId3">
             <a:alphaModFix/>
           </a:blip>
-          <a:srcRect b="0" l="0" r="0" t="0"/>
+          <a:srcRect/>
           <a:stretch/>
         </p:blipFill>
         <p:spPr>
@@ -9312,7 +9434,7 @@
             <a:noFill/>
           </a:ln>
           <a:effectLst>
-            <a:outerShdw blurRad="76200" kx="-800311" rotWithShape="0" algn="bl" dir="2700000" dist="12700" sy="-23000">
+            <a:outerShdw blurRad="76200" dist="12700" dir="2700000" sy="-23000" kx="-800311" algn="bl" rotWithShape="0">
               <a:srgbClr val="000000">
                 <a:alpha val="20000"/>
               </a:srgbClr>
@@ -9333,7 +9455,7 @@
           </a:xfrm>
           <a:prstGeom prst="roundRect">
             <a:avLst>
-              <a:gd fmla="val 16667" name="adj"/>
+              <a:gd name="adj" fmla="val 16667"/>
             </a:avLst>
           </a:prstGeom>
           <a:solidFill>
@@ -9343,7 +9465,7 @@
             <a:noFill/>
           </a:ln>
           <a:effectLst>
-            <a:outerShdw blurRad="44450" algn="ctr" dir="5400000" dist="27940">
+            <a:outerShdw blurRad="44450" dist="27940" dir="5400000" algn="ctr">
               <a:srgbClr val="000000">
                 <a:alpha val="31370"/>
               </a:srgbClr>
@@ -9351,12 +9473,12 @@
           </a:effectLst>
         </p:spPr>
         <p:txBody>
-          <a:bodyPr anchorCtr="0" anchor="ctr" bIns="34275" lIns="68575" spcFirstLastPara="1" rIns="68575" wrap="square" tIns="34275">
+          <a:bodyPr spcFirstLastPara="1" wrap="square" lIns="68575" tIns="34275" rIns="68575" bIns="34275" anchor="ctr" anchorCtr="0">
             <a:noAutofit/>
           </a:bodyPr>
           <a:lstStyle/>
           <a:p>
-            <a:pPr indent="0" lvl="0" marL="0" marR="0" rtl="0" algn="l">
+            <a:pPr marL="0" marR="0" lvl="0" indent="0" algn="l" rtl="0">
               <a:lnSpc>
                 <a:spcPct val="100000"/>
               </a:lnSpc>
@@ -9373,10 +9495,7 @@
               <a:buFont typeface="Calibri"/>
               <a:buNone/>
             </a:pPr>
-            <a:r>
-              <a:t/>
-            </a:r>
-            <a:endParaRPr b="1" i="0" sz="1800" u="none" cap="none" strike="noStrike">
+            <a:endParaRPr sz="1800" b="1" i="0" u="none" strike="noStrike" cap="none">
               <a:solidFill>
                 <a:schemeClr val="dk1"/>
               </a:solidFill>
@@ -9387,7 +9506,7 @@
             </a:endParaRPr>
           </a:p>
           <a:p>
-            <a:pPr indent="0" lvl="0" marL="0" marR="0" rtl="0" algn="l">
+            <a:pPr marL="0" marR="0" lvl="0" indent="0" algn="l" rtl="0">
               <a:lnSpc>
                 <a:spcPct val="100000"/>
               </a:lnSpc>
@@ -9405,7 +9524,7 @@
               <a:buNone/>
             </a:pPr>
             <a:r>
-              <a:rPr b="1" i="0" lang="en" sz="1900" u="none" cap="none" strike="noStrike">
+              <a:rPr lang="en" sz="1900" b="1" i="0" u="none" strike="noStrike" cap="none">
                 <a:solidFill>
                   <a:schemeClr val="lt1"/>
                 </a:solidFill>
@@ -9416,7 +9535,7 @@
               </a:rPr>
               <a:t>What are exceptions?</a:t>
             </a:r>
-            <a:endParaRPr b="0" i="0" sz="1900" u="none" cap="none" strike="noStrike">
+            <a:endParaRPr sz="1900" b="0" i="0" u="none" strike="noStrike" cap="none">
               <a:solidFill>
                 <a:srgbClr val="000000"/>
               </a:solidFill>
@@ -9427,7 +9546,7 @@
             </a:endParaRPr>
           </a:p>
           <a:p>
-            <a:pPr indent="0" lvl="0" marL="0" marR="0" rtl="0" algn="l">
+            <a:pPr marL="0" marR="0" lvl="0" indent="0" algn="l" rtl="0">
               <a:lnSpc>
                 <a:spcPct val="100000"/>
               </a:lnSpc>
@@ -9444,10 +9563,7 @@
               <a:buFont typeface="Calibri"/>
               <a:buNone/>
             </a:pPr>
-            <a:r>
-              <a:t/>
-            </a:r>
-            <a:endParaRPr b="0" i="0" sz="1200" u="none" cap="none" strike="noStrike">
+            <a:endParaRPr sz="1200" b="0" i="0" u="none" strike="noStrike" cap="none">
               <a:solidFill>
                 <a:schemeClr val="lt1"/>
               </a:solidFill>
@@ -9458,7 +9574,7 @@
             </a:endParaRPr>
           </a:p>
           <a:p>
-            <a:pPr indent="-215900" lvl="0" marL="215900" marR="0" rtl="0" algn="l">
+            <a:pPr marL="215900" marR="0" lvl="0" indent="-215900" algn="l" rtl="0">
               <a:lnSpc>
                 <a:spcPct val="100000"/>
               </a:lnSpc>
@@ -9476,7 +9592,7 @@
               <a:buChar char="•"/>
             </a:pPr>
             <a:r>
-              <a:rPr b="0" i="0" lang="en" sz="1200" u="none" cap="none" strike="noStrike">
+              <a:rPr lang="en" sz="1200" b="0" i="0" u="none" strike="noStrike" cap="none">
                 <a:solidFill>
                   <a:schemeClr val="lt1"/>
                 </a:solidFill>
@@ -9487,7 +9603,7 @@
               </a:rPr>
               <a:t>Anomalous conditions that disrupt program flow.</a:t>
             </a:r>
-            <a:endParaRPr b="0" i="0" sz="1100" u="none" cap="none" strike="noStrike">
+            <a:endParaRPr sz="1100" b="0" i="0" u="none" strike="noStrike" cap="none">
               <a:solidFill>
                 <a:srgbClr val="000000"/>
               </a:solidFill>
@@ -9498,7 +9614,7 @@
             </a:endParaRPr>
           </a:p>
           <a:p>
-            <a:pPr indent="-215900" lvl="0" marL="215900" marR="0" rtl="0" algn="l">
+            <a:pPr marL="215900" marR="0" lvl="0" indent="-215900" algn="l" rtl="0">
               <a:lnSpc>
                 <a:spcPct val="100000"/>
               </a:lnSpc>
@@ -9516,7 +9632,7 @@
               <a:buChar char="•"/>
             </a:pPr>
             <a:r>
-              <a:rPr b="0" i="0" lang="en" sz="1200" u="none" cap="none" strike="noStrike">
+              <a:rPr lang="en" sz="1200" b="0" i="0" u="none" strike="noStrike" cap="none">
                 <a:solidFill>
                   <a:schemeClr val="lt1"/>
                 </a:solidFill>
@@ -9527,7 +9643,7 @@
               </a:rPr>
               <a:t>Can be caused by various factors (e.g., user input, resource errors, network issues).</a:t>
             </a:r>
-            <a:endParaRPr b="0" i="0" sz="1100" u="none" cap="none" strike="noStrike">
+            <a:endParaRPr sz="1100" b="0" i="0" u="none" strike="noStrike" cap="none">
               <a:solidFill>
                 <a:srgbClr val="000000"/>
               </a:solidFill>
@@ -9538,7 +9654,7 @@
             </a:endParaRPr>
           </a:p>
           <a:p>
-            <a:pPr indent="0" lvl="0" marL="0" marR="0" rtl="0" algn="ctr">
+            <a:pPr marL="0" marR="0" lvl="0" indent="0" algn="ctr" rtl="0">
               <a:lnSpc>
                 <a:spcPct val="100000"/>
               </a:lnSpc>
@@ -9555,10 +9671,7 @@
               <a:buFont typeface="Calibri"/>
               <a:buNone/>
             </a:pPr>
-            <a:r>
-              <a:t/>
-            </a:r>
-            <a:endParaRPr b="0" i="0" sz="1400" u="none" cap="none" strike="noStrike">
+            <a:endParaRPr sz="1400" b="0" i="0" u="none" strike="noStrike" cap="none">
               <a:solidFill>
                 <a:schemeClr val="lt1"/>
               </a:solidFill>
@@ -9583,7 +9696,7 @@
           </a:xfrm>
           <a:prstGeom prst="roundRect">
             <a:avLst>
-              <a:gd fmla="val 16667" name="adj"/>
+              <a:gd name="adj" fmla="val 16667"/>
             </a:avLst>
           </a:prstGeom>
           <a:solidFill>
@@ -9593,7 +9706,7 @@
             <a:noFill/>
           </a:ln>
           <a:effectLst>
-            <a:outerShdw blurRad="44450" algn="ctr" dir="5400000" dist="27940">
+            <a:outerShdw blurRad="44450" dist="27940" dir="5400000" algn="ctr">
               <a:srgbClr val="000000">
                 <a:alpha val="31370"/>
               </a:srgbClr>
@@ -9601,12 +9714,12 @@
           </a:effectLst>
         </p:spPr>
         <p:txBody>
-          <a:bodyPr anchorCtr="0" anchor="ctr" bIns="34275" lIns="68575" spcFirstLastPara="1" rIns="68575" wrap="square" tIns="34275">
+          <a:bodyPr spcFirstLastPara="1" wrap="square" lIns="68575" tIns="34275" rIns="68575" bIns="34275" anchor="ctr" anchorCtr="0">
             <a:noAutofit/>
           </a:bodyPr>
           <a:lstStyle/>
           <a:p>
-            <a:pPr indent="0" lvl="0" marL="0" marR="0" rtl="0" algn="l">
+            <a:pPr marL="0" marR="0" lvl="0" indent="0" algn="l" rtl="0">
               <a:lnSpc>
                 <a:spcPct val="100000"/>
               </a:lnSpc>
@@ -9623,10 +9736,7 @@
               <a:buFont typeface="Calibri"/>
               <a:buNone/>
             </a:pPr>
-            <a:r>
-              <a:t/>
-            </a:r>
-            <a:endParaRPr b="1" i="0" sz="1400" u="none" cap="none" strike="noStrike">
+            <a:endParaRPr sz="1400" b="1" i="0" u="none" strike="noStrike" cap="none">
               <a:solidFill>
                 <a:schemeClr val="lt1"/>
               </a:solidFill>
@@ -9637,7 +9747,7 @@
             </a:endParaRPr>
           </a:p>
           <a:p>
-            <a:pPr indent="0" lvl="0" marL="0" marR="0" rtl="0" algn="l">
+            <a:pPr marL="0" marR="0" lvl="0" indent="0" algn="l" rtl="0">
               <a:lnSpc>
                 <a:spcPct val="100000"/>
               </a:lnSpc>
@@ -9655,7 +9765,7 @@
               <a:buNone/>
             </a:pPr>
             <a:r>
-              <a:rPr b="1" i="0" lang="en" sz="1900" u="none" cap="none" strike="noStrike">
+              <a:rPr lang="en" sz="1900" b="1" i="0" u="none" strike="noStrike" cap="none">
                 <a:solidFill>
                   <a:schemeClr val="lt1"/>
                 </a:solidFill>
@@ -9666,7 +9776,7 @@
               </a:rPr>
               <a:t>Importance of exception handling</a:t>
             </a:r>
-            <a:endParaRPr b="0" i="0" sz="1900" u="none" cap="none" strike="noStrike">
+            <a:endParaRPr sz="1900" b="0" i="0" u="none" strike="noStrike" cap="none">
               <a:solidFill>
                 <a:srgbClr val="000000"/>
               </a:solidFill>
@@ -9677,7 +9787,7 @@
             </a:endParaRPr>
           </a:p>
           <a:p>
-            <a:pPr indent="0" lvl="0" marL="0" marR="0" rtl="0" algn="l">
+            <a:pPr marL="0" marR="0" lvl="0" indent="0" algn="l" rtl="0">
               <a:lnSpc>
                 <a:spcPct val="100000"/>
               </a:lnSpc>
@@ -9694,10 +9804,7 @@
               <a:buFont typeface="Calibri"/>
               <a:buNone/>
             </a:pPr>
-            <a:r>
-              <a:t/>
-            </a:r>
-            <a:endParaRPr b="1" i="0" sz="1400" u="none" cap="none" strike="noStrike">
+            <a:endParaRPr sz="1400" b="1" i="0" u="none" strike="noStrike" cap="none">
               <a:solidFill>
                 <a:schemeClr val="dk1"/>
               </a:solidFill>
@@ -9708,7 +9815,7 @@
             </a:endParaRPr>
           </a:p>
           <a:p>
-            <a:pPr indent="-215900" lvl="0" marL="215900" marR="0" rtl="0" algn="l">
+            <a:pPr marL="215900" marR="0" lvl="0" indent="-215900" algn="l" rtl="0">
               <a:lnSpc>
                 <a:spcPct val="100000"/>
               </a:lnSpc>
@@ -9726,7 +9833,7 @@
               <a:buChar char="•"/>
             </a:pPr>
             <a:r>
-              <a:rPr b="0" i="0" lang="en" sz="1200" u="none" cap="none" strike="noStrike">
+              <a:rPr lang="en" sz="1200" b="0" i="0" u="none" strike="noStrike" cap="none">
                 <a:solidFill>
                   <a:schemeClr val="lt1"/>
                 </a:solidFill>
@@ -9737,7 +9844,7 @@
               </a:rPr>
               <a:t>Ensures program stability and prevents crashes.</a:t>
             </a:r>
-            <a:endParaRPr b="0" i="0" sz="1200" u="none" cap="none" strike="noStrike">
+            <a:endParaRPr sz="1200" b="0" i="0" u="none" strike="noStrike" cap="none">
               <a:solidFill>
                 <a:srgbClr val="000000"/>
               </a:solidFill>
@@ -9748,7 +9855,7 @@
             </a:endParaRPr>
           </a:p>
           <a:p>
-            <a:pPr indent="-215900" lvl="0" marL="215900" marR="0" rtl="0" algn="l">
+            <a:pPr marL="215900" marR="0" lvl="0" indent="-215900" algn="l" rtl="0">
               <a:lnSpc>
                 <a:spcPct val="100000"/>
               </a:lnSpc>
@@ -9766,7 +9873,7 @@
               <a:buChar char="•"/>
             </a:pPr>
             <a:r>
-              <a:rPr b="0" i="0" lang="en" sz="1200" u="none" cap="none" strike="noStrike">
+              <a:rPr lang="en" sz="1200" b="0" i="0" u="none" strike="noStrike" cap="none">
                 <a:solidFill>
                   <a:schemeClr val="lt1"/>
                 </a:solidFill>
@@ -9777,7 +9884,7 @@
               </a:rPr>
               <a:t>Allows for graceful handling of errors.</a:t>
             </a:r>
-            <a:endParaRPr b="0" i="0" sz="1200" u="none" cap="none" strike="noStrike">
+            <a:endParaRPr sz="1200" b="0" i="0" u="none" strike="noStrike" cap="none">
               <a:solidFill>
                 <a:srgbClr val="000000"/>
               </a:solidFill>
@@ -9788,7 +9895,7 @@
             </a:endParaRPr>
           </a:p>
           <a:p>
-            <a:pPr indent="-215900" lvl="0" marL="215900" marR="0" rtl="0" algn="l">
+            <a:pPr marL="215900" marR="0" lvl="0" indent="-215900" algn="l" rtl="0">
               <a:lnSpc>
                 <a:spcPct val="100000"/>
               </a:lnSpc>
@@ -9806,7 +9913,7 @@
               <a:buChar char="•"/>
             </a:pPr>
             <a:r>
-              <a:rPr b="0" i="0" lang="en" sz="1200" u="none" cap="none" strike="noStrike">
+              <a:rPr lang="en" sz="1200" b="0" i="0" u="none" strike="noStrike" cap="none">
                 <a:solidFill>
                   <a:schemeClr val="lt1"/>
                 </a:solidFill>
@@ -9817,7 +9924,7 @@
               </a:rPr>
               <a:t>Improves application robustness and user experience.</a:t>
             </a:r>
-            <a:endParaRPr b="0" i="0" sz="1200" u="none" cap="none" strike="noStrike">
+            <a:endParaRPr sz="1200" b="0" i="0" u="none" strike="noStrike" cap="none">
               <a:solidFill>
                 <a:srgbClr val="000000"/>
               </a:solidFill>
@@ -9828,7 +9935,7 @@
             </a:endParaRPr>
           </a:p>
           <a:p>
-            <a:pPr indent="0" lvl="0" marL="0" marR="0" rtl="0" algn="ctr">
+            <a:pPr marL="0" marR="0" lvl="0" indent="0" algn="ctr" rtl="0">
               <a:lnSpc>
                 <a:spcPct val="100000"/>
               </a:lnSpc>
@@ -9845,10 +9952,7 @@
               <a:buFont typeface="Calibri"/>
               <a:buNone/>
             </a:pPr>
-            <a:r>
-              <a:t/>
-            </a:r>
-            <a:endParaRPr b="0" i="0" sz="1400" u="none" cap="none" strike="noStrike">
+            <a:endParaRPr sz="1400" b="0" i="0" u="none" strike="noStrike" cap="none">
               <a:solidFill>
                 <a:schemeClr val="lt1"/>
               </a:solidFill>
@@ -9873,7 +9977,7 @@
           </a:xfrm>
           <a:prstGeom prst="roundRect">
             <a:avLst>
-              <a:gd fmla="val 16667" name="adj"/>
+              <a:gd name="adj" fmla="val 16667"/>
             </a:avLst>
           </a:prstGeom>
           <a:solidFill>
@@ -9883,7 +9987,7 @@
             <a:noFill/>
           </a:ln>
           <a:effectLst>
-            <a:outerShdw blurRad="44450" algn="ctr" dir="5400000" dist="27940">
+            <a:outerShdw blurRad="44450" dist="27940" dir="5400000" algn="ctr">
               <a:srgbClr val="000000">
                 <a:alpha val="31370"/>
               </a:srgbClr>
@@ -9891,12 +9995,12 @@
           </a:effectLst>
         </p:spPr>
         <p:txBody>
-          <a:bodyPr anchorCtr="0" anchor="ctr" bIns="34275" lIns="68575" spcFirstLastPara="1" rIns="68575" wrap="square" tIns="34275">
+          <a:bodyPr spcFirstLastPara="1" wrap="square" lIns="68575" tIns="34275" rIns="68575" bIns="34275" anchor="ctr" anchorCtr="0">
             <a:noAutofit/>
           </a:bodyPr>
           <a:lstStyle/>
           <a:p>
-            <a:pPr indent="0" lvl="0" marL="0" marR="0" rtl="0" algn="l">
+            <a:pPr marL="0" marR="0" lvl="0" indent="0" algn="l" rtl="0">
               <a:lnSpc>
                 <a:spcPct val="100000"/>
               </a:lnSpc>
@@ -9913,10 +10017,7 @@
               <a:buFont typeface="Calibri"/>
               <a:buNone/>
             </a:pPr>
-            <a:r>
-              <a:t/>
-            </a:r>
-            <a:endParaRPr b="1" i="0" sz="1400" u="none" cap="none" strike="noStrike">
+            <a:endParaRPr sz="1400" b="1" i="0" u="none" strike="noStrike" cap="none">
               <a:solidFill>
                 <a:schemeClr val="lt1"/>
               </a:solidFill>
@@ -9927,7 +10028,7 @@
             </a:endParaRPr>
           </a:p>
           <a:p>
-            <a:pPr indent="0" lvl="0" marL="0" marR="0" rtl="0" algn="l">
+            <a:pPr marL="0" marR="0" lvl="0" indent="0" algn="l" rtl="0">
               <a:lnSpc>
                 <a:spcPct val="100000"/>
               </a:lnSpc>
@@ -9945,7 +10046,7 @@
               <a:buNone/>
             </a:pPr>
             <a:r>
-              <a:rPr b="1" i="0" lang="en" sz="1400" u="none" cap="none" strike="noStrike">
+              <a:rPr lang="en" sz="1400" b="1" i="0" u="none" strike="noStrike" cap="none">
                 <a:solidFill>
                   <a:schemeClr val="lt1"/>
                 </a:solidFill>
@@ -9956,7 +10057,7 @@
               </a:rPr>
               <a:t>Benefits of proper exception handling</a:t>
             </a:r>
-            <a:endParaRPr b="0" i="0" sz="1100" u="none" cap="none" strike="noStrike">
+            <a:endParaRPr sz="1100" b="0" i="0" u="none" strike="noStrike" cap="none">
               <a:solidFill>
                 <a:srgbClr val="000000"/>
               </a:solidFill>
@@ -9967,7 +10068,7 @@
             </a:endParaRPr>
           </a:p>
           <a:p>
-            <a:pPr indent="0" lvl="0" marL="0" marR="0" rtl="0" algn="l">
+            <a:pPr marL="0" marR="0" lvl="0" indent="0" algn="l" rtl="0">
               <a:lnSpc>
                 <a:spcPct val="100000"/>
               </a:lnSpc>
@@ -9984,10 +10085,7 @@
               <a:buFont typeface="Calibri"/>
               <a:buNone/>
             </a:pPr>
-            <a:r>
-              <a:t/>
-            </a:r>
-            <a:endParaRPr b="1" i="0" sz="1400" u="none" cap="none" strike="noStrike">
+            <a:endParaRPr sz="1400" b="1" i="0" u="none" strike="noStrike" cap="none">
               <a:solidFill>
                 <a:schemeClr val="lt1"/>
               </a:solidFill>
@@ -9998,7 +10096,7 @@
             </a:endParaRPr>
           </a:p>
           <a:p>
-            <a:pPr indent="-215900" lvl="0" marL="215900" marR="0" rtl="0" algn="l">
+            <a:pPr marL="215900" marR="0" lvl="0" indent="-215900" algn="l" rtl="0">
               <a:lnSpc>
                 <a:spcPct val="100000"/>
               </a:lnSpc>
@@ -10016,7 +10114,7 @@
               <a:buChar char="•"/>
             </a:pPr>
             <a:r>
-              <a:rPr b="0" i="0" lang="en" sz="1200" u="none" cap="none" strike="noStrike">
+              <a:rPr lang="en" sz="1200" b="0" i="0" u="none" strike="noStrike" cap="none">
                 <a:solidFill>
                   <a:schemeClr val="lt1"/>
                 </a:solidFill>
@@ -10027,7 +10125,7 @@
               </a:rPr>
               <a:t>Increased code quality and maintainability.</a:t>
             </a:r>
-            <a:endParaRPr b="0" i="0" sz="1100" u="none" cap="none" strike="noStrike">
+            <a:endParaRPr sz="1100" b="0" i="0" u="none" strike="noStrike" cap="none">
               <a:solidFill>
                 <a:srgbClr val="000000"/>
               </a:solidFill>
@@ -10038,7 +10136,7 @@
             </a:endParaRPr>
           </a:p>
           <a:p>
-            <a:pPr indent="-215900" lvl="0" marL="215900" marR="0" rtl="0" algn="l">
+            <a:pPr marL="215900" marR="0" lvl="0" indent="-215900" algn="l" rtl="0">
               <a:lnSpc>
                 <a:spcPct val="100000"/>
               </a:lnSpc>
@@ -10056,7 +10154,7 @@
               <a:buChar char="•"/>
             </a:pPr>
             <a:r>
-              <a:rPr b="0" i="0" lang="en" sz="1200" u="none" cap="none" strike="noStrike">
+              <a:rPr lang="en" sz="1200" b="0" i="0" u="none" strike="noStrike" cap="none">
                 <a:solidFill>
                   <a:schemeClr val="lt1"/>
                 </a:solidFill>
@@ -10067,7 +10165,7 @@
               </a:rPr>
               <a:t>Easier debugging and troubleshooting.</a:t>
             </a:r>
-            <a:endParaRPr b="0" i="0" sz="1100" u="none" cap="none" strike="noStrike">
+            <a:endParaRPr sz="1100" b="0" i="0" u="none" strike="noStrike" cap="none">
               <a:solidFill>
                 <a:srgbClr val="000000"/>
               </a:solidFill>
@@ -10078,7 +10176,7 @@
             </a:endParaRPr>
           </a:p>
           <a:p>
-            <a:pPr indent="-215900" lvl="0" marL="215900" marR="0" rtl="0" algn="l">
+            <a:pPr marL="215900" marR="0" lvl="0" indent="-215900" algn="l" rtl="0">
               <a:lnSpc>
                 <a:spcPct val="100000"/>
               </a:lnSpc>
@@ -10096,7 +10194,7 @@
               <a:buChar char="•"/>
             </a:pPr>
             <a:r>
-              <a:rPr b="0" i="0" lang="en" sz="1200" u="none" cap="none" strike="noStrike">
+              <a:rPr lang="en" sz="1200" b="0" i="0" u="none" strike="noStrike" cap="none">
                 <a:solidFill>
                   <a:schemeClr val="lt1"/>
                 </a:solidFill>
@@ -10107,7 +10205,7 @@
               </a:rPr>
               <a:t>Improved error reporting and logging.</a:t>
             </a:r>
-            <a:endParaRPr b="0" i="0" sz="1100" u="none" cap="none" strike="noStrike">
+            <a:endParaRPr sz="1100" b="0" i="0" u="none" strike="noStrike" cap="none">
               <a:solidFill>
                 <a:srgbClr val="000000"/>
               </a:solidFill>
@@ -10118,7 +10216,7 @@
             </a:endParaRPr>
           </a:p>
           <a:p>
-            <a:pPr indent="-215900" lvl="0" marL="215900" marR="0" rtl="0" algn="l">
+            <a:pPr marL="215900" marR="0" lvl="0" indent="-215900" algn="l" rtl="0">
               <a:lnSpc>
                 <a:spcPct val="100000"/>
               </a:lnSpc>
@@ -10136,7 +10234,7 @@
               <a:buChar char="•"/>
             </a:pPr>
             <a:r>
-              <a:rPr b="0" i="0" lang="en" sz="1200" u="none" cap="none" strike="noStrike">
+              <a:rPr lang="en" sz="1200" b="0" i="0" u="none" strike="noStrike" cap="none">
                 <a:solidFill>
                   <a:schemeClr val="lt1"/>
                 </a:solidFill>
@@ -10147,7 +10245,7 @@
               </a:rPr>
               <a:t>Provides a more predictable and reliable program execution.</a:t>
             </a:r>
-            <a:endParaRPr b="0" i="0" sz="1100" u="none" cap="none" strike="noStrike">
+            <a:endParaRPr sz="1100" b="0" i="0" u="none" strike="noStrike" cap="none">
               <a:solidFill>
                 <a:srgbClr val="000000"/>
               </a:solidFill>
@@ -10158,7 +10256,7 @@
             </a:endParaRPr>
           </a:p>
           <a:p>
-            <a:pPr indent="0" lvl="0" marL="0" marR="0" rtl="0" algn="ctr">
+            <a:pPr marL="0" marR="0" lvl="0" indent="0" algn="ctr" rtl="0">
               <a:lnSpc>
                 <a:spcPct val="100000"/>
               </a:lnSpc>
@@ -10175,10 +10273,7 @@
               <a:buFont typeface="Calibri"/>
               <a:buNone/>
             </a:pPr>
-            <a:r>
-              <a:t/>
-            </a:r>
-            <a:endParaRPr b="0" i="0" sz="1400" u="none" cap="none" strike="noStrike">
+            <a:endParaRPr sz="1400" b="0" i="0" u="none" strike="noStrike" cap="none">
               <a:solidFill>
                 <a:schemeClr val="lt1"/>
               </a:solidFill>
@@ -10200,7 +10295,7 @@
           <a:blip r:embed="rId4">
             <a:alphaModFix/>
           </a:blip>
-          <a:srcRect b="0" l="0" r="0" t="0"/>
+          <a:srcRect/>
           <a:stretch/>
         </p:blipFill>
         <p:spPr>
@@ -10225,32 +10320,32 @@
   <p:timing>
     <p:tnLst>
       <p:par>
-        <p:cTn dur="indefinite" nodeType="tmRoot" restart="never">
+        <p:cTn id="1" dur="indefinite" restart="never" nodeType="tmRoot">
           <p:childTnLst>
             <p:seq concurrent="1" nextAc="seek">
-              <p:cTn dur="indefinite" id="2" nodeType="mainSeq">
+              <p:cTn id="2" dur="indefinite" nodeType="mainSeq">
                 <p:childTnLst>
                   <p:par>
-                    <p:cTn fill="hold">
+                    <p:cTn id="3" fill="hold">
                       <p:stCondLst>
                         <p:cond delay="indefinite"/>
                       </p:stCondLst>
                       <p:childTnLst>
                         <p:par>
-                          <p:cTn fill="hold">
+                          <p:cTn id="4" fill="hold">
                             <p:stCondLst>
                               <p:cond delay="0"/>
                             </p:stCondLst>
                             <p:childTnLst>
                               <p:par>
-                                <p:cTn fill="hold" nodeType="clickEffect" presetClass="entr" presetID="10" presetSubtype="0">
+                                <p:cTn id="5" presetID="10" presetClass="entr" presetSubtype="0" fill="hold" nodeType="clickEffect">
                                   <p:stCondLst>
                                     <p:cond delay="0"/>
                                   </p:stCondLst>
                                   <p:childTnLst>
                                     <p:set>
                                       <p:cBhvr>
-                                        <p:cTn dur="1" fill="hold">
+                                        <p:cTn id="6" dur="1" fill="hold">
                                           <p:stCondLst>
                                             <p:cond delay="0"/>
                                           </p:stCondLst>
@@ -10266,9 +10361,9 @@
                                         <p:strVal val="visible"/>
                                       </p:to>
                                     </p:set>
-                                    <p:animEffect filter="fade" transition="in">
+                                    <p:animEffect transition="in" filter="fade">
                                       <p:cBhvr>
-                                        <p:cTn dur="500"/>
+                                        <p:cTn id="7" dur="500"/>
                                         <p:tgtEl>
                                           <p:spTgt spid="96"/>
                                         </p:tgtEl>
@@ -10284,26 +10379,26 @@
                     </p:cTn>
                   </p:par>
                   <p:par>
-                    <p:cTn fill="hold">
+                    <p:cTn id="8" fill="hold">
                       <p:stCondLst>
                         <p:cond delay="indefinite"/>
                       </p:stCondLst>
                       <p:childTnLst>
                         <p:par>
-                          <p:cTn fill="hold">
+                          <p:cTn id="9" fill="hold">
                             <p:stCondLst>
                               <p:cond delay="0"/>
                             </p:stCondLst>
                             <p:childTnLst>
                               <p:par>
-                                <p:cTn fill="hold" nodeType="clickEffect" presetClass="entr" presetID="10" presetSubtype="0">
+                                <p:cTn id="10" presetID="10" presetClass="entr" presetSubtype="0" fill="hold" nodeType="clickEffect">
                                   <p:stCondLst>
                                     <p:cond delay="0"/>
                                   </p:stCondLst>
                                   <p:childTnLst>
                                     <p:set>
                                       <p:cBhvr>
-                                        <p:cTn dur="1" fill="hold">
+                                        <p:cTn id="11" dur="1" fill="hold">
                                           <p:stCondLst>
                                             <p:cond delay="0"/>
                                           </p:stCondLst>
@@ -10319,9 +10414,9 @@
                                         <p:strVal val="visible"/>
                                       </p:to>
                                     </p:set>
-                                    <p:animEffect filter="fade" transition="in">
+                                    <p:animEffect transition="in" filter="fade">
                                       <p:cBhvr>
-                                        <p:cTn dur="500"/>
+                                        <p:cTn id="12" dur="500"/>
                                         <p:tgtEl>
                                           <p:spTgt spid="98"/>
                                         </p:tgtEl>
@@ -10337,26 +10432,26 @@
                     </p:cTn>
                   </p:par>
                   <p:par>
-                    <p:cTn fill="hold">
+                    <p:cTn id="13" fill="hold">
                       <p:stCondLst>
                         <p:cond delay="indefinite"/>
                       </p:stCondLst>
                       <p:childTnLst>
                         <p:par>
-                          <p:cTn fill="hold">
+                          <p:cTn id="14" fill="hold">
                             <p:stCondLst>
                               <p:cond delay="0"/>
                             </p:stCondLst>
                             <p:childTnLst>
                               <p:par>
-                                <p:cTn fill="hold" nodeType="clickEffect" presetClass="entr" presetID="10" presetSubtype="0">
+                                <p:cTn id="15" presetID="10" presetClass="entr" presetSubtype="0" fill="hold" nodeType="clickEffect">
                                   <p:stCondLst>
                                     <p:cond delay="0"/>
                                   </p:stCondLst>
                                   <p:childTnLst>
                                     <p:set>
                                       <p:cBhvr>
-                                        <p:cTn dur="1" fill="hold">
+                                        <p:cTn id="16" dur="1" fill="hold">
                                           <p:stCondLst>
                                             <p:cond delay="0"/>
                                           </p:stCondLst>
@@ -10372,9 +10467,9 @@
                                         <p:strVal val="visible"/>
                                       </p:to>
                                     </p:set>
-                                    <p:animEffect filter="fade" transition="in">
+                                    <p:animEffect transition="in" filter="fade">
                                       <p:cBhvr>
-                                        <p:cTn dur="500"/>
+                                        <p:cTn id="17" dur="500"/>
                                         <p:tgtEl>
                                           <p:spTgt spid="99"/>
                                         </p:tgtEl>
@@ -10390,26 +10485,26 @@
                     </p:cTn>
                   </p:par>
                   <p:par>
-                    <p:cTn fill="hold">
+                    <p:cTn id="18" fill="hold">
                       <p:stCondLst>
                         <p:cond delay="indefinite"/>
                       </p:stCondLst>
                       <p:childTnLst>
                         <p:par>
-                          <p:cTn fill="hold">
+                          <p:cTn id="19" fill="hold">
                             <p:stCondLst>
                               <p:cond delay="0"/>
                             </p:stCondLst>
                             <p:childTnLst>
                               <p:par>
-                                <p:cTn fill="hold" nodeType="clickEffect" presetClass="entr" presetID="10" presetSubtype="0">
+                                <p:cTn id="20" presetID="10" presetClass="entr" presetSubtype="0" fill="hold" nodeType="clickEffect">
                                   <p:stCondLst>
                                     <p:cond delay="0"/>
                                   </p:stCondLst>
                                   <p:childTnLst>
                                     <p:set>
                                       <p:cBhvr>
-                                        <p:cTn dur="1" fill="hold">
+                                        <p:cTn id="21" dur="1" fill="hold">
                                           <p:stCondLst>
                                             <p:cond delay="0"/>
                                           </p:stCondLst>
@@ -10425,9 +10520,9 @@
                                         <p:strVal val="visible"/>
                                       </p:to>
                                     </p:set>
-                                    <p:animEffect filter="fade" transition="in">
+                                    <p:animEffect transition="in" filter="fade">
                                       <p:cBhvr>
-                                        <p:cTn dur="500"/>
+                                        <p:cTn id="22" dur="500"/>
                                         <p:tgtEl>
                                           <p:spTgt spid="100"/>
                                         </p:tgtEl>
@@ -10443,26 +10538,26 @@
                     </p:cTn>
                   </p:par>
                   <p:par>
-                    <p:cTn fill="hold">
+                    <p:cTn id="23" fill="hold">
                       <p:stCondLst>
                         <p:cond delay="indefinite"/>
                       </p:stCondLst>
                       <p:childTnLst>
                         <p:par>
-                          <p:cTn fill="hold">
+                          <p:cTn id="24" fill="hold">
                             <p:stCondLst>
                               <p:cond delay="0"/>
                             </p:stCondLst>
                             <p:childTnLst>
                               <p:par>
-                                <p:cTn fill="hold" nodeType="clickEffect" presetClass="entr" presetID="10" presetSubtype="0">
+                                <p:cTn id="25" presetID="10" presetClass="entr" presetSubtype="0" fill="hold" nodeType="clickEffect">
                                   <p:stCondLst>
                                     <p:cond delay="0"/>
                                   </p:stCondLst>
                                   <p:childTnLst>
                                     <p:set>
                                       <p:cBhvr>
-                                        <p:cTn dur="1" fill="hold">
+                                        <p:cTn id="26" dur="1" fill="hold">
                                           <p:stCondLst>
                                             <p:cond delay="0"/>
                                           </p:stCondLst>
@@ -10478,9 +10573,9 @@
                                         <p:strVal val="visible"/>
                                       </p:to>
                                     </p:set>
-                                    <p:animEffect filter="fade" transition="in">
+                                    <p:animEffect transition="in" filter="fade">
                                       <p:cBhvr>
-                                        <p:cTn dur="500"/>
+                                        <p:cTn id="27" dur="500"/>
                                         <p:tgtEl>
                                           <p:spTgt spid="96"/>
                                         </p:tgtEl>
@@ -10498,14 +10593,14 @@
                 </p:childTnLst>
               </p:cTn>
               <p:prevCondLst>
-                <p:cond evt="onPrev">
+                <p:cond evt="onPrev" delay="0">
                   <p:tgtEl>
                     <p:sldTgt/>
                   </p:tgtEl>
                 </p:cond>
               </p:prevCondLst>
               <p:nextCondLst>
-                <p:cond evt="onNext">
+                <p:cond evt="onNext" delay="0">
                   <p:tgtEl>
                     <p:sldTgt/>
                   </p:tgtEl>
@@ -10521,18 +10616,19 @@
 </file>
 
 <file path=ppt/slides/slide3.xml><?xml version="1.0" encoding="utf-8"?>
-<p:sld xmlns:a="http://schemas.openxmlformats.org/drawingml/2006/main" xmlns:r="http://schemas.openxmlformats.org/officeDocument/2006/relationships" xmlns:mc="http://schemas.openxmlformats.org/markup-compatibility/2006" xmlns:mv="urn:schemas-microsoft-com:mac:vml" xmlns:p="http://schemas.openxmlformats.org/presentationml/2006/main" xmlns:c="http://schemas.openxmlformats.org/drawingml/2006/chart" xmlns:dgm="http://schemas.openxmlformats.org/drawingml/2006/diagram" xmlns:o="urn:schemas-microsoft-com:office:office" xmlns:v="urn:schemas-microsoft-com:vml" xmlns:pvml="urn:schemas-microsoft-com:office:powerpoint" xmlns:com="http://schemas.openxmlformats.org/drawingml/2006/compatibility" xmlns:p14="http://schemas.microsoft.com/office/powerpoint/2010/main" xmlns:p15="http://schemas.microsoft.com/office/powerpoint/2012/main" xmlns:ahyp="http://schemas.microsoft.com/office/drawing/2018/hyperlinkcolor">
+<p:sld xmlns:a="http://schemas.openxmlformats.org/drawingml/2006/main" xmlns:r="http://schemas.openxmlformats.org/officeDocument/2006/relationships" xmlns:p="http://schemas.openxmlformats.org/presentationml/2006/main">
   <p:cSld>
     <p:bg>
       <p:bgPr>
         <a:solidFill>
           <a:schemeClr val="lt1"/>
         </a:solidFill>
+        <a:effectLst/>
       </p:bgPr>
     </p:bg>
     <p:spTree>
       <p:nvGrpSpPr>
-        <p:cNvPr id="105" name="Shape 105"/>
+        <p:cNvPr id="1" name="Shape 105"/>
         <p:cNvGrpSpPr/>
         <p:nvPr/>
       </p:nvGrpSpPr>
@@ -10556,9 +10652,13 @@
             <a:ext cx="9143999" cy="5143500"/>
           </a:xfrm>
           <a:custGeom>
-            <a:rect b="b" l="l" r="r" t="t"/>
+            <a:avLst/>
+            <a:gdLst/>
+            <a:ahLst/>
+            <a:cxnLst/>
+            <a:rect l="l" t="t" r="r" b="b"/>
             <a:pathLst>
-              <a:path extrusionOk="0" h="6858000" w="12191999">
+              <a:path w="12191999" h="6858000" extrusionOk="0">
                 <a:moveTo>
                   <a:pt x="0" y="0"/>
                 </a:moveTo>
@@ -10583,12 +10683,12 @@
           </a:ln>
         </p:spPr>
         <p:txBody>
-          <a:bodyPr anchorCtr="0" anchor="ctr" bIns="34275" lIns="68575" spcFirstLastPara="1" rIns="68575" wrap="square" tIns="34275">
+          <a:bodyPr spcFirstLastPara="1" wrap="square" lIns="68575" tIns="34275" rIns="68575" bIns="34275" anchor="ctr" anchorCtr="0">
             <a:noAutofit/>
           </a:bodyPr>
           <a:lstStyle/>
           <a:p>
-            <a:pPr indent="0" lvl="0" marL="0" marR="0" rtl="0" algn="ctr">
+            <a:pPr marL="0" marR="0" lvl="0" indent="0" algn="ctr" rtl="0">
               <a:lnSpc>
                 <a:spcPct val="100000"/>
               </a:lnSpc>
@@ -10605,10 +10705,7 @@
               <a:buFont typeface="Calibri"/>
               <a:buNone/>
             </a:pPr>
-            <a:r>
-              <a:t/>
-            </a:r>
-            <a:endParaRPr b="0" i="0" sz="1400" u="none" cap="none" strike="noStrike">
+            <a:endParaRPr sz="1400" b="0" i="0" u="none" strike="noStrike" cap="none">
               <a:solidFill>
                 <a:schemeClr val="lt1"/>
               </a:solidFill>
@@ -10642,12 +10739,12 @@
           </a:ln>
         </p:spPr>
         <p:txBody>
-          <a:bodyPr anchorCtr="0" anchor="ctr" bIns="34275" lIns="68575" spcFirstLastPara="1" rIns="68575" wrap="square" tIns="34275">
+          <a:bodyPr spcFirstLastPara="1" wrap="square" lIns="68575" tIns="34275" rIns="68575" bIns="34275" anchor="ctr" anchorCtr="0">
             <a:noAutofit/>
           </a:bodyPr>
           <a:lstStyle/>
           <a:p>
-            <a:pPr indent="0" lvl="0" marL="0" marR="0" rtl="0" algn="ctr">
+            <a:pPr marL="0" marR="0" lvl="0" indent="0" algn="ctr" rtl="0">
               <a:lnSpc>
                 <a:spcPct val="100000"/>
               </a:lnSpc>
@@ -10664,10 +10761,7 @@
               <a:buFont typeface="Calibri"/>
               <a:buNone/>
             </a:pPr>
-            <a:r>
-              <a:t/>
-            </a:r>
-            <a:endParaRPr b="0" i="0" sz="1400" u="none" cap="none" strike="noStrike">
+            <a:endParaRPr sz="1400" b="0" i="0" u="none" strike="noStrike" cap="none">
               <a:solidFill>
                 <a:schemeClr val="lt1"/>
               </a:solidFill>
@@ -10699,12 +10793,12 @@
           </a:ln>
         </p:spPr>
         <p:txBody>
-          <a:bodyPr anchorCtr="0" anchor="t" bIns="34275" lIns="68575" spcFirstLastPara="1" rIns="68575" wrap="square" tIns="34275">
+          <a:bodyPr spcFirstLastPara="1" wrap="square" lIns="68575" tIns="34275" rIns="68575" bIns="34275" anchor="t" anchorCtr="0">
             <a:spAutoFit/>
           </a:bodyPr>
           <a:lstStyle/>
           <a:p>
-            <a:pPr indent="0" lvl="0" marL="0" marR="0" rtl="0" algn="ctr">
+            <a:pPr marL="0" marR="0" lvl="0" indent="0" algn="ctr" rtl="0">
               <a:lnSpc>
                 <a:spcPct val="100000"/>
               </a:lnSpc>
@@ -10722,7 +10816,7 @@
               <a:buNone/>
             </a:pPr>
             <a:r>
-              <a:rPr b="1" lang="en" sz="2700">
+              <a:rPr lang="en" sz="2700" b="1">
                 <a:solidFill>
                   <a:schemeClr val="dk1"/>
                 </a:solidFill>
@@ -10733,7 +10827,7 @@
               </a:rPr>
               <a:t>Exception</a:t>
             </a:r>
-            <a:endParaRPr b="0" i="0" sz="1100" u="none" cap="none" strike="noStrike">
+            <a:endParaRPr sz="1100" b="0" i="0" u="none" strike="noStrike" cap="none">
               <a:solidFill>
                 <a:srgbClr val="000000"/>
               </a:solidFill>
@@ -10755,7 +10849,7 @@
           <a:blip r:embed="rId3">
             <a:alphaModFix/>
           </a:blip>
-          <a:srcRect b="0" l="0" r="0" t="0"/>
+          <a:srcRect/>
           <a:stretch/>
         </p:blipFill>
         <p:spPr>
@@ -10782,12 +10876,12 @@
           <a:blip r:embed="rId4">
             <a:alphaModFix/>
           </a:blip>
-          <a:srcRect b="0" l="0" r="0" t="773"/>
+          <a:srcRect t="773"/>
           <a:stretch/>
         </p:blipFill>
         <p:spPr>
           <a:xfrm>
-            <a:off x="482625" y="674350"/>
+            <a:off x="482625" y="681784"/>
             <a:ext cx="2813550" cy="4255749"/>
           </a:xfrm>
           <a:prstGeom prst="rect">
@@ -10819,12 +10913,12 @@
           </a:ln>
         </p:spPr>
         <p:txBody>
-          <a:bodyPr anchorCtr="0" anchor="t" bIns="91425" lIns="91425" spcFirstLastPara="1" rIns="91425" wrap="square" tIns="91425">
+          <a:bodyPr spcFirstLastPara="1" wrap="square" lIns="91425" tIns="91425" rIns="91425" bIns="91425" anchor="t" anchorCtr="0">
             <a:noAutofit/>
           </a:bodyPr>
           <a:lstStyle/>
           <a:p>
-            <a:pPr indent="0" lvl="0" marL="0" rtl="0" algn="l">
+            <a:pPr marL="0" lvl="0" indent="0" algn="l" rtl="0">
               <a:spcBef>
                 <a:spcPts val="0"/>
               </a:spcBef>
@@ -10834,7 +10928,7 @@
               <a:buNone/>
             </a:pPr>
             <a:r>
-              <a:rPr lang="en" sz="1800">
+              <a:rPr lang="en" sz="1800" dirty="0">
                 <a:solidFill>
                   <a:schemeClr val="dk1"/>
                 </a:solidFill>
@@ -10845,7 +10939,7 @@
               </a:rPr>
               <a:t>Here, We Programmed a execution to divide a variable x with y, but the user given is “ x as  4 and y as 0 ”</a:t>
             </a:r>
-            <a:endParaRPr sz="1800">
+            <a:endParaRPr sz="1800" dirty="0">
               <a:solidFill>
                 <a:schemeClr val="dk1"/>
               </a:solidFill>
@@ -10856,7 +10950,7 @@
             </a:endParaRPr>
           </a:p>
           <a:p>
-            <a:pPr indent="0" lvl="0" marL="0" rtl="0" algn="l">
+            <a:pPr marL="0" lvl="0" indent="0" algn="l" rtl="0">
               <a:spcBef>
                 <a:spcPts val="0"/>
               </a:spcBef>
@@ -10865,10 +10959,7 @@
               </a:spcAft>
               <a:buNone/>
             </a:pPr>
-            <a:r>
-              <a:t/>
-            </a:r>
-            <a:endParaRPr sz="1800">
+            <a:endParaRPr sz="1800" dirty="0">
               <a:solidFill>
                 <a:schemeClr val="dk1"/>
               </a:solidFill>
@@ -10879,7 +10970,7 @@
             </a:endParaRPr>
           </a:p>
           <a:p>
-            <a:pPr indent="0" lvl="0" marL="0" rtl="0" algn="l">
+            <a:pPr marL="0" lvl="0" indent="0" algn="l" rtl="0">
               <a:spcBef>
                 <a:spcPts val="0"/>
               </a:spcBef>
@@ -10889,7 +10980,7 @@
               <a:buNone/>
             </a:pPr>
             <a:r>
-              <a:rPr lang="en" sz="1800">
+              <a:rPr lang="en" sz="1800" dirty="0">
                 <a:solidFill>
                   <a:schemeClr val="dk1"/>
                 </a:solidFill>
@@ -10900,7 +10991,7 @@
               </a:rPr>
               <a:t>In ordinary arithmetic, the expression has no meaning, as there is no number which, when multiplied by 0, gives a (assuming a ≠ 0), and so division by zero is undefined.</a:t>
             </a:r>
-            <a:endParaRPr sz="1800">
+            <a:endParaRPr sz="1800" dirty="0">
               <a:solidFill>
                 <a:schemeClr val="dk1"/>
               </a:solidFill>
@@ -10911,7 +11002,7 @@
             </a:endParaRPr>
           </a:p>
           <a:p>
-            <a:pPr indent="0" lvl="0" marL="0" rtl="0" algn="l">
+            <a:pPr marL="0" lvl="0" indent="0" algn="l" rtl="0">
               <a:spcBef>
                 <a:spcPts val="0"/>
               </a:spcBef>
@@ -10920,10 +11011,7 @@
               </a:spcAft>
               <a:buNone/>
             </a:pPr>
-            <a:r>
-              <a:t/>
-            </a:r>
-            <a:endParaRPr sz="1800">
+            <a:endParaRPr sz="1800" dirty="0">
               <a:solidFill>
                 <a:schemeClr val="dk1"/>
               </a:solidFill>
@@ -10934,7 +11022,7 @@
             </a:endParaRPr>
           </a:p>
           <a:p>
-            <a:pPr indent="0" lvl="0" marL="0" rtl="0" algn="l">
+            <a:pPr marL="0" lvl="0" indent="0" algn="l" rtl="0">
               <a:spcBef>
                 <a:spcPts val="0"/>
               </a:spcBef>
@@ -10944,7 +11032,7 @@
               <a:buNone/>
             </a:pPr>
             <a:r>
-              <a:rPr lang="en" sz="1800">
+              <a:rPr lang="en" sz="1800" dirty="0">
                 <a:solidFill>
                   <a:schemeClr val="dk1"/>
                 </a:solidFill>
@@ -10955,7 +11043,7 @@
               </a:rPr>
               <a:t>So it will be a problem during execution.which automatically terminate the program.</a:t>
             </a:r>
-            <a:endParaRPr sz="1800">
+            <a:endParaRPr sz="1800" dirty="0">
               <a:solidFill>
                 <a:schemeClr val="dk1"/>
               </a:solidFill>
@@ -10966,7 +11054,7 @@
             </a:endParaRPr>
           </a:p>
           <a:p>
-            <a:pPr indent="0" lvl="0" marL="0" rtl="0" algn="l">
+            <a:pPr marL="0" lvl="0" indent="0" algn="l" rtl="0">
               <a:spcBef>
                 <a:spcPts val="0"/>
               </a:spcBef>
@@ -10975,10 +11063,7 @@
               </a:spcAft>
               <a:buNone/>
             </a:pPr>
-            <a:r>
-              <a:t/>
-            </a:r>
-            <a:endParaRPr sz="1800">
+            <a:endParaRPr sz="1800" dirty="0">
               <a:solidFill>
                 <a:schemeClr val="dk1"/>
               </a:solidFill>
@@ -10989,7 +11074,7 @@
             </a:endParaRPr>
           </a:p>
           <a:p>
-            <a:pPr indent="0" lvl="0" marL="0" rtl="0" algn="l">
+            <a:pPr marL="0" lvl="0" indent="0" algn="l" rtl="0">
               <a:spcBef>
                 <a:spcPts val="0"/>
               </a:spcBef>
@@ -10999,7 +11084,7 @@
               <a:buNone/>
             </a:pPr>
             <a:r>
-              <a:rPr b="1" lang="en" sz="1800">
+              <a:rPr lang="en" sz="1800" b="1" dirty="0">
                 <a:solidFill>
                   <a:schemeClr val="dk1"/>
                 </a:solidFill>
@@ -11010,7 +11095,7 @@
               </a:rPr>
               <a:t>So for those problems that rise during executions are called exception</a:t>
             </a:r>
-            <a:endParaRPr b="1" sz="1800">
+            <a:endParaRPr sz="1800" b="1" dirty="0">
               <a:solidFill>
                 <a:schemeClr val="dk1"/>
               </a:solidFill>
@@ -11021,7 +11106,7 @@
             </a:endParaRPr>
           </a:p>
           <a:p>
-            <a:pPr indent="0" lvl="0" marL="0" rtl="0" algn="l">
+            <a:pPr marL="0" lvl="0" indent="0" algn="l" rtl="0">
               <a:spcBef>
                 <a:spcPts val="0"/>
               </a:spcBef>
@@ -11030,17 +11115,14 @@
               </a:spcAft>
               <a:buNone/>
             </a:pPr>
-            <a:r>
-              <a:t/>
-            </a:r>
-            <a:endParaRPr b="1" sz="1800">
+            <a:endParaRPr sz="1800" b="1" dirty="0">
               <a:solidFill>
                 <a:schemeClr val="dk1"/>
               </a:solidFill>
             </a:endParaRPr>
           </a:p>
           <a:p>
-            <a:pPr indent="0" lvl="0" marL="0" rtl="0" algn="l">
+            <a:pPr marL="0" lvl="0" indent="0" algn="l" rtl="0">
               <a:spcBef>
                 <a:spcPts val="0"/>
               </a:spcBef>
@@ -11054,7 +11136,7 @@
               <a:buNone/>
             </a:pPr>
             <a:r>
-              <a:rPr b="1" lang="en" sz="1800">
+              <a:rPr lang="en" sz="1800" b="1" dirty="0">
                 <a:solidFill>
                   <a:schemeClr val="dk1"/>
                 </a:solidFill>
@@ -11065,7 +11147,7 @@
               </a:rPr>
               <a:t>And solving that is exception handling</a:t>
             </a:r>
-            <a:endParaRPr sz="1800">
+            <a:endParaRPr sz="1800" dirty="0">
               <a:solidFill>
                 <a:schemeClr val="dk1"/>
               </a:solidFill>
@@ -11085,32 +11167,32 @@
   <p:timing>
     <p:tnLst>
       <p:par>
-        <p:cTn dur="indefinite" nodeType="tmRoot" restart="never">
+        <p:cTn id="1" dur="indefinite" restart="never" nodeType="tmRoot">
           <p:childTnLst>
             <p:seq concurrent="1" nextAc="seek">
-              <p:cTn dur="indefinite" id="2" nodeType="mainSeq">
+              <p:cTn id="2" dur="indefinite" nodeType="mainSeq">
                 <p:childTnLst>
                   <p:par>
-                    <p:cTn fill="hold">
+                    <p:cTn id="3" fill="hold">
                       <p:stCondLst>
                         <p:cond delay="indefinite"/>
                       </p:stCondLst>
                       <p:childTnLst>
                         <p:par>
-                          <p:cTn fill="hold">
+                          <p:cTn id="4" fill="hold">
                             <p:stCondLst>
                               <p:cond delay="0"/>
                             </p:stCondLst>
                             <p:childTnLst>
                               <p:par>
-                                <p:cTn fill="hold" nodeType="clickEffect" presetClass="entr" presetID="10" presetSubtype="0">
+                                <p:cTn id="5" presetID="10" presetClass="entr" presetSubtype="0" fill="hold" nodeType="clickEffect">
                                   <p:stCondLst>
                                     <p:cond delay="0"/>
                                   </p:stCondLst>
                                   <p:childTnLst>
                                     <p:set>
                                       <p:cBhvr>
-                                        <p:cTn dur="1" fill="hold">
+                                        <p:cTn id="6" dur="1" fill="hold">
                                           <p:stCondLst>
                                             <p:cond delay="0"/>
                                           </p:stCondLst>
@@ -11126,9 +11208,9 @@
                                         <p:strVal val="visible"/>
                                       </p:to>
                                     </p:set>
-                                    <p:animEffect filter="fade" transition="in">
+                                    <p:animEffect transition="in" filter="fade">
                                       <p:cBhvr>
-                                        <p:cTn dur="500"/>
+                                        <p:cTn id="7" dur="500"/>
                                         <p:tgtEl>
                                           <p:spTgt spid="108"/>
                                         </p:tgtEl>
@@ -11146,14 +11228,14 @@
                 </p:childTnLst>
               </p:cTn>
               <p:prevCondLst>
-                <p:cond evt="onPrev">
+                <p:cond evt="onPrev" delay="0">
                   <p:tgtEl>
                     <p:sldTgt/>
                   </p:tgtEl>
                 </p:cond>
               </p:prevCondLst>
               <p:nextCondLst>
-                <p:cond evt="onNext">
+                <p:cond evt="onNext" delay="0">
                   <p:tgtEl>
                     <p:sldTgt/>
                   </p:tgtEl>
@@ -11169,18 +11251,19 @@
 </file>
 
 <file path=ppt/slides/slide4.xml><?xml version="1.0" encoding="utf-8"?>
-<p:sld xmlns:a="http://schemas.openxmlformats.org/drawingml/2006/main" xmlns:r="http://schemas.openxmlformats.org/officeDocument/2006/relationships" xmlns:mc="http://schemas.openxmlformats.org/markup-compatibility/2006" xmlns:mv="urn:schemas-microsoft-com:mac:vml" xmlns:p="http://schemas.openxmlformats.org/presentationml/2006/main" xmlns:c="http://schemas.openxmlformats.org/drawingml/2006/chart" xmlns:dgm="http://schemas.openxmlformats.org/drawingml/2006/diagram" xmlns:o="urn:schemas-microsoft-com:office:office" xmlns:v="urn:schemas-microsoft-com:vml" xmlns:pvml="urn:schemas-microsoft-com:office:powerpoint" xmlns:com="http://schemas.openxmlformats.org/drawingml/2006/compatibility" xmlns:p14="http://schemas.microsoft.com/office/powerpoint/2010/main" xmlns:p15="http://schemas.microsoft.com/office/powerpoint/2012/main" xmlns:ahyp="http://schemas.microsoft.com/office/drawing/2018/hyperlinkcolor">
+<p:sld xmlns:a="http://schemas.openxmlformats.org/drawingml/2006/main" xmlns:r="http://schemas.openxmlformats.org/officeDocument/2006/relationships" xmlns:p="http://schemas.openxmlformats.org/presentationml/2006/main">
   <p:cSld>
     <p:bg>
       <p:bgPr>
         <a:solidFill>
           <a:schemeClr val="lt1"/>
         </a:solidFill>
+        <a:effectLst/>
       </p:bgPr>
     </p:bg>
     <p:spTree>
       <p:nvGrpSpPr>
-        <p:cNvPr id="115" name="Shape 115"/>
+        <p:cNvPr id="1" name="Shape 115"/>
         <p:cNvGrpSpPr/>
         <p:nvPr/>
       </p:nvGrpSpPr>
@@ -11204,9 +11287,13 @@
             <a:ext cx="9143999" cy="5297805"/>
           </a:xfrm>
           <a:custGeom>
-            <a:rect b="b" l="l" r="r" t="t"/>
+            <a:avLst/>
+            <a:gdLst/>
+            <a:ahLst/>
+            <a:cxnLst/>
+            <a:rect l="l" t="t" r="r" b="b"/>
             <a:pathLst>
-              <a:path extrusionOk="0" h="6858000" w="12191999">
+              <a:path w="12191999" h="6858000" extrusionOk="0">
                 <a:moveTo>
                   <a:pt x="0" y="0"/>
                 </a:moveTo>
@@ -11231,12 +11318,12 @@
           </a:ln>
         </p:spPr>
         <p:txBody>
-          <a:bodyPr anchorCtr="0" anchor="ctr" bIns="34275" lIns="68575" spcFirstLastPara="1" rIns="68575" wrap="square" tIns="34275">
+          <a:bodyPr spcFirstLastPara="1" wrap="square" lIns="68575" tIns="34275" rIns="68575" bIns="34275" anchor="ctr" anchorCtr="0">
             <a:noAutofit/>
           </a:bodyPr>
           <a:lstStyle/>
           <a:p>
-            <a:pPr indent="0" lvl="0" marL="0" marR="0" rtl="0" algn="ctr">
+            <a:pPr marL="0" marR="0" lvl="0" indent="0" algn="ctr" rtl="0">
               <a:lnSpc>
                 <a:spcPct val="100000"/>
               </a:lnSpc>
@@ -11253,10 +11340,7 @@
               <a:buFont typeface="Calibri"/>
               <a:buNone/>
             </a:pPr>
-            <a:r>
-              <a:t/>
-            </a:r>
-            <a:endParaRPr b="0" i="0" sz="1400" u="none" cap="none" strike="noStrike">
+            <a:endParaRPr sz="1400" b="0" i="0" u="none" strike="noStrike" cap="none">
               <a:solidFill>
                 <a:schemeClr val="lt1"/>
               </a:solidFill>
@@ -11290,12 +11374,12 @@
           </a:ln>
         </p:spPr>
         <p:txBody>
-          <a:bodyPr anchorCtr="0" anchor="ctr" bIns="34275" lIns="68575" spcFirstLastPara="1" rIns="68575" wrap="square" tIns="34275">
+          <a:bodyPr spcFirstLastPara="1" wrap="square" lIns="68575" tIns="34275" rIns="68575" bIns="34275" anchor="ctr" anchorCtr="0">
             <a:noAutofit/>
           </a:bodyPr>
           <a:lstStyle/>
           <a:p>
-            <a:pPr indent="0" lvl="0" marL="0" marR="0" rtl="0" algn="ctr">
+            <a:pPr marL="0" marR="0" lvl="0" indent="0" algn="ctr" rtl="0">
               <a:lnSpc>
                 <a:spcPct val="100000"/>
               </a:lnSpc>
@@ -11312,10 +11396,7 @@
               <a:buFont typeface="Calibri"/>
               <a:buNone/>
             </a:pPr>
-            <a:r>
-              <a:t/>
-            </a:r>
-            <a:endParaRPr b="0" i="0" sz="1400" u="none" cap="none" strike="noStrike">
+            <a:endParaRPr sz="1400" b="0" i="0" u="none" strike="noStrike" cap="none">
               <a:solidFill>
                 <a:schemeClr val="lt1"/>
               </a:solidFill>
@@ -11347,12 +11428,12 @@
           </a:ln>
         </p:spPr>
         <p:txBody>
-          <a:bodyPr anchorCtr="0" anchor="t" bIns="34275" lIns="68575" spcFirstLastPara="1" rIns="68575" wrap="square" tIns="34275">
+          <a:bodyPr spcFirstLastPara="1" wrap="square" lIns="68575" tIns="34275" rIns="68575" bIns="34275" anchor="t" anchorCtr="0">
             <a:spAutoFit/>
           </a:bodyPr>
           <a:lstStyle/>
           <a:p>
-            <a:pPr indent="0" lvl="0" marL="0" marR="0" rtl="0" algn="l">
+            <a:pPr marL="0" marR="0" lvl="0" indent="0" algn="l" rtl="0">
               <a:lnSpc>
                 <a:spcPct val="100000"/>
               </a:lnSpc>
@@ -11370,7 +11451,7 @@
               <a:buNone/>
             </a:pPr>
             <a:r>
-              <a:rPr b="1" i="0" lang="en" sz="2700" u="none" cap="none" strike="noStrike">
+              <a:rPr lang="en" sz="2700" b="1" i="0" u="none" strike="noStrike" cap="none">
                 <a:solidFill>
                   <a:schemeClr val="dk1"/>
                 </a:solidFill>
@@ -11381,7 +11462,7 @@
               </a:rPr>
               <a:t>Handling Exceptions</a:t>
             </a:r>
-            <a:endParaRPr b="0" i="0" sz="1100" u="none" cap="none" strike="noStrike">
+            <a:endParaRPr sz="1100" b="0" i="0" u="none" strike="noStrike" cap="none">
               <a:solidFill>
                 <a:srgbClr val="000000"/>
               </a:solidFill>
@@ -11403,7 +11484,7 @@
           <a:blip r:embed="rId3">
             <a:alphaModFix/>
           </a:blip>
-          <a:srcRect b="0" l="0" r="0" t="0"/>
+          <a:srcRect/>
           <a:stretch/>
         </p:blipFill>
         <p:spPr>
@@ -11440,12 +11521,12 @@
           </a:ln>
         </p:spPr>
         <p:txBody>
-          <a:bodyPr anchorCtr="0" anchor="t" bIns="91425" lIns="91425" spcFirstLastPara="1" rIns="91425" wrap="square" tIns="91425">
+          <a:bodyPr spcFirstLastPara="1" wrap="square" lIns="91425" tIns="91425" rIns="91425" bIns="91425" anchor="t" anchorCtr="0">
             <a:noAutofit/>
           </a:bodyPr>
           <a:lstStyle/>
           <a:p>
-            <a:pPr indent="0" lvl="0" marL="0" rtl="0" algn="l">
+            <a:pPr marL="0" lvl="0" indent="0" algn="l" rtl="0">
               <a:spcBef>
                 <a:spcPts val="0"/>
               </a:spcBef>
@@ -11455,7 +11536,7 @@
               <a:buNone/>
             </a:pPr>
             <a:r>
-              <a:rPr b="1" lang="en" sz="1800">
+              <a:rPr lang="en" sz="1800" b="1">
                 <a:solidFill>
                   <a:schemeClr val="dk1"/>
                 </a:solidFill>
@@ -11477,7 +11558,7 @@
             </a:endParaRPr>
           </a:p>
           <a:p>
-            <a:pPr indent="0" lvl="0" marL="0" rtl="0" algn="l">
+            <a:pPr marL="0" lvl="0" indent="0" algn="l" rtl="0">
               <a:spcBef>
                 <a:spcPts val="0"/>
               </a:spcBef>
@@ -11486,9 +11567,6 @@
               </a:spcAft>
               <a:buNone/>
             </a:pPr>
-            <a:r>
-              <a:t/>
-            </a:r>
             <a:endParaRPr sz="1800">
               <a:solidFill>
                 <a:schemeClr val="dk1"/>
@@ -11496,7 +11574,7 @@
             </a:endParaRPr>
           </a:p>
           <a:p>
-            <a:pPr indent="0" lvl="0" marL="0" rtl="0" algn="l">
+            <a:pPr marL="0" lvl="0" indent="0" algn="l" rtl="0">
               <a:spcBef>
                 <a:spcPts val="0"/>
               </a:spcBef>
@@ -11506,7 +11584,7 @@
               <a:buNone/>
             </a:pPr>
             <a:r>
-              <a:rPr b="1" lang="en" sz="1800">
+              <a:rPr lang="en" sz="1800" b="1">
                 <a:solidFill>
                   <a:schemeClr val="dk1"/>
                 </a:solidFill>
@@ -11528,7 +11606,7 @@
             </a:endParaRPr>
           </a:p>
           <a:p>
-            <a:pPr indent="0" lvl="0" marL="0" rtl="0" algn="l">
+            <a:pPr marL="0" lvl="0" indent="0" algn="l" rtl="0">
               <a:spcBef>
                 <a:spcPts val="0"/>
               </a:spcBef>
@@ -11537,9 +11615,6 @@
               </a:spcAft>
               <a:buNone/>
             </a:pPr>
-            <a:r>
-              <a:t/>
-            </a:r>
             <a:endParaRPr sz="1800">
               <a:solidFill>
                 <a:schemeClr val="dk1"/>
@@ -11547,7 +11622,7 @@
             </a:endParaRPr>
           </a:p>
           <a:p>
-            <a:pPr indent="0" lvl="0" marL="0" rtl="0" algn="l">
+            <a:pPr marL="0" lvl="0" indent="0" algn="l" rtl="0">
               <a:spcBef>
                 <a:spcPts val="0"/>
               </a:spcBef>
@@ -11557,7 +11632,7 @@
               <a:buNone/>
             </a:pPr>
             <a:r>
-              <a:rPr b="1" lang="en" sz="1800">
+              <a:rPr lang="en" sz="1800" b="1">
                 <a:solidFill>
                   <a:schemeClr val="dk1"/>
                 </a:solidFill>
@@ -11579,7 +11654,7 @@
             </a:endParaRPr>
           </a:p>
           <a:p>
-            <a:pPr indent="0" lvl="0" marL="0" rtl="0" algn="l">
+            <a:pPr marL="0" lvl="0" indent="0" algn="l" rtl="0">
               <a:spcBef>
                 <a:spcPts val="0"/>
               </a:spcBef>
@@ -11588,9 +11663,6 @@
               </a:spcAft>
               <a:buNone/>
             </a:pPr>
-            <a:r>
-              <a:t/>
-            </a:r>
             <a:endParaRPr sz="1800">
               <a:solidFill>
                 <a:schemeClr val="dk1"/>
@@ -11598,7 +11670,7 @@
             </a:endParaRPr>
           </a:p>
           <a:p>
-            <a:pPr indent="0" lvl="0" marL="0" rtl="0" algn="l">
+            <a:pPr marL="0" lvl="0" indent="0" algn="l" rtl="0">
               <a:spcBef>
                 <a:spcPts val="0"/>
               </a:spcBef>
@@ -11612,7 +11684,7 @@
               <a:buNone/>
             </a:pPr>
             <a:r>
-              <a:rPr b="1" lang="en" sz="1800">
+              <a:rPr lang="en" sz="1800" b="1">
                 <a:solidFill>
                   <a:schemeClr val="dk1"/>
                 </a:solidFill>
@@ -11671,32 +11743,32 @@
   <p:timing>
     <p:tnLst>
       <p:par>
-        <p:cTn dur="indefinite" nodeType="tmRoot" restart="never">
+        <p:cTn id="1" dur="indefinite" restart="never" nodeType="tmRoot">
           <p:childTnLst>
             <p:seq concurrent="1" nextAc="seek">
-              <p:cTn dur="indefinite" id="2" nodeType="mainSeq">
+              <p:cTn id="2" dur="indefinite" nodeType="mainSeq">
                 <p:childTnLst>
                   <p:par>
-                    <p:cTn fill="hold">
+                    <p:cTn id="3" fill="hold">
                       <p:stCondLst>
                         <p:cond delay="indefinite"/>
                       </p:stCondLst>
                       <p:childTnLst>
                         <p:par>
-                          <p:cTn fill="hold">
+                          <p:cTn id="4" fill="hold">
                             <p:stCondLst>
                               <p:cond delay="0"/>
                             </p:stCondLst>
                             <p:childTnLst>
                               <p:par>
-                                <p:cTn fill="hold" nodeType="clickEffect" presetClass="entr" presetID="10" presetSubtype="0">
+                                <p:cTn id="5" presetID="10" presetClass="entr" presetSubtype="0" fill="hold" nodeType="clickEffect">
                                   <p:stCondLst>
                                     <p:cond delay="0"/>
                                   </p:stCondLst>
                                   <p:childTnLst>
                                     <p:set>
                                       <p:cBhvr>
-                                        <p:cTn dur="1" fill="hold">
+                                        <p:cTn id="6" dur="1" fill="hold">
                                           <p:stCondLst>
                                             <p:cond delay="0"/>
                                           </p:stCondLst>
@@ -11712,9 +11784,9 @@
                                         <p:strVal val="visible"/>
                                       </p:to>
                                     </p:set>
-                                    <p:animEffect filter="fade" transition="in">
+                                    <p:animEffect transition="in" filter="fade">
                                       <p:cBhvr>
-                                        <p:cTn dur="500"/>
+                                        <p:cTn id="7" dur="500"/>
                                         <p:tgtEl>
                                           <p:spTgt spid="118"/>
                                         </p:tgtEl>
@@ -11732,14 +11804,14 @@
                 </p:childTnLst>
               </p:cTn>
               <p:prevCondLst>
-                <p:cond evt="onPrev">
+                <p:cond evt="onPrev" delay="0">
                   <p:tgtEl>
                     <p:sldTgt/>
                   </p:tgtEl>
                 </p:cond>
               </p:prevCondLst>
               <p:nextCondLst>
-                <p:cond evt="onNext">
+                <p:cond evt="onNext" delay="0">
                   <p:tgtEl>
                     <p:sldTgt/>
                   </p:tgtEl>
@@ -11755,11 +11827,11 @@
 </file>
 
 <file path=ppt/slides/slide5.xml><?xml version="1.0" encoding="utf-8"?>
-<p:sld xmlns:a="http://schemas.openxmlformats.org/drawingml/2006/main" xmlns:r="http://schemas.openxmlformats.org/officeDocument/2006/relationships" xmlns:mc="http://schemas.openxmlformats.org/markup-compatibility/2006" xmlns:mv="urn:schemas-microsoft-com:mac:vml" xmlns:p="http://schemas.openxmlformats.org/presentationml/2006/main" xmlns:c="http://schemas.openxmlformats.org/drawingml/2006/chart" xmlns:dgm="http://schemas.openxmlformats.org/drawingml/2006/diagram" xmlns:o="urn:schemas-microsoft-com:office:office" xmlns:v="urn:schemas-microsoft-com:vml" xmlns:pvml="urn:schemas-microsoft-com:office:powerpoint" xmlns:com="http://schemas.openxmlformats.org/drawingml/2006/compatibility" xmlns:p14="http://schemas.microsoft.com/office/powerpoint/2010/main" xmlns:p15="http://schemas.microsoft.com/office/powerpoint/2012/main" xmlns:ahyp="http://schemas.microsoft.com/office/drawing/2018/hyperlinkcolor">
+<p:sld xmlns:a="http://schemas.openxmlformats.org/drawingml/2006/main" xmlns:r="http://schemas.openxmlformats.org/officeDocument/2006/relationships" xmlns:p="http://schemas.openxmlformats.org/presentationml/2006/main">
   <p:cSld>
     <p:spTree>
       <p:nvGrpSpPr>
-        <p:cNvPr id="125" name="Shape 125"/>
+        <p:cNvPr id="1" name="Shape 125"/>
         <p:cNvGrpSpPr/>
         <p:nvPr/>
       </p:nvGrpSpPr>
@@ -11783,9 +11855,13 @@
             <a:ext cx="9143999" cy="5143500"/>
           </a:xfrm>
           <a:custGeom>
-            <a:rect b="b" l="l" r="r" t="t"/>
+            <a:avLst/>
+            <a:gdLst/>
+            <a:ahLst/>
+            <a:cxnLst/>
+            <a:rect l="l" t="t" r="r" b="b"/>
             <a:pathLst>
-              <a:path extrusionOk="0" h="6858000" w="12191999">
+              <a:path w="12191999" h="6858000" extrusionOk="0">
                 <a:moveTo>
                   <a:pt x="0" y="0"/>
                 </a:moveTo>
@@ -11810,12 +11886,12 @@
           </a:ln>
         </p:spPr>
         <p:txBody>
-          <a:bodyPr anchorCtr="0" anchor="ctr" bIns="34275" lIns="68575" spcFirstLastPara="1" rIns="68575" wrap="square" tIns="34275">
+          <a:bodyPr spcFirstLastPara="1" wrap="square" lIns="68575" tIns="34275" rIns="68575" bIns="34275" anchor="ctr" anchorCtr="0">
             <a:noAutofit/>
           </a:bodyPr>
           <a:lstStyle/>
           <a:p>
-            <a:pPr indent="0" lvl="0" marL="0" marR="0" rtl="0" algn="ctr">
+            <a:pPr marL="0" marR="0" lvl="0" indent="0" algn="ctr" rtl="0">
               <a:lnSpc>
                 <a:spcPct val="100000"/>
               </a:lnSpc>
@@ -11832,10 +11908,7 @@
               <a:buFont typeface="Calibri"/>
               <a:buNone/>
             </a:pPr>
-            <a:r>
-              <a:t/>
-            </a:r>
-            <a:endParaRPr b="0" i="0" sz="1400" u="none" cap="none" strike="noStrike">
+            <a:endParaRPr sz="1400" b="0" i="0" u="none" strike="noStrike" cap="none">
               <a:solidFill>
                 <a:schemeClr val="lt1"/>
               </a:solidFill>
@@ -11869,12 +11942,12 @@
           </a:ln>
         </p:spPr>
         <p:txBody>
-          <a:bodyPr anchorCtr="0" anchor="ctr" bIns="34275" lIns="68575" spcFirstLastPara="1" rIns="68575" wrap="square" tIns="34275">
+          <a:bodyPr spcFirstLastPara="1" wrap="square" lIns="68575" tIns="34275" rIns="68575" bIns="34275" anchor="ctr" anchorCtr="0">
             <a:noAutofit/>
           </a:bodyPr>
           <a:lstStyle/>
           <a:p>
-            <a:pPr indent="0" lvl="0" marL="0" marR="0" rtl="0" algn="ctr">
+            <a:pPr marL="0" marR="0" lvl="0" indent="0" algn="ctr" rtl="0">
               <a:lnSpc>
                 <a:spcPct val="100000"/>
               </a:lnSpc>
@@ -11891,10 +11964,7 @@
               <a:buFont typeface="Calibri"/>
               <a:buNone/>
             </a:pPr>
-            <a:r>
-              <a:t/>
-            </a:r>
-            <a:endParaRPr b="0" i="0" sz="1400" u="none" cap="none" strike="noStrike">
+            <a:endParaRPr sz="1400" b="0" i="0" u="none" strike="noStrike" cap="none">
               <a:solidFill>
                 <a:srgbClr val="FFFFFF"/>
               </a:solidFill>
@@ -11932,9 +12002,13 @@
               <a:ext cx="188913" cy="407988"/>
             </a:xfrm>
             <a:custGeom>
-              <a:rect b="b" l="l" r="r" t="t"/>
+              <a:avLst/>
+              <a:gdLst/>
+              <a:ahLst/>
+              <a:cxnLst/>
+              <a:rect l="l" t="t" r="r" b="b"/>
               <a:pathLst>
-                <a:path extrusionOk="0" h="453" w="210">
+                <a:path w="210" h="453" extrusionOk="0">
                   <a:moveTo>
                     <a:pt x="48" y="208"/>
                   </a:moveTo>
@@ -11995,12 +12069,12 @@
             </a:ln>
           </p:spPr>
           <p:txBody>
-            <a:bodyPr anchorCtr="0" anchor="t" bIns="34275" lIns="68575" spcFirstLastPara="1" rIns="68575" wrap="square" tIns="34275">
+            <a:bodyPr spcFirstLastPara="1" wrap="square" lIns="68575" tIns="34275" rIns="68575" bIns="34275" anchor="t" anchorCtr="0">
               <a:noAutofit/>
             </a:bodyPr>
             <a:lstStyle/>
             <a:p>
-              <a:pPr indent="0" lvl="0" marL="0" marR="0" rtl="0" algn="l">
+              <a:pPr marL="0" marR="0" lvl="0" indent="0" algn="l" rtl="0">
                 <a:lnSpc>
                   <a:spcPct val="100000"/>
                 </a:lnSpc>
@@ -12017,10 +12091,7 @@
                 <a:buFont typeface="Calibri"/>
                 <a:buNone/>
               </a:pPr>
-              <a:r>
-                <a:t/>
-              </a:r>
-              <a:endParaRPr b="0" i="0" sz="1400" u="none" cap="none" strike="noStrike">
+              <a:endParaRPr sz="1400" b="0" i="0" u="none" strike="noStrike" cap="none">
                 <a:solidFill>
                   <a:schemeClr val="dk1"/>
                 </a:solidFill>
@@ -12044,9 +12115,13 @@
               <a:ext cx="71438" cy="231775"/>
             </a:xfrm>
             <a:custGeom>
-              <a:rect b="b" l="l" r="r" t="t"/>
+              <a:avLst/>
+              <a:gdLst/>
+              <a:ahLst/>
+              <a:cxnLst/>
+              <a:rect l="l" t="t" r="r" b="b"/>
               <a:pathLst>
-                <a:path extrusionOk="0" h="258" w="79">
+                <a:path w="79" h="258" extrusionOk="0">
                   <a:moveTo>
                     <a:pt x="0" y="185"/>
                   </a:moveTo>
@@ -12102,12 +12177,12 @@
             </a:ln>
           </p:spPr>
           <p:txBody>
-            <a:bodyPr anchorCtr="0" anchor="t" bIns="34275" lIns="68575" spcFirstLastPara="1" rIns="68575" wrap="square" tIns="34275">
+            <a:bodyPr spcFirstLastPara="1" wrap="square" lIns="68575" tIns="34275" rIns="68575" bIns="34275" anchor="t" anchorCtr="0">
               <a:noAutofit/>
             </a:bodyPr>
             <a:lstStyle/>
             <a:p>
-              <a:pPr indent="0" lvl="0" marL="0" marR="0" rtl="0" algn="l">
+              <a:pPr marL="0" marR="0" lvl="0" indent="0" algn="l" rtl="0">
                 <a:lnSpc>
                   <a:spcPct val="100000"/>
                 </a:lnSpc>
@@ -12124,10 +12199,7 @@
                 <a:buFont typeface="Calibri"/>
                 <a:buNone/>
               </a:pPr>
-              <a:r>
-                <a:t/>
-              </a:r>
-              <a:endParaRPr b="0" i="0" sz="1400" u="none" cap="none" strike="noStrike">
+              <a:endParaRPr sz="1400" b="0" i="0" u="none" strike="noStrike" cap="none">
                 <a:solidFill>
                   <a:schemeClr val="dk1"/>
                 </a:solidFill>
@@ -12151,9 +12223,13 @@
               <a:ext cx="69850" cy="231775"/>
             </a:xfrm>
             <a:custGeom>
-              <a:rect b="b" l="l" r="r" t="t"/>
+              <a:avLst/>
+              <a:gdLst/>
+              <a:ahLst/>
+              <a:cxnLst/>
+              <a:rect l="l" t="t" r="r" b="b"/>
               <a:pathLst>
-                <a:path extrusionOk="0" h="258" w="79">
+                <a:path w="79" h="258" extrusionOk="0">
                   <a:moveTo>
                     <a:pt x="79" y="188"/>
                   </a:moveTo>
@@ -12222,12 +12298,12 @@
             </a:ln>
           </p:spPr>
           <p:txBody>
-            <a:bodyPr anchorCtr="0" anchor="t" bIns="34275" lIns="68575" spcFirstLastPara="1" rIns="68575" wrap="square" tIns="34275">
+            <a:bodyPr spcFirstLastPara="1" wrap="square" lIns="68575" tIns="34275" rIns="68575" bIns="34275" anchor="t" anchorCtr="0">
               <a:noAutofit/>
             </a:bodyPr>
             <a:lstStyle/>
             <a:p>
-              <a:pPr indent="0" lvl="0" marL="0" marR="0" rtl="0" algn="l">
+              <a:pPr marL="0" marR="0" lvl="0" indent="0" algn="l" rtl="0">
                 <a:lnSpc>
                   <a:spcPct val="100000"/>
                 </a:lnSpc>
@@ -12244,10 +12320,7 @@
                 <a:buFont typeface="Calibri"/>
                 <a:buNone/>
               </a:pPr>
-              <a:r>
-                <a:t/>
-              </a:r>
-              <a:endParaRPr b="0" i="0" sz="1400" u="none" cap="none" strike="noStrike">
+              <a:endParaRPr sz="1400" b="0" i="0" u="none" strike="noStrike" cap="none">
                 <a:solidFill>
                   <a:schemeClr val="dk1"/>
                 </a:solidFill>
@@ -12271,9 +12344,13 @@
               <a:ext cx="430213" cy="449263"/>
             </a:xfrm>
             <a:custGeom>
-              <a:rect b="b" l="l" r="r" t="t"/>
+              <a:avLst/>
+              <a:gdLst/>
+              <a:ahLst/>
+              <a:cxnLst/>
+              <a:rect l="l" t="t" r="r" b="b"/>
               <a:pathLst>
-                <a:path extrusionOk="0" h="498" w="478">
+                <a:path w="478" h="498" extrusionOk="0">
                   <a:moveTo>
                     <a:pt x="463" y="211"/>
                   </a:moveTo>
@@ -12361,12 +12438,12 @@
             </a:ln>
           </p:spPr>
           <p:txBody>
-            <a:bodyPr anchorCtr="0" anchor="t" bIns="34275" lIns="68575" spcFirstLastPara="1" rIns="68575" wrap="square" tIns="34275">
+            <a:bodyPr spcFirstLastPara="1" wrap="square" lIns="68575" tIns="34275" rIns="68575" bIns="34275" anchor="t" anchorCtr="0">
               <a:noAutofit/>
             </a:bodyPr>
             <a:lstStyle/>
             <a:p>
-              <a:pPr indent="0" lvl="0" marL="0" marR="0" rtl="0" algn="l">
+              <a:pPr marL="0" marR="0" lvl="0" indent="0" algn="l" rtl="0">
                 <a:lnSpc>
                   <a:spcPct val="100000"/>
                 </a:lnSpc>
@@ -12383,10 +12460,7 @@
                 <a:buFont typeface="Calibri"/>
                 <a:buNone/>
               </a:pPr>
-              <a:r>
-                <a:t/>
-              </a:r>
-              <a:endParaRPr b="0" i="0" sz="1400" u="none" cap="none" strike="noStrike">
+              <a:endParaRPr sz="1400" b="0" i="0" u="none" strike="noStrike" cap="none">
                 <a:solidFill>
                   <a:schemeClr val="dk1"/>
                 </a:solidFill>
@@ -12410,9 +12484,13 @@
               <a:ext cx="225425" cy="115888"/>
             </a:xfrm>
             <a:custGeom>
-              <a:rect b="b" l="l" r="r" t="t"/>
+              <a:avLst/>
+              <a:gdLst/>
+              <a:ahLst/>
+              <a:cxnLst/>
+              <a:rect l="l" t="t" r="r" b="b"/>
               <a:pathLst>
-                <a:path extrusionOk="0" h="128" w="251">
+                <a:path w="251" h="128" extrusionOk="0">
                   <a:moveTo>
                     <a:pt x="172" y="58"/>
                   </a:moveTo>
@@ -12558,12 +12636,12 @@
             </a:ln>
           </p:spPr>
           <p:txBody>
-            <a:bodyPr anchorCtr="0" anchor="t" bIns="34275" lIns="68575" spcFirstLastPara="1" rIns="68575" wrap="square" tIns="34275">
+            <a:bodyPr spcFirstLastPara="1" wrap="square" lIns="68575" tIns="34275" rIns="68575" bIns="34275" anchor="t" anchorCtr="0">
               <a:noAutofit/>
             </a:bodyPr>
             <a:lstStyle/>
             <a:p>
-              <a:pPr indent="0" lvl="0" marL="0" marR="0" rtl="0" algn="l">
+              <a:pPr marL="0" marR="0" lvl="0" indent="0" algn="l" rtl="0">
                 <a:lnSpc>
                   <a:spcPct val="100000"/>
                 </a:lnSpc>
@@ -12580,10 +12658,7 @@
                 <a:buFont typeface="Calibri"/>
                 <a:buNone/>
               </a:pPr>
-              <a:r>
-                <a:t/>
-              </a:r>
-              <a:endParaRPr b="0" i="0" sz="1400" u="none" cap="none" strike="noStrike">
+              <a:endParaRPr sz="1400" b="0" i="0" u="none" strike="noStrike" cap="none">
                 <a:solidFill>
                   <a:schemeClr val="dk1"/>
                 </a:solidFill>
@@ -12607,9 +12682,13 @@
               <a:ext cx="212725" cy="31750"/>
             </a:xfrm>
             <a:custGeom>
-              <a:rect b="b" l="l" r="r" t="t"/>
+              <a:avLst/>
+              <a:gdLst/>
+              <a:ahLst/>
+              <a:cxnLst/>
+              <a:rect l="l" t="t" r="r" b="b"/>
               <a:pathLst>
-                <a:path extrusionOk="0" h="20" w="134">
+                <a:path w="134" h="20" extrusionOk="0">
                   <a:moveTo>
                     <a:pt x="122" y="12"/>
                   </a:moveTo>
@@ -12661,12 +12740,12 @@
             </a:ln>
           </p:spPr>
           <p:txBody>
-            <a:bodyPr anchorCtr="0" anchor="t" bIns="34275" lIns="68575" spcFirstLastPara="1" rIns="68575" wrap="square" tIns="34275">
+            <a:bodyPr spcFirstLastPara="1" wrap="square" lIns="68575" tIns="34275" rIns="68575" bIns="34275" anchor="t" anchorCtr="0">
               <a:noAutofit/>
             </a:bodyPr>
             <a:lstStyle/>
             <a:p>
-              <a:pPr indent="0" lvl="0" marL="0" marR="0" rtl="0" algn="l">
+              <a:pPr marL="0" marR="0" lvl="0" indent="0" algn="l" rtl="0">
                 <a:lnSpc>
                   <a:spcPct val="100000"/>
                 </a:lnSpc>
@@ -12683,10 +12762,7 @@
                 <a:buFont typeface="Calibri"/>
                 <a:buNone/>
               </a:pPr>
-              <a:r>
-                <a:t/>
-              </a:r>
-              <a:endParaRPr b="0" i="0" sz="1400" u="none" cap="none" strike="noStrike">
+              <a:endParaRPr sz="1400" b="0" i="0" u="none" strike="noStrike" cap="none">
                 <a:solidFill>
                   <a:schemeClr val="dk1"/>
                 </a:solidFill>
@@ -12710,9 +12786,13 @@
               <a:ext cx="200025" cy="90488"/>
             </a:xfrm>
             <a:custGeom>
-              <a:rect b="b" l="l" r="r" t="t"/>
+              <a:avLst/>
+              <a:gdLst/>
+              <a:ahLst/>
+              <a:cxnLst/>
+              <a:rect l="l" t="t" r="r" b="b"/>
               <a:pathLst>
-                <a:path extrusionOk="0" h="57" w="126">
+                <a:path w="126" h="57" extrusionOk="0">
                   <a:moveTo>
                     <a:pt x="69" y="45"/>
                   </a:moveTo>
@@ -12776,12 +12856,12 @@
             </a:ln>
           </p:spPr>
           <p:txBody>
-            <a:bodyPr anchorCtr="0" anchor="t" bIns="34275" lIns="68575" spcFirstLastPara="1" rIns="68575" wrap="square" tIns="34275">
+            <a:bodyPr spcFirstLastPara="1" wrap="square" lIns="68575" tIns="34275" rIns="68575" bIns="34275" anchor="t" anchorCtr="0">
               <a:noAutofit/>
             </a:bodyPr>
             <a:lstStyle/>
             <a:p>
-              <a:pPr indent="0" lvl="0" marL="0" marR="0" rtl="0" algn="l">
+              <a:pPr marL="0" marR="0" lvl="0" indent="0" algn="l" rtl="0">
                 <a:lnSpc>
                   <a:spcPct val="100000"/>
                 </a:lnSpc>
@@ -12798,10 +12878,7 @@
                 <a:buFont typeface="Calibri"/>
                 <a:buNone/>
               </a:pPr>
-              <a:r>
-                <a:t/>
-              </a:r>
-              <a:endParaRPr b="0" i="0" sz="1400" u="none" cap="none" strike="noStrike">
+              <a:endParaRPr sz="1400" b="0" i="0" u="none" strike="noStrike" cap="none">
                 <a:solidFill>
                   <a:schemeClr val="dk1"/>
                 </a:solidFill>
@@ -12825,9 +12902,13 @@
               <a:ext cx="142875" cy="149225"/>
             </a:xfrm>
             <a:custGeom>
-              <a:rect b="b" l="l" r="r" t="t"/>
+              <a:avLst/>
+              <a:gdLst/>
+              <a:ahLst/>
+              <a:cxnLst/>
+              <a:rect l="l" t="t" r="r" b="b"/>
               <a:pathLst>
-                <a:path extrusionOk="0" h="94" w="90">
+                <a:path w="90" h="94" extrusionOk="0">
                   <a:moveTo>
                     <a:pt x="12" y="94"/>
                   </a:moveTo>
@@ -12918,12 +12999,12 @@
             </a:ln>
           </p:spPr>
           <p:txBody>
-            <a:bodyPr anchorCtr="0" anchor="t" bIns="34275" lIns="68575" spcFirstLastPara="1" rIns="68575" wrap="square" tIns="34275">
+            <a:bodyPr spcFirstLastPara="1" wrap="square" lIns="68575" tIns="34275" rIns="68575" bIns="34275" anchor="t" anchorCtr="0">
               <a:noAutofit/>
             </a:bodyPr>
             <a:lstStyle/>
             <a:p>
-              <a:pPr indent="0" lvl="0" marL="0" marR="0" rtl="0" algn="l">
+              <a:pPr marL="0" marR="0" lvl="0" indent="0" algn="l" rtl="0">
                 <a:lnSpc>
                   <a:spcPct val="100000"/>
                 </a:lnSpc>
@@ -12940,10 +13021,7 @@
                 <a:buFont typeface="Calibri"/>
                 <a:buNone/>
               </a:pPr>
-              <a:r>
-                <a:t/>
-              </a:r>
-              <a:endParaRPr b="0" i="0" sz="1400" u="none" cap="none" strike="noStrike">
+              <a:endParaRPr sz="1400" b="0" i="0" u="none" strike="noStrike" cap="none">
                 <a:solidFill>
                   <a:schemeClr val="dk1"/>
                 </a:solidFill>
@@ -12967,9 +13045,13 @@
               <a:ext cx="39688" cy="46038"/>
             </a:xfrm>
             <a:custGeom>
-              <a:rect b="b" l="l" r="r" t="t"/>
+              <a:avLst/>
+              <a:gdLst/>
+              <a:ahLst/>
+              <a:cxnLst/>
+              <a:rect l="l" t="t" r="r" b="b"/>
               <a:pathLst>
-                <a:path extrusionOk="0" h="29" w="25">
+                <a:path w="25" h="29" extrusionOk="0">
                   <a:moveTo>
                     <a:pt x="0" y="23"/>
                   </a:moveTo>
@@ -12997,12 +13079,12 @@
             </a:ln>
           </p:spPr>
           <p:txBody>
-            <a:bodyPr anchorCtr="0" anchor="t" bIns="34275" lIns="68575" spcFirstLastPara="1" rIns="68575" wrap="square" tIns="34275">
+            <a:bodyPr spcFirstLastPara="1" wrap="square" lIns="68575" tIns="34275" rIns="68575" bIns="34275" anchor="t" anchorCtr="0">
               <a:noAutofit/>
             </a:bodyPr>
             <a:lstStyle/>
             <a:p>
-              <a:pPr indent="0" lvl="0" marL="0" marR="0" rtl="0" algn="l">
+              <a:pPr marL="0" marR="0" lvl="0" indent="0" algn="l" rtl="0">
                 <a:lnSpc>
                   <a:spcPct val="100000"/>
                 </a:lnSpc>
@@ -13019,10 +13101,7 @@
                 <a:buFont typeface="Calibri"/>
                 <a:buNone/>
               </a:pPr>
-              <a:r>
-                <a:t/>
-              </a:r>
-              <a:endParaRPr b="0" i="0" sz="1400" u="none" cap="none" strike="noStrike">
+              <a:endParaRPr sz="1400" b="0" i="0" u="none" strike="noStrike" cap="none">
                 <a:solidFill>
                   <a:schemeClr val="dk1"/>
                 </a:solidFill>
@@ -13046,9 +13125,13 @@
               <a:ext cx="39688" cy="46038"/>
             </a:xfrm>
             <a:custGeom>
-              <a:rect b="b" l="l" r="r" t="t"/>
+              <a:avLst/>
+              <a:gdLst/>
+              <a:ahLst/>
+              <a:cxnLst/>
+              <a:rect l="l" t="t" r="r" b="b"/>
               <a:pathLst>
-                <a:path extrusionOk="0" h="29" w="25">
+                <a:path w="25" h="29" extrusionOk="0">
                   <a:moveTo>
                     <a:pt x="25" y="23"/>
                   </a:moveTo>
@@ -13076,12 +13159,12 @@
             </a:ln>
           </p:spPr>
           <p:txBody>
-            <a:bodyPr anchorCtr="0" anchor="t" bIns="34275" lIns="68575" spcFirstLastPara="1" rIns="68575" wrap="square" tIns="34275">
+            <a:bodyPr spcFirstLastPara="1" wrap="square" lIns="68575" tIns="34275" rIns="68575" bIns="34275" anchor="t" anchorCtr="0">
               <a:noAutofit/>
             </a:bodyPr>
             <a:lstStyle/>
             <a:p>
-              <a:pPr indent="0" lvl="0" marL="0" marR="0" rtl="0" algn="l">
+              <a:pPr marL="0" marR="0" lvl="0" indent="0" algn="l" rtl="0">
                 <a:lnSpc>
                   <a:spcPct val="100000"/>
                 </a:lnSpc>
@@ -13098,10 +13181,7 @@
                 <a:buFont typeface="Calibri"/>
                 <a:buNone/>
               </a:pPr>
-              <a:r>
-                <a:t/>
-              </a:r>
-              <a:endParaRPr b="0" i="0" sz="1400" u="none" cap="none" strike="noStrike">
+              <a:endParaRPr sz="1400" b="0" i="0" u="none" strike="noStrike" cap="none">
                 <a:solidFill>
                   <a:schemeClr val="dk1"/>
                 </a:solidFill>
@@ -13125,9 +13205,13 @@
               <a:ext cx="39688" cy="46038"/>
             </a:xfrm>
             <a:custGeom>
-              <a:rect b="b" l="l" r="r" t="t"/>
+              <a:avLst/>
+              <a:gdLst/>
+              <a:ahLst/>
+              <a:cxnLst/>
+              <a:rect l="l" t="t" r="r" b="b"/>
               <a:pathLst>
-                <a:path extrusionOk="0" h="29" w="25">
+                <a:path w="25" h="29" extrusionOk="0">
                   <a:moveTo>
                     <a:pt x="0" y="6"/>
                   </a:moveTo>
@@ -13155,12 +13239,12 @@
             </a:ln>
           </p:spPr>
           <p:txBody>
-            <a:bodyPr anchorCtr="0" anchor="t" bIns="34275" lIns="68575" spcFirstLastPara="1" rIns="68575" wrap="square" tIns="34275">
+            <a:bodyPr spcFirstLastPara="1" wrap="square" lIns="68575" tIns="34275" rIns="68575" bIns="34275" anchor="t" anchorCtr="0">
               <a:noAutofit/>
             </a:bodyPr>
             <a:lstStyle/>
             <a:p>
-              <a:pPr indent="0" lvl="0" marL="0" marR="0" rtl="0" algn="l">
+              <a:pPr marL="0" marR="0" lvl="0" indent="0" algn="l" rtl="0">
                 <a:lnSpc>
                   <a:spcPct val="100000"/>
                 </a:lnSpc>
@@ -13177,10 +13261,7 @@
                 <a:buFont typeface="Calibri"/>
                 <a:buNone/>
               </a:pPr>
-              <a:r>
-                <a:t/>
-              </a:r>
-              <a:endParaRPr b="0" i="0" sz="1400" u="none" cap="none" strike="noStrike">
+              <a:endParaRPr sz="1400" b="0" i="0" u="none" strike="noStrike" cap="none">
                 <a:solidFill>
                   <a:schemeClr val="dk1"/>
                 </a:solidFill>
@@ -13204,9 +13285,13 @@
               <a:ext cx="134938" cy="46038"/>
             </a:xfrm>
             <a:custGeom>
-              <a:rect b="b" l="l" r="r" t="t"/>
+              <a:avLst/>
+              <a:gdLst/>
+              <a:ahLst/>
+              <a:cxnLst/>
+              <a:rect l="l" t="t" r="r" b="b"/>
               <a:pathLst>
-                <a:path extrusionOk="0" h="29" w="85">
+                <a:path w="85" h="29" extrusionOk="0">
                   <a:moveTo>
                     <a:pt x="0" y="17"/>
                   </a:moveTo>
@@ -13234,12 +13319,12 @@
             </a:ln>
           </p:spPr>
           <p:txBody>
-            <a:bodyPr anchorCtr="0" anchor="t" bIns="34275" lIns="68575" spcFirstLastPara="1" rIns="68575" wrap="square" tIns="34275">
+            <a:bodyPr spcFirstLastPara="1" wrap="square" lIns="68575" tIns="34275" rIns="68575" bIns="34275" anchor="t" anchorCtr="0">
               <a:noAutofit/>
             </a:bodyPr>
             <a:lstStyle/>
             <a:p>
-              <a:pPr indent="0" lvl="0" marL="0" marR="0" rtl="0" algn="l">
+              <a:pPr marL="0" marR="0" lvl="0" indent="0" algn="l" rtl="0">
                 <a:lnSpc>
                   <a:spcPct val="100000"/>
                 </a:lnSpc>
@@ -13256,10 +13341,7 @@
                 <a:buFont typeface="Calibri"/>
                 <a:buNone/>
               </a:pPr>
-              <a:r>
-                <a:t/>
-              </a:r>
-              <a:endParaRPr b="0" i="0" sz="1400" u="none" cap="none" strike="noStrike">
+              <a:endParaRPr sz="1400" b="0" i="0" u="none" strike="noStrike" cap="none">
                 <a:solidFill>
                   <a:schemeClr val="dk1"/>
                 </a:solidFill>
@@ -13283,9 +13365,13 @@
               <a:ext cx="117475" cy="207963"/>
             </a:xfrm>
             <a:custGeom>
-              <a:rect b="b" l="l" r="r" t="t"/>
+              <a:avLst/>
+              <a:gdLst/>
+              <a:ahLst/>
+              <a:cxnLst/>
+              <a:rect l="l" t="t" r="r" b="b"/>
               <a:pathLst>
-                <a:path extrusionOk="0" h="131" w="74">
+                <a:path w="74" h="131" extrusionOk="0">
                   <a:moveTo>
                     <a:pt x="46" y="49"/>
                   </a:moveTo>
@@ -13364,12 +13450,12 @@
             </a:ln>
           </p:spPr>
           <p:txBody>
-            <a:bodyPr anchorCtr="0" anchor="t" bIns="34275" lIns="68575" spcFirstLastPara="1" rIns="68575" wrap="square" tIns="34275">
+            <a:bodyPr spcFirstLastPara="1" wrap="square" lIns="68575" tIns="34275" rIns="68575" bIns="34275" anchor="t" anchorCtr="0">
               <a:noAutofit/>
             </a:bodyPr>
             <a:lstStyle/>
             <a:p>
-              <a:pPr indent="0" lvl="0" marL="0" marR="0" rtl="0" algn="l">
+              <a:pPr marL="0" marR="0" lvl="0" indent="0" algn="l" rtl="0">
                 <a:lnSpc>
                   <a:spcPct val="100000"/>
                 </a:lnSpc>
@@ -13386,10 +13472,7 @@
                 <a:buFont typeface="Calibri"/>
                 <a:buNone/>
               </a:pPr>
-              <a:r>
-                <a:t/>
-              </a:r>
-              <a:endParaRPr b="0" i="0" sz="1400" u="none" cap="none" strike="noStrike">
+              <a:endParaRPr sz="1400" b="0" i="0" u="none" strike="noStrike" cap="none">
                 <a:solidFill>
                   <a:schemeClr val="dk1"/>
                 </a:solidFill>
@@ -13413,9 +13496,13 @@
               <a:ext cx="103188" cy="44450"/>
             </a:xfrm>
             <a:custGeom>
-              <a:rect b="b" l="l" r="r" t="t"/>
+              <a:avLst/>
+              <a:gdLst/>
+              <a:ahLst/>
+              <a:cxnLst/>
+              <a:rect l="l" t="t" r="r" b="b"/>
               <a:pathLst>
-                <a:path extrusionOk="0" h="28" w="65">
+                <a:path w="65" h="28" extrusionOk="0">
                   <a:moveTo>
                     <a:pt x="0" y="16"/>
                   </a:moveTo>
@@ -13443,12 +13530,12 @@
             </a:ln>
           </p:spPr>
           <p:txBody>
-            <a:bodyPr anchorCtr="0" anchor="t" bIns="34275" lIns="68575" spcFirstLastPara="1" rIns="68575" wrap="square" tIns="34275">
+            <a:bodyPr spcFirstLastPara="1" wrap="square" lIns="68575" tIns="34275" rIns="68575" bIns="34275" anchor="t" anchorCtr="0">
               <a:noAutofit/>
             </a:bodyPr>
             <a:lstStyle/>
             <a:p>
-              <a:pPr indent="0" lvl="0" marL="0" marR="0" rtl="0" algn="l">
+              <a:pPr marL="0" marR="0" lvl="0" indent="0" algn="l" rtl="0">
                 <a:lnSpc>
                   <a:spcPct val="100000"/>
                 </a:lnSpc>
@@ -13465,10 +13552,7 @@
                 <a:buFont typeface="Calibri"/>
                 <a:buNone/>
               </a:pPr>
-              <a:r>
-                <a:t/>
-              </a:r>
-              <a:endParaRPr b="0" i="0" sz="1400" u="none" cap="none" strike="noStrike">
+              <a:endParaRPr sz="1400" b="0" i="0" u="none" strike="noStrike" cap="none">
                 <a:solidFill>
                   <a:schemeClr val="dk1"/>
                 </a:solidFill>
@@ -13492,9 +13576,13 @@
               <a:ext cx="698501" cy="392113"/>
             </a:xfrm>
             <a:custGeom>
-              <a:rect b="b" l="l" r="r" t="t"/>
+              <a:avLst/>
+              <a:gdLst/>
+              <a:ahLst/>
+              <a:cxnLst/>
+              <a:rect l="l" t="t" r="r" b="b"/>
               <a:pathLst>
-                <a:path extrusionOk="0" h="436" w="776">
+                <a:path w="776" h="436" extrusionOk="0">
                   <a:moveTo>
                     <a:pt x="740" y="336"/>
                   </a:moveTo>
@@ -13602,12 +13690,12 @@
             </a:ln>
           </p:spPr>
           <p:txBody>
-            <a:bodyPr anchorCtr="0" anchor="t" bIns="34275" lIns="68575" spcFirstLastPara="1" rIns="68575" wrap="square" tIns="34275">
+            <a:bodyPr spcFirstLastPara="1" wrap="square" lIns="68575" tIns="34275" rIns="68575" bIns="34275" anchor="t" anchorCtr="0">
               <a:noAutofit/>
             </a:bodyPr>
             <a:lstStyle/>
             <a:p>
-              <a:pPr indent="0" lvl="0" marL="0" marR="0" rtl="0" algn="l">
+              <a:pPr marL="0" marR="0" lvl="0" indent="0" algn="l" rtl="0">
                 <a:lnSpc>
                   <a:spcPct val="100000"/>
                 </a:lnSpc>
@@ -13624,10 +13712,7 @@
                 <a:buFont typeface="Calibri"/>
                 <a:buNone/>
               </a:pPr>
-              <a:r>
-                <a:t/>
-              </a:r>
-              <a:endParaRPr b="0" i="0" sz="1400" u="none" cap="none" strike="noStrike">
+              <a:endParaRPr sz="1400" b="0" i="0" u="none" strike="noStrike" cap="none">
                 <a:solidFill>
                   <a:schemeClr val="dk1"/>
                 </a:solidFill>
@@ -13651,9 +13736,13 @@
               <a:ext cx="679449" cy="800099"/>
             </a:xfrm>
             <a:custGeom>
-              <a:rect b="b" l="l" r="r" t="t"/>
+              <a:avLst/>
+              <a:gdLst/>
+              <a:ahLst/>
+              <a:cxnLst/>
+              <a:rect l="l" t="t" r="r" b="b"/>
               <a:pathLst>
-                <a:path extrusionOk="0" h="888" w="756">
+                <a:path w="756" h="888" extrusionOk="0">
                   <a:moveTo>
                     <a:pt x="313" y="0"/>
                   </a:moveTo>
@@ -13791,12 +13880,12 @@
             </a:ln>
           </p:spPr>
           <p:txBody>
-            <a:bodyPr anchorCtr="0" anchor="t" bIns="34275" lIns="68575" spcFirstLastPara="1" rIns="68575" wrap="square" tIns="34275">
+            <a:bodyPr spcFirstLastPara="1" wrap="square" lIns="68575" tIns="34275" rIns="68575" bIns="34275" anchor="t" anchorCtr="0">
               <a:noAutofit/>
             </a:bodyPr>
             <a:lstStyle/>
             <a:p>
-              <a:pPr indent="0" lvl="0" marL="0" marR="0" rtl="0" algn="l">
+              <a:pPr marL="0" marR="0" lvl="0" indent="0" algn="l" rtl="0">
                 <a:lnSpc>
                   <a:spcPct val="100000"/>
                 </a:lnSpc>
@@ -13813,10 +13902,7 @@
                 <a:buFont typeface="Calibri"/>
                 <a:buNone/>
               </a:pPr>
-              <a:r>
-                <a:t/>
-              </a:r>
-              <a:endParaRPr b="0" i="0" sz="1400" u="none" cap="none" strike="noStrike">
+              <a:endParaRPr sz="1400" b="0" i="0" u="none" strike="noStrike" cap="none">
                 <a:solidFill>
                   <a:schemeClr val="dk1"/>
                 </a:solidFill>
@@ -13839,7 +13925,7 @@
           <a:blip r:embed="rId3">
             <a:alphaModFix/>
           </a:blip>
-          <a:srcRect b="0" l="0" r="0" t="0"/>
+          <a:srcRect/>
           <a:stretch/>
         </p:blipFill>
         <p:spPr>
@@ -13904,12 +13990,12 @@
           </a:ln>
         </p:spPr>
         <p:txBody>
-          <a:bodyPr anchorCtr="0" anchor="t" bIns="91425" lIns="91425" spcFirstLastPara="1" rIns="91425" wrap="square" tIns="91425">
+          <a:bodyPr spcFirstLastPara="1" wrap="square" lIns="91425" tIns="91425" rIns="91425" bIns="91425" anchor="t" anchorCtr="0">
             <a:noAutofit/>
           </a:bodyPr>
           <a:lstStyle/>
           <a:p>
-            <a:pPr indent="0" lvl="0" marL="0" rtl="0" algn="l">
+            <a:pPr marL="0" lvl="0" indent="0" algn="l" rtl="0">
               <a:spcBef>
                 <a:spcPts val="0"/>
               </a:spcBef>
@@ -13941,7 +14027,7 @@
             </a:endParaRPr>
           </a:p>
           <a:p>
-            <a:pPr indent="0" lvl="0" marL="0" rtl="0" algn="l">
+            <a:pPr marL="0" lvl="0" indent="0" algn="l" rtl="0">
               <a:spcBef>
                 <a:spcPts val="0"/>
               </a:spcBef>
@@ -13973,7 +14059,7 @@
             </a:endParaRPr>
           </a:p>
           <a:p>
-            <a:pPr indent="0" lvl="0" marL="0" rtl="0" algn="l">
+            <a:pPr marL="0" lvl="0" indent="0" algn="l" rtl="0">
               <a:spcBef>
                 <a:spcPts val="0"/>
               </a:spcBef>
@@ -14026,12 +14112,12 @@
           </a:ln>
         </p:spPr>
         <p:txBody>
-          <a:bodyPr anchorCtr="0" anchor="t" bIns="91425" lIns="91425" spcFirstLastPara="1" rIns="91425" wrap="square" tIns="91425">
+          <a:bodyPr spcFirstLastPara="1" wrap="square" lIns="91425" tIns="91425" rIns="91425" bIns="91425" anchor="t" anchorCtr="0">
             <a:noAutofit/>
           </a:bodyPr>
           <a:lstStyle/>
           <a:p>
-            <a:pPr indent="0" lvl="0" marL="0" rtl="0" algn="l">
+            <a:pPr marL="0" lvl="0" indent="0" algn="l" rtl="0">
               <a:spcBef>
                 <a:spcPts val="0"/>
               </a:spcBef>
@@ -14055,7 +14141,7 @@
             </a:endParaRPr>
           </a:p>
           <a:p>
-            <a:pPr indent="0" lvl="0" marL="0" rtl="0" algn="l">
+            <a:pPr marL="0" lvl="0" indent="0" algn="l" rtl="0">
               <a:spcBef>
                 <a:spcPts val="0"/>
               </a:spcBef>
@@ -14128,12 +14214,12 @@
           </a:ln>
         </p:spPr>
         <p:txBody>
-          <a:bodyPr anchorCtr="0" anchor="t" bIns="91425" lIns="91425" spcFirstLastPara="1" rIns="91425" wrap="square" tIns="91425">
+          <a:bodyPr spcFirstLastPara="1" wrap="square" lIns="91425" tIns="91425" rIns="91425" bIns="91425" anchor="t" anchorCtr="0">
             <a:noAutofit/>
           </a:bodyPr>
           <a:lstStyle/>
           <a:p>
-            <a:pPr indent="0" lvl="0" marL="0" rtl="0" algn="l">
+            <a:pPr marL="0" lvl="0" indent="0" algn="l" rtl="0">
               <a:spcBef>
                 <a:spcPts val="0"/>
               </a:spcBef>
@@ -14167,11 +14253,11 @@
 </file>
 
 <file path=ppt/slides/slide6.xml><?xml version="1.0" encoding="utf-8"?>
-<p:sld xmlns:a="http://schemas.openxmlformats.org/drawingml/2006/main" xmlns:r="http://schemas.openxmlformats.org/officeDocument/2006/relationships" xmlns:mc="http://schemas.openxmlformats.org/markup-compatibility/2006" xmlns:mv="urn:schemas-microsoft-com:mac:vml" xmlns:p="http://schemas.openxmlformats.org/presentationml/2006/main" xmlns:c="http://schemas.openxmlformats.org/drawingml/2006/chart" xmlns:dgm="http://schemas.openxmlformats.org/drawingml/2006/diagram" xmlns:o="urn:schemas-microsoft-com:office:office" xmlns:v="urn:schemas-microsoft-com:vml" xmlns:pvml="urn:schemas-microsoft-com:office:powerpoint" xmlns:com="http://schemas.openxmlformats.org/drawingml/2006/compatibility" xmlns:p14="http://schemas.microsoft.com/office/powerpoint/2010/main" xmlns:p15="http://schemas.microsoft.com/office/powerpoint/2012/main" xmlns:ahyp="http://schemas.microsoft.com/office/drawing/2018/hyperlinkcolor">
+<p:sld xmlns:a="http://schemas.openxmlformats.org/drawingml/2006/main" xmlns:r="http://schemas.openxmlformats.org/officeDocument/2006/relationships" xmlns:p="http://schemas.openxmlformats.org/presentationml/2006/main">
   <p:cSld>
     <p:spTree>
       <p:nvGrpSpPr>
-        <p:cNvPr id="154" name="Shape 154"/>
+        <p:cNvPr id="1" name="Shape 154"/>
         <p:cNvGrpSpPr/>
         <p:nvPr/>
       </p:nvGrpSpPr>
@@ -14205,12 +14291,12 @@
           </a:ln>
         </p:spPr>
         <p:txBody>
-          <a:bodyPr anchorCtr="0" anchor="ctr" bIns="34275" lIns="68575" spcFirstLastPara="1" rIns="68575" wrap="square" tIns="34275">
+          <a:bodyPr spcFirstLastPara="1" wrap="square" lIns="68575" tIns="34275" rIns="68575" bIns="34275" anchor="ctr" anchorCtr="0">
             <a:noAutofit/>
           </a:bodyPr>
           <a:lstStyle/>
           <a:p>
-            <a:pPr indent="0" lvl="0" marL="0" marR="0" rtl="0" algn="ctr">
+            <a:pPr marL="0" marR="0" lvl="0" indent="0" algn="ctr" rtl="0">
               <a:lnSpc>
                 <a:spcPct val="100000"/>
               </a:lnSpc>
@@ -14227,10 +14313,7 @@
               <a:buFont typeface="Calibri"/>
               <a:buNone/>
             </a:pPr>
-            <a:r>
-              <a:t/>
-            </a:r>
-            <a:endParaRPr b="0" i="0" sz="1400" u="none" cap="none" strike="noStrike">
+            <a:endParaRPr sz="1400" b="0" i="0" u="none" strike="noStrike" cap="none">
               <a:solidFill>
                 <a:srgbClr val="FFFFFF"/>
               </a:solidFill>
@@ -14262,12 +14345,12 @@
           </a:ln>
         </p:spPr>
         <p:txBody>
-          <a:bodyPr anchorCtr="0" anchor="t" bIns="34275" lIns="68575" spcFirstLastPara="1" rIns="68575" wrap="square" tIns="34275">
+          <a:bodyPr spcFirstLastPara="1" wrap="square" lIns="68575" tIns="34275" rIns="68575" bIns="34275" anchor="t" anchorCtr="0">
             <a:noAutofit/>
           </a:bodyPr>
           <a:lstStyle/>
           <a:p>
-            <a:pPr indent="0" lvl="0" marL="0" marR="0" rtl="0" algn="l">
+            <a:pPr marL="0" marR="0" lvl="0" indent="0" algn="l" rtl="0">
               <a:lnSpc>
                 <a:spcPct val="100000"/>
               </a:lnSpc>
@@ -14284,10 +14367,7 @@
               <a:buFont typeface="Calibri"/>
               <a:buNone/>
             </a:pPr>
-            <a:r>
-              <a:t/>
-            </a:r>
-            <a:endParaRPr b="0" i="0" sz="1100" u="none" cap="none" strike="noStrike">
+            <a:endParaRPr sz="1100" b="0" i="0" u="none" strike="noStrike" cap="none">
               <a:solidFill>
                 <a:srgbClr val="000000"/>
               </a:solidFill>
@@ -14301,7 +14381,7 @@
       </p:sp>
       <p:pic>
         <p:nvPicPr>
-          <p:cNvPr descr="Dart_logo" id="157" name="Google Shape;157;p19"/>
+          <p:cNvPr id="157" name="Google Shape;157;p19" descr="Dart_logo"/>
           <p:cNvPicPr preferRelativeResize="0"/>
           <p:nvPr/>
         </p:nvPicPr>
@@ -14309,7 +14389,7 @@
           <a:blip r:embed="rId3">
             <a:alphaModFix/>
           </a:blip>
-          <a:srcRect b="0" l="0" r="0" t="0"/>
+          <a:srcRect/>
           <a:stretch/>
         </p:blipFill>
         <p:spPr>
@@ -14325,7 +14405,7 @@
             <a:noFill/>
           </a:ln>
           <a:effectLst>
-            <a:outerShdw blurRad="190500" algn="ctr" dir="2700000" dist="228600">
+            <a:outerShdw blurRad="190500" dist="228600" dir="2700000" algn="ctr">
               <a:srgbClr val="000000">
                 <a:alpha val="29409"/>
               </a:srgbClr>
@@ -14343,7 +14423,7 @@
           <a:blip r:embed="rId4">
             <a:alphaModFix/>
           </a:blip>
-          <a:srcRect b="0" l="0" r="0" t="0"/>
+          <a:srcRect/>
           <a:stretch/>
         </p:blipFill>
         <p:spPr>
@@ -14370,7 +14450,7 @@
           <a:blip r:embed="rId5">
             <a:alphaModFix/>
           </a:blip>
-          <a:srcRect b="0" l="0" r="0" t="0"/>
+          <a:srcRect/>
           <a:stretch/>
         </p:blipFill>
         <p:spPr>
@@ -14382,14 +14462,14 @@
             <a:avLst/>
           </a:prstGeom>
           <a:noFill/>
-          <a:ln cap="flat" cmpd="sng" w="9525">
+          <a:ln w="9525" cap="flat" cmpd="sng">
             <a:solidFill>
               <a:srgbClr val="062374"/>
             </a:solidFill>
             <a:prstDash val="solid"/>
             <a:round/>
-            <a:headEnd len="sm" w="sm" type="none"/>
-            <a:tailEnd len="sm" w="sm" type="none"/>
+            <a:headEnd type="none" w="sm" len="sm"/>
+            <a:tailEnd type="none" w="sm" len="sm"/>
           </a:ln>
         </p:spPr>
       </p:pic>
@@ -14401,32 +14481,32 @@
   <p:timing>
     <p:tnLst>
       <p:par>
-        <p:cTn dur="indefinite" nodeType="tmRoot" restart="never">
+        <p:cTn id="1" dur="indefinite" restart="never" nodeType="tmRoot">
           <p:childTnLst>
             <p:seq concurrent="1" nextAc="seek">
-              <p:cTn dur="indefinite" id="2" nodeType="mainSeq">
+              <p:cTn id="2" dur="indefinite" nodeType="mainSeq">
                 <p:childTnLst>
                   <p:par>
-                    <p:cTn fill="hold">
+                    <p:cTn id="3" fill="hold">
                       <p:stCondLst>
                         <p:cond delay="indefinite"/>
                       </p:stCondLst>
                       <p:childTnLst>
                         <p:par>
-                          <p:cTn fill="hold">
+                          <p:cTn id="4" fill="hold">
                             <p:stCondLst>
                               <p:cond delay="0"/>
                             </p:stCondLst>
                             <p:childTnLst>
                               <p:par>
-                                <p:cTn fill="hold" nodeType="clickEffect" presetClass="entr" presetID="10" presetSubtype="0">
+                                <p:cTn id="5" presetID="10" presetClass="entr" presetSubtype="0" fill="hold" nodeType="clickEffect">
                                   <p:stCondLst>
                                     <p:cond delay="0"/>
                                   </p:stCondLst>
                                   <p:childTnLst>
                                     <p:set>
                                       <p:cBhvr>
-                                        <p:cTn dur="1" fill="hold">
+                                        <p:cTn id="6" dur="1" fill="hold">
                                           <p:stCondLst>
                                             <p:cond delay="0"/>
                                           </p:stCondLst>
@@ -14442,9 +14522,9 @@
                                         <p:strVal val="visible"/>
                                       </p:to>
                                     </p:set>
-                                    <p:animEffect filter="fade" transition="in">
+                                    <p:animEffect transition="in" filter="fade">
                                       <p:cBhvr>
-                                        <p:cTn dur="500"/>
+                                        <p:cTn id="7" dur="500"/>
                                         <p:tgtEl>
                                           <p:spTgt spid="156"/>
                                         </p:tgtEl>
@@ -14460,26 +14540,26 @@
                     </p:cTn>
                   </p:par>
                   <p:par>
-                    <p:cTn fill="hold">
+                    <p:cTn id="8" fill="hold">
                       <p:stCondLst>
                         <p:cond delay="indefinite"/>
                       </p:stCondLst>
                       <p:childTnLst>
                         <p:par>
-                          <p:cTn fill="hold">
+                          <p:cTn id="9" fill="hold">
                             <p:stCondLst>
                               <p:cond delay="0"/>
                             </p:stCondLst>
                             <p:childTnLst>
                               <p:par>
-                                <p:cTn fill="hold" nodeType="clickEffect" presetClass="entr" presetID="10" presetSubtype="0">
+                                <p:cTn id="10" presetID="10" presetClass="entr" presetSubtype="0" fill="hold" nodeType="clickEffect">
                                   <p:stCondLst>
                                     <p:cond delay="0"/>
                                   </p:stCondLst>
                                   <p:childTnLst>
                                     <p:set>
                                       <p:cBhvr>
-                                        <p:cTn dur="1" fill="hold">
+                                        <p:cTn id="11" dur="1" fill="hold">
                                           <p:stCondLst>
                                             <p:cond delay="0"/>
                                           </p:stCondLst>
@@ -14495,9 +14575,9 @@
                                         <p:strVal val="visible"/>
                                       </p:to>
                                     </p:set>
-                                    <p:animEffect filter="fade" transition="in">
+                                    <p:animEffect transition="in" filter="fade">
                                       <p:cBhvr>
-                                        <p:cTn dur="500"/>
+                                        <p:cTn id="12" dur="500"/>
                                         <p:tgtEl>
                                           <p:spTgt spid="156"/>
                                         </p:tgtEl>
@@ -14515,14 +14595,14 @@
                 </p:childTnLst>
               </p:cTn>
               <p:prevCondLst>
-                <p:cond evt="onPrev">
+                <p:cond evt="onPrev" delay="0">
                   <p:tgtEl>
                     <p:sldTgt/>
                   </p:tgtEl>
                 </p:cond>
               </p:prevCondLst>
               <p:nextCondLst>
-                <p:cond evt="onNext">
+                <p:cond evt="onNext" delay="0">
                   <p:tgtEl>
                     <p:sldTgt/>
                   </p:tgtEl>
@@ -14538,18 +14618,19 @@
 </file>
 
 <file path=ppt/slides/slide7.xml><?xml version="1.0" encoding="utf-8"?>
-<p:sld xmlns:a="http://schemas.openxmlformats.org/drawingml/2006/main" xmlns:r="http://schemas.openxmlformats.org/officeDocument/2006/relationships" xmlns:mc="http://schemas.openxmlformats.org/markup-compatibility/2006" xmlns:mv="urn:schemas-microsoft-com:mac:vml" xmlns:p="http://schemas.openxmlformats.org/presentationml/2006/main" xmlns:c="http://schemas.openxmlformats.org/drawingml/2006/chart" xmlns:dgm="http://schemas.openxmlformats.org/drawingml/2006/diagram" xmlns:o="urn:schemas-microsoft-com:office:office" xmlns:v="urn:schemas-microsoft-com:vml" xmlns:pvml="urn:schemas-microsoft-com:office:powerpoint" xmlns:com="http://schemas.openxmlformats.org/drawingml/2006/compatibility" xmlns:p14="http://schemas.microsoft.com/office/powerpoint/2010/main" xmlns:p15="http://schemas.microsoft.com/office/powerpoint/2012/main" xmlns:ahyp="http://schemas.microsoft.com/office/drawing/2018/hyperlinkcolor">
+<p:sld xmlns:a="http://schemas.openxmlformats.org/drawingml/2006/main" xmlns:r="http://schemas.openxmlformats.org/officeDocument/2006/relationships" xmlns:p="http://schemas.openxmlformats.org/presentationml/2006/main">
   <p:cSld>
     <p:bg>
       <p:bgPr>
         <a:solidFill>
           <a:srgbClr val="0D5176"/>
         </a:solidFill>
+        <a:effectLst/>
       </p:bgPr>
     </p:bg>
     <p:spTree>
       <p:nvGrpSpPr>
-        <p:cNvPr id="163" name="Shape 163"/>
+        <p:cNvPr id="1" name="Shape 163"/>
         <p:cNvGrpSpPr/>
         <p:nvPr/>
       </p:nvGrpSpPr>
@@ -14581,12 +14662,12 @@
           </a:ln>
         </p:spPr>
         <p:txBody>
-          <a:bodyPr anchorCtr="0" anchor="t" bIns="34275" lIns="68575" spcFirstLastPara="1" rIns="68575" wrap="square" tIns="34275">
+          <a:bodyPr spcFirstLastPara="1" wrap="square" lIns="68575" tIns="34275" rIns="68575" bIns="34275" anchor="t" anchorCtr="0">
             <a:noAutofit/>
           </a:bodyPr>
           <a:lstStyle/>
           <a:p>
-            <a:pPr indent="0" lvl="0" marL="0" marR="0" rtl="0" algn="l">
+            <a:pPr marL="0" marR="0" lvl="0" indent="0" algn="l" rtl="0">
               <a:lnSpc>
                 <a:spcPct val="100000"/>
               </a:lnSpc>
@@ -14603,10 +14684,7 @@
               <a:buFont typeface="Calibri"/>
               <a:buNone/>
             </a:pPr>
-            <a:r>
-              <a:t/>
-            </a:r>
-            <a:endParaRPr b="0" i="0" sz="1500" u="none" cap="none" strike="noStrike">
+            <a:endParaRPr sz="1500" b="0" i="0" u="none" strike="noStrike" cap="none">
               <a:solidFill>
                 <a:srgbClr val="FFFFFF"/>
               </a:solidFill>
@@ -14620,7 +14698,7 @@
       </p:sp>
       <p:pic>
         <p:nvPicPr>
-          <p:cNvPr descr="Dart_logo" id="165" name="Google Shape;165;p20"/>
+          <p:cNvPr id="165" name="Google Shape;165;p20" descr="Dart_logo"/>
           <p:cNvPicPr preferRelativeResize="0"/>
           <p:nvPr/>
         </p:nvPicPr>
@@ -14628,12 +14706,12 @@
           <a:blip r:embed="rId3">
             <a:alphaModFix/>
           </a:blip>
-          <a:srcRect b="0" l="0" r="0" t="0"/>
+          <a:srcRect/>
           <a:stretch/>
         </p:blipFill>
         <p:spPr>
           <a:xfrm>
-            <a:off x="6613400" y="783429"/>
+            <a:off x="6613400" y="790863"/>
             <a:ext cx="2032390" cy="2032390"/>
           </a:xfrm>
           <a:prstGeom prst="rect">
@@ -14644,7 +14722,7 @@
             <a:noFill/>
           </a:ln>
           <a:effectLst>
-            <a:outerShdw blurRad="190500" algn="ctr" dir="2700000" dist="228600">
+            <a:outerShdw blurRad="190500" dist="228600" dir="2700000" algn="ctr">
               <a:srgbClr val="000000">
                 <a:alpha val="29409"/>
               </a:srgbClr>
@@ -14665,7 +14743,7 @@
           </a:xfrm>
           <a:prstGeom prst="roundRect">
             <a:avLst>
-              <a:gd fmla="val 16667" name="adj"/>
+              <a:gd name="adj" fmla="val 16667"/>
             </a:avLst>
           </a:prstGeom>
           <a:solidFill>
@@ -14675,7 +14753,7 @@
             <a:noFill/>
           </a:ln>
           <a:effectLst>
-            <a:outerShdw blurRad="190500" algn="ctr" dir="2700000" dist="228600">
+            <a:outerShdw blurRad="190500" dist="228600" dir="2700000" algn="ctr">
               <a:srgbClr val="000000">
                 <a:alpha val="29409"/>
               </a:srgbClr>
@@ -14683,12 +14761,12 @@
           </a:effectLst>
         </p:spPr>
         <p:txBody>
-          <a:bodyPr anchorCtr="0" anchor="ctr" bIns="34275" lIns="68575" spcFirstLastPara="1" rIns="68575" wrap="square" tIns="34275">
+          <a:bodyPr spcFirstLastPara="1" wrap="square" lIns="68575" tIns="34275" rIns="68575" bIns="34275" anchor="ctr" anchorCtr="0">
             <a:noAutofit/>
           </a:bodyPr>
           <a:lstStyle/>
           <a:p>
-            <a:pPr indent="0" lvl="0" marL="0" rtl="0" algn="l">
+            <a:pPr marL="0" lvl="0" indent="0" algn="l" rtl="0">
               <a:spcBef>
                 <a:spcPts val="0"/>
               </a:spcBef>
@@ -14702,21 +14780,21 @@
               <a:buNone/>
             </a:pPr>
             <a:r>
-              <a:rPr lang="en" sz="2000">
+              <a:rPr lang="en" sz="2000" dirty="0">
                 <a:solidFill>
                   <a:schemeClr val="lt1"/>
                 </a:solidFill>
               </a:rPr>
               <a:t>Custom exceptions are exceptions we create.</a:t>
             </a:r>
-            <a:endParaRPr sz="2000">
+            <a:endParaRPr sz="2000" dirty="0">
               <a:solidFill>
                 <a:schemeClr val="lt1"/>
               </a:solidFill>
             </a:endParaRPr>
           </a:p>
           <a:p>
-            <a:pPr indent="0" lvl="0" marL="0" rtl="0" algn="l">
+            <a:pPr marL="0" lvl="0" indent="0" algn="l" rtl="0">
               <a:spcBef>
                 <a:spcPts val="0"/>
               </a:spcBef>
@@ -14729,17 +14807,14 @@
               <a:buFont typeface="Arial"/>
               <a:buNone/>
             </a:pPr>
-            <a:r>
-              <a:t/>
-            </a:r>
-            <a:endParaRPr sz="2000">
+            <a:endParaRPr sz="2000" dirty="0">
               <a:solidFill>
                 <a:schemeClr val="dk1"/>
               </a:solidFill>
             </a:endParaRPr>
           </a:p>
           <a:p>
-            <a:pPr indent="0" lvl="0" marL="0" rtl="0" algn="l">
+            <a:pPr marL="0" lvl="0" indent="0" algn="l" rtl="0">
               <a:spcBef>
                 <a:spcPts val="0"/>
               </a:spcBef>
@@ -14753,7 +14828,7 @@
               <a:buNone/>
             </a:pPr>
             <a:r>
-              <a:rPr lang="en" sz="1500">
+              <a:rPr lang="en" sz="1500" dirty="0">
                 <a:solidFill>
                   <a:schemeClr val="lt1"/>
                 </a:solidFill>
@@ -14764,7 +14839,7 @@
               </a:rPr>
               <a:t>For example, Think if a problem rises when the device is getting hot, but managing that problem is not an exception because that type of exception is not there, but it’s a problem.So for that we will create an exception for the problems that are not listed in the types of exceptions.</a:t>
             </a:r>
-            <a:endParaRPr b="1">
+            <a:endParaRPr b="1" dirty="0">
               <a:solidFill>
                 <a:srgbClr val="FFFFFF"/>
               </a:solidFill>
@@ -14789,7 +14864,7 @@
           </a:xfrm>
           <a:prstGeom prst="roundRect">
             <a:avLst>
-              <a:gd fmla="val 16667" name="adj"/>
+              <a:gd name="adj" fmla="val 16667"/>
             </a:avLst>
           </a:prstGeom>
           <a:solidFill>
@@ -14799,7 +14874,7 @@
             <a:noFill/>
           </a:ln>
           <a:effectLst>
-            <a:outerShdw blurRad="190500" algn="ctr" dir="2700000" dist="228600">
+            <a:outerShdw blurRad="190500" dist="228600" dir="2700000" algn="ctr">
               <a:srgbClr val="000000">
                 <a:alpha val="29409"/>
               </a:srgbClr>
@@ -14807,12 +14882,12 @@
           </a:effectLst>
         </p:spPr>
         <p:txBody>
-          <a:bodyPr anchorCtr="0" anchor="ctr" bIns="34275" lIns="68575" spcFirstLastPara="1" rIns="68575" wrap="square" tIns="34275">
+          <a:bodyPr spcFirstLastPara="1" wrap="square" lIns="68575" tIns="34275" rIns="68575" bIns="34275" anchor="ctr" anchorCtr="0">
             <a:noAutofit/>
           </a:bodyPr>
           <a:lstStyle/>
           <a:p>
-            <a:pPr indent="0" lvl="0" marL="0" rtl="0" algn="l">
+            <a:pPr marL="0" lvl="0" indent="0" algn="l" rtl="0">
               <a:spcBef>
                 <a:spcPts val="0"/>
               </a:spcBef>
@@ -14822,7 +14897,7 @@
               <a:buNone/>
             </a:pPr>
             <a:r>
-              <a:rPr b="1" lang="en" sz="1700">
+              <a:rPr lang="en" sz="1700" b="1" dirty="0">
                 <a:solidFill>
                   <a:schemeClr val="lt1"/>
                 </a:solidFill>
@@ -14833,7 +14908,7 @@
               </a:rPr>
               <a:t>But for creating an custom exception we must know about some keywords</a:t>
             </a:r>
-            <a:endParaRPr sz="1700">
+            <a:endParaRPr sz="1700" dirty="0">
               <a:solidFill>
                 <a:schemeClr val="lt1"/>
               </a:solidFill>
@@ -14844,7 +14919,7 @@
             </a:endParaRPr>
           </a:p>
           <a:p>
-            <a:pPr indent="-266700" lvl="0" marL="285750" rtl="0" algn="l">
+            <a:pPr marL="285750" lvl="0" indent="-266700" algn="l" rtl="0">
               <a:spcBef>
                 <a:spcPts val="0"/>
               </a:spcBef>
@@ -14859,7 +14934,7 @@
               <a:buChar char="•"/>
             </a:pPr>
             <a:r>
-              <a:rPr lang="en" sz="1700">
+              <a:rPr lang="en" sz="1700" dirty="0">
                 <a:solidFill>
                   <a:schemeClr val="lt1"/>
                 </a:solidFill>
@@ -14870,7 +14945,7 @@
               </a:rPr>
               <a:t>class</a:t>
             </a:r>
-            <a:endParaRPr sz="1700">
+            <a:endParaRPr sz="1700" dirty="0">
               <a:solidFill>
                 <a:schemeClr val="lt1"/>
               </a:solidFill>
@@ -14881,7 +14956,7 @@
             </a:endParaRPr>
           </a:p>
           <a:p>
-            <a:pPr indent="-266700" lvl="0" marL="285750" rtl="0" algn="l">
+            <a:pPr marL="285750" lvl="0" indent="-266700" algn="l" rtl="0">
               <a:spcBef>
                 <a:spcPts val="0"/>
               </a:spcBef>
@@ -14896,7 +14971,7 @@
               <a:buChar char="•"/>
             </a:pPr>
             <a:r>
-              <a:rPr lang="en" sz="1700">
+              <a:rPr lang="en" sz="1700" dirty="0">
                 <a:solidFill>
                   <a:schemeClr val="lt1"/>
                 </a:solidFill>
@@ -14907,7 +14982,7 @@
               </a:rPr>
               <a:t>constructor </a:t>
             </a:r>
-            <a:endParaRPr sz="1700">
+            <a:endParaRPr sz="1700" dirty="0">
               <a:solidFill>
                 <a:schemeClr val="lt1"/>
               </a:solidFill>
@@ -14918,7 +14993,7 @@
             </a:endParaRPr>
           </a:p>
           <a:p>
-            <a:pPr indent="-266700" lvl="0" marL="285750" rtl="0" algn="l">
+            <a:pPr marL="285750" lvl="0" indent="-266700" algn="l" rtl="0">
               <a:spcBef>
                 <a:spcPts val="0"/>
               </a:spcBef>
@@ -14933,7 +15008,7 @@
               <a:buChar char="•"/>
             </a:pPr>
             <a:r>
-              <a:rPr lang="en" sz="1700">
+              <a:rPr lang="en" sz="1700" dirty="0">
                 <a:solidFill>
                   <a:schemeClr val="lt1"/>
                 </a:solidFill>
@@ -14944,7 +15019,7 @@
               </a:rPr>
               <a:t>implements </a:t>
             </a:r>
-            <a:endParaRPr sz="1700">
+            <a:endParaRPr sz="1700" dirty="0">
               <a:solidFill>
                 <a:schemeClr val="lt1"/>
               </a:solidFill>
@@ -14955,7 +15030,7 @@
             </a:endParaRPr>
           </a:p>
           <a:p>
-            <a:pPr indent="-266700" lvl="0" marL="285750" rtl="0" algn="l">
+            <a:pPr marL="285750" lvl="0" indent="-266700" algn="l" rtl="0">
               <a:spcBef>
                 <a:spcPts val="0"/>
               </a:spcBef>
@@ -14970,7 +15045,7 @@
               <a:buChar char="•"/>
             </a:pPr>
             <a:r>
-              <a:rPr lang="en" sz="1700">
+              <a:rPr lang="en" sz="1700" dirty="0">
                 <a:solidFill>
                   <a:schemeClr val="lt1"/>
                 </a:solidFill>
@@ -14981,7 +15056,7 @@
               </a:rPr>
               <a:t>throw</a:t>
             </a:r>
-            <a:endParaRPr b="1">
+            <a:endParaRPr b="1" dirty="0">
               <a:solidFill>
                 <a:srgbClr val="FFFFFF"/>
               </a:solidFill>
@@ -14992,7 +15067,7 @@
             </a:endParaRPr>
           </a:p>
           <a:p>
-            <a:pPr indent="0" lvl="0" marL="0" marR="0" rtl="0" algn="ctr">
+            <a:pPr marL="0" marR="0" lvl="0" indent="0" algn="ctr" rtl="0">
               <a:lnSpc>
                 <a:spcPct val="100000"/>
               </a:lnSpc>
@@ -15009,10 +15084,7 @@
               <a:buFont typeface="Calibri"/>
               <a:buNone/>
             </a:pPr>
-            <a:r>
-              <a:t/>
-            </a:r>
-            <a:endParaRPr b="0" i="0" sz="1400" u="none" cap="none" strike="noStrike">
+            <a:endParaRPr sz="1400" b="0" i="0" u="none" strike="noStrike" cap="none" dirty="0">
               <a:solidFill>
                 <a:schemeClr val="lt1"/>
               </a:solidFill>
@@ -15044,12 +15116,12 @@
           </a:ln>
         </p:spPr>
         <p:txBody>
-          <a:bodyPr anchorCtr="0" anchor="t" bIns="34275" lIns="68575" spcFirstLastPara="1" rIns="68575" wrap="square" tIns="34275">
+          <a:bodyPr spcFirstLastPara="1" wrap="square" lIns="68575" tIns="34275" rIns="68575" bIns="34275" anchor="t" anchorCtr="0">
             <a:spAutoFit/>
           </a:bodyPr>
           <a:lstStyle/>
           <a:p>
-            <a:pPr indent="0" lvl="0" marL="0" marR="0" rtl="0" algn="ctr">
+            <a:pPr marL="0" marR="0" lvl="0" indent="0" algn="ctr" rtl="0">
               <a:lnSpc>
                 <a:spcPct val="100000"/>
               </a:lnSpc>
@@ -15067,14 +15139,14 @@
               <a:buNone/>
             </a:pPr>
             <a:r>
-              <a:rPr b="1" lang="en" sz="3000">
+              <a:rPr lang="en" sz="3000" b="1">
                 <a:solidFill>
                   <a:schemeClr val="lt1"/>
                 </a:solidFill>
               </a:rPr>
               <a:t>Custom Exception</a:t>
             </a:r>
-            <a:endParaRPr b="1" i="0" sz="3000" u="none" cap="none" strike="noStrike">
+            <a:endParaRPr sz="3000" b="1" i="0" u="none" strike="noStrike" cap="none">
               <a:solidFill>
                 <a:schemeClr val="lt1"/>
               </a:solidFill>
@@ -15085,7 +15157,7 @@
             </a:endParaRPr>
           </a:p>
           <a:p>
-            <a:pPr indent="0" lvl="0" marL="0" marR="0" rtl="0" algn="l">
+            <a:pPr marL="0" marR="0" lvl="0" indent="0" algn="l" rtl="0">
               <a:lnSpc>
                 <a:spcPct val="100000"/>
               </a:lnSpc>
@@ -15103,7 +15175,7 @@
               <a:buNone/>
             </a:pPr>
             <a:br>
-              <a:rPr b="0" i="0" lang="en" sz="1400" u="none" cap="none" strike="noStrike">
+              <a:rPr lang="en" sz="1400" b="0" i="0" u="none" strike="noStrike" cap="none">
                 <a:solidFill>
                   <a:schemeClr val="dk1"/>
                 </a:solidFill>
@@ -15113,7 +15185,7 @@
                 <a:sym typeface="Calibri"/>
               </a:rPr>
             </a:br>
-            <a:endParaRPr b="0" i="0" sz="1400" u="none" cap="none" strike="noStrike">
+            <a:endParaRPr sz="1400" b="0" i="0" u="none" strike="noStrike" cap="none">
               <a:solidFill>
                 <a:schemeClr val="dk1"/>
               </a:solidFill>
@@ -15135,7 +15207,7 @@
           <a:blip r:embed="rId4">
             <a:alphaModFix/>
           </a:blip>
-          <a:srcRect b="0" l="0" r="0" t="0"/>
+          <a:srcRect/>
           <a:stretch/>
         </p:blipFill>
         <p:spPr>
@@ -15160,32 +15232,32 @@
   <p:timing>
     <p:tnLst>
       <p:par>
-        <p:cTn dur="indefinite" nodeType="tmRoot" restart="never">
+        <p:cTn id="1" dur="indefinite" restart="never" nodeType="tmRoot">
           <p:childTnLst>
             <p:seq concurrent="1" nextAc="seek">
-              <p:cTn dur="indefinite" id="2" nodeType="mainSeq">
+              <p:cTn id="2" dur="indefinite" nodeType="mainSeq">
                 <p:childTnLst>
                   <p:par>
-                    <p:cTn fill="hold">
+                    <p:cTn id="3" fill="hold">
                       <p:stCondLst>
                         <p:cond delay="indefinite"/>
                       </p:stCondLst>
                       <p:childTnLst>
                         <p:par>
-                          <p:cTn fill="hold">
+                          <p:cTn id="4" fill="hold">
                             <p:stCondLst>
                               <p:cond delay="0"/>
                             </p:stCondLst>
                             <p:childTnLst>
                               <p:par>
-                                <p:cTn fill="hold" nodeType="clickEffect" presetClass="entr" presetID="10" presetSubtype="0">
+                                <p:cTn id="5" presetID="10" presetClass="entr" presetSubtype="0" fill="hold" nodeType="clickEffect">
                                   <p:stCondLst>
                                     <p:cond delay="0"/>
                                   </p:stCondLst>
                                   <p:childTnLst>
                                     <p:set>
                                       <p:cBhvr>
-                                        <p:cTn dur="1" fill="hold">
+                                        <p:cTn id="6" dur="1" fill="hold">
                                           <p:stCondLst>
                                             <p:cond delay="0"/>
                                           </p:stCondLst>
@@ -15201,9 +15273,9 @@
                                         <p:strVal val="visible"/>
                                       </p:to>
                                     </p:set>
-                                    <p:animEffect filter="fade" transition="in">
+                                    <p:animEffect transition="in" filter="fade">
                                       <p:cBhvr>
-                                        <p:cTn dur="500"/>
+                                        <p:cTn id="7" dur="500"/>
                                         <p:tgtEl>
                                           <p:spTgt spid="166"/>
                                         </p:tgtEl>
@@ -15219,26 +15291,26 @@
                     </p:cTn>
                   </p:par>
                   <p:par>
-                    <p:cTn fill="hold">
+                    <p:cTn id="8" fill="hold">
                       <p:stCondLst>
                         <p:cond delay="indefinite"/>
                       </p:stCondLst>
                       <p:childTnLst>
                         <p:par>
-                          <p:cTn fill="hold">
+                          <p:cTn id="9" fill="hold">
                             <p:stCondLst>
                               <p:cond delay="0"/>
                             </p:stCondLst>
                             <p:childTnLst>
                               <p:par>
-                                <p:cTn fill="hold" nodeType="clickEffect" presetClass="entr" presetID="10" presetSubtype="0">
+                                <p:cTn id="10" presetID="10" presetClass="entr" presetSubtype="0" fill="hold" nodeType="clickEffect">
                                   <p:stCondLst>
                                     <p:cond delay="0"/>
                                   </p:stCondLst>
                                   <p:childTnLst>
                                     <p:set>
                                       <p:cBhvr>
-                                        <p:cTn dur="1" fill="hold">
+                                        <p:cTn id="11" dur="1" fill="hold">
                                           <p:stCondLst>
                                             <p:cond delay="0"/>
                                           </p:stCondLst>
@@ -15254,9 +15326,9 @@
                                         <p:strVal val="visible"/>
                                       </p:to>
                                     </p:set>
-                                    <p:animEffect filter="fade" transition="in">
+                                    <p:animEffect transition="in" filter="fade">
                                       <p:cBhvr>
-                                        <p:cTn dur="500"/>
+                                        <p:cTn id="12" dur="500"/>
                                         <p:tgtEl>
                                           <p:spTgt spid="167"/>
                                         </p:tgtEl>
@@ -15274,14 +15346,14 @@
                 </p:childTnLst>
               </p:cTn>
               <p:prevCondLst>
-                <p:cond evt="onPrev">
+                <p:cond evt="onPrev" delay="0">
                   <p:tgtEl>
                     <p:sldTgt/>
                   </p:tgtEl>
                 </p:cond>
               </p:prevCondLst>
               <p:nextCondLst>
-                <p:cond evt="onNext">
+                <p:cond evt="onNext" delay="0">
                   <p:tgtEl>
                     <p:sldTgt/>
                   </p:tgtEl>
@@ -15297,18 +15369,19 @@
 </file>
 
 <file path=ppt/slides/slide8.xml><?xml version="1.0" encoding="utf-8"?>
-<p:sld xmlns:a="http://schemas.openxmlformats.org/drawingml/2006/main" xmlns:r="http://schemas.openxmlformats.org/officeDocument/2006/relationships" xmlns:mc="http://schemas.openxmlformats.org/markup-compatibility/2006" xmlns:mv="urn:schemas-microsoft-com:mac:vml" xmlns:p="http://schemas.openxmlformats.org/presentationml/2006/main" xmlns:c="http://schemas.openxmlformats.org/drawingml/2006/chart" xmlns:dgm="http://schemas.openxmlformats.org/drawingml/2006/diagram" xmlns:o="urn:schemas-microsoft-com:office:office" xmlns:v="urn:schemas-microsoft-com:vml" xmlns:pvml="urn:schemas-microsoft-com:office:powerpoint" xmlns:com="http://schemas.openxmlformats.org/drawingml/2006/compatibility" xmlns:p14="http://schemas.microsoft.com/office/powerpoint/2010/main" xmlns:p15="http://schemas.microsoft.com/office/powerpoint/2012/main" xmlns:ahyp="http://schemas.microsoft.com/office/drawing/2018/hyperlinkcolor">
+<p:sld xmlns:a="http://schemas.openxmlformats.org/drawingml/2006/main" xmlns:r="http://schemas.openxmlformats.org/officeDocument/2006/relationships" xmlns:p="http://schemas.openxmlformats.org/presentationml/2006/main">
   <p:cSld>
     <p:bg>
       <p:bgPr>
         <a:solidFill>
           <a:schemeClr val="lt1"/>
         </a:solidFill>
+        <a:effectLst/>
       </p:bgPr>
     </p:bg>
     <p:spTree>
       <p:nvGrpSpPr>
-        <p:cNvPr id="173" name="Shape 173"/>
+        <p:cNvPr id="1" name="Shape 173"/>
         <p:cNvGrpSpPr/>
         <p:nvPr/>
       </p:nvGrpSpPr>
@@ -15342,12 +15415,12 @@
           </a:ln>
         </p:spPr>
         <p:txBody>
-          <a:bodyPr anchorCtr="0" anchor="ctr" bIns="34275" lIns="68575" spcFirstLastPara="1" rIns="68575" wrap="square" tIns="34275">
+          <a:bodyPr spcFirstLastPara="1" wrap="square" lIns="68575" tIns="34275" rIns="68575" bIns="34275" anchor="ctr" anchorCtr="0">
             <a:noAutofit/>
           </a:bodyPr>
           <a:lstStyle/>
           <a:p>
-            <a:pPr indent="0" lvl="0" marL="0" marR="0" rtl="0" algn="ctr">
+            <a:pPr marL="0" marR="0" lvl="0" indent="0" algn="ctr" rtl="0">
               <a:lnSpc>
                 <a:spcPct val="100000"/>
               </a:lnSpc>
@@ -15364,10 +15437,7 @@
               <a:buFont typeface="Calibri"/>
               <a:buNone/>
             </a:pPr>
-            <a:r>
-              <a:t/>
-            </a:r>
-            <a:endParaRPr b="0" i="0" sz="1400" u="none" cap="none" strike="noStrike">
+            <a:endParaRPr sz="1400" b="0" i="0" u="none" strike="noStrike" cap="none">
               <a:solidFill>
                 <a:schemeClr val="lt1"/>
               </a:solidFill>
@@ -15381,7 +15451,7 @@
       </p:sp>
       <p:pic>
         <p:nvPicPr>
-          <p:cNvPr descr="Dart_logo" id="175" name="Google Shape;175;p21"/>
+          <p:cNvPr id="175" name="Google Shape;175;p21" descr="Dart_logo"/>
           <p:cNvPicPr preferRelativeResize="0"/>
           <p:nvPr/>
         </p:nvPicPr>
@@ -15389,12 +15459,12 @@
           <a:blip r:embed="rId3">
             <a:alphaModFix/>
           </a:blip>
-          <a:srcRect b="0" l="0" r="0" t="0"/>
+          <a:srcRect/>
           <a:stretch/>
         </p:blipFill>
         <p:spPr>
           <a:xfrm>
-            <a:off x="137173" y="123101"/>
+            <a:off x="166909" y="94738"/>
             <a:ext cx="843232" cy="761524"/>
           </a:xfrm>
           <a:prstGeom prst="rect">
@@ -15405,7 +15475,7 @@
             <a:noFill/>
           </a:ln>
           <a:effectLst>
-            <a:outerShdw blurRad="190500" algn="ctr" dir="2700000" dist="228600">
+            <a:outerShdw blurRad="190500" dist="228600" dir="2700000" algn="ctr">
               <a:srgbClr val="000000">
                 <a:alpha val="29409"/>
               </a:srgbClr>
@@ -15423,7 +15493,7 @@
           <a:blip r:embed="rId4">
             <a:alphaModFix/>
           </a:blip>
-          <a:srcRect b="0" l="0" r="0" t="0"/>
+          <a:srcRect/>
           <a:stretch/>
         </p:blipFill>
         <p:spPr>
@@ -15460,12 +15530,12 @@
           </a:ln>
         </p:spPr>
         <p:txBody>
-          <a:bodyPr anchorCtr="0" anchor="t" bIns="91425" lIns="91425" spcFirstLastPara="1" rIns="91425" wrap="square" tIns="91425">
+          <a:bodyPr spcFirstLastPara="1" wrap="square" lIns="91425" tIns="91425" rIns="91425" bIns="91425" anchor="t" anchorCtr="0">
             <a:noAutofit/>
           </a:bodyPr>
           <a:lstStyle/>
           <a:p>
-            <a:pPr indent="0" lvl="0" marL="0" rtl="0" algn="l">
+            <a:pPr marL="0" lvl="0" indent="0" algn="l" rtl="0">
               <a:spcBef>
                 <a:spcPts val="0"/>
               </a:spcBef>
@@ -15474,9 +15544,6 @@
               </a:spcAft>
               <a:buNone/>
             </a:pPr>
-            <a:r>
-              <a:t/>
-            </a:r>
             <a:endParaRPr sz="1800">
               <a:solidFill>
                 <a:schemeClr val="dk2"/>
@@ -15507,12 +15574,12 @@
           </a:ln>
         </p:spPr>
         <p:txBody>
-          <a:bodyPr anchorCtr="0" anchor="ctr" bIns="34275" lIns="68575" spcFirstLastPara="1" rIns="68575" wrap="square" tIns="34275">
+          <a:bodyPr spcFirstLastPara="1" wrap="square" lIns="68575" tIns="34275" rIns="68575" bIns="34275" anchor="ctr" anchorCtr="0">
             <a:noAutofit/>
           </a:bodyPr>
           <a:lstStyle/>
           <a:p>
-            <a:pPr indent="0" lvl="0" marL="0" marR="0" rtl="0" algn="ctr">
+            <a:pPr marL="0" marR="0" lvl="0" indent="0" algn="ctr" rtl="0">
               <a:lnSpc>
                 <a:spcPct val="100000"/>
               </a:lnSpc>
@@ -15529,10 +15596,7 @@
               <a:buFont typeface="Calibri"/>
               <a:buNone/>
             </a:pPr>
-            <a:r>
-              <a:t/>
-            </a:r>
-            <a:endParaRPr b="0" i="0" sz="1400" u="none" cap="none" strike="noStrike">
+            <a:endParaRPr sz="1400" b="0" i="0" u="none" strike="noStrike" cap="none">
               <a:solidFill>
                 <a:srgbClr val="FFFFFF"/>
               </a:solidFill>
@@ -15564,12 +15628,12 @@
           </a:ln>
         </p:spPr>
         <p:txBody>
-          <a:bodyPr anchorCtr="0" anchor="t" bIns="91425" lIns="91425" spcFirstLastPara="1" rIns="91425" wrap="square" tIns="91425">
+          <a:bodyPr spcFirstLastPara="1" wrap="square" lIns="91425" tIns="91425" rIns="91425" bIns="91425" anchor="t" anchorCtr="0">
             <a:noAutofit/>
           </a:bodyPr>
           <a:lstStyle/>
           <a:p>
-            <a:pPr indent="0" lvl="0" marL="0" rtl="0" algn="l">
+            <a:pPr marL="0" lvl="0" indent="0" algn="l" rtl="0">
               <a:spcBef>
                 <a:spcPts val="0"/>
               </a:spcBef>
@@ -15583,7 +15647,7 @@
               <a:buNone/>
             </a:pPr>
             <a:r>
-              <a:rPr b="1" lang="en" sz="1700">
+              <a:rPr lang="en" sz="1700" b="1" dirty="0">
                 <a:solidFill>
                   <a:schemeClr val="dk1"/>
                 </a:solidFill>
@@ -15591,21 +15655,21 @@
               <a:t>class-</a:t>
             </a:r>
             <a:r>
-              <a:rPr lang="en" sz="1700">
+              <a:rPr lang="en" sz="1700" dirty="0">
                 <a:solidFill>
                   <a:schemeClr val="dk1"/>
                 </a:solidFill>
               </a:rPr>
               <a:t> class is where we group items related to a base item, in other words its an library.</a:t>
             </a:r>
-            <a:endParaRPr sz="1700">
+            <a:endParaRPr sz="1700" dirty="0">
               <a:solidFill>
                 <a:schemeClr val="dk1"/>
               </a:solidFill>
             </a:endParaRPr>
           </a:p>
           <a:p>
-            <a:pPr indent="0" lvl="0" marL="0" rtl="0" algn="l">
+            <a:pPr marL="0" lvl="0" indent="0" algn="l" rtl="0">
               <a:spcBef>
                 <a:spcPts val="0"/>
               </a:spcBef>
@@ -15618,17 +15682,14 @@
               <a:buFont typeface="Arial"/>
               <a:buNone/>
             </a:pPr>
-            <a:r>
-              <a:t/>
-            </a:r>
-            <a:endParaRPr sz="1700">
+            <a:endParaRPr sz="1700" dirty="0">
               <a:solidFill>
                 <a:schemeClr val="dk1"/>
               </a:solidFill>
             </a:endParaRPr>
           </a:p>
           <a:p>
-            <a:pPr indent="0" lvl="0" marL="0" rtl="0" algn="l">
+            <a:pPr marL="0" lvl="0" indent="0" algn="l" rtl="0">
               <a:spcBef>
                 <a:spcPts val="0"/>
               </a:spcBef>
@@ -15642,7 +15703,7 @@
               <a:buNone/>
             </a:pPr>
             <a:r>
-              <a:rPr b="1" lang="en" sz="1700">
+              <a:rPr lang="en" sz="1700" b="1" dirty="0">
                 <a:solidFill>
                   <a:schemeClr val="dk1"/>
                 </a:solidFill>
@@ -15650,21 +15711,21 @@
               <a:t>constructor- </a:t>
             </a:r>
             <a:r>
-              <a:rPr lang="en" sz="1700">
+              <a:rPr lang="en" sz="1700" dirty="0">
                 <a:solidFill>
                   <a:schemeClr val="dk1"/>
                 </a:solidFill>
               </a:rPr>
               <a:t>constructor is responsible for allocating memory for new objects inside a class.</a:t>
             </a:r>
-            <a:endParaRPr sz="1700">
+            <a:endParaRPr sz="1700" dirty="0">
               <a:solidFill>
                 <a:schemeClr val="dk1"/>
               </a:solidFill>
             </a:endParaRPr>
           </a:p>
           <a:p>
-            <a:pPr indent="0" lvl="0" marL="0" rtl="0" algn="l">
+            <a:pPr marL="0" lvl="0" indent="0" algn="l" rtl="0">
               <a:spcBef>
                 <a:spcPts val="0"/>
               </a:spcBef>
@@ -15677,17 +15738,14 @@
               <a:buFont typeface="Arial"/>
               <a:buNone/>
             </a:pPr>
-            <a:r>
-              <a:t/>
-            </a:r>
-            <a:endParaRPr sz="1700">
+            <a:endParaRPr sz="1700" dirty="0">
               <a:solidFill>
                 <a:schemeClr val="dk1"/>
               </a:solidFill>
             </a:endParaRPr>
           </a:p>
           <a:p>
-            <a:pPr indent="0" lvl="0" marL="0" rtl="0" algn="l">
+            <a:pPr marL="0" lvl="0" indent="0" algn="l" rtl="0">
               <a:spcBef>
                 <a:spcPts val="0"/>
               </a:spcBef>
@@ -15701,7 +15759,7 @@
               <a:buNone/>
             </a:pPr>
             <a:r>
-              <a:rPr b="1" lang="en" sz="1700">
+              <a:rPr lang="en" sz="1700" b="1" dirty="0">
                 <a:solidFill>
                   <a:schemeClr val="dk1"/>
                 </a:solidFill>
@@ -15709,21 +15767,21 @@
               <a:t>Implements- </a:t>
             </a:r>
             <a:r>
-              <a:rPr lang="en" sz="1700">
+              <a:rPr lang="en" sz="1700" dirty="0">
                 <a:solidFill>
                   <a:schemeClr val="dk1"/>
                 </a:solidFill>
               </a:rPr>
               <a:t>An implementation class defines the physical implementation of objects of a class.</a:t>
             </a:r>
-            <a:endParaRPr sz="1700">
+            <a:endParaRPr sz="1700" dirty="0">
               <a:solidFill>
                 <a:schemeClr val="dk1"/>
               </a:solidFill>
             </a:endParaRPr>
           </a:p>
           <a:p>
-            <a:pPr indent="0" lvl="0" marL="0" rtl="0" algn="l">
+            <a:pPr marL="0" lvl="0" indent="0" algn="l" rtl="0">
               <a:spcBef>
                 <a:spcPts val="0"/>
               </a:spcBef>
@@ -15736,17 +15794,14 @@
               <a:buFont typeface="Arial"/>
               <a:buNone/>
             </a:pPr>
-            <a:r>
-              <a:t/>
-            </a:r>
-            <a:endParaRPr sz="1700">
+            <a:endParaRPr sz="1700" dirty="0">
               <a:solidFill>
                 <a:schemeClr val="dk1"/>
               </a:solidFill>
             </a:endParaRPr>
           </a:p>
           <a:p>
-            <a:pPr indent="0" lvl="0" marL="0" rtl="0" algn="l">
+            <a:pPr marL="0" lvl="0" indent="0" algn="l" rtl="0">
               <a:spcBef>
                 <a:spcPts val="0"/>
               </a:spcBef>
@@ -15760,7 +15815,7 @@
               <a:buNone/>
             </a:pPr>
             <a:r>
-              <a:rPr b="1" lang="en" sz="1700">
+              <a:rPr lang="en" sz="1700" b="1" dirty="0">
                 <a:solidFill>
                   <a:schemeClr val="dk1"/>
                 </a:solidFill>
@@ -15768,21 +15823,21 @@
               <a:t>throw-</a:t>
             </a:r>
             <a:r>
-              <a:rPr lang="en" sz="1700">
+              <a:rPr lang="en" sz="1700" dirty="0">
                 <a:solidFill>
                   <a:schemeClr val="dk1"/>
                 </a:solidFill>
               </a:rPr>
               <a:t> throw keyword is used to explicitly raise an exception. A raised exception should be handled to prevent the program from exiting abruptly.</a:t>
             </a:r>
-            <a:endParaRPr sz="1700">
+            <a:endParaRPr sz="1700" dirty="0">
               <a:solidFill>
                 <a:schemeClr val="dk1"/>
               </a:solidFill>
             </a:endParaRPr>
           </a:p>
           <a:p>
-            <a:pPr indent="0" lvl="0" marL="0" rtl="0" algn="l">
+            <a:pPr marL="0" lvl="0" indent="0" algn="l" rtl="0">
               <a:spcBef>
                 <a:spcPts val="0"/>
               </a:spcBef>
@@ -15795,17 +15850,14 @@
               <a:buFont typeface="Arial"/>
               <a:buNone/>
             </a:pPr>
-            <a:r>
-              <a:t/>
-            </a:r>
-            <a:endParaRPr sz="1700">
+            <a:endParaRPr sz="1700" dirty="0">
               <a:solidFill>
                 <a:schemeClr val="dk1"/>
               </a:solidFill>
             </a:endParaRPr>
           </a:p>
           <a:p>
-            <a:pPr indent="0" lvl="0" marL="0" rtl="0" algn="l">
+            <a:pPr marL="0" lvl="0" indent="0" algn="l" rtl="0">
               <a:spcBef>
                 <a:spcPts val="0"/>
               </a:spcBef>
@@ -15819,14 +15871,14 @@
               <a:buNone/>
             </a:pPr>
             <a:r>
-              <a:rPr lang="en" sz="1500">
+              <a:rPr lang="en" sz="1500" dirty="0">
                 <a:solidFill>
                   <a:schemeClr val="dk1"/>
                 </a:solidFill>
               </a:rPr>
               <a:t>(detailing of these keywords will be found in following modules)</a:t>
             </a:r>
-            <a:endParaRPr sz="1500">
+            <a:endParaRPr sz="1500" dirty="0">
               <a:solidFill>
                 <a:schemeClr val="dk2"/>
               </a:solidFill>
@@ -15844,7 +15896,7 @@
           <a:blip r:embed="rId5">
             <a:alphaModFix/>
           </a:blip>
-          <a:srcRect b="0" l="0" r="0" t="0"/>
+          <a:srcRect/>
           <a:stretch/>
         </p:blipFill>
         <p:spPr>
@@ -15869,32 +15921,32 @@
   <p:timing>
     <p:tnLst>
       <p:par>
-        <p:cTn dur="indefinite" nodeType="tmRoot" restart="never">
+        <p:cTn id="1" dur="indefinite" restart="never" nodeType="tmRoot">
           <p:childTnLst>
             <p:seq concurrent="1" nextAc="seek">
-              <p:cTn dur="indefinite" id="2" nodeType="mainSeq">
+              <p:cTn id="2" dur="indefinite" nodeType="mainSeq">
                 <p:childTnLst>
                   <p:par>
-                    <p:cTn fill="hold">
+                    <p:cTn id="3" fill="hold">
                       <p:stCondLst>
                         <p:cond delay="indefinite"/>
                       </p:stCondLst>
                       <p:childTnLst>
                         <p:par>
-                          <p:cTn fill="hold">
+                          <p:cTn id="4" fill="hold">
                             <p:stCondLst>
                               <p:cond delay="0"/>
                             </p:stCondLst>
                             <p:childTnLst>
                               <p:par>
-                                <p:cTn fill="hold" nodeType="clickEffect" presetClass="entr" presetID="10" presetSubtype="0">
+                                <p:cTn id="5" presetID="10" presetClass="entr" presetSubtype="0" fill="hold" nodeType="clickEffect">
                                   <p:stCondLst>
                                     <p:cond delay="0"/>
                                   </p:stCondLst>
                                   <p:childTnLst>
                                     <p:set>
                                       <p:cBhvr>
-                                        <p:cTn dur="1" fill="hold">
+                                        <p:cTn id="6" dur="1" fill="hold">
                                           <p:stCondLst>
                                             <p:cond delay="0"/>
                                           </p:stCondLst>
@@ -15910,9 +15962,9 @@
                                         <p:strVal val="visible"/>
                                       </p:to>
                                     </p:set>
-                                    <p:animEffect filter="fade" transition="in">
+                                    <p:animEffect transition="in" filter="fade">
                                       <p:cBhvr>
-                                        <p:cTn dur="500"/>
+                                        <p:cTn id="7" dur="500"/>
                                         <p:tgtEl>
                                           <p:spTgt spid="175"/>
                                         </p:tgtEl>
@@ -15930,14 +15982,14 @@
                 </p:childTnLst>
               </p:cTn>
               <p:prevCondLst>
-                <p:cond evt="onPrev">
+                <p:cond evt="onPrev" delay="0">
                   <p:tgtEl>
                     <p:sldTgt/>
                   </p:tgtEl>
                 </p:cond>
               </p:prevCondLst>
               <p:nextCondLst>
-                <p:cond evt="onNext">
+                <p:cond evt="onNext" delay="0">
                   <p:tgtEl>
                     <p:sldTgt/>
                   </p:tgtEl>
@@ -15953,7 +16005,288 @@
 </file>
 
 <file path=ppt/theme/theme1.xml><?xml version="1.0" encoding="utf-8"?>
-<a:theme xmlns:a="http://schemas.openxmlformats.org/drawingml/2006/main" xmlns:r="http://schemas.openxmlformats.org/officeDocument/2006/relationships">
+<a:theme xmlns:a="http://schemas.openxmlformats.org/drawingml/2006/main" name="Simple Light">
+  <a:themeElements>
+    <a:clrScheme name="Simple Light">
+      <a:dk1>
+        <a:srgbClr val="000000"/>
+      </a:dk1>
+      <a:lt1>
+        <a:srgbClr val="FFFFFF"/>
+      </a:lt1>
+      <a:dk2>
+        <a:srgbClr val="595959"/>
+      </a:dk2>
+      <a:lt2>
+        <a:srgbClr val="EEEEEE"/>
+      </a:lt2>
+      <a:accent1>
+        <a:srgbClr val="4285F4"/>
+      </a:accent1>
+      <a:accent2>
+        <a:srgbClr val="212121"/>
+      </a:accent2>
+      <a:accent3>
+        <a:srgbClr val="78909C"/>
+      </a:accent3>
+      <a:accent4>
+        <a:srgbClr val="FFAB40"/>
+      </a:accent4>
+      <a:accent5>
+        <a:srgbClr val="0097A7"/>
+      </a:accent5>
+      <a:accent6>
+        <a:srgbClr val="EEFF41"/>
+      </a:accent6>
+      <a:hlink>
+        <a:srgbClr val="0097A7"/>
+      </a:hlink>
+      <a:folHlink>
+        <a:srgbClr val="0097A7"/>
+      </a:folHlink>
+    </a:clrScheme>
+    <a:fontScheme name="Office">
+      <a:majorFont>
+        <a:latin typeface="Arial"/>
+        <a:ea typeface=""/>
+        <a:cs typeface=""/>
+        <a:font script="Jpan" typeface="ＭＳ Ｐゴシック"/>
+        <a:font script="Hang" typeface="맑은 고딕"/>
+        <a:font script="Hans" typeface="宋体"/>
+        <a:font script="Hant" typeface="新細明體"/>
+        <a:font script="Arab" typeface="Times New Roman"/>
+        <a:font script="Hebr" typeface="Times New Roman"/>
+        <a:font script="Thai" typeface="Angsana New"/>
+        <a:font script="Ethi" typeface="Nyala"/>
+        <a:font script="Beng" typeface="Vrinda"/>
+        <a:font script="Gujr" typeface="Shruti"/>
+        <a:font script="Khmr" typeface="MoolBoran"/>
+        <a:font script="Knda" typeface="Tunga"/>
+        <a:font script="Guru" typeface="Raavi"/>
+        <a:font script="Cans" typeface="Euphemia"/>
+        <a:font script="Cher" typeface="Plantagenet Cherokee"/>
+        <a:font script="Yiii" typeface="Microsoft Yi Baiti"/>
+        <a:font script="Tibt" typeface="Microsoft Himalaya"/>
+        <a:font script="Thaa" typeface="MV Boli"/>
+        <a:font script="Deva" typeface="Mangal"/>
+        <a:font script="Telu" typeface="Gautami"/>
+        <a:font script="Taml" typeface="Latha"/>
+        <a:font script="Syrc" typeface="Estrangelo Edessa"/>
+        <a:font script="Orya" typeface="Kalinga"/>
+        <a:font script="Mlym" typeface="Kartika"/>
+        <a:font script="Laoo" typeface="DokChampa"/>
+        <a:font script="Sinh" typeface="Iskoola Pota"/>
+        <a:font script="Mong" typeface="Mongolian Baiti"/>
+        <a:font script="Viet" typeface="Times New Roman"/>
+        <a:font script="Uigh" typeface="Microsoft Uighur"/>
+        <a:font script="Geor" typeface="Sylfaen"/>
+      </a:majorFont>
+      <a:minorFont>
+        <a:latin typeface="Arial"/>
+        <a:ea typeface=""/>
+        <a:cs typeface=""/>
+        <a:font script="Jpan" typeface="ＭＳ Ｐゴシック"/>
+        <a:font script="Hang" typeface="맑은 고딕"/>
+        <a:font script="Hans" typeface="宋体"/>
+        <a:font script="Hant" typeface="新細明體"/>
+        <a:font script="Arab" typeface="Arial"/>
+        <a:font script="Hebr" typeface="Arial"/>
+        <a:font script="Thai" typeface="Cordia New"/>
+        <a:font script="Ethi" typeface="Nyala"/>
+        <a:font script="Beng" typeface="Vrinda"/>
+        <a:font script="Gujr" typeface="Shruti"/>
+        <a:font script="Khmr" typeface="DaunPenh"/>
+        <a:font script="Knda" typeface="Tunga"/>
+        <a:font script="Guru" typeface="Raavi"/>
+        <a:font script="Cans" typeface="Euphemia"/>
+        <a:font script="Cher" typeface="Plantagenet Cherokee"/>
+        <a:font script="Yiii" typeface="Microsoft Yi Baiti"/>
+        <a:font script="Tibt" typeface="Microsoft Himalaya"/>
+        <a:font script="Thaa" typeface="MV Boli"/>
+        <a:font script="Deva" typeface="Mangal"/>
+        <a:font script="Telu" typeface="Gautami"/>
+        <a:font script="Taml" typeface="Latha"/>
+        <a:font script="Syrc" typeface="Estrangelo Edessa"/>
+        <a:font script="Orya" typeface="Kalinga"/>
+        <a:font script="Mlym" typeface="Kartika"/>
+        <a:font script="Laoo" typeface="DokChampa"/>
+        <a:font script="Sinh" typeface="Iskoola Pota"/>
+        <a:font script="Mong" typeface="Mongolian Baiti"/>
+        <a:font script="Viet" typeface="Arial"/>
+        <a:font script="Uigh" typeface="Microsoft Uighur"/>
+        <a:font script="Geor" typeface="Sylfaen"/>
+      </a:minorFont>
+    </a:fontScheme>
+    <a:fmtScheme name="Office">
+      <a:fillStyleLst>
+        <a:solidFill>
+          <a:schemeClr val="phClr"/>
+        </a:solidFill>
+        <a:gradFill rotWithShape="1">
+          <a:gsLst>
+            <a:gs pos="0">
+              <a:schemeClr val="phClr">
+                <a:tint val="50000"/>
+                <a:satMod val="300000"/>
+              </a:schemeClr>
+            </a:gs>
+            <a:gs pos="35000">
+              <a:schemeClr val="phClr">
+                <a:tint val="37000"/>
+                <a:satMod val="300000"/>
+              </a:schemeClr>
+            </a:gs>
+            <a:gs pos="100000">
+              <a:schemeClr val="phClr">
+                <a:tint val="15000"/>
+                <a:satMod val="350000"/>
+              </a:schemeClr>
+            </a:gs>
+          </a:gsLst>
+          <a:lin ang="16200000" scaled="1"/>
+        </a:gradFill>
+        <a:gradFill rotWithShape="1">
+          <a:gsLst>
+            <a:gs pos="0">
+              <a:schemeClr val="phClr">
+                <a:tint val="100000"/>
+                <a:shade val="100000"/>
+                <a:satMod val="130000"/>
+              </a:schemeClr>
+            </a:gs>
+            <a:gs pos="100000">
+              <a:schemeClr val="phClr">
+                <a:tint val="50000"/>
+                <a:shade val="100000"/>
+                <a:satMod val="350000"/>
+              </a:schemeClr>
+            </a:gs>
+          </a:gsLst>
+          <a:lin ang="16200000" scaled="0"/>
+        </a:gradFill>
+      </a:fillStyleLst>
+      <a:lnStyleLst>
+        <a:ln w="9525" cap="flat" cmpd="sng" algn="ctr">
+          <a:solidFill>
+            <a:schemeClr val="phClr">
+              <a:shade val="95000"/>
+              <a:satMod val="105000"/>
+            </a:schemeClr>
+          </a:solidFill>
+          <a:prstDash val="solid"/>
+        </a:ln>
+        <a:ln w="25400" cap="flat" cmpd="sng" algn="ctr">
+          <a:solidFill>
+            <a:schemeClr val="phClr"/>
+          </a:solidFill>
+          <a:prstDash val="solid"/>
+        </a:ln>
+        <a:ln w="38100" cap="flat" cmpd="sng" algn="ctr">
+          <a:solidFill>
+            <a:schemeClr val="phClr"/>
+          </a:solidFill>
+          <a:prstDash val="solid"/>
+        </a:ln>
+      </a:lnStyleLst>
+      <a:effectStyleLst>
+        <a:effectStyle>
+          <a:effectLst>
+            <a:outerShdw blurRad="40000" dist="20000" dir="5400000" rotWithShape="0">
+              <a:srgbClr val="000000">
+                <a:alpha val="38000"/>
+              </a:srgbClr>
+            </a:outerShdw>
+          </a:effectLst>
+        </a:effectStyle>
+        <a:effectStyle>
+          <a:effectLst>
+            <a:outerShdw blurRad="40000" dist="23000" dir="5400000" rotWithShape="0">
+              <a:srgbClr val="000000">
+                <a:alpha val="35000"/>
+              </a:srgbClr>
+            </a:outerShdw>
+          </a:effectLst>
+        </a:effectStyle>
+        <a:effectStyle>
+          <a:effectLst>
+            <a:outerShdw blurRad="40000" dist="23000" dir="5400000" rotWithShape="0">
+              <a:srgbClr val="000000">
+                <a:alpha val="35000"/>
+              </a:srgbClr>
+            </a:outerShdw>
+          </a:effectLst>
+          <a:scene3d>
+            <a:camera prst="orthographicFront">
+              <a:rot lat="0" lon="0" rev="0"/>
+            </a:camera>
+            <a:lightRig rig="threePt" dir="t">
+              <a:rot lat="0" lon="0" rev="1200000"/>
+            </a:lightRig>
+          </a:scene3d>
+          <a:sp3d>
+            <a:bevelT w="63500" h="25400"/>
+          </a:sp3d>
+        </a:effectStyle>
+      </a:effectStyleLst>
+      <a:bgFillStyleLst>
+        <a:solidFill>
+          <a:schemeClr val="phClr"/>
+        </a:solidFill>
+        <a:gradFill rotWithShape="1">
+          <a:gsLst>
+            <a:gs pos="0">
+              <a:schemeClr val="phClr">
+                <a:tint val="40000"/>
+                <a:satMod val="350000"/>
+              </a:schemeClr>
+            </a:gs>
+            <a:gs pos="40000">
+              <a:schemeClr val="phClr">
+                <a:tint val="45000"/>
+                <a:shade val="99000"/>
+                <a:satMod val="350000"/>
+              </a:schemeClr>
+            </a:gs>
+            <a:gs pos="100000">
+              <a:schemeClr val="phClr">
+                <a:shade val="20000"/>
+                <a:satMod val="255000"/>
+              </a:schemeClr>
+            </a:gs>
+          </a:gsLst>
+          <a:path path="circle">
+            <a:fillToRect l="50000" t="-80000" r="50000" b="180000"/>
+          </a:path>
+        </a:gradFill>
+        <a:gradFill rotWithShape="1">
+          <a:gsLst>
+            <a:gs pos="0">
+              <a:schemeClr val="phClr">
+                <a:tint val="80000"/>
+                <a:satMod val="300000"/>
+              </a:schemeClr>
+            </a:gs>
+            <a:gs pos="100000">
+              <a:schemeClr val="phClr">
+                <a:shade val="30000"/>
+                <a:satMod val="200000"/>
+              </a:schemeClr>
+            </a:gs>
+          </a:gsLst>
+          <a:path path="circle">
+            <a:fillToRect l="50000" t="50000" r="50000" b="50000"/>
+          </a:path>
+        </a:gradFill>
+      </a:bgFillStyleLst>
+    </a:fmtScheme>
+  </a:themeElements>
+  <a:objectDefaults/>
+  <a:extraClrSchemeLst/>
+</a:theme>
+</file>
+
+<file path=ppt/theme/theme2.xml><?xml version="1.0" encoding="utf-8"?>
+<a:theme xmlns:a="http://schemas.openxmlformats.org/drawingml/2006/main">
   <a:themeElements>
     <a:clrScheme name="Default">
       <a:dk1>
@@ -16228,284 +16561,7 @@
       </a:bgFillStyleLst>
     </a:fmtScheme>
   </a:themeElements>
-</a:theme>
-</file>
-
-<file path=ppt/theme/theme2.xml><?xml version="1.0" encoding="utf-8"?>
-<a:theme xmlns:a="http://schemas.openxmlformats.org/drawingml/2006/main" xmlns:r="http://schemas.openxmlformats.org/officeDocument/2006/relationships" name="Simple Light">
-  <a:themeElements>
-    <a:clrScheme name="Simple Light">
-      <a:dk1>
-        <a:srgbClr val="000000"/>
-      </a:dk1>
-      <a:lt1>
-        <a:srgbClr val="FFFFFF"/>
-      </a:lt1>
-      <a:dk2>
-        <a:srgbClr val="595959"/>
-      </a:dk2>
-      <a:lt2>
-        <a:srgbClr val="EEEEEE"/>
-      </a:lt2>
-      <a:accent1>
-        <a:srgbClr val="4285F4"/>
-      </a:accent1>
-      <a:accent2>
-        <a:srgbClr val="212121"/>
-      </a:accent2>
-      <a:accent3>
-        <a:srgbClr val="78909C"/>
-      </a:accent3>
-      <a:accent4>
-        <a:srgbClr val="FFAB40"/>
-      </a:accent4>
-      <a:accent5>
-        <a:srgbClr val="0097A7"/>
-      </a:accent5>
-      <a:accent6>
-        <a:srgbClr val="EEFF41"/>
-      </a:accent6>
-      <a:hlink>
-        <a:srgbClr val="0097A7"/>
-      </a:hlink>
-      <a:folHlink>
-        <a:srgbClr val="0097A7"/>
-      </a:folHlink>
-    </a:clrScheme>
-    <a:fontScheme name="Office">
-      <a:majorFont>
-        <a:latin typeface="Arial"/>
-        <a:ea typeface=""/>
-        <a:cs typeface=""/>
-        <a:font script="Jpan" typeface="ＭＳ Ｐゴシック"/>
-        <a:font script="Hang" typeface="맑은 고딕"/>
-        <a:font script="Hans" typeface="宋体"/>
-        <a:font script="Hant" typeface="新細明體"/>
-        <a:font script="Arab" typeface="Times New Roman"/>
-        <a:font script="Hebr" typeface="Times New Roman"/>
-        <a:font script="Thai" typeface="Angsana New"/>
-        <a:font script="Ethi" typeface="Nyala"/>
-        <a:font script="Beng" typeface="Vrinda"/>
-        <a:font script="Gujr" typeface="Shruti"/>
-        <a:font script="Khmr" typeface="MoolBoran"/>
-        <a:font script="Knda" typeface="Tunga"/>
-        <a:font script="Guru" typeface="Raavi"/>
-        <a:font script="Cans" typeface="Euphemia"/>
-        <a:font script="Cher" typeface="Plantagenet Cherokee"/>
-        <a:font script="Yiii" typeface="Microsoft Yi Baiti"/>
-        <a:font script="Tibt" typeface="Microsoft Himalaya"/>
-        <a:font script="Thaa" typeface="MV Boli"/>
-        <a:font script="Deva" typeface="Mangal"/>
-        <a:font script="Telu" typeface="Gautami"/>
-        <a:font script="Taml" typeface="Latha"/>
-        <a:font script="Syrc" typeface="Estrangelo Edessa"/>
-        <a:font script="Orya" typeface="Kalinga"/>
-        <a:font script="Mlym" typeface="Kartika"/>
-        <a:font script="Laoo" typeface="DokChampa"/>
-        <a:font script="Sinh" typeface="Iskoola Pota"/>
-        <a:font script="Mong" typeface="Mongolian Baiti"/>
-        <a:font script="Viet" typeface="Times New Roman"/>
-        <a:font script="Uigh" typeface="Microsoft Uighur"/>
-        <a:font script="Geor" typeface="Sylfaen"/>
-      </a:majorFont>
-      <a:minorFont>
-        <a:latin typeface="Arial"/>
-        <a:ea typeface=""/>
-        <a:cs typeface=""/>
-        <a:font script="Jpan" typeface="ＭＳ Ｐゴシック"/>
-        <a:font script="Hang" typeface="맑은 고딕"/>
-        <a:font script="Hans" typeface="宋体"/>
-        <a:font script="Hant" typeface="新細明體"/>
-        <a:font script="Arab" typeface="Arial"/>
-        <a:font script="Hebr" typeface="Arial"/>
-        <a:font script="Thai" typeface="Cordia New"/>
-        <a:font script="Ethi" typeface="Nyala"/>
-        <a:font script="Beng" typeface="Vrinda"/>
-        <a:font script="Gujr" typeface="Shruti"/>
-        <a:font script="Khmr" typeface="DaunPenh"/>
-        <a:font script="Knda" typeface="Tunga"/>
-        <a:font script="Guru" typeface="Raavi"/>
-        <a:font script="Cans" typeface="Euphemia"/>
-        <a:font script="Cher" typeface="Plantagenet Cherokee"/>
-        <a:font script="Yiii" typeface="Microsoft Yi Baiti"/>
-        <a:font script="Tibt" typeface="Microsoft Himalaya"/>
-        <a:font script="Thaa" typeface="MV Boli"/>
-        <a:font script="Deva" typeface="Mangal"/>
-        <a:font script="Telu" typeface="Gautami"/>
-        <a:font script="Taml" typeface="Latha"/>
-        <a:font script="Syrc" typeface="Estrangelo Edessa"/>
-        <a:font script="Orya" typeface="Kalinga"/>
-        <a:font script="Mlym" typeface="Kartika"/>
-        <a:font script="Laoo" typeface="DokChampa"/>
-        <a:font script="Sinh" typeface="Iskoola Pota"/>
-        <a:font script="Mong" typeface="Mongolian Baiti"/>
-        <a:font script="Viet" typeface="Arial"/>
-        <a:font script="Uigh" typeface="Microsoft Uighur"/>
-        <a:font script="Geor" typeface="Sylfaen"/>
-      </a:minorFont>
-    </a:fontScheme>
-    <a:fmtScheme name="Office">
-      <a:fillStyleLst>
-        <a:solidFill>
-          <a:schemeClr val="phClr"/>
-        </a:solidFill>
-        <a:gradFill rotWithShape="1">
-          <a:gsLst>
-            <a:gs pos="0">
-              <a:schemeClr val="phClr">
-                <a:tint val="50000"/>
-                <a:satMod val="300000"/>
-              </a:schemeClr>
-            </a:gs>
-            <a:gs pos="35000">
-              <a:schemeClr val="phClr">
-                <a:tint val="37000"/>
-                <a:satMod val="300000"/>
-              </a:schemeClr>
-            </a:gs>
-            <a:gs pos="100000">
-              <a:schemeClr val="phClr">
-                <a:tint val="15000"/>
-                <a:satMod val="350000"/>
-              </a:schemeClr>
-            </a:gs>
-          </a:gsLst>
-          <a:lin ang="16200000" scaled="1"/>
-        </a:gradFill>
-        <a:gradFill rotWithShape="1">
-          <a:gsLst>
-            <a:gs pos="0">
-              <a:schemeClr val="phClr">
-                <a:tint val="100000"/>
-                <a:shade val="100000"/>
-                <a:satMod val="130000"/>
-              </a:schemeClr>
-            </a:gs>
-            <a:gs pos="100000">
-              <a:schemeClr val="phClr">
-                <a:tint val="50000"/>
-                <a:shade val="100000"/>
-                <a:satMod val="350000"/>
-              </a:schemeClr>
-            </a:gs>
-          </a:gsLst>
-          <a:lin ang="16200000" scaled="0"/>
-        </a:gradFill>
-      </a:fillStyleLst>
-      <a:lnStyleLst>
-        <a:ln w="9525" cap="flat" cmpd="sng" algn="ctr">
-          <a:solidFill>
-            <a:schemeClr val="phClr">
-              <a:shade val="95000"/>
-              <a:satMod val="105000"/>
-            </a:schemeClr>
-          </a:solidFill>
-          <a:prstDash val="solid"/>
-        </a:ln>
-        <a:ln w="25400" cap="flat" cmpd="sng" algn="ctr">
-          <a:solidFill>
-            <a:schemeClr val="phClr"/>
-          </a:solidFill>
-          <a:prstDash val="solid"/>
-        </a:ln>
-        <a:ln w="38100" cap="flat" cmpd="sng" algn="ctr">
-          <a:solidFill>
-            <a:schemeClr val="phClr"/>
-          </a:solidFill>
-          <a:prstDash val="solid"/>
-        </a:ln>
-      </a:lnStyleLst>
-      <a:effectStyleLst>
-        <a:effectStyle>
-          <a:effectLst>
-            <a:outerShdw blurRad="40000" dist="20000" dir="5400000" rotWithShape="0">
-              <a:srgbClr val="000000">
-                <a:alpha val="38000"/>
-              </a:srgbClr>
-            </a:outerShdw>
-          </a:effectLst>
-        </a:effectStyle>
-        <a:effectStyle>
-          <a:effectLst>
-            <a:outerShdw blurRad="40000" dist="23000" dir="5400000" rotWithShape="0">
-              <a:srgbClr val="000000">
-                <a:alpha val="35000"/>
-              </a:srgbClr>
-            </a:outerShdw>
-          </a:effectLst>
-        </a:effectStyle>
-        <a:effectStyle>
-          <a:effectLst>
-            <a:outerShdw blurRad="40000" dist="23000" dir="5400000" rotWithShape="0">
-              <a:srgbClr val="000000">
-                <a:alpha val="35000"/>
-              </a:srgbClr>
-            </a:outerShdw>
-          </a:effectLst>
-          <a:scene3d>
-            <a:camera prst="orthographicFront">
-              <a:rot lat="0" lon="0" rev="0"/>
-            </a:camera>
-            <a:lightRig rig="threePt" dir="t">
-              <a:rot lat="0" lon="0" rev="1200000"/>
-            </a:lightRig>
-          </a:scene3d>
-          <a:sp3d>
-            <a:bevelT w="63500" h="25400"/>
-          </a:sp3d>
-        </a:effectStyle>
-      </a:effectStyleLst>
-      <a:bgFillStyleLst>
-        <a:solidFill>
-          <a:schemeClr val="phClr"/>
-        </a:solidFill>
-        <a:gradFill rotWithShape="1">
-          <a:gsLst>
-            <a:gs pos="0">
-              <a:schemeClr val="phClr">
-                <a:tint val="40000"/>
-                <a:satMod val="350000"/>
-              </a:schemeClr>
-            </a:gs>
-            <a:gs pos="40000">
-              <a:schemeClr val="phClr">
-                <a:tint val="45000"/>
-                <a:shade val="99000"/>
-                <a:satMod val="350000"/>
-              </a:schemeClr>
-            </a:gs>
-            <a:gs pos="100000">
-              <a:schemeClr val="phClr">
-                <a:shade val="20000"/>
-                <a:satMod val="255000"/>
-              </a:schemeClr>
-            </a:gs>
-          </a:gsLst>
-          <a:path path="circle">
-            <a:fillToRect l="50000" t="-80000" r="50000" b="180000"/>
-          </a:path>
-        </a:gradFill>
-        <a:gradFill rotWithShape="1">
-          <a:gsLst>
-            <a:gs pos="0">
-              <a:schemeClr val="phClr">
-                <a:tint val="80000"/>
-                <a:satMod val="300000"/>
-              </a:schemeClr>
-            </a:gs>
-            <a:gs pos="100000">
-              <a:schemeClr val="phClr">
-                <a:shade val="30000"/>
-                <a:satMod val="200000"/>
-              </a:schemeClr>
-            </a:gs>
-          </a:gsLst>
-          <a:path path="circle">
-            <a:fillToRect l="50000" t="50000" r="50000" b="50000"/>
-          </a:path>
-        </a:gradFill>
-      </a:bgFillStyleLst>
-    </a:fmtScheme>
-  </a:themeElements>
+  <a:objectDefaults/>
+  <a:extraClrSchemeLst/>
 </a:theme>
 </file>